--- a/Science_Teesside/Teaching_Packs/GROW/lessons/W7A/GROW_Science_Autumn1_W7A_The_Moon.pptx
+++ b/Science_Teesside/Teaching_Packs/GROW/lessons/W7A/GROW_Science_Autumn1_W7A_The_Moon.pptx
@@ -2,25 +2,25 @@
 <file path=ppt/presentation.xml><?xml version="1.0" encoding="utf-8"?>
 <p:presentation xmlns:p="http://schemas.openxmlformats.org/presentationml/2006/main">
   <p:sldMasterIdLst>
-    <p:sldMasterId xmlns:r="http://schemas.openxmlformats.org/officeDocument/2006/relationships" id="2147483648" r:id="R642e735284254e9f"/>
+    <p:sldMasterId xmlns:r="http://schemas.openxmlformats.org/officeDocument/2006/relationships" id="2147483648" r:id="R556e1c2d06d344e7"/>
   </p:sldMasterIdLst>
   <p:notesMasterIdLst>
-    <p:notesMasterId xmlns:r="http://schemas.openxmlformats.org/officeDocument/2006/relationships" r:id="R7be009e256b94b36"/>
+    <p:notesMasterId xmlns:r="http://schemas.openxmlformats.org/officeDocument/2006/relationships" r:id="Rbfab270dd31f4df3"/>
   </p:notesMasterIdLst>
   <p:sldIdLst>
-    <p:sldId xmlns:r="http://schemas.openxmlformats.org/officeDocument/2006/relationships" id="256" r:id="Rf576b66353af42a6"/>
-    <p:sldId xmlns:r="http://schemas.openxmlformats.org/officeDocument/2006/relationships" id="257" r:id="R86bcbacb05a44044"/>
-    <p:sldId xmlns:r="http://schemas.openxmlformats.org/officeDocument/2006/relationships" id="258" r:id="Rbc7a64dd596247b6"/>
-    <p:sldId xmlns:r="http://schemas.openxmlformats.org/officeDocument/2006/relationships" id="259" r:id="R046850ed369c4665"/>
-    <p:sldId xmlns:r="http://schemas.openxmlformats.org/officeDocument/2006/relationships" id="260" r:id="Rc9ec0d9262074abe"/>
-    <p:sldId xmlns:r="http://schemas.openxmlformats.org/officeDocument/2006/relationships" id="261" r:id="R76218c3ab18c4787"/>
-    <p:sldId xmlns:r="http://schemas.openxmlformats.org/officeDocument/2006/relationships" id="262" r:id="R9c173753452f42b8"/>
-    <p:sldId xmlns:r="http://schemas.openxmlformats.org/officeDocument/2006/relationships" id="263" r:id="R3c4f951c90524f0c"/>
-    <p:sldId xmlns:r="http://schemas.openxmlformats.org/officeDocument/2006/relationships" id="264" r:id="R406d92ab80e34ceb"/>
-    <p:sldId xmlns:r="http://schemas.openxmlformats.org/officeDocument/2006/relationships" id="265" r:id="Rfb4dd6c2b9204ab0"/>
-    <p:sldId xmlns:r="http://schemas.openxmlformats.org/officeDocument/2006/relationships" id="266" r:id="R736c24eba31e45ff"/>
-    <p:sldId xmlns:r="http://schemas.openxmlformats.org/officeDocument/2006/relationships" id="267" r:id="R3376894322204c24"/>
-    <p:sldId xmlns:r="http://schemas.openxmlformats.org/officeDocument/2006/relationships" id="268" r:id="Rac9316b40f6a4642"/>
+    <p:sldId xmlns:r="http://schemas.openxmlformats.org/officeDocument/2006/relationships" id="256" r:id="R76a8f1b58b274070"/>
+    <p:sldId xmlns:r="http://schemas.openxmlformats.org/officeDocument/2006/relationships" id="257" r:id="Rc6a0bc4f70334563"/>
+    <p:sldId xmlns:r="http://schemas.openxmlformats.org/officeDocument/2006/relationships" id="258" r:id="R404ceb3a0fa146c6"/>
+    <p:sldId xmlns:r="http://schemas.openxmlformats.org/officeDocument/2006/relationships" id="259" r:id="Ra6ca39fd9ee64fa5"/>
+    <p:sldId xmlns:r="http://schemas.openxmlformats.org/officeDocument/2006/relationships" id="260" r:id="R270cf93fc8b74cf6"/>
+    <p:sldId xmlns:r="http://schemas.openxmlformats.org/officeDocument/2006/relationships" id="261" r:id="Ra7e10426abfa44a5"/>
+    <p:sldId xmlns:r="http://schemas.openxmlformats.org/officeDocument/2006/relationships" id="262" r:id="R15897af742194875"/>
+    <p:sldId xmlns:r="http://schemas.openxmlformats.org/officeDocument/2006/relationships" id="263" r:id="Rde1ebe400ae949f0"/>
+    <p:sldId xmlns:r="http://schemas.openxmlformats.org/officeDocument/2006/relationships" id="264" r:id="Rf58b19801a224313"/>
+    <p:sldId xmlns:r="http://schemas.openxmlformats.org/officeDocument/2006/relationships" id="265" r:id="Rbd3eaa2336184f06"/>
+    <p:sldId xmlns:r="http://schemas.openxmlformats.org/officeDocument/2006/relationships" id="266" r:id="R863a947d52624a5b"/>
+    <p:sldId xmlns:r="http://schemas.openxmlformats.org/officeDocument/2006/relationships" id="267" r:id="Ra3e1aa7a5b464384"/>
+    <p:sldId xmlns:r="http://schemas.openxmlformats.org/officeDocument/2006/relationships" id="268" r:id="R1f3d6872295646a2"/>
   </p:sldIdLst>
   <p:sldSz cx="12192000" cy="6858000"/>
   <p:notesSz cx="6858000" cy="9144000"/>
@@ -492,6 +492,14 @@
               <a:t>[/Sources]</a:t>
             </a:r>
           </a:p>
+          <a:p xmlns:a="http://schemas.openxmlformats.org/drawingml/2006/main">
+            <a:r>
+              <a:t>
+[Sources]
+NASA, Moon Phases. https://science.nasa.gov/moon/moon-phases/
+[/Sources]</a:t>
+            </a:r>
+          </a:p>
         </p:txBody>
       </p:sp>
       <p:sp>
@@ -1817,7 +1825,7 @@
   </p:cSld>
   <p:clrMap bg1="lt1" tx1="dk1" bg2="lt2" tx2="dk2" accent1="accent1" accent2="accent2" accent3="accent3" accent4="accent4" accent5="accent5" accent6="accent6" hlink="hlink" folHlink="folHlink"/>
   <p:sldLayoutIdLst>
-    <p:sldLayoutId xmlns:r="http://schemas.openxmlformats.org/officeDocument/2006/relationships" id="2147483649" r:id="R69559a7fd1354c9d"/>
+    <p:sldLayoutId xmlns:r="http://schemas.openxmlformats.org/officeDocument/2006/relationships" id="2147483649" r:id="R5e3f25b738d34b3f"/>
   </p:sldLayoutIdLst>
   <p:txStyles>
     <p:titleStyle>
@@ -2350,7 +2358,7 @@
     <p:bg>
       <p:bgPr>
         <a:solidFill xmlns:a="http://schemas.openxmlformats.org/drawingml/2006/main">
-          <a:srgbClr val="F5F1E8"/>
+          <a:srgbClr val="FAF9F5"/>
         </a:solidFill>
       </p:bgPr>
     </p:bg>
@@ -2379,8 +2387,8 @@
         </p:nvSpPr>
         <p:spPr>
           <a:xfrm xmlns:a="http://schemas.openxmlformats.org/drawingml/2006/main">
-            <a:off x="609600" y="552450"/>
-            <a:ext cx="781050" cy="57150"/>
+            <a:off x="609600" y="733425"/>
+            <a:ext cx="781050" cy="38100"/>
           </a:xfrm>
           <a:prstGeom xmlns:a="http://schemas.openxmlformats.org/drawingml/2006/main" prst="rect">
             <a:avLst/>
@@ -2410,34 +2418,43 @@
         </p:nvSpPr>
         <p:spPr>
           <a:xfrm xmlns:a="http://schemas.openxmlformats.org/drawingml/2006/main">
-            <a:off x="609600" y="762000"/>
-            <a:ext cx="8572500" cy="285750"/>
-          </a:xfrm>
-          <a:prstGeom xmlns:a="http://schemas.openxmlformats.org/drawingml/2006/main" prst="rect">
-            <a:avLst/>
-          </a:prstGeom>
-          <a:noFill xmlns:a="http://schemas.openxmlformats.org/drawingml/2006/main"/>
-          <a:ln xmlns:a="http://schemas.openxmlformats.org/drawingml/2006/main" w="0">
-            <a:noFill/>
-            <a:prstDash val="solid"/>
-          </a:ln>
-        </p:spPr>
-        <p:txBody>
-          <a:bodyPr xmlns:a="http://schemas.openxmlformats.org/drawingml/2006/main" lIns="0" tIns="0" rIns="0" bIns="0" anchor="ctr"/>
-          <a:lstStyle xmlns:a="http://schemas.openxmlformats.org/drawingml/2006/main"/>
-          <a:p xmlns:a="http://schemas.openxmlformats.org/drawingml/2006/main">
-            <a:pPr>
-              <a:defRPr sz="1500" b="1">
+            <a:off x="609600" y="342900"/>
+            <a:ext cx="9334500" cy="304800"/>
+          </a:xfrm>
+          <a:prstGeom xmlns:a="http://schemas.openxmlformats.org/drawingml/2006/main" prst="rect">
+            <a:avLst/>
+          </a:prstGeom>
+          <a:noFill xmlns:a="http://schemas.openxmlformats.org/drawingml/2006/main"/>
+          <a:ln xmlns:a="http://schemas.openxmlformats.org/drawingml/2006/main" w="0">
+            <a:noFill/>
+            <a:prstDash val="solid"/>
+          </a:ln>
+        </p:spPr>
+        <p:txBody>
+          <a:bodyPr xmlns:a="http://schemas.openxmlformats.org/drawingml/2006/main" lIns="0" tIns="0" rIns="0" bIns="0" anchor="ctr">
+            <a:noAutofit/>
+          </a:bodyPr>
+          <a:lstStyle xmlns:a="http://schemas.openxmlformats.org/drawingml/2006/main"/>
+          <a:p xmlns:a="http://schemas.openxmlformats.org/drawingml/2006/main">
+            <a:pPr algn="l">
+              <a:buNone/>
+              <a:defRPr sz="1350" b="1">
                 <a:solidFill>
                   <a:srgbClr val="28685E"/>
                 </a:solidFill>
-              </a:defRPr>
-            </a:pPr>
-            <a:r>
-              <a:rPr sz="1500" b="1">
+                <a:latin typeface="Calibri"/>
+                <a:ea typeface="Calibri"/>
+                <a:cs typeface="Calibri"/>
+              </a:defRPr>
+            </a:pPr>
+            <a:r>
+              <a:rPr sz="1350" b="1">
                 <a:solidFill>
                   <a:srgbClr val="28685E"/>
                 </a:solidFill>
+                <a:latin typeface="Calibri"/>
+                <a:ea typeface="Calibri"/>
+                <a:cs typeface="Calibri"/>
               </a:rPr>
               <a:t>MADE BY MATT  /  GROW SCIENCE</a:t>
             </a:r>
@@ -2460,34 +2477,43 @@
         </p:nvSpPr>
         <p:spPr>
           <a:xfrm xmlns:a="http://schemas.openxmlformats.org/drawingml/2006/main">
-            <a:off x="609600" y="1352550"/>
-            <a:ext cx="10972800" cy="952500"/>
-          </a:xfrm>
-          <a:prstGeom xmlns:a="http://schemas.openxmlformats.org/drawingml/2006/main" prst="rect">
-            <a:avLst/>
-          </a:prstGeom>
-          <a:noFill xmlns:a="http://schemas.openxmlformats.org/drawingml/2006/main"/>
-          <a:ln xmlns:a="http://schemas.openxmlformats.org/drawingml/2006/main" w="0">
-            <a:noFill/>
-            <a:prstDash val="solid"/>
-          </a:ln>
-        </p:spPr>
-        <p:txBody>
-          <a:bodyPr xmlns:a="http://schemas.openxmlformats.org/drawingml/2006/main" lIns="0" tIns="0" rIns="0" bIns="0" anchor="ctr"/>
-          <a:lstStyle xmlns:a="http://schemas.openxmlformats.org/drawingml/2006/main"/>
-          <a:p xmlns:a="http://schemas.openxmlformats.org/drawingml/2006/main">
-            <a:pPr>
-              <a:defRPr sz="3750" b="1">
-                <a:solidFill>
-                  <a:srgbClr val="152B3A"/>
-                </a:solidFill>
-              </a:defRPr>
-            </a:pPr>
-            <a:r>
-              <a:rPr sz="3750" b="1">
-                <a:solidFill>
-                  <a:srgbClr val="152B3A"/>
-                </a:solidFill>
+            <a:off x="609600" y="990600"/>
+            <a:ext cx="10972800" cy="1000125"/>
+          </a:xfrm>
+          <a:prstGeom xmlns:a="http://schemas.openxmlformats.org/drawingml/2006/main" prst="rect">
+            <a:avLst/>
+          </a:prstGeom>
+          <a:noFill xmlns:a="http://schemas.openxmlformats.org/drawingml/2006/main"/>
+          <a:ln xmlns:a="http://schemas.openxmlformats.org/drawingml/2006/main" w="0">
+            <a:noFill/>
+            <a:prstDash val="solid"/>
+          </a:ln>
+        </p:spPr>
+        <p:txBody>
+          <a:bodyPr xmlns:a="http://schemas.openxmlformats.org/drawingml/2006/main" lIns="0" tIns="0" rIns="0" bIns="0" anchor="ctr">
+            <a:noAutofit/>
+          </a:bodyPr>
+          <a:lstStyle xmlns:a="http://schemas.openxmlformats.org/drawingml/2006/main"/>
+          <a:p xmlns:a="http://schemas.openxmlformats.org/drawingml/2006/main">
+            <a:pPr algn="l">
+              <a:buNone/>
+              <a:defRPr sz="3675" b="1">
+                <a:solidFill>
+                  <a:srgbClr val="152B3A"/>
+                </a:solidFill>
+                <a:latin typeface="Calibri"/>
+                <a:ea typeface="Calibri"/>
+                <a:cs typeface="Calibri"/>
+              </a:defRPr>
+            </a:pPr>
+            <a:r>
+              <a:rPr sz="3675" b="1">
+                <a:solidFill>
+                  <a:srgbClr val="152B3A"/>
+                </a:solidFill>
+                <a:latin typeface="Calibri"/>
+                <a:ea typeface="Calibri"/>
+                <a:cs typeface="Calibri"/>
               </a:rPr>
               <a:t>The Moon's journey</a:t>
             </a:r>
@@ -2510,14 +2536,14 @@
         </p:nvSpPr>
         <p:spPr>
           <a:xfrm xmlns:a="http://schemas.openxmlformats.org/drawingml/2006/main">
-            <a:off x="609600" y="6219825"/>
+            <a:off x="609600" y="6191250"/>
             <a:ext cx="10972800" cy="9525"/>
           </a:xfrm>
           <a:prstGeom xmlns:a="http://schemas.openxmlformats.org/drawingml/2006/main" prst="rect">
             <a:avLst/>
           </a:prstGeom>
           <a:solidFill xmlns:a="http://schemas.openxmlformats.org/drawingml/2006/main">
-            <a:srgbClr val="DCE7DD"/>
+            <a:srgbClr val="CEDBD3"/>
           </a:solidFill>
           <a:ln xmlns:a="http://schemas.openxmlformats.org/drawingml/2006/main" w="0">
             <a:noFill/>
@@ -2541,34 +2567,43 @@
         </p:nvSpPr>
         <p:spPr>
           <a:xfrm xmlns:a="http://schemas.openxmlformats.org/drawingml/2006/main">
-            <a:off x="609600" y="6381750"/>
-            <a:ext cx="9906000" cy="228600"/>
-          </a:xfrm>
-          <a:prstGeom xmlns:a="http://schemas.openxmlformats.org/drawingml/2006/main" prst="rect">
-            <a:avLst/>
-          </a:prstGeom>
-          <a:noFill xmlns:a="http://schemas.openxmlformats.org/drawingml/2006/main"/>
-          <a:ln xmlns:a="http://schemas.openxmlformats.org/drawingml/2006/main" w="0">
-            <a:noFill/>
-            <a:prstDash val="solid"/>
-          </a:ln>
-        </p:spPr>
-        <p:txBody>
-          <a:bodyPr xmlns:a="http://schemas.openxmlformats.org/drawingml/2006/main" lIns="0" tIns="0" rIns="0" bIns="0" anchor="ctr"/>
-          <a:lstStyle xmlns:a="http://schemas.openxmlformats.org/drawingml/2006/main"/>
-          <a:p xmlns:a="http://schemas.openxmlformats.org/drawingml/2006/main">
-            <a:pPr>
-              <a:defRPr sz="1275" b="0">
+            <a:off x="609600" y="6419850"/>
+            <a:ext cx="9525000" cy="219075"/>
+          </a:xfrm>
+          <a:prstGeom xmlns:a="http://schemas.openxmlformats.org/drawingml/2006/main" prst="rect">
+            <a:avLst/>
+          </a:prstGeom>
+          <a:noFill xmlns:a="http://schemas.openxmlformats.org/drawingml/2006/main"/>
+          <a:ln xmlns:a="http://schemas.openxmlformats.org/drawingml/2006/main" w="0">
+            <a:noFill/>
+            <a:prstDash val="solid"/>
+          </a:ln>
+        </p:spPr>
+        <p:txBody>
+          <a:bodyPr xmlns:a="http://schemas.openxmlformats.org/drawingml/2006/main" lIns="0" tIns="0" rIns="0" bIns="0" anchor="ctr">
+            <a:noAutofit/>
+          </a:bodyPr>
+          <a:lstStyle xmlns:a="http://schemas.openxmlformats.org/drawingml/2006/main"/>
+          <a:p xmlns:a="http://schemas.openxmlformats.org/drawingml/2006/main">
+            <a:pPr algn="l">
+              <a:buNone/>
+              <a:defRPr sz="1200" b="0">
                 <a:solidFill>
                   <a:srgbClr val="50616B"/>
                 </a:solidFill>
-              </a:defRPr>
-            </a:pPr>
-            <a:r>
-              <a:rPr sz="1275" b="0">
+                <a:latin typeface="Calibri"/>
+                <a:ea typeface="Calibri"/>
+                <a:cs typeface="Calibri"/>
+              </a:defRPr>
+            </a:pPr>
+            <a:r>
+              <a:rPr sz="1200" b="0">
                 <a:solidFill>
                   <a:srgbClr val="50616B"/>
                 </a:solidFill>
+                <a:latin typeface="Calibri"/>
+                <a:ea typeface="Calibri"/>
+                <a:cs typeface="Calibri"/>
               </a:rPr>
               <a:t>AUTUMN 1  ·  WEEK 7  ·  LESSON A</a:t>
             </a:r>
@@ -2591,27 +2626,33 @@
         </p:nvSpPr>
         <p:spPr>
           <a:xfrm xmlns:a="http://schemas.openxmlformats.org/drawingml/2006/main">
-            <a:off x="11106150" y="6362700"/>
-            <a:ext cx="476250" cy="238125"/>
-          </a:xfrm>
-          <a:prstGeom xmlns:a="http://schemas.openxmlformats.org/drawingml/2006/main" prst="rect">
-            <a:avLst/>
-          </a:prstGeom>
-          <a:noFill xmlns:a="http://schemas.openxmlformats.org/drawingml/2006/main"/>
-          <a:ln xmlns:a="http://schemas.openxmlformats.org/drawingml/2006/main" w="0">
-            <a:noFill/>
-            <a:prstDash val="solid"/>
-          </a:ln>
-        </p:spPr>
-        <p:txBody>
-          <a:bodyPr xmlns:a="http://schemas.openxmlformats.org/drawingml/2006/main" lIns="0" tIns="0" rIns="0" bIns="0" anchor="ctr"/>
-          <a:lstStyle xmlns:a="http://schemas.openxmlformats.org/drawingml/2006/main"/>
-          <a:p xmlns:a="http://schemas.openxmlformats.org/drawingml/2006/main">
-            <a:pPr>
+            <a:off x="11106150" y="6400800"/>
+            <a:ext cx="476250" cy="247650"/>
+          </a:xfrm>
+          <a:prstGeom xmlns:a="http://schemas.openxmlformats.org/drawingml/2006/main" prst="rect">
+            <a:avLst/>
+          </a:prstGeom>
+          <a:noFill xmlns:a="http://schemas.openxmlformats.org/drawingml/2006/main"/>
+          <a:ln xmlns:a="http://schemas.openxmlformats.org/drawingml/2006/main" w="0">
+            <a:noFill/>
+            <a:prstDash val="solid"/>
+          </a:ln>
+        </p:spPr>
+        <p:txBody>
+          <a:bodyPr xmlns:a="http://schemas.openxmlformats.org/drawingml/2006/main" lIns="0" tIns="0" rIns="0" bIns="0" anchor="ctr">
+            <a:noAutofit/>
+          </a:bodyPr>
+          <a:lstStyle xmlns:a="http://schemas.openxmlformats.org/drawingml/2006/main"/>
+          <a:p xmlns:a="http://schemas.openxmlformats.org/drawingml/2006/main">
+            <a:pPr algn="l">
+              <a:buNone/>
               <a:defRPr sz="1350" b="1">
                 <a:solidFill>
                   <a:srgbClr val="28685E"/>
                 </a:solidFill>
+                <a:latin typeface="Calibri"/>
+                <a:ea typeface="Calibri"/>
+                <a:cs typeface="Calibri"/>
               </a:defRPr>
             </a:pPr>
             <a:r>
@@ -2619,6 +2660,9 @@
                 <a:solidFill>
                   <a:srgbClr val="28685E"/>
                 </a:solidFill>
+                <a:latin typeface="Calibri"/>
+                <a:ea typeface="Calibri"/>
+                <a:cs typeface="Calibri"/>
               </a:rPr>
               <a:t>01</a:t>
             </a:r>
@@ -2641,34 +2685,43 @@
         </p:nvSpPr>
         <p:spPr>
           <a:xfrm xmlns:a="http://schemas.openxmlformats.org/drawingml/2006/main">
-            <a:off x="609600" y="2809875"/>
-            <a:ext cx="10668000" cy="1000125"/>
-          </a:xfrm>
-          <a:prstGeom xmlns:a="http://schemas.openxmlformats.org/drawingml/2006/main" prst="rect">
-            <a:avLst/>
-          </a:prstGeom>
-          <a:noFill xmlns:a="http://schemas.openxmlformats.org/drawingml/2006/main"/>
-          <a:ln xmlns:a="http://schemas.openxmlformats.org/drawingml/2006/main" w="0">
-            <a:noFill/>
-            <a:prstDash val="solid"/>
-          </a:ln>
-        </p:spPr>
-        <p:txBody>
-          <a:bodyPr xmlns:a="http://schemas.openxmlformats.org/drawingml/2006/main" lIns="0" tIns="0" rIns="0" bIns="0" anchor="ctr"/>
-          <a:lstStyle xmlns:a="http://schemas.openxmlformats.org/drawingml/2006/main"/>
-          <a:p xmlns:a="http://schemas.openxmlformats.org/drawingml/2006/main">
-            <a:pPr>
-              <a:defRPr sz="3900" b="1">
+            <a:off x="609600" y="2447925"/>
+            <a:ext cx="5429250" cy="1638300"/>
+          </a:xfrm>
+          <a:prstGeom xmlns:a="http://schemas.openxmlformats.org/drawingml/2006/main" prst="rect">
+            <a:avLst/>
+          </a:prstGeom>
+          <a:noFill xmlns:a="http://schemas.openxmlformats.org/drawingml/2006/main"/>
+          <a:ln xmlns:a="http://schemas.openxmlformats.org/drawingml/2006/main" w="0">
+            <a:noFill/>
+            <a:prstDash val="solid"/>
+          </a:ln>
+        </p:spPr>
+        <p:txBody>
+          <a:bodyPr xmlns:a="http://schemas.openxmlformats.org/drawingml/2006/main" lIns="0" tIns="0" rIns="0" bIns="0" anchor="ctr">
+            <a:noAutofit/>
+          </a:bodyPr>
+          <a:lstStyle xmlns:a="http://schemas.openxmlformats.org/drawingml/2006/main"/>
+          <a:p xmlns:a="http://schemas.openxmlformats.org/drawingml/2006/main">
+            <a:pPr algn="l">
+              <a:buNone/>
+              <a:defRPr sz="3600" b="1">
                 <a:solidFill>
                   <a:srgbClr val="28685E"/>
                 </a:solidFill>
-              </a:defRPr>
-            </a:pPr>
-            <a:r>
-              <a:rPr sz="3900" b="1">
+                <a:latin typeface="Calibri"/>
+                <a:ea typeface="Calibri"/>
+                <a:cs typeface="Calibri"/>
+              </a:defRPr>
+            </a:pPr>
+            <a:r>
+              <a:rPr sz="3600" b="1">
                 <a:solidFill>
                   <a:srgbClr val="28685E"/>
                 </a:solidFill>
+                <a:latin typeface="Calibri"/>
+                <a:ea typeface="Calibri"/>
+                <a:cs typeface="Calibri"/>
               </a:rPr>
               <a:t>Same Moon. Changing view.</a:t>
             </a:r>
@@ -2691,40 +2744,71 @@
         </p:nvSpPr>
         <p:spPr>
           <a:xfrm xmlns:a="http://schemas.openxmlformats.org/drawingml/2006/main">
-            <a:off x="609600" y="4143375"/>
-            <a:ext cx="10668000" cy="1143000"/>
-          </a:xfrm>
-          <a:prstGeom xmlns:a="http://schemas.openxmlformats.org/drawingml/2006/main" prst="rect">
-            <a:avLst/>
-          </a:prstGeom>
-          <a:noFill xmlns:a="http://schemas.openxmlformats.org/drawingml/2006/main"/>
-          <a:ln xmlns:a="http://schemas.openxmlformats.org/drawingml/2006/main" w="0">
-            <a:noFill/>
-            <a:prstDash val="solid"/>
-          </a:ln>
-        </p:spPr>
-        <p:txBody>
-          <a:bodyPr xmlns:a="http://schemas.openxmlformats.org/drawingml/2006/main" lIns="0" tIns="0" rIns="0" bIns="0" anchor="ctr"/>
-          <a:lstStyle xmlns:a="http://schemas.openxmlformats.org/drawingml/2006/main"/>
-          <a:p xmlns:a="http://schemas.openxmlformats.org/drawingml/2006/main">
-            <a:pPr>
-              <a:defRPr sz="2550" b="0">
-                <a:solidFill>
-                  <a:srgbClr val="152B3A"/>
-                </a:solidFill>
-              </a:defRPr>
-            </a:pPr>
-            <a:r>
-              <a:rPr sz="2550" b="0">
-                <a:solidFill>
-                  <a:srgbClr val="152B3A"/>
-                </a:solidFill>
+            <a:off x="609600" y="4286250"/>
+            <a:ext cx="5314950" cy="1466850"/>
+          </a:xfrm>
+          <a:prstGeom xmlns:a="http://schemas.openxmlformats.org/drawingml/2006/main" prst="rect">
+            <a:avLst/>
+          </a:prstGeom>
+          <a:noFill xmlns:a="http://schemas.openxmlformats.org/drawingml/2006/main"/>
+          <a:ln xmlns:a="http://schemas.openxmlformats.org/drawingml/2006/main" w="0">
+            <a:noFill/>
+            <a:prstDash val="solid"/>
+          </a:ln>
+        </p:spPr>
+        <p:txBody>
+          <a:bodyPr xmlns:a="http://schemas.openxmlformats.org/drawingml/2006/main" lIns="0" tIns="0" rIns="0" bIns="0" anchor="ctr">
+            <a:noAutofit/>
+          </a:bodyPr>
+          <a:lstStyle xmlns:a="http://schemas.openxmlformats.org/drawingml/2006/main"/>
+          <a:p xmlns:a="http://schemas.openxmlformats.org/drawingml/2006/main">
+            <a:pPr algn="l">
+              <a:buNone/>
+              <a:defRPr sz="2400" b="0">
+                <a:solidFill>
+                  <a:srgbClr val="152B3A"/>
+                </a:solidFill>
+                <a:latin typeface="Calibri"/>
+                <a:ea typeface="Calibri"/>
+                <a:cs typeface="Calibri"/>
+              </a:defRPr>
+            </a:pPr>
+            <a:r>
+              <a:rPr sz="2400" b="0">
+                <a:solidFill>
+                  <a:srgbClr val="152B3A"/>
+                </a:solidFill>
+                <a:latin typeface="Calibri"/>
+                <a:ea typeface="Calibri"/>
+                <a:cs typeface="Calibri"/>
               </a:rPr>
               <a:t>Explain how the Moon moves and why it looks different across a month.</a:t>
             </a:r>
           </a:p>
         </p:txBody>
       </p:sp>
+      <p:pic>
+        <p:nvPicPr>
+          <p:cNvPr id="19" name=""/>
+          <p:cNvPicPr>
+            <a:picLocks xmlns:a="http://schemas.openxmlformats.org/drawingml/2006/main" noChangeAspect="1"/>
+          </p:cNvPicPr>
+          <p:nvPr/>
+        </p:nvPicPr>
+        <p:blipFill>
+          <a:blip xmlns:r="http://schemas.openxmlformats.org/officeDocument/2006/relationships" xmlns:a="http://schemas.openxmlformats.org/drawingml/2006/main" r:embed="Ra574ada90efe4489"/>
+          <a:stretch xmlns:a="http://schemas.openxmlformats.org/drawingml/2006/main"/>
+        </p:blipFill>
+        <p:spPr>
+          <a:xfrm xmlns:a="http://schemas.openxmlformats.org/drawingml/2006/main">
+            <a:off x="7052416" y="2200275"/>
+            <a:ext cx="3878369" cy="3714750"/>
+          </a:xfrm>
+          <a:prstGeom xmlns:a="http://schemas.openxmlformats.org/drawingml/2006/main" prst="rect">
+            <a:avLst/>
+          </a:prstGeom>
+        </p:spPr>
+      </p:pic>
     </p:spTree>
     <p:extLst>
       <p:ext uri="{BB962C8B-B14F-4D97-AF65-F5344CB8AC3E}">
@@ -2741,7 +2825,7 @@
     <p:bg>
       <p:bgPr>
         <a:solidFill xmlns:a="http://schemas.openxmlformats.org/drawingml/2006/main">
-          <a:srgbClr val="F5F1E8"/>
+          <a:srgbClr val="FAF9F5"/>
         </a:solidFill>
       </p:bgPr>
     </p:bg>
@@ -2770,8 +2854,8 @@
         </p:nvSpPr>
         <p:spPr>
           <a:xfrm xmlns:a="http://schemas.openxmlformats.org/drawingml/2006/main">
-            <a:off x="609600" y="552450"/>
-            <a:ext cx="781050" cy="57150"/>
+            <a:off x="609600" y="733425"/>
+            <a:ext cx="781050" cy="38100"/>
           </a:xfrm>
           <a:prstGeom xmlns:a="http://schemas.openxmlformats.org/drawingml/2006/main" prst="rect">
             <a:avLst/>
@@ -2801,34 +2885,43 @@
         </p:nvSpPr>
         <p:spPr>
           <a:xfrm xmlns:a="http://schemas.openxmlformats.org/drawingml/2006/main">
-            <a:off x="609600" y="762000"/>
-            <a:ext cx="8572500" cy="285750"/>
-          </a:xfrm>
-          <a:prstGeom xmlns:a="http://schemas.openxmlformats.org/drawingml/2006/main" prst="rect">
-            <a:avLst/>
-          </a:prstGeom>
-          <a:noFill xmlns:a="http://schemas.openxmlformats.org/drawingml/2006/main"/>
-          <a:ln xmlns:a="http://schemas.openxmlformats.org/drawingml/2006/main" w="0">
-            <a:noFill/>
-            <a:prstDash val="solid"/>
-          </a:ln>
-        </p:spPr>
-        <p:txBody>
-          <a:bodyPr xmlns:a="http://schemas.openxmlformats.org/drawingml/2006/main" lIns="0" tIns="0" rIns="0" bIns="0" anchor="ctr"/>
-          <a:lstStyle xmlns:a="http://schemas.openxmlformats.org/drawingml/2006/main"/>
-          <a:p xmlns:a="http://schemas.openxmlformats.org/drawingml/2006/main">
-            <a:pPr>
-              <a:defRPr sz="1500" b="1">
+            <a:off x="609600" y="342900"/>
+            <a:ext cx="9334500" cy="304800"/>
+          </a:xfrm>
+          <a:prstGeom xmlns:a="http://schemas.openxmlformats.org/drawingml/2006/main" prst="rect">
+            <a:avLst/>
+          </a:prstGeom>
+          <a:noFill xmlns:a="http://schemas.openxmlformats.org/drawingml/2006/main"/>
+          <a:ln xmlns:a="http://schemas.openxmlformats.org/drawingml/2006/main" w="0">
+            <a:noFill/>
+            <a:prstDash val="solid"/>
+          </a:ln>
+        </p:spPr>
+        <p:txBody>
+          <a:bodyPr xmlns:a="http://schemas.openxmlformats.org/drawingml/2006/main" lIns="0" tIns="0" rIns="0" bIns="0" anchor="ctr">
+            <a:noAutofit/>
+          </a:bodyPr>
+          <a:lstStyle xmlns:a="http://schemas.openxmlformats.org/drawingml/2006/main"/>
+          <a:p xmlns:a="http://schemas.openxmlformats.org/drawingml/2006/main">
+            <a:pPr algn="l">
+              <a:buNone/>
+              <a:defRPr sz="1350" b="1">
                 <a:solidFill>
                   <a:srgbClr val="28685E"/>
                 </a:solidFill>
-              </a:defRPr>
-            </a:pPr>
-            <a:r>
-              <a:rPr sz="1500" b="1">
+                <a:latin typeface="Calibri"/>
+                <a:ea typeface="Calibri"/>
+                <a:cs typeface="Calibri"/>
+              </a:defRPr>
+            </a:pPr>
+            <a:r>
+              <a:rPr sz="1350" b="1">
                 <a:solidFill>
                   <a:srgbClr val="28685E"/>
                 </a:solidFill>
+                <a:latin typeface="Calibri"/>
+                <a:ea typeface="Calibri"/>
+                <a:cs typeface="Calibri"/>
               </a:rPr>
               <a:t>MADE BY MATT  /  GROW SCIENCE</a:t>
             </a:r>
@@ -2851,34 +2944,43 @@
         </p:nvSpPr>
         <p:spPr>
           <a:xfrm xmlns:a="http://schemas.openxmlformats.org/drawingml/2006/main">
-            <a:off x="609600" y="1352550"/>
-            <a:ext cx="10972800" cy="952500"/>
-          </a:xfrm>
-          <a:prstGeom xmlns:a="http://schemas.openxmlformats.org/drawingml/2006/main" prst="rect">
-            <a:avLst/>
-          </a:prstGeom>
-          <a:noFill xmlns:a="http://schemas.openxmlformats.org/drawingml/2006/main"/>
-          <a:ln xmlns:a="http://schemas.openxmlformats.org/drawingml/2006/main" w="0">
-            <a:noFill/>
-            <a:prstDash val="solid"/>
-          </a:ln>
-        </p:spPr>
-        <p:txBody>
-          <a:bodyPr xmlns:a="http://schemas.openxmlformats.org/drawingml/2006/main" lIns="0" tIns="0" rIns="0" bIns="0" anchor="ctr"/>
-          <a:lstStyle xmlns:a="http://schemas.openxmlformats.org/drawingml/2006/main"/>
-          <a:p xmlns:a="http://schemas.openxmlformats.org/drawingml/2006/main">
-            <a:pPr>
-              <a:defRPr sz="3750" b="1">
-                <a:solidFill>
-                  <a:srgbClr val="152B3A"/>
-                </a:solidFill>
-              </a:defRPr>
-            </a:pPr>
-            <a:r>
-              <a:rPr sz="3750" b="1">
-                <a:solidFill>
-                  <a:srgbClr val="152B3A"/>
-                </a:solidFill>
+            <a:off x="609600" y="990600"/>
+            <a:ext cx="10972800" cy="1000125"/>
+          </a:xfrm>
+          <a:prstGeom xmlns:a="http://schemas.openxmlformats.org/drawingml/2006/main" prst="rect">
+            <a:avLst/>
+          </a:prstGeom>
+          <a:noFill xmlns:a="http://schemas.openxmlformats.org/drawingml/2006/main"/>
+          <a:ln xmlns:a="http://schemas.openxmlformats.org/drawingml/2006/main" w="0">
+            <a:noFill/>
+            <a:prstDash val="solid"/>
+          </a:ln>
+        </p:spPr>
+        <p:txBody>
+          <a:bodyPr xmlns:a="http://schemas.openxmlformats.org/drawingml/2006/main" lIns="0" tIns="0" rIns="0" bIns="0" anchor="ctr">
+            <a:noAutofit/>
+          </a:bodyPr>
+          <a:lstStyle xmlns:a="http://schemas.openxmlformats.org/drawingml/2006/main"/>
+          <a:p xmlns:a="http://schemas.openxmlformats.org/drawingml/2006/main">
+            <a:pPr algn="l">
+              <a:buNone/>
+              <a:defRPr sz="3675" b="1">
+                <a:solidFill>
+                  <a:srgbClr val="152B3A"/>
+                </a:solidFill>
+                <a:latin typeface="Calibri"/>
+                <a:ea typeface="Calibri"/>
+                <a:cs typeface="Calibri"/>
+              </a:defRPr>
+            </a:pPr>
+            <a:r>
+              <a:rPr sz="3675" b="1">
+                <a:solidFill>
+                  <a:srgbClr val="152B3A"/>
+                </a:solidFill>
+                <a:latin typeface="Calibri"/>
+                <a:ea typeface="Calibri"/>
+                <a:cs typeface="Calibri"/>
               </a:rPr>
               <a:t>Sort the five claims</a:t>
             </a:r>
@@ -2901,14 +3003,14 @@
         </p:nvSpPr>
         <p:spPr>
           <a:xfrm xmlns:a="http://schemas.openxmlformats.org/drawingml/2006/main">
-            <a:off x="609600" y="6219825"/>
+            <a:off x="609600" y="6191250"/>
             <a:ext cx="10972800" cy="9525"/>
           </a:xfrm>
           <a:prstGeom xmlns:a="http://schemas.openxmlformats.org/drawingml/2006/main" prst="rect">
             <a:avLst/>
           </a:prstGeom>
           <a:solidFill xmlns:a="http://schemas.openxmlformats.org/drawingml/2006/main">
-            <a:srgbClr val="DCE7DD"/>
+            <a:srgbClr val="CEDBD3"/>
           </a:solidFill>
           <a:ln xmlns:a="http://schemas.openxmlformats.org/drawingml/2006/main" w="0">
             <a:noFill/>
@@ -2932,34 +3034,43 @@
         </p:nvSpPr>
         <p:spPr>
           <a:xfrm xmlns:a="http://schemas.openxmlformats.org/drawingml/2006/main">
-            <a:off x="609600" y="6381750"/>
-            <a:ext cx="9906000" cy="228600"/>
-          </a:xfrm>
-          <a:prstGeom xmlns:a="http://schemas.openxmlformats.org/drawingml/2006/main" prst="rect">
-            <a:avLst/>
-          </a:prstGeom>
-          <a:noFill xmlns:a="http://schemas.openxmlformats.org/drawingml/2006/main"/>
-          <a:ln xmlns:a="http://schemas.openxmlformats.org/drawingml/2006/main" w="0">
-            <a:noFill/>
-            <a:prstDash val="solid"/>
-          </a:ln>
-        </p:spPr>
-        <p:txBody>
-          <a:bodyPr xmlns:a="http://schemas.openxmlformats.org/drawingml/2006/main" lIns="0" tIns="0" rIns="0" bIns="0" anchor="ctr"/>
-          <a:lstStyle xmlns:a="http://schemas.openxmlformats.org/drawingml/2006/main"/>
-          <a:p xmlns:a="http://schemas.openxmlformats.org/drawingml/2006/main">
-            <a:pPr>
-              <a:defRPr sz="1275" b="0">
+            <a:off x="609600" y="6419850"/>
+            <a:ext cx="9525000" cy="219075"/>
+          </a:xfrm>
+          <a:prstGeom xmlns:a="http://schemas.openxmlformats.org/drawingml/2006/main" prst="rect">
+            <a:avLst/>
+          </a:prstGeom>
+          <a:noFill xmlns:a="http://schemas.openxmlformats.org/drawingml/2006/main"/>
+          <a:ln xmlns:a="http://schemas.openxmlformats.org/drawingml/2006/main" w="0">
+            <a:noFill/>
+            <a:prstDash val="solid"/>
+          </a:ln>
+        </p:spPr>
+        <p:txBody>
+          <a:bodyPr xmlns:a="http://schemas.openxmlformats.org/drawingml/2006/main" lIns="0" tIns="0" rIns="0" bIns="0" anchor="ctr">
+            <a:noAutofit/>
+          </a:bodyPr>
+          <a:lstStyle xmlns:a="http://schemas.openxmlformats.org/drawingml/2006/main"/>
+          <a:p xmlns:a="http://schemas.openxmlformats.org/drawingml/2006/main">
+            <a:pPr algn="l">
+              <a:buNone/>
+              <a:defRPr sz="1200" b="0">
                 <a:solidFill>
                   <a:srgbClr val="50616B"/>
                 </a:solidFill>
-              </a:defRPr>
-            </a:pPr>
-            <a:r>
-              <a:rPr sz="1275" b="0">
+                <a:latin typeface="Calibri"/>
+                <a:ea typeface="Calibri"/>
+                <a:cs typeface="Calibri"/>
+              </a:defRPr>
+            </a:pPr>
+            <a:r>
+              <a:rPr sz="1200" b="0">
                 <a:solidFill>
                   <a:srgbClr val="50616B"/>
                 </a:solidFill>
+                <a:latin typeface="Calibri"/>
+                <a:ea typeface="Calibri"/>
+                <a:cs typeface="Calibri"/>
               </a:rPr>
               <a:t>AUTUMN 1  ·  WEEK 7  ·  LESSON A</a:t>
             </a:r>
@@ -2982,27 +3093,33 @@
         </p:nvSpPr>
         <p:spPr>
           <a:xfrm xmlns:a="http://schemas.openxmlformats.org/drawingml/2006/main">
-            <a:off x="11106150" y="6362700"/>
-            <a:ext cx="476250" cy="238125"/>
-          </a:xfrm>
-          <a:prstGeom xmlns:a="http://schemas.openxmlformats.org/drawingml/2006/main" prst="rect">
-            <a:avLst/>
-          </a:prstGeom>
-          <a:noFill xmlns:a="http://schemas.openxmlformats.org/drawingml/2006/main"/>
-          <a:ln xmlns:a="http://schemas.openxmlformats.org/drawingml/2006/main" w="0">
-            <a:noFill/>
-            <a:prstDash val="solid"/>
-          </a:ln>
-        </p:spPr>
-        <p:txBody>
-          <a:bodyPr xmlns:a="http://schemas.openxmlformats.org/drawingml/2006/main" lIns="0" tIns="0" rIns="0" bIns="0" anchor="ctr"/>
-          <a:lstStyle xmlns:a="http://schemas.openxmlformats.org/drawingml/2006/main"/>
-          <a:p xmlns:a="http://schemas.openxmlformats.org/drawingml/2006/main">
-            <a:pPr>
+            <a:off x="11106150" y="6400800"/>
+            <a:ext cx="476250" cy="247650"/>
+          </a:xfrm>
+          <a:prstGeom xmlns:a="http://schemas.openxmlformats.org/drawingml/2006/main" prst="rect">
+            <a:avLst/>
+          </a:prstGeom>
+          <a:noFill xmlns:a="http://schemas.openxmlformats.org/drawingml/2006/main"/>
+          <a:ln xmlns:a="http://schemas.openxmlformats.org/drawingml/2006/main" w="0">
+            <a:noFill/>
+            <a:prstDash val="solid"/>
+          </a:ln>
+        </p:spPr>
+        <p:txBody>
+          <a:bodyPr xmlns:a="http://schemas.openxmlformats.org/drawingml/2006/main" lIns="0" tIns="0" rIns="0" bIns="0" anchor="ctr">
+            <a:noAutofit/>
+          </a:bodyPr>
+          <a:lstStyle xmlns:a="http://schemas.openxmlformats.org/drawingml/2006/main"/>
+          <a:p xmlns:a="http://schemas.openxmlformats.org/drawingml/2006/main">
+            <a:pPr algn="l">
+              <a:buNone/>
               <a:defRPr sz="1350" b="1">
                 <a:solidFill>
                   <a:srgbClr val="28685E"/>
                 </a:solidFill>
+                <a:latin typeface="Calibri"/>
+                <a:ea typeface="Calibri"/>
+                <a:cs typeface="Calibri"/>
               </a:defRPr>
             </a:pPr>
             <a:r>
@@ -3010,6 +3127,9 @@
                 <a:solidFill>
                   <a:srgbClr val="28685E"/>
                 </a:solidFill>
+                <a:latin typeface="Calibri"/>
+                <a:ea typeface="Calibri"/>
+                <a:cs typeface="Calibri"/>
               </a:rPr>
               <a:t>10</a:t>
             </a:r>
@@ -3032,34 +3152,43 @@
         </p:nvSpPr>
         <p:spPr>
           <a:xfrm xmlns:a="http://schemas.openxmlformats.org/drawingml/2006/main">
-            <a:off x="609600" y="2619375"/>
-            <a:ext cx="10972800" cy="533400"/>
-          </a:xfrm>
-          <a:prstGeom xmlns:a="http://schemas.openxmlformats.org/drawingml/2006/main" prst="rect">
-            <a:avLst/>
-          </a:prstGeom>
-          <a:noFill xmlns:a="http://schemas.openxmlformats.org/drawingml/2006/main"/>
-          <a:ln xmlns:a="http://schemas.openxmlformats.org/drawingml/2006/main" w="0">
-            <a:noFill/>
-            <a:prstDash val="solid"/>
-          </a:ln>
-        </p:spPr>
-        <p:txBody>
-          <a:bodyPr xmlns:a="http://schemas.openxmlformats.org/drawingml/2006/main" lIns="0" tIns="0" rIns="0" bIns="0" anchor="ctr"/>
-          <a:lstStyle xmlns:a="http://schemas.openxmlformats.org/drawingml/2006/main"/>
-          <a:p xmlns:a="http://schemas.openxmlformats.org/drawingml/2006/main">
-            <a:pPr>
-              <a:defRPr sz="2175" b="0">
-                <a:solidFill>
-                  <a:srgbClr val="152B3A"/>
-                </a:solidFill>
-              </a:defRPr>
-            </a:pPr>
-            <a:r>
-              <a:rPr sz="2175" b="0">
-                <a:solidFill>
-                  <a:srgbClr val="152B3A"/>
-                </a:solidFill>
+            <a:off x="1000125" y="2333625"/>
+            <a:ext cx="10382250" cy="622935"/>
+          </a:xfrm>
+          <a:prstGeom xmlns:a="http://schemas.openxmlformats.org/drawingml/2006/main" prst="rect">
+            <a:avLst/>
+          </a:prstGeom>
+          <a:noFill xmlns:a="http://schemas.openxmlformats.org/drawingml/2006/main"/>
+          <a:ln xmlns:a="http://schemas.openxmlformats.org/drawingml/2006/main" w="0">
+            <a:noFill/>
+            <a:prstDash val="solid"/>
+          </a:ln>
+        </p:spPr>
+        <p:txBody>
+          <a:bodyPr xmlns:a="http://schemas.openxmlformats.org/drawingml/2006/main" lIns="0" tIns="0" rIns="0" bIns="0" anchor="ctr">
+            <a:noAutofit/>
+          </a:bodyPr>
+          <a:lstStyle xmlns:a="http://schemas.openxmlformats.org/drawingml/2006/main"/>
+          <a:p xmlns:a="http://schemas.openxmlformats.org/drawingml/2006/main">
+            <a:pPr algn="l">
+              <a:buNone/>
+              <a:defRPr sz="2400" b="0">
+                <a:solidFill>
+                  <a:srgbClr val="152B3A"/>
+                </a:solidFill>
+                <a:latin typeface="Calibri"/>
+                <a:ea typeface="Calibri"/>
+                <a:cs typeface="Calibri"/>
+              </a:defRPr>
+            </a:pPr>
+            <a:r>
+              <a:rPr sz="2400" b="0">
+                <a:solidFill>
+                  <a:srgbClr val="152B3A"/>
+                </a:solidFill>
+                <a:latin typeface="Calibri"/>
+                <a:ea typeface="Calibri"/>
+                <a:cs typeface="Calibri"/>
               </a:rPr>
               <a:t>The Moon reflects sunlight.</a:t>
             </a:r>
@@ -3082,34 +3211,43 @@
         </p:nvSpPr>
         <p:spPr>
           <a:xfrm xmlns:a="http://schemas.openxmlformats.org/drawingml/2006/main">
-            <a:off x="609600" y="3228975"/>
-            <a:ext cx="10972800" cy="533400"/>
-          </a:xfrm>
-          <a:prstGeom xmlns:a="http://schemas.openxmlformats.org/drawingml/2006/main" prst="rect">
-            <a:avLst/>
-          </a:prstGeom>
-          <a:noFill xmlns:a="http://schemas.openxmlformats.org/drawingml/2006/main"/>
-          <a:ln xmlns:a="http://schemas.openxmlformats.org/drawingml/2006/main" w="0">
-            <a:noFill/>
-            <a:prstDash val="solid"/>
-          </a:ln>
-        </p:spPr>
-        <p:txBody>
-          <a:bodyPr xmlns:a="http://schemas.openxmlformats.org/drawingml/2006/main" lIns="0" tIns="0" rIns="0" bIns="0" anchor="ctr"/>
-          <a:lstStyle xmlns:a="http://schemas.openxmlformats.org/drawingml/2006/main"/>
-          <a:p xmlns:a="http://schemas.openxmlformats.org/drawingml/2006/main">
-            <a:pPr>
-              <a:defRPr sz="2175" b="0">
-                <a:solidFill>
-                  <a:srgbClr val="152B3A"/>
-                </a:solidFill>
-              </a:defRPr>
-            </a:pPr>
-            <a:r>
-              <a:rPr sz="2175" b="0">
-                <a:solidFill>
-                  <a:srgbClr val="152B3A"/>
-                </a:solidFill>
+            <a:off x="1000125" y="3013710"/>
+            <a:ext cx="10382250" cy="622935"/>
+          </a:xfrm>
+          <a:prstGeom xmlns:a="http://schemas.openxmlformats.org/drawingml/2006/main" prst="rect">
+            <a:avLst/>
+          </a:prstGeom>
+          <a:noFill xmlns:a="http://schemas.openxmlformats.org/drawingml/2006/main"/>
+          <a:ln xmlns:a="http://schemas.openxmlformats.org/drawingml/2006/main" w="0">
+            <a:noFill/>
+            <a:prstDash val="solid"/>
+          </a:ln>
+        </p:spPr>
+        <p:txBody>
+          <a:bodyPr xmlns:a="http://schemas.openxmlformats.org/drawingml/2006/main" lIns="0" tIns="0" rIns="0" bIns="0" anchor="ctr">
+            <a:noAutofit/>
+          </a:bodyPr>
+          <a:lstStyle xmlns:a="http://schemas.openxmlformats.org/drawingml/2006/main"/>
+          <a:p xmlns:a="http://schemas.openxmlformats.org/drawingml/2006/main">
+            <a:pPr algn="l">
+              <a:buNone/>
+              <a:defRPr sz="2400" b="0">
+                <a:solidFill>
+                  <a:srgbClr val="152B3A"/>
+                </a:solidFill>
+                <a:latin typeface="Calibri"/>
+                <a:ea typeface="Calibri"/>
+                <a:cs typeface="Calibri"/>
+              </a:defRPr>
+            </a:pPr>
+            <a:r>
+              <a:rPr sz="2400" b="0">
+                <a:solidFill>
+                  <a:srgbClr val="152B3A"/>
+                </a:solidFill>
+                <a:latin typeface="Calibri"/>
+                <a:ea typeface="Calibri"/>
+                <a:cs typeface="Calibri"/>
               </a:rPr>
               <a:t>The Moon glows by itself.</a:t>
             </a:r>
@@ -3132,34 +3270,43 @@
         </p:nvSpPr>
         <p:spPr>
           <a:xfrm xmlns:a="http://schemas.openxmlformats.org/drawingml/2006/main">
-            <a:off x="609600" y="3838575"/>
-            <a:ext cx="10972800" cy="533400"/>
-          </a:xfrm>
-          <a:prstGeom xmlns:a="http://schemas.openxmlformats.org/drawingml/2006/main" prst="rect">
-            <a:avLst/>
-          </a:prstGeom>
-          <a:noFill xmlns:a="http://schemas.openxmlformats.org/drawingml/2006/main"/>
-          <a:ln xmlns:a="http://schemas.openxmlformats.org/drawingml/2006/main" w="0">
-            <a:noFill/>
-            <a:prstDash val="solid"/>
-          </a:ln>
-        </p:spPr>
-        <p:txBody>
-          <a:bodyPr xmlns:a="http://schemas.openxmlformats.org/drawingml/2006/main" lIns="0" tIns="0" rIns="0" bIns="0" anchor="ctr"/>
-          <a:lstStyle xmlns:a="http://schemas.openxmlformats.org/drawingml/2006/main"/>
-          <a:p xmlns:a="http://schemas.openxmlformats.org/drawingml/2006/main">
-            <a:pPr>
-              <a:defRPr sz="2175" b="0">
-                <a:solidFill>
-                  <a:srgbClr val="152B3A"/>
-                </a:solidFill>
-              </a:defRPr>
-            </a:pPr>
-            <a:r>
-              <a:rPr sz="2175" b="0">
-                <a:solidFill>
-                  <a:srgbClr val="152B3A"/>
-                </a:solidFill>
+            <a:off x="1000125" y="3693795"/>
+            <a:ext cx="10382250" cy="622935"/>
+          </a:xfrm>
+          <a:prstGeom xmlns:a="http://schemas.openxmlformats.org/drawingml/2006/main" prst="rect">
+            <a:avLst/>
+          </a:prstGeom>
+          <a:noFill xmlns:a="http://schemas.openxmlformats.org/drawingml/2006/main"/>
+          <a:ln xmlns:a="http://schemas.openxmlformats.org/drawingml/2006/main" w="0">
+            <a:noFill/>
+            <a:prstDash val="solid"/>
+          </a:ln>
+        </p:spPr>
+        <p:txBody>
+          <a:bodyPr xmlns:a="http://schemas.openxmlformats.org/drawingml/2006/main" lIns="0" tIns="0" rIns="0" bIns="0" anchor="ctr">
+            <a:noAutofit/>
+          </a:bodyPr>
+          <a:lstStyle xmlns:a="http://schemas.openxmlformats.org/drawingml/2006/main"/>
+          <a:p xmlns:a="http://schemas.openxmlformats.org/drawingml/2006/main">
+            <a:pPr algn="l">
+              <a:buNone/>
+              <a:defRPr sz="2400" b="0">
+                <a:solidFill>
+                  <a:srgbClr val="152B3A"/>
+                </a:solidFill>
+                <a:latin typeface="Calibri"/>
+                <a:ea typeface="Calibri"/>
+                <a:cs typeface="Calibri"/>
+              </a:defRPr>
+            </a:pPr>
+            <a:r>
+              <a:rPr sz="2400" b="0">
+                <a:solidFill>
+                  <a:srgbClr val="152B3A"/>
+                </a:solidFill>
+                <a:latin typeface="Calibri"/>
+                <a:ea typeface="Calibri"/>
+                <a:cs typeface="Calibri"/>
               </a:rPr>
               <a:t>Ordinary phases are caused by Earth's shadow.</a:t>
             </a:r>
@@ -3182,34 +3329,43 @@
         </p:nvSpPr>
         <p:spPr>
           <a:xfrm xmlns:a="http://schemas.openxmlformats.org/drawingml/2006/main">
-            <a:off x="609600" y="4448175"/>
-            <a:ext cx="10972800" cy="533400"/>
-          </a:xfrm>
-          <a:prstGeom xmlns:a="http://schemas.openxmlformats.org/drawingml/2006/main" prst="rect">
-            <a:avLst/>
-          </a:prstGeom>
-          <a:noFill xmlns:a="http://schemas.openxmlformats.org/drawingml/2006/main"/>
-          <a:ln xmlns:a="http://schemas.openxmlformats.org/drawingml/2006/main" w="0">
-            <a:noFill/>
-            <a:prstDash val="solid"/>
-          </a:ln>
-        </p:spPr>
-        <p:txBody>
-          <a:bodyPr xmlns:a="http://schemas.openxmlformats.org/drawingml/2006/main" lIns="0" tIns="0" rIns="0" bIns="0" anchor="ctr"/>
-          <a:lstStyle xmlns:a="http://schemas.openxmlformats.org/drawingml/2006/main"/>
-          <a:p xmlns:a="http://schemas.openxmlformats.org/drawingml/2006/main">
-            <a:pPr>
-              <a:defRPr sz="2175" b="0">
-                <a:solidFill>
-                  <a:srgbClr val="152B3A"/>
-                </a:solidFill>
-              </a:defRPr>
-            </a:pPr>
-            <a:r>
-              <a:rPr sz="2175" b="0">
-                <a:solidFill>
-                  <a:srgbClr val="152B3A"/>
-                </a:solidFill>
+            <a:off x="1000125" y="4373880"/>
+            <a:ext cx="10382250" cy="622935"/>
+          </a:xfrm>
+          <a:prstGeom xmlns:a="http://schemas.openxmlformats.org/drawingml/2006/main" prst="rect">
+            <a:avLst/>
+          </a:prstGeom>
+          <a:noFill xmlns:a="http://schemas.openxmlformats.org/drawingml/2006/main"/>
+          <a:ln xmlns:a="http://schemas.openxmlformats.org/drawingml/2006/main" w="0">
+            <a:noFill/>
+            <a:prstDash val="solid"/>
+          </a:ln>
+        </p:spPr>
+        <p:txBody>
+          <a:bodyPr xmlns:a="http://schemas.openxmlformats.org/drawingml/2006/main" lIns="0" tIns="0" rIns="0" bIns="0" anchor="ctr">
+            <a:noAutofit/>
+          </a:bodyPr>
+          <a:lstStyle xmlns:a="http://schemas.openxmlformats.org/drawingml/2006/main"/>
+          <a:p xmlns:a="http://schemas.openxmlformats.org/drawingml/2006/main">
+            <a:pPr algn="l">
+              <a:buNone/>
+              <a:defRPr sz="2400" b="0">
+                <a:solidFill>
+                  <a:srgbClr val="152B3A"/>
+                </a:solidFill>
+                <a:latin typeface="Calibri"/>
+                <a:ea typeface="Calibri"/>
+                <a:cs typeface="Calibri"/>
+              </a:defRPr>
+            </a:pPr>
+            <a:r>
+              <a:rPr sz="2400" b="0">
+                <a:solidFill>
+                  <a:srgbClr val="152B3A"/>
+                </a:solidFill>
+                <a:latin typeface="Calibri"/>
+                <a:ea typeface="Calibri"/>
+                <a:cs typeface="Calibri"/>
               </a:rPr>
               <a:t>The Moon orbits Earth in about a month.</a:t>
             </a:r>
@@ -3232,36 +3388,450 @@
         </p:nvSpPr>
         <p:spPr>
           <a:xfrm xmlns:a="http://schemas.openxmlformats.org/drawingml/2006/main">
-            <a:off x="609600" y="5057775"/>
-            <a:ext cx="10972800" cy="533400"/>
-          </a:xfrm>
-          <a:prstGeom xmlns:a="http://schemas.openxmlformats.org/drawingml/2006/main" prst="rect">
-            <a:avLst/>
-          </a:prstGeom>
-          <a:noFill xmlns:a="http://schemas.openxmlformats.org/drawingml/2006/main"/>
-          <a:ln xmlns:a="http://schemas.openxmlformats.org/drawingml/2006/main" w="0">
-            <a:noFill/>
-            <a:prstDash val="solid"/>
-          </a:ln>
-        </p:spPr>
-        <p:txBody>
-          <a:bodyPr xmlns:a="http://schemas.openxmlformats.org/drawingml/2006/main" lIns="0" tIns="0" rIns="0" bIns="0" anchor="ctr"/>
-          <a:lstStyle xmlns:a="http://schemas.openxmlformats.org/drawingml/2006/main"/>
-          <a:p xmlns:a="http://schemas.openxmlformats.org/drawingml/2006/main">
-            <a:pPr>
-              <a:defRPr sz="2175" b="0">
-                <a:solidFill>
-                  <a:srgbClr val="152B3A"/>
-                </a:solidFill>
-              </a:defRPr>
-            </a:pPr>
-            <a:r>
-              <a:rPr sz="2175" b="0">
-                <a:solidFill>
-                  <a:srgbClr val="152B3A"/>
-                </a:solidFill>
+            <a:off x="1000125" y="5053965"/>
+            <a:ext cx="10382250" cy="622935"/>
+          </a:xfrm>
+          <a:prstGeom xmlns:a="http://schemas.openxmlformats.org/drawingml/2006/main" prst="rect">
+            <a:avLst/>
+          </a:prstGeom>
+          <a:noFill xmlns:a="http://schemas.openxmlformats.org/drawingml/2006/main"/>
+          <a:ln xmlns:a="http://schemas.openxmlformats.org/drawingml/2006/main" w="0">
+            <a:noFill/>
+            <a:prstDash val="solid"/>
+          </a:ln>
+        </p:spPr>
+        <p:txBody>
+          <a:bodyPr xmlns:a="http://schemas.openxmlformats.org/drawingml/2006/main" lIns="0" tIns="0" rIns="0" bIns="0" anchor="ctr">
+            <a:noAutofit/>
+          </a:bodyPr>
+          <a:lstStyle xmlns:a="http://schemas.openxmlformats.org/drawingml/2006/main"/>
+          <a:p xmlns:a="http://schemas.openxmlformats.org/drawingml/2006/main">
+            <a:pPr algn="l">
+              <a:buNone/>
+              <a:defRPr sz="2400" b="0">
+                <a:solidFill>
+                  <a:srgbClr val="152B3A"/>
+                </a:solidFill>
+                <a:latin typeface="Calibri"/>
+                <a:ea typeface="Calibri"/>
+                <a:cs typeface="Calibri"/>
+              </a:defRPr>
+            </a:pPr>
+            <a:r>
+              <a:rPr sz="2400" b="0">
+                <a:solidFill>
+                  <a:srgbClr val="152B3A"/>
+                </a:solidFill>
+                <a:latin typeface="Calibri"/>
+                <a:ea typeface="Calibri"/>
+                <a:cs typeface="Calibri"/>
               </a:rPr>
               <a:t>The Moon is only visible at night.</a:t>
+            </a:r>
+          </a:p>
+        </p:txBody>
+      </p:sp>
+      <p:sp>
+        <p:nvSpPr>
+          <p:cNvPr id="13" name="cue-0">
+            <a:extLst xmlns:a="http://schemas.openxmlformats.org/drawingml/2006/main">
+              <a:ext uri="{FF2B5EF4-FFF2-40B4-BE49-F238E27FC236}">
+                <a16:creationId xmlns:a16="http://schemas.microsoft.com/office/drawing/2014/main" id="{607CFC21-BA5F-42F4-8FFC-D2273706EC6F}"/>
+              </a:ext>
+            </a:extLst>
+          </p:cNvPr>
+          <p:cNvSpPr>
+            <a:spLocks xmlns:a="http://schemas.openxmlformats.org/drawingml/2006/main" noGrp="1"/>
+          </p:cNvSpPr>
+          <p:nvPr/>
+        </p:nvSpPr>
+        <p:spPr>
+          <a:xfrm xmlns:a="http://schemas.openxmlformats.org/drawingml/2006/main">
+            <a:off x="609600" y="2362200"/>
+            <a:ext cx="323850" cy="323850"/>
+          </a:xfrm>
+          <a:prstGeom xmlns:a="http://schemas.openxmlformats.org/drawingml/2006/main" prst="rect">
+            <a:avLst/>
+          </a:prstGeom>
+          <a:noFill xmlns:a="http://schemas.openxmlformats.org/drawingml/2006/main"/>
+          <a:ln xmlns:a="http://schemas.openxmlformats.org/drawingml/2006/main" w="0">
+            <a:noFill/>
+          </a:ln>
+        </p:spPr>
+        <p:txBody>
+          <a:bodyPr xmlns:a="http://schemas.openxmlformats.org/drawingml/2006/main" lIns="0" tIns="0" rIns="0" bIns="0" anchor="ctr">
+            <a:noAutofit/>
+          </a:bodyPr>
+          <a:lstStyle xmlns:a="http://schemas.openxmlformats.org/drawingml/2006/main"/>
+          <a:p xmlns:a="http://schemas.openxmlformats.org/drawingml/2006/main">
+            <a:pPr algn="l">
+              <a:defRPr sz="1350" b="1">
+                <a:solidFill>
+                  <a:srgbClr val="28685E"/>
+                </a:solidFill>
+                <a:latin typeface="Calibri"/>
+                <a:ea typeface="Calibri"/>
+                <a:cs typeface="Calibri"/>
+              </a:defRPr>
+            </a:pPr>
+            <a:r>
+              <a:rPr sz="1350" b="1">
+                <a:solidFill>
+                  <a:srgbClr val="28685E"/>
+                </a:solidFill>
+                <a:latin typeface="Calibri"/>
+                <a:ea typeface="Calibri"/>
+                <a:cs typeface="Calibri"/>
+              </a:rPr>
+              <a:t>01</a:t>
+            </a:r>
+          </a:p>
+        </p:txBody>
+      </p:sp>
+      <p:sp>
+        <p:nvSpPr>
+          <p:cNvPr id="14" name="row-rule-0">
+            <a:extLst xmlns:a="http://schemas.openxmlformats.org/drawingml/2006/main">
+              <a:ext uri="{FF2B5EF4-FFF2-40B4-BE49-F238E27FC236}">
+                <a16:creationId xmlns:a16="http://schemas.microsoft.com/office/drawing/2014/main" id="{7B3B768A-CF05-45C5-8888-2FAF7A04CFA7}"/>
+              </a:ext>
+            </a:extLst>
+          </p:cNvPr>
+          <p:cNvSpPr>
+            <a:spLocks xmlns:a="http://schemas.openxmlformats.org/drawingml/2006/main" noGrp="1"/>
+          </p:cNvSpPr>
+          <p:nvPr/>
+        </p:nvSpPr>
+        <p:spPr>
+          <a:xfrm xmlns:a="http://schemas.openxmlformats.org/drawingml/2006/main">
+            <a:off x="1000125" y="2966085"/>
+            <a:ext cx="10334625" cy="0"/>
+          </a:xfrm>
+          <a:prstGeom xmlns:a="http://schemas.openxmlformats.org/drawingml/2006/main" prst="line">
+            <a:avLst/>
+          </a:prstGeom>
+          <a:noFill xmlns:a="http://schemas.openxmlformats.org/drawingml/2006/main"/>
+          <a:ln xmlns:a="http://schemas.openxmlformats.org/drawingml/2006/main" w="9525">
+            <a:solidFill>
+              <a:srgbClr val="CEDBD3"/>
+            </a:solidFill>
+          </a:ln>
+        </p:spPr>
+      </p:sp>
+      <p:sp>
+        <p:nvSpPr>
+          <p:cNvPr id="15" name="cue-1">
+            <a:extLst xmlns:a="http://schemas.openxmlformats.org/drawingml/2006/main">
+              <a:ext uri="{FF2B5EF4-FFF2-40B4-BE49-F238E27FC236}">
+                <a16:creationId xmlns:a16="http://schemas.microsoft.com/office/drawing/2014/main" id="{B2ADDB78-194C-411F-BA8D-F6EEA91B445B}"/>
+              </a:ext>
+            </a:extLst>
+          </p:cNvPr>
+          <p:cNvSpPr>
+            <a:spLocks xmlns:a="http://schemas.openxmlformats.org/drawingml/2006/main" noGrp="1"/>
+          </p:cNvSpPr>
+          <p:nvPr/>
+        </p:nvSpPr>
+        <p:spPr>
+          <a:xfrm xmlns:a="http://schemas.openxmlformats.org/drawingml/2006/main">
+            <a:off x="609600" y="3042285"/>
+            <a:ext cx="323850" cy="323850"/>
+          </a:xfrm>
+          <a:prstGeom xmlns:a="http://schemas.openxmlformats.org/drawingml/2006/main" prst="rect">
+            <a:avLst/>
+          </a:prstGeom>
+          <a:noFill xmlns:a="http://schemas.openxmlformats.org/drawingml/2006/main"/>
+          <a:ln xmlns:a="http://schemas.openxmlformats.org/drawingml/2006/main" w="0">
+            <a:noFill/>
+          </a:ln>
+        </p:spPr>
+        <p:txBody>
+          <a:bodyPr xmlns:a="http://schemas.openxmlformats.org/drawingml/2006/main" lIns="0" tIns="0" rIns="0" bIns="0" anchor="ctr">
+            <a:noAutofit/>
+          </a:bodyPr>
+          <a:lstStyle xmlns:a="http://schemas.openxmlformats.org/drawingml/2006/main"/>
+          <a:p xmlns:a="http://schemas.openxmlformats.org/drawingml/2006/main">
+            <a:pPr algn="l">
+              <a:defRPr sz="1350" b="1">
+                <a:solidFill>
+                  <a:srgbClr val="28685E"/>
+                </a:solidFill>
+                <a:latin typeface="Calibri"/>
+                <a:ea typeface="Calibri"/>
+                <a:cs typeface="Calibri"/>
+              </a:defRPr>
+            </a:pPr>
+            <a:r>
+              <a:rPr sz="1350" b="1">
+                <a:solidFill>
+                  <a:srgbClr val="28685E"/>
+                </a:solidFill>
+                <a:latin typeface="Calibri"/>
+                <a:ea typeface="Calibri"/>
+                <a:cs typeface="Calibri"/>
+              </a:rPr>
+              <a:t>02</a:t>
+            </a:r>
+          </a:p>
+        </p:txBody>
+      </p:sp>
+      <p:sp>
+        <p:nvSpPr>
+          <p:cNvPr id="16" name="row-rule-1">
+            <a:extLst xmlns:a="http://schemas.openxmlformats.org/drawingml/2006/main">
+              <a:ext uri="{FF2B5EF4-FFF2-40B4-BE49-F238E27FC236}">
+                <a16:creationId xmlns:a16="http://schemas.microsoft.com/office/drawing/2014/main" id="{1CB141FD-BC7D-4479-9814-7E2313A88D55}"/>
+              </a:ext>
+            </a:extLst>
+          </p:cNvPr>
+          <p:cNvSpPr>
+            <a:spLocks xmlns:a="http://schemas.openxmlformats.org/drawingml/2006/main" noGrp="1"/>
+          </p:cNvSpPr>
+          <p:nvPr/>
+        </p:nvSpPr>
+        <p:spPr>
+          <a:xfrm xmlns:a="http://schemas.openxmlformats.org/drawingml/2006/main">
+            <a:off x="1000125" y="3646170"/>
+            <a:ext cx="10334625" cy="0"/>
+          </a:xfrm>
+          <a:prstGeom xmlns:a="http://schemas.openxmlformats.org/drawingml/2006/main" prst="line">
+            <a:avLst/>
+          </a:prstGeom>
+          <a:noFill xmlns:a="http://schemas.openxmlformats.org/drawingml/2006/main"/>
+          <a:ln xmlns:a="http://schemas.openxmlformats.org/drawingml/2006/main" w="9525">
+            <a:solidFill>
+              <a:srgbClr val="CEDBD3"/>
+            </a:solidFill>
+          </a:ln>
+        </p:spPr>
+      </p:sp>
+      <p:sp>
+        <p:nvSpPr>
+          <p:cNvPr id="17" name="cue-2">
+            <a:extLst xmlns:a="http://schemas.openxmlformats.org/drawingml/2006/main">
+              <a:ext uri="{FF2B5EF4-FFF2-40B4-BE49-F238E27FC236}">
+                <a16:creationId xmlns:a16="http://schemas.microsoft.com/office/drawing/2014/main" id="{E7E821D0-6D1D-4F93-8844-D57F37FC1596}"/>
+              </a:ext>
+            </a:extLst>
+          </p:cNvPr>
+          <p:cNvSpPr>
+            <a:spLocks xmlns:a="http://schemas.openxmlformats.org/drawingml/2006/main" noGrp="1"/>
+          </p:cNvSpPr>
+          <p:nvPr/>
+        </p:nvSpPr>
+        <p:spPr>
+          <a:xfrm xmlns:a="http://schemas.openxmlformats.org/drawingml/2006/main">
+            <a:off x="609600" y="3722370"/>
+            <a:ext cx="323850" cy="323850"/>
+          </a:xfrm>
+          <a:prstGeom xmlns:a="http://schemas.openxmlformats.org/drawingml/2006/main" prst="rect">
+            <a:avLst/>
+          </a:prstGeom>
+          <a:noFill xmlns:a="http://schemas.openxmlformats.org/drawingml/2006/main"/>
+          <a:ln xmlns:a="http://schemas.openxmlformats.org/drawingml/2006/main" w="0">
+            <a:noFill/>
+          </a:ln>
+        </p:spPr>
+        <p:txBody>
+          <a:bodyPr xmlns:a="http://schemas.openxmlformats.org/drawingml/2006/main" lIns="0" tIns="0" rIns="0" bIns="0" anchor="ctr">
+            <a:noAutofit/>
+          </a:bodyPr>
+          <a:lstStyle xmlns:a="http://schemas.openxmlformats.org/drawingml/2006/main"/>
+          <a:p xmlns:a="http://schemas.openxmlformats.org/drawingml/2006/main">
+            <a:pPr algn="l">
+              <a:defRPr sz="1350" b="1">
+                <a:solidFill>
+                  <a:srgbClr val="28685E"/>
+                </a:solidFill>
+                <a:latin typeface="Calibri"/>
+                <a:ea typeface="Calibri"/>
+                <a:cs typeface="Calibri"/>
+              </a:defRPr>
+            </a:pPr>
+            <a:r>
+              <a:rPr sz="1350" b="1">
+                <a:solidFill>
+                  <a:srgbClr val="28685E"/>
+                </a:solidFill>
+                <a:latin typeface="Calibri"/>
+                <a:ea typeface="Calibri"/>
+                <a:cs typeface="Calibri"/>
+              </a:rPr>
+              <a:t>03</a:t>
+            </a:r>
+          </a:p>
+        </p:txBody>
+      </p:sp>
+      <p:sp>
+        <p:nvSpPr>
+          <p:cNvPr id="18" name="row-rule-2">
+            <a:extLst xmlns:a="http://schemas.openxmlformats.org/drawingml/2006/main">
+              <a:ext uri="{FF2B5EF4-FFF2-40B4-BE49-F238E27FC236}">
+                <a16:creationId xmlns:a16="http://schemas.microsoft.com/office/drawing/2014/main" id="{A7249F16-9416-4FD3-AB77-6DBFC7E36393}"/>
+              </a:ext>
+            </a:extLst>
+          </p:cNvPr>
+          <p:cNvSpPr>
+            <a:spLocks xmlns:a="http://schemas.openxmlformats.org/drawingml/2006/main" noGrp="1"/>
+          </p:cNvSpPr>
+          <p:nvPr/>
+        </p:nvSpPr>
+        <p:spPr>
+          <a:xfrm xmlns:a="http://schemas.openxmlformats.org/drawingml/2006/main">
+            <a:off x="1000125" y="4326255"/>
+            <a:ext cx="10334625" cy="0"/>
+          </a:xfrm>
+          <a:prstGeom xmlns:a="http://schemas.openxmlformats.org/drawingml/2006/main" prst="line">
+            <a:avLst/>
+          </a:prstGeom>
+          <a:noFill xmlns:a="http://schemas.openxmlformats.org/drawingml/2006/main"/>
+          <a:ln xmlns:a="http://schemas.openxmlformats.org/drawingml/2006/main" w="9525">
+            <a:solidFill>
+              <a:srgbClr val="CEDBD3"/>
+            </a:solidFill>
+          </a:ln>
+        </p:spPr>
+      </p:sp>
+      <p:sp>
+        <p:nvSpPr>
+          <p:cNvPr id="19" name="cue-3">
+            <a:extLst xmlns:a="http://schemas.openxmlformats.org/drawingml/2006/main">
+              <a:ext uri="{FF2B5EF4-FFF2-40B4-BE49-F238E27FC236}">
+                <a16:creationId xmlns:a16="http://schemas.microsoft.com/office/drawing/2014/main" id="{19AC171E-9CAB-420D-B7A9-1E5AD6198923}"/>
+              </a:ext>
+            </a:extLst>
+          </p:cNvPr>
+          <p:cNvSpPr>
+            <a:spLocks xmlns:a="http://schemas.openxmlformats.org/drawingml/2006/main" noGrp="1"/>
+          </p:cNvSpPr>
+          <p:nvPr/>
+        </p:nvSpPr>
+        <p:spPr>
+          <a:xfrm xmlns:a="http://schemas.openxmlformats.org/drawingml/2006/main">
+            <a:off x="609600" y="4402455"/>
+            <a:ext cx="323850" cy="323850"/>
+          </a:xfrm>
+          <a:prstGeom xmlns:a="http://schemas.openxmlformats.org/drawingml/2006/main" prst="rect">
+            <a:avLst/>
+          </a:prstGeom>
+          <a:noFill xmlns:a="http://schemas.openxmlformats.org/drawingml/2006/main"/>
+          <a:ln xmlns:a="http://schemas.openxmlformats.org/drawingml/2006/main" w="0">
+            <a:noFill/>
+          </a:ln>
+        </p:spPr>
+        <p:txBody>
+          <a:bodyPr xmlns:a="http://schemas.openxmlformats.org/drawingml/2006/main" lIns="0" tIns="0" rIns="0" bIns="0" anchor="ctr">
+            <a:noAutofit/>
+          </a:bodyPr>
+          <a:lstStyle xmlns:a="http://schemas.openxmlformats.org/drawingml/2006/main"/>
+          <a:p xmlns:a="http://schemas.openxmlformats.org/drawingml/2006/main">
+            <a:pPr algn="l">
+              <a:defRPr sz="1350" b="1">
+                <a:solidFill>
+                  <a:srgbClr val="28685E"/>
+                </a:solidFill>
+                <a:latin typeface="Calibri"/>
+                <a:ea typeface="Calibri"/>
+                <a:cs typeface="Calibri"/>
+              </a:defRPr>
+            </a:pPr>
+            <a:r>
+              <a:rPr sz="1350" b="1">
+                <a:solidFill>
+                  <a:srgbClr val="28685E"/>
+                </a:solidFill>
+                <a:latin typeface="Calibri"/>
+                <a:ea typeface="Calibri"/>
+                <a:cs typeface="Calibri"/>
+              </a:rPr>
+              <a:t>04</a:t>
+            </a:r>
+          </a:p>
+        </p:txBody>
+      </p:sp>
+      <p:sp>
+        <p:nvSpPr>
+          <p:cNvPr id="20" name="row-rule-3">
+            <a:extLst xmlns:a="http://schemas.openxmlformats.org/drawingml/2006/main">
+              <a:ext uri="{FF2B5EF4-FFF2-40B4-BE49-F238E27FC236}">
+                <a16:creationId xmlns:a16="http://schemas.microsoft.com/office/drawing/2014/main" id="{80193020-06FF-4234-B794-20138F2FBF0B}"/>
+              </a:ext>
+            </a:extLst>
+          </p:cNvPr>
+          <p:cNvSpPr>
+            <a:spLocks xmlns:a="http://schemas.openxmlformats.org/drawingml/2006/main" noGrp="1"/>
+          </p:cNvSpPr>
+          <p:nvPr/>
+        </p:nvSpPr>
+        <p:spPr>
+          <a:xfrm xmlns:a="http://schemas.openxmlformats.org/drawingml/2006/main">
+            <a:off x="1000125" y="5006340"/>
+            <a:ext cx="10334625" cy="0"/>
+          </a:xfrm>
+          <a:prstGeom xmlns:a="http://schemas.openxmlformats.org/drawingml/2006/main" prst="line">
+            <a:avLst/>
+          </a:prstGeom>
+          <a:noFill xmlns:a="http://schemas.openxmlformats.org/drawingml/2006/main"/>
+          <a:ln xmlns:a="http://schemas.openxmlformats.org/drawingml/2006/main" w="9525">
+            <a:solidFill>
+              <a:srgbClr val="CEDBD3"/>
+            </a:solidFill>
+          </a:ln>
+        </p:spPr>
+      </p:sp>
+      <p:sp>
+        <p:nvSpPr>
+          <p:cNvPr id="21" name="cue-4">
+            <a:extLst xmlns:a="http://schemas.openxmlformats.org/drawingml/2006/main">
+              <a:ext uri="{FF2B5EF4-FFF2-40B4-BE49-F238E27FC236}">
+                <a16:creationId xmlns:a16="http://schemas.microsoft.com/office/drawing/2014/main" id="{506CC0C2-778C-4FED-B1B0-89C0BB4DC315}"/>
+              </a:ext>
+            </a:extLst>
+          </p:cNvPr>
+          <p:cNvSpPr>
+            <a:spLocks xmlns:a="http://schemas.openxmlformats.org/drawingml/2006/main" noGrp="1"/>
+          </p:cNvSpPr>
+          <p:nvPr/>
+        </p:nvSpPr>
+        <p:spPr>
+          <a:xfrm xmlns:a="http://schemas.openxmlformats.org/drawingml/2006/main">
+            <a:off x="609600" y="5082540"/>
+            <a:ext cx="323850" cy="323850"/>
+          </a:xfrm>
+          <a:prstGeom xmlns:a="http://schemas.openxmlformats.org/drawingml/2006/main" prst="rect">
+            <a:avLst/>
+          </a:prstGeom>
+          <a:noFill xmlns:a="http://schemas.openxmlformats.org/drawingml/2006/main"/>
+          <a:ln xmlns:a="http://schemas.openxmlformats.org/drawingml/2006/main" w="0">
+            <a:noFill/>
+          </a:ln>
+        </p:spPr>
+        <p:txBody>
+          <a:bodyPr xmlns:a="http://schemas.openxmlformats.org/drawingml/2006/main" lIns="0" tIns="0" rIns="0" bIns="0" anchor="ctr">
+            <a:noAutofit/>
+          </a:bodyPr>
+          <a:lstStyle xmlns:a="http://schemas.openxmlformats.org/drawingml/2006/main"/>
+          <a:p xmlns:a="http://schemas.openxmlformats.org/drawingml/2006/main">
+            <a:pPr algn="l">
+              <a:defRPr sz="1350" b="1">
+                <a:solidFill>
+                  <a:srgbClr val="28685E"/>
+                </a:solidFill>
+                <a:latin typeface="Calibri"/>
+                <a:ea typeface="Calibri"/>
+                <a:cs typeface="Calibri"/>
+              </a:defRPr>
+            </a:pPr>
+            <a:r>
+              <a:rPr sz="1350" b="1">
+                <a:solidFill>
+                  <a:srgbClr val="28685E"/>
+                </a:solidFill>
+                <a:latin typeface="Calibri"/>
+                <a:ea typeface="Calibri"/>
+                <a:cs typeface="Calibri"/>
+              </a:rPr>
+              <a:t>05</a:t>
             </a:r>
           </a:p>
         </p:txBody>
@@ -3282,7 +3852,7 @@
     <p:bg>
       <p:bgPr>
         <a:solidFill xmlns:a="http://schemas.openxmlformats.org/drawingml/2006/main">
-          <a:srgbClr val="F5F1E8"/>
+          <a:srgbClr val="FAF9F5"/>
         </a:solidFill>
       </p:bgPr>
     </p:bg>
@@ -3311,8 +3881,8 @@
         </p:nvSpPr>
         <p:spPr>
           <a:xfrm xmlns:a="http://schemas.openxmlformats.org/drawingml/2006/main">
-            <a:off x="609600" y="552450"/>
-            <a:ext cx="781050" cy="57150"/>
+            <a:off x="609600" y="733425"/>
+            <a:ext cx="781050" cy="38100"/>
           </a:xfrm>
           <a:prstGeom xmlns:a="http://schemas.openxmlformats.org/drawingml/2006/main" prst="rect">
             <a:avLst/>
@@ -3342,34 +3912,43 @@
         </p:nvSpPr>
         <p:spPr>
           <a:xfrm xmlns:a="http://schemas.openxmlformats.org/drawingml/2006/main">
-            <a:off x="609600" y="762000"/>
-            <a:ext cx="8572500" cy="285750"/>
-          </a:xfrm>
-          <a:prstGeom xmlns:a="http://schemas.openxmlformats.org/drawingml/2006/main" prst="rect">
-            <a:avLst/>
-          </a:prstGeom>
-          <a:noFill xmlns:a="http://schemas.openxmlformats.org/drawingml/2006/main"/>
-          <a:ln xmlns:a="http://schemas.openxmlformats.org/drawingml/2006/main" w="0">
-            <a:noFill/>
-            <a:prstDash val="solid"/>
-          </a:ln>
-        </p:spPr>
-        <p:txBody>
-          <a:bodyPr xmlns:a="http://schemas.openxmlformats.org/drawingml/2006/main" lIns="0" tIns="0" rIns="0" bIns="0" anchor="ctr"/>
-          <a:lstStyle xmlns:a="http://schemas.openxmlformats.org/drawingml/2006/main"/>
-          <a:p xmlns:a="http://schemas.openxmlformats.org/drawingml/2006/main">
-            <a:pPr>
-              <a:defRPr sz="1500" b="1">
+            <a:off x="609600" y="342900"/>
+            <a:ext cx="9334500" cy="304800"/>
+          </a:xfrm>
+          <a:prstGeom xmlns:a="http://schemas.openxmlformats.org/drawingml/2006/main" prst="rect">
+            <a:avLst/>
+          </a:prstGeom>
+          <a:noFill xmlns:a="http://schemas.openxmlformats.org/drawingml/2006/main"/>
+          <a:ln xmlns:a="http://schemas.openxmlformats.org/drawingml/2006/main" w="0">
+            <a:noFill/>
+            <a:prstDash val="solid"/>
+          </a:ln>
+        </p:spPr>
+        <p:txBody>
+          <a:bodyPr xmlns:a="http://schemas.openxmlformats.org/drawingml/2006/main" lIns="0" tIns="0" rIns="0" bIns="0" anchor="ctr">
+            <a:noAutofit/>
+          </a:bodyPr>
+          <a:lstStyle xmlns:a="http://schemas.openxmlformats.org/drawingml/2006/main"/>
+          <a:p xmlns:a="http://schemas.openxmlformats.org/drawingml/2006/main">
+            <a:pPr algn="l">
+              <a:buNone/>
+              <a:defRPr sz="1350" b="1">
                 <a:solidFill>
                   <a:srgbClr val="28685E"/>
                 </a:solidFill>
-              </a:defRPr>
-            </a:pPr>
-            <a:r>
-              <a:rPr sz="1500" b="1">
+                <a:latin typeface="Calibri"/>
+                <a:ea typeface="Calibri"/>
+                <a:cs typeface="Calibri"/>
+              </a:defRPr>
+            </a:pPr>
+            <a:r>
+              <a:rPr sz="1350" b="1">
                 <a:solidFill>
                   <a:srgbClr val="28685E"/>
                 </a:solidFill>
+                <a:latin typeface="Calibri"/>
+                <a:ea typeface="Calibri"/>
+                <a:cs typeface="Calibri"/>
               </a:rPr>
               <a:t>MADE BY MATT  /  GROW SCIENCE</a:t>
             </a:r>
@@ -3392,34 +3971,43 @@
         </p:nvSpPr>
         <p:spPr>
           <a:xfrm xmlns:a="http://schemas.openxmlformats.org/drawingml/2006/main">
-            <a:off x="609600" y="1352550"/>
-            <a:ext cx="10972800" cy="952500"/>
-          </a:xfrm>
-          <a:prstGeom xmlns:a="http://schemas.openxmlformats.org/drawingml/2006/main" prst="rect">
-            <a:avLst/>
-          </a:prstGeom>
-          <a:noFill xmlns:a="http://schemas.openxmlformats.org/drawingml/2006/main"/>
-          <a:ln xmlns:a="http://schemas.openxmlformats.org/drawingml/2006/main" w="0">
-            <a:noFill/>
-            <a:prstDash val="solid"/>
-          </a:ln>
-        </p:spPr>
-        <p:txBody>
-          <a:bodyPr xmlns:a="http://schemas.openxmlformats.org/drawingml/2006/main" lIns="0" tIns="0" rIns="0" bIns="0" anchor="ctr"/>
-          <a:lstStyle xmlns:a="http://schemas.openxmlformats.org/drawingml/2006/main"/>
-          <a:p xmlns:a="http://schemas.openxmlformats.org/drawingml/2006/main">
-            <a:pPr>
-              <a:defRPr sz="3750" b="1">
-                <a:solidFill>
-                  <a:srgbClr val="152B3A"/>
-                </a:solidFill>
-              </a:defRPr>
-            </a:pPr>
-            <a:r>
-              <a:rPr sz="3750" b="1">
-                <a:solidFill>
-                  <a:srgbClr val="152B3A"/>
-                </a:solidFill>
+            <a:off x="609600" y="990600"/>
+            <a:ext cx="10972800" cy="1000125"/>
+          </a:xfrm>
+          <a:prstGeom xmlns:a="http://schemas.openxmlformats.org/drawingml/2006/main" prst="rect">
+            <a:avLst/>
+          </a:prstGeom>
+          <a:noFill xmlns:a="http://schemas.openxmlformats.org/drawingml/2006/main"/>
+          <a:ln xmlns:a="http://schemas.openxmlformats.org/drawingml/2006/main" w="0">
+            <a:noFill/>
+            <a:prstDash val="solid"/>
+          </a:ln>
+        </p:spPr>
+        <p:txBody>
+          <a:bodyPr xmlns:a="http://schemas.openxmlformats.org/drawingml/2006/main" lIns="0" tIns="0" rIns="0" bIns="0" anchor="ctr">
+            <a:noAutofit/>
+          </a:bodyPr>
+          <a:lstStyle xmlns:a="http://schemas.openxmlformats.org/drawingml/2006/main"/>
+          <a:p xmlns:a="http://schemas.openxmlformats.org/drawingml/2006/main">
+            <a:pPr algn="l">
+              <a:buNone/>
+              <a:defRPr sz="3675" b="1">
+                <a:solidFill>
+                  <a:srgbClr val="152B3A"/>
+                </a:solidFill>
+                <a:latin typeface="Calibri"/>
+                <a:ea typeface="Calibri"/>
+                <a:cs typeface="Calibri"/>
+              </a:defRPr>
+            </a:pPr>
+            <a:r>
+              <a:rPr sz="3675" b="1">
+                <a:solidFill>
+                  <a:srgbClr val="152B3A"/>
+                </a:solidFill>
+                <a:latin typeface="Calibri"/>
+                <a:ea typeface="Calibri"/>
+                <a:cs typeface="Calibri"/>
               </a:rPr>
               <a:t>Check the original claims</a:t>
             </a:r>
@@ -3442,14 +4030,14 @@
         </p:nvSpPr>
         <p:spPr>
           <a:xfrm xmlns:a="http://schemas.openxmlformats.org/drawingml/2006/main">
-            <a:off x="609600" y="6219825"/>
+            <a:off x="609600" y="6191250"/>
             <a:ext cx="10972800" cy="9525"/>
           </a:xfrm>
           <a:prstGeom xmlns:a="http://schemas.openxmlformats.org/drawingml/2006/main" prst="rect">
             <a:avLst/>
           </a:prstGeom>
           <a:solidFill xmlns:a="http://schemas.openxmlformats.org/drawingml/2006/main">
-            <a:srgbClr val="DCE7DD"/>
+            <a:srgbClr val="CEDBD3"/>
           </a:solidFill>
           <a:ln xmlns:a="http://schemas.openxmlformats.org/drawingml/2006/main" w="0">
             <a:noFill/>
@@ -3473,34 +4061,43 @@
         </p:nvSpPr>
         <p:spPr>
           <a:xfrm xmlns:a="http://schemas.openxmlformats.org/drawingml/2006/main">
-            <a:off x="609600" y="6381750"/>
-            <a:ext cx="9906000" cy="228600"/>
-          </a:xfrm>
-          <a:prstGeom xmlns:a="http://schemas.openxmlformats.org/drawingml/2006/main" prst="rect">
-            <a:avLst/>
-          </a:prstGeom>
-          <a:noFill xmlns:a="http://schemas.openxmlformats.org/drawingml/2006/main"/>
-          <a:ln xmlns:a="http://schemas.openxmlformats.org/drawingml/2006/main" w="0">
-            <a:noFill/>
-            <a:prstDash val="solid"/>
-          </a:ln>
-        </p:spPr>
-        <p:txBody>
-          <a:bodyPr xmlns:a="http://schemas.openxmlformats.org/drawingml/2006/main" lIns="0" tIns="0" rIns="0" bIns="0" anchor="ctr"/>
-          <a:lstStyle xmlns:a="http://schemas.openxmlformats.org/drawingml/2006/main"/>
-          <a:p xmlns:a="http://schemas.openxmlformats.org/drawingml/2006/main">
-            <a:pPr>
-              <a:defRPr sz="1275" b="0">
+            <a:off x="609600" y="6419850"/>
+            <a:ext cx="9525000" cy="219075"/>
+          </a:xfrm>
+          <a:prstGeom xmlns:a="http://schemas.openxmlformats.org/drawingml/2006/main" prst="rect">
+            <a:avLst/>
+          </a:prstGeom>
+          <a:noFill xmlns:a="http://schemas.openxmlformats.org/drawingml/2006/main"/>
+          <a:ln xmlns:a="http://schemas.openxmlformats.org/drawingml/2006/main" w="0">
+            <a:noFill/>
+            <a:prstDash val="solid"/>
+          </a:ln>
+        </p:spPr>
+        <p:txBody>
+          <a:bodyPr xmlns:a="http://schemas.openxmlformats.org/drawingml/2006/main" lIns="0" tIns="0" rIns="0" bIns="0" anchor="ctr">
+            <a:noAutofit/>
+          </a:bodyPr>
+          <a:lstStyle xmlns:a="http://schemas.openxmlformats.org/drawingml/2006/main"/>
+          <a:p xmlns:a="http://schemas.openxmlformats.org/drawingml/2006/main">
+            <a:pPr algn="l">
+              <a:buNone/>
+              <a:defRPr sz="1200" b="0">
                 <a:solidFill>
                   <a:srgbClr val="50616B"/>
                 </a:solidFill>
-              </a:defRPr>
-            </a:pPr>
-            <a:r>
-              <a:rPr sz="1275" b="0">
+                <a:latin typeface="Calibri"/>
+                <a:ea typeface="Calibri"/>
+                <a:cs typeface="Calibri"/>
+              </a:defRPr>
+            </a:pPr>
+            <a:r>
+              <a:rPr sz="1200" b="0">
                 <a:solidFill>
                   <a:srgbClr val="50616B"/>
                 </a:solidFill>
+                <a:latin typeface="Calibri"/>
+                <a:ea typeface="Calibri"/>
+                <a:cs typeface="Calibri"/>
               </a:rPr>
               <a:t>AUTUMN 1  ·  WEEK 7  ·  LESSON A</a:t>
             </a:r>
@@ -3523,27 +4120,33 @@
         </p:nvSpPr>
         <p:spPr>
           <a:xfrm xmlns:a="http://schemas.openxmlformats.org/drawingml/2006/main">
-            <a:off x="11106150" y="6362700"/>
-            <a:ext cx="476250" cy="238125"/>
-          </a:xfrm>
-          <a:prstGeom xmlns:a="http://schemas.openxmlformats.org/drawingml/2006/main" prst="rect">
-            <a:avLst/>
-          </a:prstGeom>
-          <a:noFill xmlns:a="http://schemas.openxmlformats.org/drawingml/2006/main"/>
-          <a:ln xmlns:a="http://schemas.openxmlformats.org/drawingml/2006/main" w="0">
-            <a:noFill/>
-            <a:prstDash val="solid"/>
-          </a:ln>
-        </p:spPr>
-        <p:txBody>
-          <a:bodyPr xmlns:a="http://schemas.openxmlformats.org/drawingml/2006/main" lIns="0" tIns="0" rIns="0" bIns="0" anchor="ctr"/>
-          <a:lstStyle xmlns:a="http://schemas.openxmlformats.org/drawingml/2006/main"/>
-          <a:p xmlns:a="http://schemas.openxmlformats.org/drawingml/2006/main">
-            <a:pPr>
+            <a:off x="11106150" y="6400800"/>
+            <a:ext cx="476250" cy="247650"/>
+          </a:xfrm>
+          <a:prstGeom xmlns:a="http://schemas.openxmlformats.org/drawingml/2006/main" prst="rect">
+            <a:avLst/>
+          </a:prstGeom>
+          <a:noFill xmlns:a="http://schemas.openxmlformats.org/drawingml/2006/main"/>
+          <a:ln xmlns:a="http://schemas.openxmlformats.org/drawingml/2006/main" w="0">
+            <a:noFill/>
+            <a:prstDash val="solid"/>
+          </a:ln>
+        </p:spPr>
+        <p:txBody>
+          <a:bodyPr xmlns:a="http://schemas.openxmlformats.org/drawingml/2006/main" lIns="0" tIns="0" rIns="0" bIns="0" anchor="ctr">
+            <a:noAutofit/>
+          </a:bodyPr>
+          <a:lstStyle xmlns:a="http://schemas.openxmlformats.org/drawingml/2006/main"/>
+          <a:p xmlns:a="http://schemas.openxmlformats.org/drawingml/2006/main">
+            <a:pPr algn="l">
+              <a:buNone/>
               <a:defRPr sz="1350" b="1">
                 <a:solidFill>
                   <a:srgbClr val="28685E"/>
                 </a:solidFill>
+                <a:latin typeface="Calibri"/>
+                <a:ea typeface="Calibri"/>
+                <a:cs typeface="Calibri"/>
               </a:defRPr>
             </a:pPr>
             <a:r>
@@ -3551,6 +4154,9 @@
                 <a:solidFill>
                   <a:srgbClr val="28685E"/>
                 </a:solidFill>
+                <a:latin typeface="Calibri"/>
+                <a:ea typeface="Calibri"/>
+                <a:cs typeface="Calibri"/>
               </a:rPr>
               <a:t>11</a:t>
             </a:r>
@@ -3573,34 +4179,45 @@
         </p:nvSpPr>
         <p:spPr>
           <a:xfrm xmlns:a="http://schemas.openxmlformats.org/drawingml/2006/main">
-            <a:off x="609600" y="2619375"/>
-            <a:ext cx="4953000" cy="428625"/>
-          </a:xfrm>
-          <a:prstGeom xmlns:a="http://schemas.openxmlformats.org/drawingml/2006/main" prst="rect">
-            <a:avLst/>
-          </a:prstGeom>
-          <a:noFill xmlns:a="http://schemas.openxmlformats.org/drawingml/2006/main"/>
-          <a:ln xmlns:a="http://schemas.openxmlformats.org/drawingml/2006/main" w="0">
-            <a:noFill/>
-            <a:prstDash val="solid"/>
-          </a:ln>
-        </p:spPr>
-        <p:txBody>
-          <a:bodyPr xmlns:a="http://schemas.openxmlformats.org/drawingml/2006/main" lIns="0" tIns="0" rIns="0" bIns="0" anchor="ctr"/>
-          <a:lstStyle xmlns:a="http://schemas.openxmlformats.org/drawingml/2006/main"/>
-          <a:p xmlns:a="http://schemas.openxmlformats.org/drawingml/2006/main">
-            <a:pPr>
-              <a:defRPr sz="2025" b="1">
+            <a:off x="609600" y="2219325"/>
+            <a:ext cx="5257800" cy="762000"/>
+          </a:xfrm>
+          <a:prstGeom xmlns:a="http://schemas.openxmlformats.org/drawingml/2006/main" prst="rect">
+            <a:avLst/>
+          </a:prstGeom>
+          <a:solidFill xmlns:a="http://schemas.openxmlformats.org/drawingml/2006/main">
+            <a:srgbClr val="E7EFE9"/>
+          </a:solidFill>
+          <a:ln xmlns:a="http://schemas.openxmlformats.org/drawingml/2006/main" w="0">
+            <a:noFill/>
+            <a:prstDash val="solid"/>
+          </a:ln>
+        </p:spPr>
+        <p:txBody>
+          <a:bodyPr xmlns:a="http://schemas.openxmlformats.org/drawingml/2006/main" lIns="228600" tIns="114300" rIns="228600" bIns="114300" anchor="ctr">
+            <a:noAutofit/>
+          </a:bodyPr>
+          <a:lstStyle xmlns:a="http://schemas.openxmlformats.org/drawingml/2006/main"/>
+          <a:p xmlns:a="http://schemas.openxmlformats.org/drawingml/2006/main">
+            <a:pPr algn="l">
+              <a:buNone/>
+              <a:defRPr sz="1875" b="1">
                 <a:solidFill>
                   <a:srgbClr val="28685E"/>
                 </a:solidFill>
-              </a:defRPr>
-            </a:pPr>
-            <a:r>
-              <a:rPr sz="2025" b="1">
+                <a:latin typeface="Calibri"/>
+                <a:ea typeface="Calibri"/>
+                <a:cs typeface="Calibri"/>
+              </a:defRPr>
+            </a:pPr>
+            <a:r>
+              <a:rPr sz="1875" b="1">
                 <a:solidFill>
                   <a:srgbClr val="28685E"/>
                 </a:solidFill>
+                <a:latin typeface="Calibri"/>
+                <a:ea typeface="Calibri"/>
+                <a:cs typeface="Calibri"/>
               </a:rPr>
               <a:t>TRUE</a:t>
             </a:r>
@@ -3623,34 +4240,45 @@
         </p:nvSpPr>
         <p:spPr>
           <a:xfrm xmlns:a="http://schemas.openxmlformats.org/drawingml/2006/main">
-            <a:off x="6572250" y="2619375"/>
-            <a:ext cx="4953000" cy="428625"/>
-          </a:xfrm>
-          <a:prstGeom xmlns:a="http://schemas.openxmlformats.org/drawingml/2006/main" prst="rect">
-            <a:avLst/>
-          </a:prstGeom>
-          <a:noFill xmlns:a="http://schemas.openxmlformats.org/drawingml/2006/main"/>
-          <a:ln xmlns:a="http://schemas.openxmlformats.org/drawingml/2006/main" w="0">
-            <a:noFill/>
-            <a:prstDash val="solid"/>
-          </a:ln>
-        </p:spPr>
-        <p:txBody>
-          <a:bodyPr xmlns:a="http://schemas.openxmlformats.org/drawingml/2006/main" lIns="0" tIns="0" rIns="0" bIns="0" anchor="ctr"/>
-          <a:lstStyle xmlns:a="http://schemas.openxmlformats.org/drawingml/2006/main"/>
-          <a:p xmlns:a="http://schemas.openxmlformats.org/drawingml/2006/main">
-            <a:pPr>
-              <a:defRPr sz="2025" b="1">
-                <a:solidFill>
-                  <a:srgbClr val="A65D25"/>
-                </a:solidFill>
-              </a:defRPr>
-            </a:pPr>
-            <a:r>
-              <a:rPr sz="2025" b="1">
-                <a:solidFill>
-                  <a:srgbClr val="A65D25"/>
-                </a:solidFill>
+            <a:off x="6381750" y="2219325"/>
+            <a:ext cx="5200650" cy="762000"/>
+          </a:xfrm>
+          <a:prstGeom xmlns:a="http://schemas.openxmlformats.org/drawingml/2006/main" prst="rect">
+            <a:avLst/>
+          </a:prstGeom>
+          <a:solidFill xmlns:a="http://schemas.openxmlformats.org/drawingml/2006/main">
+            <a:srgbClr val="F0EBE3"/>
+          </a:solidFill>
+          <a:ln xmlns:a="http://schemas.openxmlformats.org/drawingml/2006/main" w="0">
+            <a:noFill/>
+            <a:prstDash val="solid"/>
+          </a:ln>
+        </p:spPr>
+        <p:txBody>
+          <a:bodyPr xmlns:a="http://schemas.openxmlformats.org/drawingml/2006/main" lIns="228600" tIns="114300" rIns="228600" bIns="114300" anchor="ctr">
+            <a:noAutofit/>
+          </a:bodyPr>
+          <a:lstStyle xmlns:a="http://schemas.openxmlformats.org/drawingml/2006/main"/>
+          <a:p xmlns:a="http://schemas.openxmlformats.org/drawingml/2006/main">
+            <a:pPr algn="l">
+              <a:buNone/>
+              <a:defRPr sz="1875" b="1">
+                <a:solidFill>
+                  <a:srgbClr val="A95D21"/>
+                </a:solidFill>
+                <a:latin typeface="Calibri"/>
+                <a:ea typeface="Calibri"/>
+                <a:cs typeface="Calibri"/>
+              </a:defRPr>
+            </a:pPr>
+            <a:r>
+              <a:rPr sz="1875" b="1">
+                <a:solidFill>
+                  <a:srgbClr val="A95D21"/>
+                </a:solidFill>
+                <a:latin typeface="Calibri"/>
+                <a:ea typeface="Calibri"/>
+                <a:cs typeface="Calibri"/>
               </a:rPr>
               <a:t>FALSE</a:t>
             </a:r>
@@ -3673,27 +4301,35 @@
         </p:nvSpPr>
         <p:spPr>
           <a:xfrm xmlns:a="http://schemas.openxmlformats.org/drawingml/2006/main">
-            <a:off x="609600" y="3333750"/>
-            <a:ext cx="4953000" cy="2524125"/>
-          </a:xfrm>
-          <a:prstGeom xmlns:a="http://schemas.openxmlformats.org/drawingml/2006/main" prst="rect">
-            <a:avLst/>
-          </a:prstGeom>
-          <a:noFill xmlns:a="http://schemas.openxmlformats.org/drawingml/2006/main"/>
-          <a:ln xmlns:a="http://schemas.openxmlformats.org/drawingml/2006/main" w="0">
-            <a:noFill/>
-            <a:prstDash val="solid"/>
-          </a:ln>
-        </p:spPr>
-        <p:txBody>
-          <a:bodyPr xmlns:a="http://schemas.openxmlformats.org/drawingml/2006/main" lIns="0" tIns="0" rIns="0" bIns="0" anchor="ctr"/>
-          <a:lstStyle xmlns:a="http://schemas.openxmlformats.org/drawingml/2006/main"/>
-          <a:p xmlns:a="http://schemas.openxmlformats.org/drawingml/2006/main">
-            <a:pPr>
+            <a:off x="609600" y="2981325"/>
+            <a:ext cx="5257800" cy="2714625"/>
+          </a:xfrm>
+          <a:prstGeom xmlns:a="http://schemas.openxmlformats.org/drawingml/2006/main" prst="rect">
+            <a:avLst/>
+          </a:prstGeom>
+          <a:solidFill xmlns:a="http://schemas.openxmlformats.org/drawingml/2006/main">
+            <a:srgbClr val="E7EFE9"/>
+          </a:solidFill>
+          <a:ln xmlns:a="http://schemas.openxmlformats.org/drawingml/2006/main" w="0">
+            <a:noFill/>
+            <a:prstDash val="solid"/>
+          </a:ln>
+        </p:spPr>
+        <p:txBody>
+          <a:bodyPr xmlns:a="http://schemas.openxmlformats.org/drawingml/2006/main" lIns="228600" tIns="114300" rIns="228600" bIns="114300" anchor="ctr">
+            <a:noAutofit/>
+          </a:bodyPr>
+          <a:lstStyle xmlns:a="http://schemas.openxmlformats.org/drawingml/2006/main"/>
+          <a:p xmlns:a="http://schemas.openxmlformats.org/drawingml/2006/main">
+            <a:pPr algn="l">
+              <a:buNone/>
               <a:defRPr sz="2400" b="0">
                 <a:solidFill>
                   <a:srgbClr val="152B3A"/>
                 </a:solidFill>
+                <a:latin typeface="Calibri"/>
+                <a:ea typeface="Calibri"/>
+                <a:cs typeface="Calibri"/>
               </a:defRPr>
             </a:pPr>
             <a:r>
@@ -3701,16 +4337,23 @@
                 <a:solidFill>
                   <a:srgbClr val="152B3A"/>
                 </a:solidFill>
+                <a:latin typeface="Calibri"/>
+                <a:ea typeface="Calibri"/>
+                <a:cs typeface="Calibri"/>
               </a:rPr>
               <a:t>The Moon reflects sunlight.</a:t>
             </a:r>
           </a:p>
           <a:p xmlns:a="http://schemas.openxmlformats.org/drawingml/2006/main">
-            <a:pPr>
+            <a:pPr algn="l">
+              <a:buNone/>
               <a:defRPr sz="2400" b="0">
                 <a:solidFill>
                   <a:srgbClr val="152B3A"/>
                 </a:solidFill>
+                <a:latin typeface="Calibri"/>
+                <a:ea typeface="Calibri"/>
+                <a:cs typeface="Calibri"/>
               </a:defRPr>
             </a:pPr>
             <a:r>
@@ -3718,6 +4361,9 @@
                 <a:solidFill>
                   <a:srgbClr val="152B3A"/>
                 </a:solidFill>
+                <a:latin typeface="Calibri"/>
+                <a:ea typeface="Calibri"/>
+                <a:cs typeface="Calibri"/>
               </a:rPr>
               <a:t>One orbit is roughly a month.</a:t>
             </a:r>
@@ -3740,27 +4386,35 @@
         </p:nvSpPr>
         <p:spPr>
           <a:xfrm xmlns:a="http://schemas.openxmlformats.org/drawingml/2006/main">
-            <a:off x="6572250" y="3333750"/>
-            <a:ext cx="4857750" cy="2524125"/>
-          </a:xfrm>
-          <a:prstGeom xmlns:a="http://schemas.openxmlformats.org/drawingml/2006/main" prst="rect">
-            <a:avLst/>
-          </a:prstGeom>
-          <a:noFill xmlns:a="http://schemas.openxmlformats.org/drawingml/2006/main"/>
-          <a:ln xmlns:a="http://schemas.openxmlformats.org/drawingml/2006/main" w="0">
-            <a:noFill/>
-            <a:prstDash val="solid"/>
-          </a:ln>
-        </p:spPr>
-        <p:txBody>
-          <a:bodyPr xmlns:a="http://schemas.openxmlformats.org/drawingml/2006/main" lIns="0" tIns="0" rIns="0" bIns="0" anchor="ctr"/>
-          <a:lstStyle xmlns:a="http://schemas.openxmlformats.org/drawingml/2006/main"/>
-          <a:p xmlns:a="http://schemas.openxmlformats.org/drawingml/2006/main">
-            <a:pPr>
+            <a:off x="6381750" y="2981325"/>
+            <a:ext cx="5200650" cy="2714625"/>
+          </a:xfrm>
+          <a:prstGeom xmlns:a="http://schemas.openxmlformats.org/drawingml/2006/main" prst="rect">
+            <a:avLst/>
+          </a:prstGeom>
+          <a:solidFill xmlns:a="http://schemas.openxmlformats.org/drawingml/2006/main">
+            <a:srgbClr val="F0EBE3"/>
+          </a:solidFill>
+          <a:ln xmlns:a="http://schemas.openxmlformats.org/drawingml/2006/main" w="0">
+            <a:noFill/>
+            <a:prstDash val="solid"/>
+          </a:ln>
+        </p:spPr>
+        <p:txBody>
+          <a:bodyPr xmlns:a="http://schemas.openxmlformats.org/drawingml/2006/main" lIns="228600" tIns="114300" rIns="228600" bIns="114300" anchor="ctr">
+            <a:noAutofit/>
+          </a:bodyPr>
+          <a:lstStyle xmlns:a="http://schemas.openxmlformats.org/drawingml/2006/main"/>
+          <a:p xmlns:a="http://schemas.openxmlformats.org/drawingml/2006/main">
+            <a:pPr algn="l">
+              <a:buNone/>
               <a:defRPr sz="2400" b="0">
                 <a:solidFill>
                   <a:srgbClr val="152B3A"/>
                 </a:solidFill>
+                <a:latin typeface="Calibri"/>
+                <a:ea typeface="Calibri"/>
+                <a:cs typeface="Calibri"/>
               </a:defRPr>
             </a:pPr>
             <a:r>
@@ -3768,16 +4422,23 @@
                 <a:solidFill>
                   <a:srgbClr val="152B3A"/>
                 </a:solidFill>
+                <a:latin typeface="Calibri"/>
+                <a:ea typeface="Calibri"/>
+                <a:cs typeface="Calibri"/>
               </a:rPr>
               <a:t>It makes its own visible light.</a:t>
             </a:r>
           </a:p>
           <a:p xmlns:a="http://schemas.openxmlformats.org/drawingml/2006/main">
-            <a:pPr>
+            <a:pPr algn="l">
+              <a:buNone/>
               <a:defRPr sz="2400" b="0">
                 <a:solidFill>
                   <a:srgbClr val="152B3A"/>
                 </a:solidFill>
+                <a:latin typeface="Calibri"/>
+                <a:ea typeface="Calibri"/>
+                <a:cs typeface="Calibri"/>
               </a:defRPr>
             </a:pPr>
             <a:r>
@@ -3785,16 +4446,23 @@
                 <a:solidFill>
                   <a:srgbClr val="152B3A"/>
                 </a:solidFill>
+                <a:latin typeface="Calibri"/>
+                <a:ea typeface="Calibri"/>
+                <a:cs typeface="Calibri"/>
               </a:rPr>
               <a:t>Earth's shadow causes phases.</a:t>
             </a:r>
           </a:p>
           <a:p xmlns:a="http://schemas.openxmlformats.org/drawingml/2006/main">
-            <a:pPr>
+            <a:pPr algn="l">
+              <a:buNone/>
               <a:defRPr sz="2400" b="0">
                 <a:solidFill>
                   <a:srgbClr val="152B3A"/>
                 </a:solidFill>
+                <a:latin typeface="Calibri"/>
+                <a:ea typeface="Calibri"/>
+                <a:cs typeface="Calibri"/>
               </a:defRPr>
             </a:pPr>
             <a:r>
@@ -3802,6 +4470,9 @@
                 <a:solidFill>
                   <a:srgbClr val="152B3A"/>
                 </a:solidFill>
+                <a:latin typeface="Calibri"/>
+                <a:ea typeface="Calibri"/>
+                <a:cs typeface="Calibri"/>
               </a:rPr>
               <a:t>It is only visible at night.</a:t>
             </a:r>
@@ -3824,7 +4495,7 @@
     <p:bg>
       <p:bgPr>
         <a:solidFill xmlns:a="http://schemas.openxmlformats.org/drawingml/2006/main">
-          <a:srgbClr val="F5F1E8"/>
+          <a:srgbClr val="FAF9F5"/>
         </a:solidFill>
       </p:bgPr>
     </p:bg>
@@ -3853,8 +4524,8 @@
         </p:nvSpPr>
         <p:spPr>
           <a:xfrm xmlns:a="http://schemas.openxmlformats.org/drawingml/2006/main">
-            <a:off x="609600" y="552450"/>
-            <a:ext cx="781050" cy="57150"/>
+            <a:off x="609600" y="733425"/>
+            <a:ext cx="781050" cy="38100"/>
           </a:xfrm>
           <a:prstGeom xmlns:a="http://schemas.openxmlformats.org/drawingml/2006/main" prst="rect">
             <a:avLst/>
@@ -3884,34 +4555,43 @@
         </p:nvSpPr>
         <p:spPr>
           <a:xfrm xmlns:a="http://schemas.openxmlformats.org/drawingml/2006/main">
-            <a:off x="609600" y="762000"/>
-            <a:ext cx="8572500" cy="285750"/>
-          </a:xfrm>
-          <a:prstGeom xmlns:a="http://schemas.openxmlformats.org/drawingml/2006/main" prst="rect">
-            <a:avLst/>
-          </a:prstGeom>
-          <a:noFill xmlns:a="http://schemas.openxmlformats.org/drawingml/2006/main"/>
-          <a:ln xmlns:a="http://schemas.openxmlformats.org/drawingml/2006/main" w="0">
-            <a:noFill/>
-            <a:prstDash val="solid"/>
-          </a:ln>
-        </p:spPr>
-        <p:txBody>
-          <a:bodyPr xmlns:a="http://schemas.openxmlformats.org/drawingml/2006/main" lIns="0" tIns="0" rIns="0" bIns="0" anchor="ctr"/>
-          <a:lstStyle xmlns:a="http://schemas.openxmlformats.org/drawingml/2006/main"/>
-          <a:p xmlns:a="http://schemas.openxmlformats.org/drawingml/2006/main">
-            <a:pPr>
-              <a:defRPr sz="1500" b="1">
+            <a:off x="609600" y="342900"/>
+            <a:ext cx="9334500" cy="304800"/>
+          </a:xfrm>
+          <a:prstGeom xmlns:a="http://schemas.openxmlformats.org/drawingml/2006/main" prst="rect">
+            <a:avLst/>
+          </a:prstGeom>
+          <a:noFill xmlns:a="http://schemas.openxmlformats.org/drawingml/2006/main"/>
+          <a:ln xmlns:a="http://schemas.openxmlformats.org/drawingml/2006/main" w="0">
+            <a:noFill/>
+            <a:prstDash val="solid"/>
+          </a:ln>
+        </p:spPr>
+        <p:txBody>
+          <a:bodyPr xmlns:a="http://schemas.openxmlformats.org/drawingml/2006/main" lIns="0" tIns="0" rIns="0" bIns="0" anchor="ctr">
+            <a:noAutofit/>
+          </a:bodyPr>
+          <a:lstStyle xmlns:a="http://schemas.openxmlformats.org/drawingml/2006/main"/>
+          <a:p xmlns:a="http://schemas.openxmlformats.org/drawingml/2006/main">
+            <a:pPr algn="l">
+              <a:buNone/>
+              <a:defRPr sz="1350" b="1">
                 <a:solidFill>
                   <a:srgbClr val="28685E"/>
                 </a:solidFill>
-              </a:defRPr>
-            </a:pPr>
-            <a:r>
-              <a:rPr sz="1500" b="1">
+                <a:latin typeface="Calibri"/>
+                <a:ea typeface="Calibri"/>
+                <a:cs typeface="Calibri"/>
+              </a:defRPr>
+            </a:pPr>
+            <a:r>
+              <a:rPr sz="1350" b="1">
                 <a:solidFill>
                   <a:srgbClr val="28685E"/>
                 </a:solidFill>
+                <a:latin typeface="Calibri"/>
+                <a:ea typeface="Calibri"/>
+                <a:cs typeface="Calibri"/>
               </a:rPr>
               <a:t>MADE BY MATT  /  GROW SCIENCE</a:t>
             </a:r>
@@ -3934,34 +4614,43 @@
         </p:nvSpPr>
         <p:spPr>
           <a:xfrm xmlns:a="http://schemas.openxmlformats.org/drawingml/2006/main">
-            <a:off x="609600" y="1352550"/>
-            <a:ext cx="10972800" cy="952500"/>
-          </a:xfrm>
-          <a:prstGeom xmlns:a="http://schemas.openxmlformats.org/drawingml/2006/main" prst="rect">
-            <a:avLst/>
-          </a:prstGeom>
-          <a:noFill xmlns:a="http://schemas.openxmlformats.org/drawingml/2006/main"/>
-          <a:ln xmlns:a="http://schemas.openxmlformats.org/drawingml/2006/main" w="0">
-            <a:noFill/>
-            <a:prstDash val="solid"/>
-          </a:ln>
-        </p:spPr>
-        <p:txBody>
-          <a:bodyPr xmlns:a="http://schemas.openxmlformats.org/drawingml/2006/main" lIns="0" tIns="0" rIns="0" bIns="0" anchor="ctr"/>
-          <a:lstStyle xmlns:a="http://schemas.openxmlformats.org/drawingml/2006/main"/>
-          <a:p xmlns:a="http://schemas.openxmlformats.org/drawingml/2006/main">
-            <a:pPr>
-              <a:defRPr sz="3750" b="1">
-                <a:solidFill>
-                  <a:srgbClr val="152B3A"/>
-                </a:solidFill>
-              </a:defRPr>
-            </a:pPr>
-            <a:r>
-              <a:rPr sz="3750" b="1">
-                <a:solidFill>
-                  <a:srgbClr val="152B3A"/>
-                </a:solidFill>
+            <a:off x="609600" y="990600"/>
+            <a:ext cx="10972800" cy="1000125"/>
+          </a:xfrm>
+          <a:prstGeom xmlns:a="http://schemas.openxmlformats.org/drawingml/2006/main" prst="rect">
+            <a:avLst/>
+          </a:prstGeom>
+          <a:noFill xmlns:a="http://schemas.openxmlformats.org/drawingml/2006/main"/>
+          <a:ln xmlns:a="http://schemas.openxmlformats.org/drawingml/2006/main" w="0">
+            <a:noFill/>
+            <a:prstDash val="solid"/>
+          </a:ln>
+        </p:spPr>
+        <p:txBody>
+          <a:bodyPr xmlns:a="http://schemas.openxmlformats.org/drawingml/2006/main" lIns="0" tIns="0" rIns="0" bIns="0" anchor="ctr">
+            <a:noAutofit/>
+          </a:bodyPr>
+          <a:lstStyle xmlns:a="http://schemas.openxmlformats.org/drawingml/2006/main"/>
+          <a:p xmlns:a="http://schemas.openxmlformats.org/drawingml/2006/main">
+            <a:pPr algn="l">
+              <a:buNone/>
+              <a:defRPr sz="3675" b="1">
+                <a:solidFill>
+                  <a:srgbClr val="152B3A"/>
+                </a:solidFill>
+                <a:latin typeface="Calibri"/>
+                <a:ea typeface="Calibri"/>
+                <a:cs typeface="Calibri"/>
+              </a:defRPr>
+            </a:pPr>
+            <a:r>
+              <a:rPr sz="3675" b="1">
+                <a:solidFill>
+                  <a:srgbClr val="152B3A"/>
+                </a:solidFill>
+                <a:latin typeface="Calibri"/>
+                <a:ea typeface="Calibri"/>
+                <a:cs typeface="Calibri"/>
               </a:rPr>
               <a:t>A complete model answer</a:t>
             </a:r>
@@ -3984,14 +4673,14 @@
         </p:nvSpPr>
         <p:spPr>
           <a:xfrm xmlns:a="http://schemas.openxmlformats.org/drawingml/2006/main">
-            <a:off x="609600" y="6219825"/>
+            <a:off x="609600" y="6191250"/>
             <a:ext cx="10972800" cy="9525"/>
           </a:xfrm>
           <a:prstGeom xmlns:a="http://schemas.openxmlformats.org/drawingml/2006/main" prst="rect">
             <a:avLst/>
           </a:prstGeom>
           <a:solidFill xmlns:a="http://schemas.openxmlformats.org/drawingml/2006/main">
-            <a:srgbClr val="DCE7DD"/>
+            <a:srgbClr val="CEDBD3"/>
           </a:solidFill>
           <a:ln xmlns:a="http://schemas.openxmlformats.org/drawingml/2006/main" w="0">
             <a:noFill/>
@@ -4015,34 +4704,43 @@
         </p:nvSpPr>
         <p:spPr>
           <a:xfrm xmlns:a="http://schemas.openxmlformats.org/drawingml/2006/main">
-            <a:off x="609600" y="6381750"/>
-            <a:ext cx="9906000" cy="228600"/>
-          </a:xfrm>
-          <a:prstGeom xmlns:a="http://schemas.openxmlformats.org/drawingml/2006/main" prst="rect">
-            <a:avLst/>
-          </a:prstGeom>
-          <a:noFill xmlns:a="http://schemas.openxmlformats.org/drawingml/2006/main"/>
-          <a:ln xmlns:a="http://schemas.openxmlformats.org/drawingml/2006/main" w="0">
-            <a:noFill/>
-            <a:prstDash val="solid"/>
-          </a:ln>
-        </p:spPr>
-        <p:txBody>
-          <a:bodyPr xmlns:a="http://schemas.openxmlformats.org/drawingml/2006/main" lIns="0" tIns="0" rIns="0" bIns="0" anchor="ctr"/>
-          <a:lstStyle xmlns:a="http://schemas.openxmlformats.org/drawingml/2006/main"/>
-          <a:p xmlns:a="http://schemas.openxmlformats.org/drawingml/2006/main">
-            <a:pPr>
-              <a:defRPr sz="1275" b="0">
+            <a:off x="609600" y="6419850"/>
+            <a:ext cx="9525000" cy="219075"/>
+          </a:xfrm>
+          <a:prstGeom xmlns:a="http://schemas.openxmlformats.org/drawingml/2006/main" prst="rect">
+            <a:avLst/>
+          </a:prstGeom>
+          <a:noFill xmlns:a="http://schemas.openxmlformats.org/drawingml/2006/main"/>
+          <a:ln xmlns:a="http://schemas.openxmlformats.org/drawingml/2006/main" w="0">
+            <a:noFill/>
+            <a:prstDash val="solid"/>
+          </a:ln>
+        </p:spPr>
+        <p:txBody>
+          <a:bodyPr xmlns:a="http://schemas.openxmlformats.org/drawingml/2006/main" lIns="0" tIns="0" rIns="0" bIns="0" anchor="ctr">
+            <a:noAutofit/>
+          </a:bodyPr>
+          <a:lstStyle xmlns:a="http://schemas.openxmlformats.org/drawingml/2006/main"/>
+          <a:p xmlns:a="http://schemas.openxmlformats.org/drawingml/2006/main">
+            <a:pPr algn="l">
+              <a:buNone/>
+              <a:defRPr sz="1200" b="0">
                 <a:solidFill>
                   <a:srgbClr val="50616B"/>
                 </a:solidFill>
-              </a:defRPr>
-            </a:pPr>
-            <a:r>
-              <a:rPr sz="1275" b="0">
+                <a:latin typeface="Calibri"/>
+                <a:ea typeface="Calibri"/>
+                <a:cs typeface="Calibri"/>
+              </a:defRPr>
+            </a:pPr>
+            <a:r>
+              <a:rPr sz="1200" b="0">
                 <a:solidFill>
                   <a:srgbClr val="50616B"/>
                 </a:solidFill>
+                <a:latin typeface="Calibri"/>
+                <a:ea typeface="Calibri"/>
+                <a:cs typeface="Calibri"/>
               </a:rPr>
               <a:t>AUTUMN 1  ·  WEEK 7  ·  LESSON A</a:t>
             </a:r>
@@ -4065,27 +4763,33 @@
         </p:nvSpPr>
         <p:spPr>
           <a:xfrm xmlns:a="http://schemas.openxmlformats.org/drawingml/2006/main">
-            <a:off x="11106150" y="6362700"/>
-            <a:ext cx="476250" cy="238125"/>
-          </a:xfrm>
-          <a:prstGeom xmlns:a="http://schemas.openxmlformats.org/drawingml/2006/main" prst="rect">
-            <a:avLst/>
-          </a:prstGeom>
-          <a:noFill xmlns:a="http://schemas.openxmlformats.org/drawingml/2006/main"/>
-          <a:ln xmlns:a="http://schemas.openxmlformats.org/drawingml/2006/main" w="0">
-            <a:noFill/>
-            <a:prstDash val="solid"/>
-          </a:ln>
-        </p:spPr>
-        <p:txBody>
-          <a:bodyPr xmlns:a="http://schemas.openxmlformats.org/drawingml/2006/main" lIns="0" tIns="0" rIns="0" bIns="0" anchor="ctr"/>
-          <a:lstStyle xmlns:a="http://schemas.openxmlformats.org/drawingml/2006/main"/>
-          <a:p xmlns:a="http://schemas.openxmlformats.org/drawingml/2006/main">
-            <a:pPr>
+            <a:off x="11106150" y="6400800"/>
+            <a:ext cx="476250" cy="247650"/>
+          </a:xfrm>
+          <a:prstGeom xmlns:a="http://schemas.openxmlformats.org/drawingml/2006/main" prst="rect">
+            <a:avLst/>
+          </a:prstGeom>
+          <a:noFill xmlns:a="http://schemas.openxmlformats.org/drawingml/2006/main"/>
+          <a:ln xmlns:a="http://schemas.openxmlformats.org/drawingml/2006/main" w="0">
+            <a:noFill/>
+            <a:prstDash val="solid"/>
+          </a:ln>
+        </p:spPr>
+        <p:txBody>
+          <a:bodyPr xmlns:a="http://schemas.openxmlformats.org/drawingml/2006/main" lIns="0" tIns="0" rIns="0" bIns="0" anchor="ctr">
+            <a:noAutofit/>
+          </a:bodyPr>
+          <a:lstStyle xmlns:a="http://schemas.openxmlformats.org/drawingml/2006/main"/>
+          <a:p xmlns:a="http://schemas.openxmlformats.org/drawingml/2006/main">
+            <a:pPr algn="l">
+              <a:buNone/>
               <a:defRPr sz="1350" b="1">
                 <a:solidFill>
                   <a:srgbClr val="28685E"/>
                 </a:solidFill>
+                <a:latin typeface="Calibri"/>
+                <a:ea typeface="Calibri"/>
+                <a:cs typeface="Calibri"/>
               </a:defRPr>
             </a:pPr>
             <a:r>
@@ -4093,6 +4797,9 @@
                 <a:solidFill>
                   <a:srgbClr val="28685E"/>
                 </a:solidFill>
+                <a:latin typeface="Calibri"/>
+                <a:ea typeface="Calibri"/>
+                <a:cs typeface="Calibri"/>
               </a:rPr>
               <a:t>12</a:t>
             </a:r>
@@ -4115,34 +4822,45 @@
         </p:nvSpPr>
         <p:spPr>
           <a:xfrm xmlns:a="http://schemas.openxmlformats.org/drawingml/2006/main">
-            <a:off x="609600" y="2686050"/>
-            <a:ext cx="10858500" cy="1524000"/>
-          </a:xfrm>
-          <a:prstGeom xmlns:a="http://schemas.openxmlformats.org/drawingml/2006/main" prst="rect">
-            <a:avLst/>
-          </a:prstGeom>
-          <a:noFill xmlns:a="http://schemas.openxmlformats.org/drawingml/2006/main"/>
-          <a:ln xmlns:a="http://schemas.openxmlformats.org/drawingml/2006/main" w="0">
-            <a:noFill/>
-            <a:prstDash val="solid"/>
-          </a:ln>
-        </p:spPr>
-        <p:txBody>
-          <a:bodyPr xmlns:a="http://schemas.openxmlformats.org/drawingml/2006/main" lIns="0" tIns="0" rIns="0" bIns="0" anchor="ctr"/>
-          <a:lstStyle xmlns:a="http://schemas.openxmlformats.org/drawingml/2006/main"/>
-          <a:p xmlns:a="http://schemas.openxmlformats.org/drawingml/2006/main">
-            <a:pPr>
-              <a:defRPr sz="2925" b="1">
+            <a:off x="457200" y="2190750"/>
+            <a:ext cx="11277600" cy="2143125"/>
+          </a:xfrm>
+          <a:prstGeom xmlns:a="http://schemas.openxmlformats.org/drawingml/2006/main" prst="rect">
+            <a:avLst/>
+          </a:prstGeom>
+          <a:solidFill xmlns:a="http://schemas.openxmlformats.org/drawingml/2006/main">
+            <a:srgbClr val="E7EFE9"/>
+          </a:solidFill>
+          <a:ln xmlns:a="http://schemas.openxmlformats.org/drawingml/2006/main" w="0">
+            <a:noFill/>
+            <a:prstDash val="solid"/>
+          </a:ln>
+        </p:spPr>
+        <p:txBody>
+          <a:bodyPr xmlns:a="http://schemas.openxmlformats.org/drawingml/2006/main" lIns="152400" tIns="114300" rIns="152400" bIns="114300" anchor="ctr">
+            <a:noAutofit/>
+          </a:bodyPr>
+          <a:lstStyle xmlns:a="http://schemas.openxmlformats.org/drawingml/2006/main"/>
+          <a:p xmlns:a="http://schemas.openxmlformats.org/drawingml/2006/main">
+            <a:pPr algn="l">
+              <a:buNone/>
+              <a:defRPr sz="3075" b="1">
                 <a:solidFill>
                   <a:srgbClr val="28685E"/>
                 </a:solidFill>
-              </a:defRPr>
-            </a:pPr>
-            <a:r>
-              <a:rPr sz="2925" b="1">
+                <a:latin typeface="Calibri"/>
+                <a:ea typeface="Calibri"/>
+                <a:cs typeface="Calibri"/>
+              </a:defRPr>
+            </a:pPr>
+            <a:r>
+              <a:rPr sz="3075" b="1">
                 <a:solidFill>
                   <a:srgbClr val="28685E"/>
                 </a:solidFill>
+                <a:latin typeface="Calibri"/>
+                <a:ea typeface="Calibri"/>
+                <a:cs typeface="Calibri"/>
               </a:rPr>
               <a:t>The Moon reflects sunlight. As it orbits Earth, our view of the lit half changes.</a:t>
             </a:r>
@@ -4165,34 +4883,43 @@
         </p:nvSpPr>
         <p:spPr>
           <a:xfrm xmlns:a="http://schemas.openxmlformats.org/drawingml/2006/main">
-            <a:off x="609600" y="4552950"/>
-            <a:ext cx="10858500" cy="1285875"/>
-          </a:xfrm>
-          <a:prstGeom xmlns:a="http://schemas.openxmlformats.org/drawingml/2006/main" prst="rect">
-            <a:avLst/>
-          </a:prstGeom>
-          <a:noFill xmlns:a="http://schemas.openxmlformats.org/drawingml/2006/main"/>
-          <a:ln xmlns:a="http://schemas.openxmlformats.org/drawingml/2006/main" w="0">
-            <a:noFill/>
-            <a:prstDash val="solid"/>
-          </a:ln>
-        </p:spPr>
-        <p:txBody>
-          <a:bodyPr xmlns:a="http://schemas.openxmlformats.org/drawingml/2006/main" lIns="0" tIns="0" rIns="0" bIns="0" anchor="ctr"/>
-          <a:lstStyle xmlns:a="http://schemas.openxmlformats.org/drawingml/2006/main"/>
-          <a:p xmlns:a="http://schemas.openxmlformats.org/drawingml/2006/main">
-            <a:pPr>
-              <a:defRPr sz="2700" b="0">
-                <a:solidFill>
-                  <a:srgbClr val="152B3A"/>
-                </a:solidFill>
-              </a:defRPr>
-            </a:pPr>
-            <a:r>
-              <a:rPr sz="2700" b="0">
-                <a:solidFill>
-                  <a:srgbClr val="152B3A"/>
-                </a:solidFill>
+            <a:off x="609600" y="4438650"/>
+            <a:ext cx="10972800" cy="1257300"/>
+          </a:xfrm>
+          <a:prstGeom xmlns:a="http://schemas.openxmlformats.org/drawingml/2006/main" prst="rect">
+            <a:avLst/>
+          </a:prstGeom>
+          <a:noFill xmlns:a="http://schemas.openxmlformats.org/drawingml/2006/main"/>
+          <a:ln xmlns:a="http://schemas.openxmlformats.org/drawingml/2006/main" w="0">
+            <a:noFill/>
+            <a:prstDash val="solid"/>
+          </a:ln>
+        </p:spPr>
+        <p:txBody>
+          <a:bodyPr xmlns:a="http://schemas.openxmlformats.org/drawingml/2006/main" lIns="0" tIns="0" rIns="0" bIns="0" anchor="ctr">
+            <a:noAutofit/>
+          </a:bodyPr>
+          <a:lstStyle xmlns:a="http://schemas.openxmlformats.org/drawingml/2006/main"/>
+          <a:p xmlns:a="http://schemas.openxmlformats.org/drawingml/2006/main">
+            <a:pPr algn="l">
+              <a:buNone/>
+              <a:defRPr sz="2550" b="0">
+                <a:solidFill>
+                  <a:srgbClr val="152B3A"/>
+                </a:solidFill>
+                <a:latin typeface="Calibri"/>
+                <a:ea typeface="Calibri"/>
+                <a:cs typeface="Calibri"/>
+              </a:defRPr>
+            </a:pPr>
+            <a:r>
+              <a:rPr sz="2550" b="0">
+                <a:solidFill>
+                  <a:srgbClr val="152B3A"/>
+                </a:solidFill>
+                <a:latin typeface="Calibri"/>
+                <a:ea typeface="Calibri"/>
+                <a:cs typeface="Calibri"/>
               </a:rPr>
               <a:t>Ordinary phases are not Earth's shadow.</a:t>
             </a:r>
@@ -4215,7 +4942,7 @@
     <p:bg>
       <p:bgPr>
         <a:solidFill xmlns:a="http://schemas.openxmlformats.org/drawingml/2006/main">
-          <a:srgbClr val="F5F1E8"/>
+          <a:srgbClr val="FAF9F5"/>
         </a:solidFill>
       </p:bgPr>
     </p:bg>
@@ -4244,8 +4971,8 @@
         </p:nvSpPr>
         <p:spPr>
           <a:xfrm xmlns:a="http://schemas.openxmlformats.org/drawingml/2006/main">
-            <a:off x="609600" y="552450"/>
-            <a:ext cx="781050" cy="57150"/>
+            <a:off x="609600" y="733425"/>
+            <a:ext cx="781050" cy="38100"/>
           </a:xfrm>
           <a:prstGeom xmlns:a="http://schemas.openxmlformats.org/drawingml/2006/main" prst="rect">
             <a:avLst/>
@@ -4275,34 +5002,43 @@
         </p:nvSpPr>
         <p:spPr>
           <a:xfrm xmlns:a="http://schemas.openxmlformats.org/drawingml/2006/main">
-            <a:off x="609600" y="762000"/>
-            <a:ext cx="8572500" cy="285750"/>
-          </a:xfrm>
-          <a:prstGeom xmlns:a="http://schemas.openxmlformats.org/drawingml/2006/main" prst="rect">
-            <a:avLst/>
-          </a:prstGeom>
-          <a:noFill xmlns:a="http://schemas.openxmlformats.org/drawingml/2006/main"/>
-          <a:ln xmlns:a="http://schemas.openxmlformats.org/drawingml/2006/main" w="0">
-            <a:noFill/>
-            <a:prstDash val="solid"/>
-          </a:ln>
-        </p:spPr>
-        <p:txBody>
-          <a:bodyPr xmlns:a="http://schemas.openxmlformats.org/drawingml/2006/main" lIns="0" tIns="0" rIns="0" bIns="0" anchor="ctr"/>
-          <a:lstStyle xmlns:a="http://schemas.openxmlformats.org/drawingml/2006/main"/>
-          <a:p xmlns:a="http://schemas.openxmlformats.org/drawingml/2006/main">
-            <a:pPr>
-              <a:defRPr sz="1500" b="1">
+            <a:off x="609600" y="342900"/>
+            <a:ext cx="9334500" cy="304800"/>
+          </a:xfrm>
+          <a:prstGeom xmlns:a="http://schemas.openxmlformats.org/drawingml/2006/main" prst="rect">
+            <a:avLst/>
+          </a:prstGeom>
+          <a:noFill xmlns:a="http://schemas.openxmlformats.org/drawingml/2006/main"/>
+          <a:ln xmlns:a="http://schemas.openxmlformats.org/drawingml/2006/main" w="0">
+            <a:noFill/>
+            <a:prstDash val="solid"/>
+          </a:ln>
+        </p:spPr>
+        <p:txBody>
+          <a:bodyPr xmlns:a="http://schemas.openxmlformats.org/drawingml/2006/main" lIns="0" tIns="0" rIns="0" bIns="0" anchor="ctr">
+            <a:noAutofit/>
+          </a:bodyPr>
+          <a:lstStyle xmlns:a="http://schemas.openxmlformats.org/drawingml/2006/main"/>
+          <a:p xmlns:a="http://schemas.openxmlformats.org/drawingml/2006/main">
+            <a:pPr algn="l">
+              <a:buNone/>
+              <a:defRPr sz="1350" b="1">
                 <a:solidFill>
                   <a:srgbClr val="28685E"/>
                 </a:solidFill>
-              </a:defRPr>
-            </a:pPr>
-            <a:r>
-              <a:rPr sz="1500" b="1">
+                <a:latin typeface="Calibri"/>
+                <a:ea typeface="Calibri"/>
+                <a:cs typeface="Calibri"/>
+              </a:defRPr>
+            </a:pPr>
+            <a:r>
+              <a:rPr sz="1350" b="1">
                 <a:solidFill>
                   <a:srgbClr val="28685E"/>
                 </a:solidFill>
+                <a:latin typeface="Calibri"/>
+                <a:ea typeface="Calibri"/>
+                <a:cs typeface="Calibri"/>
               </a:rPr>
               <a:t>MADE BY MATT  /  GROW SCIENCE</a:t>
             </a:r>
@@ -4325,34 +5061,43 @@
         </p:nvSpPr>
         <p:spPr>
           <a:xfrm xmlns:a="http://schemas.openxmlformats.org/drawingml/2006/main">
-            <a:off x="609600" y="1352550"/>
-            <a:ext cx="10972800" cy="952500"/>
-          </a:xfrm>
-          <a:prstGeom xmlns:a="http://schemas.openxmlformats.org/drawingml/2006/main" prst="rect">
-            <a:avLst/>
-          </a:prstGeom>
-          <a:noFill xmlns:a="http://schemas.openxmlformats.org/drawingml/2006/main"/>
-          <a:ln xmlns:a="http://schemas.openxmlformats.org/drawingml/2006/main" w="0">
-            <a:noFill/>
-            <a:prstDash val="solid"/>
-          </a:ln>
-        </p:spPr>
-        <p:txBody>
-          <a:bodyPr xmlns:a="http://schemas.openxmlformats.org/drawingml/2006/main" lIns="0" tIns="0" rIns="0" bIns="0" anchor="ctr"/>
-          <a:lstStyle xmlns:a="http://schemas.openxmlformats.org/drawingml/2006/main"/>
-          <a:p xmlns:a="http://schemas.openxmlformats.org/drawingml/2006/main">
-            <a:pPr>
-              <a:defRPr sz="3750" b="1">
-                <a:solidFill>
-                  <a:srgbClr val="152B3A"/>
-                </a:solidFill>
-              </a:defRPr>
-            </a:pPr>
-            <a:r>
-              <a:rPr sz="3750" b="1">
-                <a:solidFill>
-                  <a:srgbClr val="152B3A"/>
-                </a:solidFill>
+            <a:off x="609600" y="990600"/>
+            <a:ext cx="10972800" cy="1000125"/>
+          </a:xfrm>
+          <a:prstGeom xmlns:a="http://schemas.openxmlformats.org/drawingml/2006/main" prst="rect">
+            <a:avLst/>
+          </a:prstGeom>
+          <a:noFill xmlns:a="http://schemas.openxmlformats.org/drawingml/2006/main"/>
+          <a:ln xmlns:a="http://schemas.openxmlformats.org/drawingml/2006/main" w="0">
+            <a:noFill/>
+            <a:prstDash val="solid"/>
+          </a:ln>
+        </p:spPr>
+        <p:txBody>
+          <a:bodyPr xmlns:a="http://schemas.openxmlformats.org/drawingml/2006/main" lIns="0" tIns="0" rIns="0" bIns="0" anchor="ctr">
+            <a:noAutofit/>
+          </a:bodyPr>
+          <a:lstStyle xmlns:a="http://schemas.openxmlformats.org/drawingml/2006/main"/>
+          <a:p xmlns:a="http://schemas.openxmlformats.org/drawingml/2006/main">
+            <a:pPr algn="l">
+              <a:buNone/>
+              <a:defRPr sz="3675" b="1">
+                <a:solidFill>
+                  <a:srgbClr val="152B3A"/>
+                </a:solidFill>
+                <a:latin typeface="Calibri"/>
+                <a:ea typeface="Calibri"/>
+                <a:cs typeface="Calibri"/>
+              </a:defRPr>
+            </a:pPr>
+            <a:r>
+              <a:rPr sz="3675" b="1">
+                <a:solidFill>
+                  <a:srgbClr val="152B3A"/>
+                </a:solidFill>
+                <a:latin typeface="Calibri"/>
+                <a:ea typeface="Calibri"/>
+                <a:cs typeface="Calibri"/>
               </a:rPr>
               <a:t>Keep your explanation for Tuesday</a:t>
             </a:r>
@@ -4375,14 +5120,14 @@
         </p:nvSpPr>
         <p:spPr>
           <a:xfrm xmlns:a="http://schemas.openxmlformats.org/drawingml/2006/main">
-            <a:off x="609600" y="6219825"/>
+            <a:off x="609600" y="6191250"/>
             <a:ext cx="10972800" cy="9525"/>
           </a:xfrm>
           <a:prstGeom xmlns:a="http://schemas.openxmlformats.org/drawingml/2006/main" prst="rect">
             <a:avLst/>
           </a:prstGeom>
           <a:solidFill xmlns:a="http://schemas.openxmlformats.org/drawingml/2006/main">
-            <a:srgbClr val="DCE7DD"/>
+            <a:srgbClr val="CEDBD3"/>
           </a:solidFill>
           <a:ln xmlns:a="http://schemas.openxmlformats.org/drawingml/2006/main" w="0">
             <a:noFill/>
@@ -4406,34 +5151,43 @@
         </p:nvSpPr>
         <p:spPr>
           <a:xfrm xmlns:a="http://schemas.openxmlformats.org/drawingml/2006/main">
-            <a:off x="609600" y="6381750"/>
-            <a:ext cx="9906000" cy="228600"/>
-          </a:xfrm>
-          <a:prstGeom xmlns:a="http://schemas.openxmlformats.org/drawingml/2006/main" prst="rect">
-            <a:avLst/>
-          </a:prstGeom>
-          <a:noFill xmlns:a="http://schemas.openxmlformats.org/drawingml/2006/main"/>
-          <a:ln xmlns:a="http://schemas.openxmlformats.org/drawingml/2006/main" w="0">
-            <a:noFill/>
-            <a:prstDash val="solid"/>
-          </a:ln>
-        </p:spPr>
-        <p:txBody>
-          <a:bodyPr xmlns:a="http://schemas.openxmlformats.org/drawingml/2006/main" lIns="0" tIns="0" rIns="0" bIns="0" anchor="ctr"/>
-          <a:lstStyle xmlns:a="http://schemas.openxmlformats.org/drawingml/2006/main"/>
-          <a:p xmlns:a="http://schemas.openxmlformats.org/drawingml/2006/main">
-            <a:pPr>
-              <a:defRPr sz="1275" b="0">
+            <a:off x="609600" y="6419850"/>
+            <a:ext cx="9525000" cy="219075"/>
+          </a:xfrm>
+          <a:prstGeom xmlns:a="http://schemas.openxmlformats.org/drawingml/2006/main" prst="rect">
+            <a:avLst/>
+          </a:prstGeom>
+          <a:noFill xmlns:a="http://schemas.openxmlformats.org/drawingml/2006/main"/>
+          <a:ln xmlns:a="http://schemas.openxmlformats.org/drawingml/2006/main" w="0">
+            <a:noFill/>
+            <a:prstDash val="solid"/>
+          </a:ln>
+        </p:spPr>
+        <p:txBody>
+          <a:bodyPr xmlns:a="http://schemas.openxmlformats.org/drawingml/2006/main" lIns="0" tIns="0" rIns="0" bIns="0" anchor="ctr">
+            <a:noAutofit/>
+          </a:bodyPr>
+          <a:lstStyle xmlns:a="http://schemas.openxmlformats.org/drawingml/2006/main"/>
+          <a:p xmlns:a="http://schemas.openxmlformats.org/drawingml/2006/main">
+            <a:pPr algn="l">
+              <a:buNone/>
+              <a:defRPr sz="1200" b="0">
                 <a:solidFill>
                   <a:srgbClr val="50616B"/>
                 </a:solidFill>
-              </a:defRPr>
-            </a:pPr>
-            <a:r>
-              <a:rPr sz="1275" b="0">
+                <a:latin typeface="Calibri"/>
+                <a:ea typeface="Calibri"/>
+                <a:cs typeface="Calibri"/>
+              </a:defRPr>
+            </a:pPr>
+            <a:r>
+              <a:rPr sz="1200" b="0">
                 <a:solidFill>
                   <a:srgbClr val="50616B"/>
                 </a:solidFill>
+                <a:latin typeface="Calibri"/>
+                <a:ea typeface="Calibri"/>
+                <a:cs typeface="Calibri"/>
               </a:rPr>
               <a:t>AUTUMN 1  ·  WEEK 7  ·  LESSON A</a:t>
             </a:r>
@@ -4456,27 +5210,33 @@
         </p:nvSpPr>
         <p:spPr>
           <a:xfrm xmlns:a="http://schemas.openxmlformats.org/drawingml/2006/main">
-            <a:off x="11106150" y="6362700"/>
-            <a:ext cx="476250" cy="238125"/>
-          </a:xfrm>
-          <a:prstGeom xmlns:a="http://schemas.openxmlformats.org/drawingml/2006/main" prst="rect">
-            <a:avLst/>
-          </a:prstGeom>
-          <a:noFill xmlns:a="http://schemas.openxmlformats.org/drawingml/2006/main"/>
-          <a:ln xmlns:a="http://schemas.openxmlformats.org/drawingml/2006/main" w="0">
-            <a:noFill/>
-            <a:prstDash val="solid"/>
-          </a:ln>
-        </p:spPr>
-        <p:txBody>
-          <a:bodyPr xmlns:a="http://schemas.openxmlformats.org/drawingml/2006/main" lIns="0" tIns="0" rIns="0" bIns="0" anchor="ctr"/>
-          <a:lstStyle xmlns:a="http://schemas.openxmlformats.org/drawingml/2006/main"/>
-          <a:p xmlns:a="http://schemas.openxmlformats.org/drawingml/2006/main">
-            <a:pPr>
+            <a:off x="11106150" y="6400800"/>
+            <a:ext cx="476250" cy="247650"/>
+          </a:xfrm>
+          <a:prstGeom xmlns:a="http://schemas.openxmlformats.org/drawingml/2006/main" prst="rect">
+            <a:avLst/>
+          </a:prstGeom>
+          <a:noFill xmlns:a="http://schemas.openxmlformats.org/drawingml/2006/main"/>
+          <a:ln xmlns:a="http://schemas.openxmlformats.org/drawingml/2006/main" w="0">
+            <a:noFill/>
+            <a:prstDash val="solid"/>
+          </a:ln>
+        </p:spPr>
+        <p:txBody>
+          <a:bodyPr xmlns:a="http://schemas.openxmlformats.org/drawingml/2006/main" lIns="0" tIns="0" rIns="0" bIns="0" anchor="ctr">
+            <a:noAutofit/>
+          </a:bodyPr>
+          <a:lstStyle xmlns:a="http://schemas.openxmlformats.org/drawingml/2006/main"/>
+          <a:p xmlns:a="http://schemas.openxmlformats.org/drawingml/2006/main">
+            <a:pPr algn="l">
+              <a:buNone/>
               <a:defRPr sz="1350" b="1">
                 <a:solidFill>
                   <a:srgbClr val="28685E"/>
                 </a:solidFill>
+                <a:latin typeface="Calibri"/>
+                <a:ea typeface="Calibri"/>
+                <a:cs typeface="Calibri"/>
               </a:defRPr>
             </a:pPr>
             <a:r>
@@ -4484,6 +5244,9 @@
                 <a:solidFill>
                   <a:srgbClr val="28685E"/>
                 </a:solidFill>
+                <a:latin typeface="Calibri"/>
+                <a:ea typeface="Calibri"/>
+                <a:cs typeface="Calibri"/>
               </a:rPr>
               <a:t>13</a:t>
             </a:r>
@@ -4506,34 +5269,43 @@
         </p:nvSpPr>
         <p:spPr>
           <a:xfrm xmlns:a="http://schemas.openxmlformats.org/drawingml/2006/main">
-            <a:off x="609600" y="2619375"/>
-            <a:ext cx="10972800" cy="781050"/>
-          </a:xfrm>
-          <a:prstGeom xmlns:a="http://schemas.openxmlformats.org/drawingml/2006/main" prst="rect">
-            <a:avLst/>
-          </a:prstGeom>
-          <a:noFill xmlns:a="http://schemas.openxmlformats.org/drawingml/2006/main"/>
-          <a:ln xmlns:a="http://schemas.openxmlformats.org/drawingml/2006/main" w="0">
-            <a:noFill/>
-            <a:prstDash val="solid"/>
-          </a:ln>
-        </p:spPr>
-        <p:txBody>
-          <a:bodyPr xmlns:a="http://schemas.openxmlformats.org/drawingml/2006/main" lIns="0" tIns="0" rIns="0" bIns="0" anchor="ctr"/>
-          <a:lstStyle xmlns:a="http://schemas.openxmlformats.org/drawingml/2006/main"/>
-          <a:p xmlns:a="http://schemas.openxmlformats.org/drawingml/2006/main">
-            <a:pPr>
-              <a:defRPr sz="2550" b="0">
-                <a:solidFill>
-                  <a:srgbClr val="152B3A"/>
-                </a:solidFill>
-              </a:defRPr>
-            </a:pPr>
-            <a:r>
-              <a:rPr sz="2550" b="0">
-                <a:solidFill>
-                  <a:srgbClr val="152B3A"/>
-                </a:solidFill>
+            <a:off x="1000125" y="2333625"/>
+            <a:ext cx="10382250" cy="1076325"/>
+          </a:xfrm>
+          <a:prstGeom xmlns:a="http://schemas.openxmlformats.org/drawingml/2006/main" prst="rect">
+            <a:avLst/>
+          </a:prstGeom>
+          <a:noFill xmlns:a="http://schemas.openxmlformats.org/drawingml/2006/main"/>
+          <a:ln xmlns:a="http://schemas.openxmlformats.org/drawingml/2006/main" w="0">
+            <a:noFill/>
+            <a:prstDash val="solid"/>
+          </a:ln>
+        </p:spPr>
+        <p:txBody>
+          <a:bodyPr xmlns:a="http://schemas.openxmlformats.org/drawingml/2006/main" lIns="0" tIns="0" rIns="0" bIns="0" anchor="ctr">
+            <a:noAutofit/>
+          </a:bodyPr>
+          <a:lstStyle xmlns:a="http://schemas.openxmlformats.org/drawingml/2006/main"/>
+          <a:p xmlns:a="http://schemas.openxmlformats.org/drawingml/2006/main">
+            <a:pPr algn="l">
+              <a:buNone/>
+              <a:defRPr sz="2625" b="0">
+                <a:solidFill>
+                  <a:srgbClr val="152B3A"/>
+                </a:solidFill>
+                <a:latin typeface="Calibri"/>
+                <a:ea typeface="Calibri"/>
+                <a:cs typeface="Calibri"/>
+              </a:defRPr>
+            </a:pPr>
+            <a:r>
+              <a:rPr sz="2625" b="0">
+                <a:solidFill>
+                  <a:srgbClr val="152B3A"/>
+                </a:solidFill>
+                <a:latin typeface="Calibri"/>
+                <a:ea typeface="Calibri"/>
+                <a:cs typeface="Calibri"/>
               </a:rPr>
               <a:t>Keep your claim-sort and corrected explanation.</a:t>
             </a:r>
@@ -4556,34 +5328,43 @@
         </p:nvSpPr>
         <p:spPr>
           <a:xfrm xmlns:a="http://schemas.openxmlformats.org/drawingml/2006/main">
-            <a:off x="609600" y="3476625"/>
-            <a:ext cx="10972800" cy="781050"/>
-          </a:xfrm>
-          <a:prstGeom xmlns:a="http://schemas.openxmlformats.org/drawingml/2006/main" prst="rect">
-            <a:avLst/>
-          </a:prstGeom>
-          <a:noFill xmlns:a="http://schemas.openxmlformats.org/drawingml/2006/main"/>
-          <a:ln xmlns:a="http://schemas.openxmlformats.org/drawingml/2006/main" w="0">
-            <a:noFill/>
-            <a:prstDash val="solid"/>
-          </a:ln>
-        </p:spPr>
-        <p:txBody>
-          <a:bodyPr xmlns:a="http://schemas.openxmlformats.org/drawingml/2006/main" lIns="0" tIns="0" rIns="0" bIns="0" anchor="ctr"/>
-          <a:lstStyle xmlns:a="http://schemas.openxmlformats.org/drawingml/2006/main"/>
-          <a:p xmlns:a="http://schemas.openxmlformats.org/drawingml/2006/main">
-            <a:pPr>
-              <a:defRPr sz="2550" b="0">
-                <a:solidFill>
-                  <a:srgbClr val="152B3A"/>
-                </a:solidFill>
-              </a:defRPr>
-            </a:pPr>
-            <a:r>
-              <a:rPr sz="2550" b="0">
-                <a:solidFill>
-                  <a:srgbClr val="152B3A"/>
-                </a:solidFill>
+            <a:off x="1000125" y="3467100"/>
+            <a:ext cx="10382250" cy="1076325"/>
+          </a:xfrm>
+          <a:prstGeom xmlns:a="http://schemas.openxmlformats.org/drawingml/2006/main" prst="rect">
+            <a:avLst/>
+          </a:prstGeom>
+          <a:noFill xmlns:a="http://schemas.openxmlformats.org/drawingml/2006/main"/>
+          <a:ln xmlns:a="http://schemas.openxmlformats.org/drawingml/2006/main" w="0">
+            <a:noFill/>
+            <a:prstDash val="solid"/>
+          </a:ln>
+        </p:spPr>
+        <p:txBody>
+          <a:bodyPr xmlns:a="http://schemas.openxmlformats.org/drawingml/2006/main" lIns="0" tIns="0" rIns="0" bIns="0" anchor="ctr">
+            <a:noAutofit/>
+          </a:bodyPr>
+          <a:lstStyle xmlns:a="http://schemas.openxmlformats.org/drawingml/2006/main"/>
+          <a:p xmlns:a="http://schemas.openxmlformats.org/drawingml/2006/main">
+            <a:pPr algn="l">
+              <a:buNone/>
+              <a:defRPr sz="2625" b="0">
+                <a:solidFill>
+                  <a:srgbClr val="152B3A"/>
+                </a:solidFill>
+                <a:latin typeface="Calibri"/>
+                <a:ea typeface="Calibri"/>
+                <a:cs typeface="Calibri"/>
+              </a:defRPr>
+            </a:pPr>
+            <a:r>
+              <a:rPr sz="2625" b="0">
+                <a:solidFill>
+                  <a:srgbClr val="152B3A"/>
+                </a:solidFill>
+                <a:latin typeface="Calibri"/>
+                <a:ea typeface="Calibri"/>
+                <a:cs typeface="Calibri"/>
               </a:rPr>
               <a:t>Next lesson: test new, half and full views.</a:t>
             </a:r>
@@ -4606,36 +5387,276 @@
         </p:nvSpPr>
         <p:spPr>
           <a:xfrm xmlns:a="http://schemas.openxmlformats.org/drawingml/2006/main">
-            <a:off x="609600" y="4333875"/>
-            <a:ext cx="10972800" cy="781050"/>
-          </a:xfrm>
-          <a:prstGeom xmlns:a="http://schemas.openxmlformats.org/drawingml/2006/main" prst="rect">
-            <a:avLst/>
-          </a:prstGeom>
-          <a:noFill xmlns:a="http://schemas.openxmlformats.org/drawingml/2006/main"/>
-          <a:ln xmlns:a="http://schemas.openxmlformats.org/drawingml/2006/main" w="0">
-            <a:noFill/>
-            <a:prstDash val="solid"/>
-          </a:ln>
-        </p:spPr>
-        <p:txBody>
-          <a:bodyPr xmlns:a="http://schemas.openxmlformats.org/drawingml/2006/main" lIns="0" tIns="0" rIns="0" bIns="0" anchor="ctr"/>
-          <a:lstStyle xmlns:a="http://schemas.openxmlformats.org/drawingml/2006/main"/>
-          <a:p xmlns:a="http://schemas.openxmlformats.org/drawingml/2006/main">
-            <a:pPr>
-              <a:defRPr sz="2550" b="0">
-                <a:solidFill>
-                  <a:srgbClr val="152B3A"/>
-                </a:solidFill>
-              </a:defRPr>
-            </a:pPr>
-            <a:r>
-              <a:rPr sz="2550" b="0">
-                <a:solidFill>
-                  <a:srgbClr val="152B3A"/>
-                </a:solidFill>
+            <a:off x="1000125" y="4600575"/>
+            <a:ext cx="10382250" cy="1076325"/>
+          </a:xfrm>
+          <a:prstGeom xmlns:a="http://schemas.openxmlformats.org/drawingml/2006/main" prst="rect">
+            <a:avLst/>
+          </a:prstGeom>
+          <a:noFill xmlns:a="http://schemas.openxmlformats.org/drawingml/2006/main"/>
+          <a:ln xmlns:a="http://schemas.openxmlformats.org/drawingml/2006/main" w="0">
+            <a:noFill/>
+            <a:prstDash val="solid"/>
+          </a:ln>
+        </p:spPr>
+        <p:txBody>
+          <a:bodyPr xmlns:a="http://schemas.openxmlformats.org/drawingml/2006/main" lIns="0" tIns="0" rIns="0" bIns="0" anchor="ctr">
+            <a:noAutofit/>
+          </a:bodyPr>
+          <a:lstStyle xmlns:a="http://schemas.openxmlformats.org/drawingml/2006/main"/>
+          <a:p xmlns:a="http://schemas.openxmlformats.org/drawingml/2006/main">
+            <a:pPr algn="l">
+              <a:buNone/>
+              <a:defRPr sz="2625" b="0">
+                <a:solidFill>
+                  <a:srgbClr val="152B3A"/>
+                </a:solidFill>
+                <a:latin typeface="Calibri"/>
+                <a:ea typeface="Calibri"/>
+                <a:cs typeface="Calibri"/>
+              </a:defRPr>
+            </a:pPr>
+            <a:r>
+              <a:rPr sz="2625" b="0">
+                <a:solidFill>
+                  <a:srgbClr val="152B3A"/>
+                </a:solidFill>
+                <a:latin typeface="Calibri"/>
+                <a:ea typeface="Calibri"/>
+                <a:cs typeface="Calibri"/>
               </a:rPr>
               <a:t>Choose one view to check again.</a:t>
+            </a:r>
+          </a:p>
+        </p:txBody>
+      </p:sp>
+      <p:sp>
+        <p:nvSpPr>
+          <p:cNvPr id="11" name="cue-0">
+            <a:extLst xmlns:a="http://schemas.openxmlformats.org/drawingml/2006/main">
+              <a:ext uri="{FF2B5EF4-FFF2-40B4-BE49-F238E27FC236}">
+                <a16:creationId xmlns:a16="http://schemas.microsoft.com/office/drawing/2014/main" id="{3AAD9BED-0A1F-4405-98D2-1BC226EDEF75}"/>
+              </a:ext>
+            </a:extLst>
+          </p:cNvPr>
+          <p:cNvSpPr>
+            <a:spLocks xmlns:a="http://schemas.openxmlformats.org/drawingml/2006/main" noGrp="1"/>
+          </p:cNvSpPr>
+          <p:nvPr/>
+        </p:nvSpPr>
+        <p:spPr>
+          <a:xfrm xmlns:a="http://schemas.openxmlformats.org/drawingml/2006/main">
+            <a:off x="609600" y="2362200"/>
+            <a:ext cx="323850" cy="323850"/>
+          </a:xfrm>
+          <a:prstGeom xmlns:a="http://schemas.openxmlformats.org/drawingml/2006/main" prst="rect">
+            <a:avLst/>
+          </a:prstGeom>
+          <a:noFill xmlns:a="http://schemas.openxmlformats.org/drawingml/2006/main"/>
+          <a:ln xmlns:a="http://schemas.openxmlformats.org/drawingml/2006/main" w="0">
+            <a:noFill/>
+          </a:ln>
+        </p:spPr>
+        <p:txBody>
+          <a:bodyPr xmlns:a="http://schemas.openxmlformats.org/drawingml/2006/main" lIns="0" tIns="0" rIns="0" bIns="0" anchor="ctr">
+            <a:noAutofit/>
+          </a:bodyPr>
+          <a:lstStyle xmlns:a="http://schemas.openxmlformats.org/drawingml/2006/main"/>
+          <a:p xmlns:a="http://schemas.openxmlformats.org/drawingml/2006/main">
+            <a:pPr algn="l">
+              <a:defRPr sz="1350" b="1">
+                <a:solidFill>
+                  <a:srgbClr val="28685E"/>
+                </a:solidFill>
+                <a:latin typeface="Calibri"/>
+                <a:ea typeface="Calibri"/>
+                <a:cs typeface="Calibri"/>
+              </a:defRPr>
+            </a:pPr>
+            <a:r>
+              <a:rPr sz="1350" b="1">
+                <a:solidFill>
+                  <a:srgbClr val="28685E"/>
+                </a:solidFill>
+                <a:latin typeface="Calibri"/>
+                <a:ea typeface="Calibri"/>
+                <a:cs typeface="Calibri"/>
+              </a:rPr>
+              <a:t>01</a:t>
+            </a:r>
+          </a:p>
+        </p:txBody>
+      </p:sp>
+      <p:sp>
+        <p:nvSpPr>
+          <p:cNvPr id="12" name="row-rule-0">
+            <a:extLst xmlns:a="http://schemas.openxmlformats.org/drawingml/2006/main">
+              <a:ext uri="{FF2B5EF4-FFF2-40B4-BE49-F238E27FC236}">
+                <a16:creationId xmlns:a16="http://schemas.microsoft.com/office/drawing/2014/main" id="{C2C4C77E-4C83-4AC0-8E46-0A63FE1A16AC}"/>
+              </a:ext>
+            </a:extLst>
+          </p:cNvPr>
+          <p:cNvSpPr>
+            <a:spLocks xmlns:a="http://schemas.openxmlformats.org/drawingml/2006/main" noGrp="1"/>
+          </p:cNvSpPr>
+          <p:nvPr/>
+        </p:nvSpPr>
+        <p:spPr>
+          <a:xfrm xmlns:a="http://schemas.openxmlformats.org/drawingml/2006/main">
+            <a:off x="1000125" y="3419475"/>
+            <a:ext cx="10334625" cy="0"/>
+          </a:xfrm>
+          <a:prstGeom xmlns:a="http://schemas.openxmlformats.org/drawingml/2006/main" prst="line">
+            <a:avLst/>
+          </a:prstGeom>
+          <a:noFill xmlns:a="http://schemas.openxmlformats.org/drawingml/2006/main"/>
+          <a:ln xmlns:a="http://schemas.openxmlformats.org/drawingml/2006/main" w="9525">
+            <a:solidFill>
+              <a:srgbClr val="CEDBD3"/>
+            </a:solidFill>
+          </a:ln>
+        </p:spPr>
+      </p:sp>
+      <p:sp>
+        <p:nvSpPr>
+          <p:cNvPr id="13" name="cue-1">
+            <a:extLst xmlns:a="http://schemas.openxmlformats.org/drawingml/2006/main">
+              <a:ext uri="{FF2B5EF4-FFF2-40B4-BE49-F238E27FC236}">
+                <a16:creationId xmlns:a16="http://schemas.microsoft.com/office/drawing/2014/main" id="{B7659EDD-F37A-4D6B-99EE-59DD856BF4BA}"/>
+              </a:ext>
+            </a:extLst>
+          </p:cNvPr>
+          <p:cNvSpPr>
+            <a:spLocks xmlns:a="http://schemas.openxmlformats.org/drawingml/2006/main" noGrp="1"/>
+          </p:cNvSpPr>
+          <p:nvPr/>
+        </p:nvSpPr>
+        <p:spPr>
+          <a:xfrm xmlns:a="http://schemas.openxmlformats.org/drawingml/2006/main">
+            <a:off x="609600" y="3495675"/>
+            <a:ext cx="323850" cy="323850"/>
+          </a:xfrm>
+          <a:prstGeom xmlns:a="http://schemas.openxmlformats.org/drawingml/2006/main" prst="rect">
+            <a:avLst/>
+          </a:prstGeom>
+          <a:noFill xmlns:a="http://schemas.openxmlformats.org/drawingml/2006/main"/>
+          <a:ln xmlns:a="http://schemas.openxmlformats.org/drawingml/2006/main" w="0">
+            <a:noFill/>
+          </a:ln>
+        </p:spPr>
+        <p:txBody>
+          <a:bodyPr xmlns:a="http://schemas.openxmlformats.org/drawingml/2006/main" lIns="0" tIns="0" rIns="0" bIns="0" anchor="ctr">
+            <a:noAutofit/>
+          </a:bodyPr>
+          <a:lstStyle xmlns:a="http://schemas.openxmlformats.org/drawingml/2006/main"/>
+          <a:p xmlns:a="http://schemas.openxmlformats.org/drawingml/2006/main">
+            <a:pPr algn="l">
+              <a:defRPr sz="1350" b="1">
+                <a:solidFill>
+                  <a:srgbClr val="28685E"/>
+                </a:solidFill>
+                <a:latin typeface="Calibri"/>
+                <a:ea typeface="Calibri"/>
+                <a:cs typeface="Calibri"/>
+              </a:defRPr>
+            </a:pPr>
+            <a:r>
+              <a:rPr sz="1350" b="1">
+                <a:solidFill>
+                  <a:srgbClr val="28685E"/>
+                </a:solidFill>
+                <a:latin typeface="Calibri"/>
+                <a:ea typeface="Calibri"/>
+                <a:cs typeface="Calibri"/>
+              </a:rPr>
+              <a:t>02</a:t>
+            </a:r>
+          </a:p>
+        </p:txBody>
+      </p:sp>
+      <p:sp>
+        <p:nvSpPr>
+          <p:cNvPr id="14" name="row-rule-1">
+            <a:extLst xmlns:a="http://schemas.openxmlformats.org/drawingml/2006/main">
+              <a:ext uri="{FF2B5EF4-FFF2-40B4-BE49-F238E27FC236}">
+                <a16:creationId xmlns:a16="http://schemas.microsoft.com/office/drawing/2014/main" id="{01D2A758-1AC8-4DE3-94AE-66EF8F26B418}"/>
+              </a:ext>
+            </a:extLst>
+          </p:cNvPr>
+          <p:cNvSpPr>
+            <a:spLocks xmlns:a="http://schemas.openxmlformats.org/drawingml/2006/main" noGrp="1"/>
+          </p:cNvSpPr>
+          <p:nvPr/>
+        </p:nvSpPr>
+        <p:spPr>
+          <a:xfrm xmlns:a="http://schemas.openxmlformats.org/drawingml/2006/main">
+            <a:off x="1000125" y="4552950"/>
+            <a:ext cx="10334625" cy="0"/>
+          </a:xfrm>
+          <a:prstGeom xmlns:a="http://schemas.openxmlformats.org/drawingml/2006/main" prst="line">
+            <a:avLst/>
+          </a:prstGeom>
+          <a:noFill xmlns:a="http://schemas.openxmlformats.org/drawingml/2006/main"/>
+          <a:ln xmlns:a="http://schemas.openxmlformats.org/drawingml/2006/main" w="9525">
+            <a:solidFill>
+              <a:srgbClr val="CEDBD3"/>
+            </a:solidFill>
+          </a:ln>
+        </p:spPr>
+      </p:sp>
+      <p:sp>
+        <p:nvSpPr>
+          <p:cNvPr id="15" name="cue-2">
+            <a:extLst xmlns:a="http://schemas.openxmlformats.org/drawingml/2006/main">
+              <a:ext uri="{FF2B5EF4-FFF2-40B4-BE49-F238E27FC236}">
+                <a16:creationId xmlns:a16="http://schemas.microsoft.com/office/drawing/2014/main" id="{0781A9BB-89DE-47C4-AC5B-5E5CFCA14204}"/>
+              </a:ext>
+            </a:extLst>
+          </p:cNvPr>
+          <p:cNvSpPr>
+            <a:spLocks xmlns:a="http://schemas.openxmlformats.org/drawingml/2006/main" noGrp="1"/>
+          </p:cNvSpPr>
+          <p:nvPr/>
+        </p:nvSpPr>
+        <p:spPr>
+          <a:xfrm xmlns:a="http://schemas.openxmlformats.org/drawingml/2006/main">
+            <a:off x="609600" y="4629150"/>
+            <a:ext cx="323850" cy="323850"/>
+          </a:xfrm>
+          <a:prstGeom xmlns:a="http://schemas.openxmlformats.org/drawingml/2006/main" prst="rect">
+            <a:avLst/>
+          </a:prstGeom>
+          <a:noFill xmlns:a="http://schemas.openxmlformats.org/drawingml/2006/main"/>
+          <a:ln xmlns:a="http://schemas.openxmlformats.org/drawingml/2006/main" w="0">
+            <a:noFill/>
+          </a:ln>
+        </p:spPr>
+        <p:txBody>
+          <a:bodyPr xmlns:a="http://schemas.openxmlformats.org/drawingml/2006/main" lIns="0" tIns="0" rIns="0" bIns="0" anchor="ctr">
+            <a:noAutofit/>
+          </a:bodyPr>
+          <a:lstStyle xmlns:a="http://schemas.openxmlformats.org/drawingml/2006/main"/>
+          <a:p xmlns:a="http://schemas.openxmlformats.org/drawingml/2006/main">
+            <a:pPr algn="l">
+              <a:defRPr sz="1350" b="1">
+                <a:solidFill>
+                  <a:srgbClr val="28685E"/>
+                </a:solidFill>
+                <a:latin typeface="Calibri"/>
+                <a:ea typeface="Calibri"/>
+                <a:cs typeface="Calibri"/>
+              </a:defRPr>
+            </a:pPr>
+            <a:r>
+              <a:rPr sz="1350" b="1">
+                <a:solidFill>
+                  <a:srgbClr val="28685E"/>
+                </a:solidFill>
+                <a:latin typeface="Calibri"/>
+                <a:ea typeface="Calibri"/>
+                <a:cs typeface="Calibri"/>
+              </a:rPr>
+              <a:t>03</a:t>
             </a:r>
           </a:p>
         </p:txBody>
@@ -4656,7 +5677,7 @@
     <p:bg>
       <p:bgPr>
         <a:solidFill xmlns:a="http://schemas.openxmlformats.org/drawingml/2006/main">
-          <a:srgbClr val="F5F1E8"/>
+          <a:srgbClr val="FAF9F5"/>
         </a:solidFill>
       </p:bgPr>
     </p:bg>
@@ -4685,8 +5706,8 @@
         </p:nvSpPr>
         <p:spPr>
           <a:xfrm xmlns:a="http://schemas.openxmlformats.org/drawingml/2006/main">
-            <a:off x="609600" y="552450"/>
-            <a:ext cx="781050" cy="57150"/>
+            <a:off x="609600" y="733425"/>
+            <a:ext cx="781050" cy="38100"/>
           </a:xfrm>
           <a:prstGeom xmlns:a="http://schemas.openxmlformats.org/drawingml/2006/main" prst="rect">
             <a:avLst/>
@@ -4716,34 +5737,43 @@
         </p:nvSpPr>
         <p:spPr>
           <a:xfrm xmlns:a="http://schemas.openxmlformats.org/drawingml/2006/main">
-            <a:off x="609600" y="762000"/>
-            <a:ext cx="8572500" cy="285750"/>
-          </a:xfrm>
-          <a:prstGeom xmlns:a="http://schemas.openxmlformats.org/drawingml/2006/main" prst="rect">
-            <a:avLst/>
-          </a:prstGeom>
-          <a:noFill xmlns:a="http://schemas.openxmlformats.org/drawingml/2006/main"/>
-          <a:ln xmlns:a="http://schemas.openxmlformats.org/drawingml/2006/main" w="0">
-            <a:noFill/>
-            <a:prstDash val="solid"/>
-          </a:ln>
-        </p:spPr>
-        <p:txBody>
-          <a:bodyPr xmlns:a="http://schemas.openxmlformats.org/drawingml/2006/main" lIns="0" tIns="0" rIns="0" bIns="0" anchor="ctr"/>
-          <a:lstStyle xmlns:a="http://schemas.openxmlformats.org/drawingml/2006/main"/>
-          <a:p xmlns:a="http://schemas.openxmlformats.org/drawingml/2006/main">
-            <a:pPr>
-              <a:defRPr sz="1500" b="1">
+            <a:off x="609600" y="342900"/>
+            <a:ext cx="9334500" cy="304800"/>
+          </a:xfrm>
+          <a:prstGeom xmlns:a="http://schemas.openxmlformats.org/drawingml/2006/main" prst="rect">
+            <a:avLst/>
+          </a:prstGeom>
+          <a:noFill xmlns:a="http://schemas.openxmlformats.org/drawingml/2006/main"/>
+          <a:ln xmlns:a="http://schemas.openxmlformats.org/drawingml/2006/main" w="0">
+            <a:noFill/>
+            <a:prstDash val="solid"/>
+          </a:ln>
+        </p:spPr>
+        <p:txBody>
+          <a:bodyPr xmlns:a="http://schemas.openxmlformats.org/drawingml/2006/main" lIns="0" tIns="0" rIns="0" bIns="0" anchor="ctr">
+            <a:noAutofit/>
+          </a:bodyPr>
+          <a:lstStyle xmlns:a="http://schemas.openxmlformats.org/drawingml/2006/main"/>
+          <a:p xmlns:a="http://schemas.openxmlformats.org/drawingml/2006/main">
+            <a:pPr algn="l">
+              <a:buNone/>
+              <a:defRPr sz="1350" b="1">
                 <a:solidFill>
                   <a:srgbClr val="28685E"/>
                 </a:solidFill>
-              </a:defRPr>
-            </a:pPr>
-            <a:r>
-              <a:rPr sz="1500" b="1">
+                <a:latin typeface="Calibri"/>
+                <a:ea typeface="Calibri"/>
+                <a:cs typeface="Calibri"/>
+              </a:defRPr>
+            </a:pPr>
+            <a:r>
+              <a:rPr sz="1350" b="1">
                 <a:solidFill>
                   <a:srgbClr val="28685E"/>
                 </a:solidFill>
+                <a:latin typeface="Calibri"/>
+                <a:ea typeface="Calibri"/>
+                <a:cs typeface="Calibri"/>
               </a:rPr>
               <a:t>MADE BY MATT  /  GROW SCIENCE</a:t>
             </a:r>
@@ -4766,34 +5796,43 @@
         </p:nvSpPr>
         <p:spPr>
           <a:xfrm xmlns:a="http://schemas.openxmlformats.org/drawingml/2006/main">
-            <a:off x="609600" y="1352550"/>
-            <a:ext cx="10972800" cy="952500"/>
-          </a:xfrm>
-          <a:prstGeom xmlns:a="http://schemas.openxmlformats.org/drawingml/2006/main" prst="rect">
-            <a:avLst/>
-          </a:prstGeom>
-          <a:noFill xmlns:a="http://schemas.openxmlformats.org/drawingml/2006/main"/>
-          <a:ln xmlns:a="http://schemas.openxmlformats.org/drawingml/2006/main" w="0">
-            <a:noFill/>
-            <a:prstDash val="solid"/>
-          </a:ln>
-        </p:spPr>
-        <p:txBody>
-          <a:bodyPr xmlns:a="http://schemas.openxmlformats.org/drawingml/2006/main" lIns="0" tIns="0" rIns="0" bIns="0" anchor="ctr"/>
-          <a:lstStyle xmlns:a="http://schemas.openxmlformats.org/drawingml/2006/main"/>
-          <a:p xmlns:a="http://schemas.openxmlformats.org/drawingml/2006/main">
-            <a:pPr>
-              <a:defRPr sz="3750" b="1">
-                <a:solidFill>
-                  <a:srgbClr val="152B3A"/>
-                </a:solidFill>
-              </a:defRPr>
-            </a:pPr>
-            <a:r>
-              <a:rPr sz="3750" b="1">
-                <a:solidFill>
-                  <a:srgbClr val="152B3A"/>
-                </a:solidFill>
+            <a:off x="609600" y="990600"/>
+            <a:ext cx="10972800" cy="1000125"/>
+          </a:xfrm>
+          <a:prstGeom xmlns:a="http://schemas.openxmlformats.org/drawingml/2006/main" prst="rect">
+            <a:avLst/>
+          </a:prstGeom>
+          <a:noFill xmlns:a="http://schemas.openxmlformats.org/drawingml/2006/main"/>
+          <a:ln xmlns:a="http://schemas.openxmlformats.org/drawingml/2006/main" w="0">
+            <a:noFill/>
+            <a:prstDash val="solid"/>
+          </a:ln>
+        </p:spPr>
+        <p:txBody>
+          <a:bodyPr xmlns:a="http://schemas.openxmlformats.org/drawingml/2006/main" lIns="0" tIns="0" rIns="0" bIns="0" anchor="ctr">
+            <a:noAutofit/>
+          </a:bodyPr>
+          <a:lstStyle xmlns:a="http://schemas.openxmlformats.org/drawingml/2006/main"/>
+          <a:p xmlns:a="http://schemas.openxmlformats.org/drawingml/2006/main">
+            <a:pPr algn="l">
+              <a:buNone/>
+              <a:defRPr sz="3675" b="1">
+                <a:solidFill>
+                  <a:srgbClr val="152B3A"/>
+                </a:solidFill>
+                <a:latin typeface="Calibri"/>
+                <a:ea typeface="Calibri"/>
+                <a:cs typeface="Calibri"/>
+              </a:defRPr>
+            </a:pPr>
+            <a:r>
+              <a:rPr sz="3675" b="1">
+                <a:solidFill>
+                  <a:srgbClr val="152B3A"/>
+                </a:solidFill>
+                <a:latin typeface="Calibri"/>
+                <a:ea typeface="Calibri"/>
+                <a:cs typeface="Calibri"/>
               </a:rPr>
               <a:t>Start with what you think</a:t>
             </a:r>
@@ -4816,14 +5855,14 @@
         </p:nvSpPr>
         <p:spPr>
           <a:xfrm xmlns:a="http://schemas.openxmlformats.org/drawingml/2006/main">
-            <a:off x="609600" y="6219825"/>
+            <a:off x="609600" y="6191250"/>
             <a:ext cx="10972800" cy="9525"/>
           </a:xfrm>
           <a:prstGeom xmlns:a="http://schemas.openxmlformats.org/drawingml/2006/main" prst="rect">
             <a:avLst/>
           </a:prstGeom>
           <a:solidFill xmlns:a="http://schemas.openxmlformats.org/drawingml/2006/main">
-            <a:srgbClr val="DCE7DD"/>
+            <a:srgbClr val="CEDBD3"/>
           </a:solidFill>
           <a:ln xmlns:a="http://schemas.openxmlformats.org/drawingml/2006/main" w="0">
             <a:noFill/>
@@ -4847,34 +5886,43 @@
         </p:nvSpPr>
         <p:spPr>
           <a:xfrm xmlns:a="http://schemas.openxmlformats.org/drawingml/2006/main">
-            <a:off x="609600" y="6381750"/>
-            <a:ext cx="9906000" cy="228600"/>
-          </a:xfrm>
-          <a:prstGeom xmlns:a="http://schemas.openxmlformats.org/drawingml/2006/main" prst="rect">
-            <a:avLst/>
-          </a:prstGeom>
-          <a:noFill xmlns:a="http://schemas.openxmlformats.org/drawingml/2006/main"/>
-          <a:ln xmlns:a="http://schemas.openxmlformats.org/drawingml/2006/main" w="0">
-            <a:noFill/>
-            <a:prstDash val="solid"/>
-          </a:ln>
-        </p:spPr>
-        <p:txBody>
-          <a:bodyPr xmlns:a="http://schemas.openxmlformats.org/drawingml/2006/main" lIns="0" tIns="0" rIns="0" bIns="0" anchor="ctr"/>
-          <a:lstStyle xmlns:a="http://schemas.openxmlformats.org/drawingml/2006/main"/>
-          <a:p xmlns:a="http://schemas.openxmlformats.org/drawingml/2006/main">
-            <a:pPr>
-              <a:defRPr sz="1275" b="0">
+            <a:off x="609600" y="6419850"/>
+            <a:ext cx="9525000" cy="219075"/>
+          </a:xfrm>
+          <a:prstGeom xmlns:a="http://schemas.openxmlformats.org/drawingml/2006/main" prst="rect">
+            <a:avLst/>
+          </a:prstGeom>
+          <a:noFill xmlns:a="http://schemas.openxmlformats.org/drawingml/2006/main"/>
+          <a:ln xmlns:a="http://schemas.openxmlformats.org/drawingml/2006/main" w="0">
+            <a:noFill/>
+            <a:prstDash val="solid"/>
+          </a:ln>
+        </p:spPr>
+        <p:txBody>
+          <a:bodyPr xmlns:a="http://schemas.openxmlformats.org/drawingml/2006/main" lIns="0" tIns="0" rIns="0" bIns="0" anchor="ctr">
+            <a:noAutofit/>
+          </a:bodyPr>
+          <a:lstStyle xmlns:a="http://schemas.openxmlformats.org/drawingml/2006/main"/>
+          <a:p xmlns:a="http://schemas.openxmlformats.org/drawingml/2006/main">
+            <a:pPr algn="l">
+              <a:buNone/>
+              <a:defRPr sz="1200" b="0">
                 <a:solidFill>
                   <a:srgbClr val="50616B"/>
                 </a:solidFill>
-              </a:defRPr>
-            </a:pPr>
-            <a:r>
-              <a:rPr sz="1275" b="0">
+                <a:latin typeface="Calibri"/>
+                <a:ea typeface="Calibri"/>
+                <a:cs typeface="Calibri"/>
+              </a:defRPr>
+            </a:pPr>
+            <a:r>
+              <a:rPr sz="1200" b="0">
                 <a:solidFill>
                   <a:srgbClr val="50616B"/>
                 </a:solidFill>
+                <a:latin typeface="Calibri"/>
+                <a:ea typeface="Calibri"/>
+                <a:cs typeface="Calibri"/>
               </a:rPr>
               <a:t>AUTUMN 1  ·  WEEK 7  ·  LESSON A</a:t>
             </a:r>
@@ -4897,27 +5945,33 @@
         </p:nvSpPr>
         <p:spPr>
           <a:xfrm xmlns:a="http://schemas.openxmlformats.org/drawingml/2006/main">
-            <a:off x="11106150" y="6362700"/>
-            <a:ext cx="476250" cy="238125"/>
-          </a:xfrm>
-          <a:prstGeom xmlns:a="http://schemas.openxmlformats.org/drawingml/2006/main" prst="rect">
-            <a:avLst/>
-          </a:prstGeom>
-          <a:noFill xmlns:a="http://schemas.openxmlformats.org/drawingml/2006/main"/>
-          <a:ln xmlns:a="http://schemas.openxmlformats.org/drawingml/2006/main" w="0">
-            <a:noFill/>
-            <a:prstDash val="solid"/>
-          </a:ln>
-        </p:spPr>
-        <p:txBody>
-          <a:bodyPr xmlns:a="http://schemas.openxmlformats.org/drawingml/2006/main" lIns="0" tIns="0" rIns="0" bIns="0" anchor="ctr"/>
-          <a:lstStyle xmlns:a="http://schemas.openxmlformats.org/drawingml/2006/main"/>
-          <a:p xmlns:a="http://schemas.openxmlformats.org/drawingml/2006/main">
-            <a:pPr>
+            <a:off x="11106150" y="6400800"/>
+            <a:ext cx="476250" cy="247650"/>
+          </a:xfrm>
+          <a:prstGeom xmlns:a="http://schemas.openxmlformats.org/drawingml/2006/main" prst="rect">
+            <a:avLst/>
+          </a:prstGeom>
+          <a:noFill xmlns:a="http://schemas.openxmlformats.org/drawingml/2006/main"/>
+          <a:ln xmlns:a="http://schemas.openxmlformats.org/drawingml/2006/main" w="0">
+            <a:noFill/>
+            <a:prstDash val="solid"/>
+          </a:ln>
+        </p:spPr>
+        <p:txBody>
+          <a:bodyPr xmlns:a="http://schemas.openxmlformats.org/drawingml/2006/main" lIns="0" tIns="0" rIns="0" bIns="0" anchor="ctr">
+            <a:noAutofit/>
+          </a:bodyPr>
+          <a:lstStyle xmlns:a="http://schemas.openxmlformats.org/drawingml/2006/main"/>
+          <a:p xmlns:a="http://schemas.openxmlformats.org/drawingml/2006/main">
+            <a:pPr algn="l">
+              <a:buNone/>
               <a:defRPr sz="1350" b="1">
                 <a:solidFill>
                   <a:srgbClr val="28685E"/>
                 </a:solidFill>
+                <a:latin typeface="Calibri"/>
+                <a:ea typeface="Calibri"/>
+                <a:cs typeface="Calibri"/>
               </a:defRPr>
             </a:pPr>
             <a:r>
@@ -4925,6 +5979,9 @@
                 <a:solidFill>
                   <a:srgbClr val="28685E"/>
                 </a:solidFill>
+                <a:latin typeface="Calibri"/>
+                <a:ea typeface="Calibri"/>
+                <a:cs typeface="Calibri"/>
               </a:rPr>
               <a:t>02</a:t>
             </a:r>
@@ -4947,34 +6004,43 @@
         </p:nvSpPr>
         <p:spPr>
           <a:xfrm xmlns:a="http://schemas.openxmlformats.org/drawingml/2006/main">
-            <a:off x="609600" y="2619375"/>
-            <a:ext cx="10972800" cy="781050"/>
-          </a:xfrm>
-          <a:prstGeom xmlns:a="http://schemas.openxmlformats.org/drawingml/2006/main" prst="rect">
-            <a:avLst/>
-          </a:prstGeom>
-          <a:noFill xmlns:a="http://schemas.openxmlformats.org/drawingml/2006/main"/>
-          <a:ln xmlns:a="http://schemas.openxmlformats.org/drawingml/2006/main" w="0">
-            <a:noFill/>
-            <a:prstDash val="solid"/>
-          </a:ln>
-        </p:spPr>
-        <p:txBody>
-          <a:bodyPr xmlns:a="http://schemas.openxmlformats.org/drawingml/2006/main" lIns="0" tIns="0" rIns="0" bIns="0" anchor="ctr"/>
-          <a:lstStyle xmlns:a="http://schemas.openxmlformats.org/drawingml/2006/main"/>
-          <a:p xmlns:a="http://schemas.openxmlformats.org/drawingml/2006/main">
-            <a:pPr>
-              <a:defRPr sz="2550" b="0">
-                <a:solidFill>
-                  <a:srgbClr val="152B3A"/>
-                </a:solidFill>
-              </a:defRPr>
-            </a:pPr>
-            <a:r>
-              <a:rPr sz="2550" b="0">
-                <a:solidFill>
-                  <a:srgbClr val="152B3A"/>
-                </a:solidFill>
+            <a:off x="1000125" y="2333625"/>
+            <a:ext cx="10382250" cy="1076325"/>
+          </a:xfrm>
+          <a:prstGeom xmlns:a="http://schemas.openxmlformats.org/drawingml/2006/main" prst="rect">
+            <a:avLst/>
+          </a:prstGeom>
+          <a:noFill xmlns:a="http://schemas.openxmlformats.org/drawingml/2006/main"/>
+          <a:ln xmlns:a="http://schemas.openxmlformats.org/drawingml/2006/main" w="0">
+            <a:noFill/>
+            <a:prstDash val="solid"/>
+          </a:ln>
+        </p:spPr>
+        <p:txBody>
+          <a:bodyPr xmlns:a="http://schemas.openxmlformats.org/drawingml/2006/main" lIns="0" tIns="0" rIns="0" bIns="0" anchor="ctr">
+            <a:noAutofit/>
+          </a:bodyPr>
+          <a:lstStyle xmlns:a="http://schemas.openxmlformats.org/drawingml/2006/main"/>
+          <a:p xmlns:a="http://schemas.openxmlformats.org/drawingml/2006/main">
+            <a:pPr algn="l">
+              <a:buNone/>
+              <a:defRPr sz="2625" b="0">
+                <a:solidFill>
+                  <a:srgbClr val="152B3A"/>
+                </a:solidFill>
+                <a:latin typeface="Calibri"/>
+                <a:ea typeface="Calibri"/>
+                <a:cs typeface="Calibri"/>
+              </a:defRPr>
+            </a:pPr>
+            <a:r>
+              <a:rPr sz="2625" b="0">
+                <a:solidFill>
+                  <a:srgbClr val="152B3A"/>
+                </a:solidFill>
+                <a:latin typeface="Calibri"/>
+                <a:ea typeface="Calibri"/>
+                <a:cs typeface="Calibri"/>
               </a:rPr>
               <a:t>Supported: point to the full Moon on a phase strip.</a:t>
             </a:r>
@@ -4997,34 +6063,43 @@
         </p:nvSpPr>
         <p:spPr>
           <a:xfrm xmlns:a="http://schemas.openxmlformats.org/drawingml/2006/main">
-            <a:off x="609600" y="3476625"/>
-            <a:ext cx="10972800" cy="781050"/>
-          </a:xfrm>
-          <a:prstGeom xmlns:a="http://schemas.openxmlformats.org/drawingml/2006/main" prst="rect">
-            <a:avLst/>
-          </a:prstGeom>
-          <a:noFill xmlns:a="http://schemas.openxmlformats.org/drawingml/2006/main"/>
-          <a:ln xmlns:a="http://schemas.openxmlformats.org/drawingml/2006/main" w="0">
-            <a:noFill/>
-            <a:prstDash val="solid"/>
-          </a:ln>
-        </p:spPr>
-        <p:txBody>
-          <a:bodyPr xmlns:a="http://schemas.openxmlformats.org/drawingml/2006/main" lIns="0" tIns="0" rIns="0" bIns="0" anchor="ctr"/>
-          <a:lstStyle xmlns:a="http://schemas.openxmlformats.org/drawingml/2006/main"/>
-          <a:p xmlns:a="http://schemas.openxmlformats.org/drawingml/2006/main">
-            <a:pPr>
-              <a:defRPr sz="2550" b="0">
-                <a:solidFill>
-                  <a:srgbClr val="152B3A"/>
-                </a:solidFill>
-              </a:defRPr>
-            </a:pPr>
-            <a:r>
-              <a:rPr sz="2550" b="0">
-                <a:solidFill>
-                  <a:srgbClr val="152B3A"/>
-                </a:solidFill>
+            <a:off x="1000125" y="3467100"/>
+            <a:ext cx="10382250" cy="1076325"/>
+          </a:xfrm>
+          <a:prstGeom xmlns:a="http://schemas.openxmlformats.org/drawingml/2006/main" prst="rect">
+            <a:avLst/>
+          </a:prstGeom>
+          <a:noFill xmlns:a="http://schemas.openxmlformats.org/drawingml/2006/main"/>
+          <a:ln xmlns:a="http://schemas.openxmlformats.org/drawingml/2006/main" w="0">
+            <a:noFill/>
+            <a:prstDash val="solid"/>
+          </a:ln>
+        </p:spPr>
+        <p:txBody>
+          <a:bodyPr xmlns:a="http://schemas.openxmlformats.org/drawingml/2006/main" lIns="0" tIns="0" rIns="0" bIns="0" anchor="ctr">
+            <a:noAutofit/>
+          </a:bodyPr>
+          <a:lstStyle xmlns:a="http://schemas.openxmlformats.org/drawingml/2006/main"/>
+          <a:p xmlns:a="http://schemas.openxmlformats.org/drawingml/2006/main">
+            <a:pPr algn="l">
+              <a:buNone/>
+              <a:defRPr sz="2625" b="0">
+                <a:solidFill>
+                  <a:srgbClr val="152B3A"/>
+                </a:solidFill>
+                <a:latin typeface="Calibri"/>
+                <a:ea typeface="Calibri"/>
+                <a:cs typeface="Calibri"/>
+              </a:defRPr>
+            </a:pPr>
+            <a:r>
+              <a:rPr sz="2625" b="0">
+                <a:solidFill>
+                  <a:srgbClr val="152B3A"/>
+                </a:solidFill>
+                <a:latin typeface="Calibri"/>
+                <a:ea typeface="Calibri"/>
+                <a:cs typeface="Calibri"/>
               </a:rPr>
               <a:t>Standard: estimate the time for one orbit of Earth.</a:t>
             </a:r>
@@ -5047,36 +6122,276 @@
         </p:nvSpPr>
         <p:spPr>
           <a:xfrm xmlns:a="http://schemas.openxmlformats.org/drawingml/2006/main">
-            <a:off x="609600" y="4333875"/>
-            <a:ext cx="10972800" cy="781050"/>
-          </a:xfrm>
-          <a:prstGeom xmlns:a="http://schemas.openxmlformats.org/drawingml/2006/main" prst="rect">
-            <a:avLst/>
-          </a:prstGeom>
-          <a:noFill xmlns:a="http://schemas.openxmlformats.org/drawingml/2006/main"/>
-          <a:ln xmlns:a="http://schemas.openxmlformats.org/drawingml/2006/main" w="0">
-            <a:noFill/>
-            <a:prstDash val="solid"/>
-          </a:ln>
-        </p:spPr>
-        <p:txBody>
-          <a:bodyPr xmlns:a="http://schemas.openxmlformats.org/drawingml/2006/main" lIns="0" tIns="0" rIns="0" bIns="0" anchor="ctr"/>
-          <a:lstStyle xmlns:a="http://schemas.openxmlformats.org/drawingml/2006/main"/>
-          <a:p xmlns:a="http://schemas.openxmlformats.org/drawingml/2006/main">
-            <a:pPr>
-              <a:defRPr sz="2550" b="0">
-                <a:solidFill>
-                  <a:srgbClr val="152B3A"/>
-                </a:solidFill>
-              </a:defRPr>
-            </a:pPr>
-            <a:r>
-              <a:rPr sz="2550" b="0">
-                <a:solidFill>
-                  <a:srgbClr val="152B3A"/>
-                </a:solidFill>
+            <a:off x="1000125" y="4600575"/>
+            <a:ext cx="10382250" cy="1076325"/>
+          </a:xfrm>
+          <a:prstGeom xmlns:a="http://schemas.openxmlformats.org/drawingml/2006/main" prst="rect">
+            <a:avLst/>
+          </a:prstGeom>
+          <a:noFill xmlns:a="http://schemas.openxmlformats.org/drawingml/2006/main"/>
+          <a:ln xmlns:a="http://schemas.openxmlformats.org/drawingml/2006/main" w="0">
+            <a:noFill/>
+            <a:prstDash val="solid"/>
+          </a:ln>
+        </p:spPr>
+        <p:txBody>
+          <a:bodyPr xmlns:a="http://schemas.openxmlformats.org/drawingml/2006/main" lIns="0" tIns="0" rIns="0" bIns="0" anchor="ctr">
+            <a:noAutofit/>
+          </a:bodyPr>
+          <a:lstStyle xmlns:a="http://schemas.openxmlformats.org/drawingml/2006/main"/>
+          <a:p xmlns:a="http://schemas.openxmlformats.org/drawingml/2006/main">
+            <a:pPr algn="l">
+              <a:buNone/>
+              <a:defRPr sz="2625" b="0">
+                <a:solidFill>
+                  <a:srgbClr val="152B3A"/>
+                </a:solidFill>
+                <a:latin typeface="Calibri"/>
+                <a:ea typeface="Calibri"/>
+                <a:cs typeface="Calibri"/>
+              </a:defRPr>
+            </a:pPr>
+            <a:r>
+              <a:rPr sz="2625" b="0">
+                <a:solidFill>
+                  <a:srgbClr val="152B3A"/>
+                </a:solidFill>
+                <a:latin typeface="Calibri"/>
+                <a:ea typeface="Calibri"/>
+                <a:cs typeface="Calibri"/>
               </a:rPr>
               <a:t>Stretch: add where the Moon's light comes from.</a:t>
+            </a:r>
+          </a:p>
+        </p:txBody>
+      </p:sp>
+      <p:sp>
+        <p:nvSpPr>
+          <p:cNvPr id="11" name="cue-0">
+            <a:extLst xmlns:a="http://schemas.openxmlformats.org/drawingml/2006/main">
+              <a:ext uri="{FF2B5EF4-FFF2-40B4-BE49-F238E27FC236}">
+                <a16:creationId xmlns:a16="http://schemas.microsoft.com/office/drawing/2014/main" id="{10BAC63B-F13A-42E5-8964-BAAA07A8E03A}"/>
+              </a:ext>
+            </a:extLst>
+          </p:cNvPr>
+          <p:cNvSpPr>
+            <a:spLocks xmlns:a="http://schemas.openxmlformats.org/drawingml/2006/main" noGrp="1"/>
+          </p:cNvSpPr>
+          <p:nvPr/>
+        </p:nvSpPr>
+        <p:spPr>
+          <a:xfrm xmlns:a="http://schemas.openxmlformats.org/drawingml/2006/main">
+            <a:off x="609600" y="2362200"/>
+            <a:ext cx="323850" cy="323850"/>
+          </a:xfrm>
+          <a:prstGeom xmlns:a="http://schemas.openxmlformats.org/drawingml/2006/main" prst="rect">
+            <a:avLst/>
+          </a:prstGeom>
+          <a:noFill xmlns:a="http://schemas.openxmlformats.org/drawingml/2006/main"/>
+          <a:ln xmlns:a="http://schemas.openxmlformats.org/drawingml/2006/main" w="0">
+            <a:noFill/>
+          </a:ln>
+        </p:spPr>
+        <p:txBody>
+          <a:bodyPr xmlns:a="http://schemas.openxmlformats.org/drawingml/2006/main" lIns="0" tIns="0" rIns="0" bIns="0" anchor="ctr">
+            <a:noAutofit/>
+          </a:bodyPr>
+          <a:lstStyle xmlns:a="http://schemas.openxmlformats.org/drawingml/2006/main"/>
+          <a:p xmlns:a="http://schemas.openxmlformats.org/drawingml/2006/main">
+            <a:pPr algn="l">
+              <a:defRPr sz="1350" b="1">
+                <a:solidFill>
+                  <a:srgbClr val="28685E"/>
+                </a:solidFill>
+                <a:latin typeface="Calibri"/>
+                <a:ea typeface="Calibri"/>
+                <a:cs typeface="Calibri"/>
+              </a:defRPr>
+            </a:pPr>
+            <a:r>
+              <a:rPr sz="1350" b="1">
+                <a:solidFill>
+                  <a:srgbClr val="28685E"/>
+                </a:solidFill>
+                <a:latin typeface="Calibri"/>
+                <a:ea typeface="Calibri"/>
+                <a:cs typeface="Calibri"/>
+              </a:rPr>
+              <a:t>01</a:t>
+            </a:r>
+          </a:p>
+        </p:txBody>
+      </p:sp>
+      <p:sp>
+        <p:nvSpPr>
+          <p:cNvPr id="12" name="row-rule-0">
+            <a:extLst xmlns:a="http://schemas.openxmlformats.org/drawingml/2006/main">
+              <a:ext uri="{FF2B5EF4-FFF2-40B4-BE49-F238E27FC236}">
+                <a16:creationId xmlns:a16="http://schemas.microsoft.com/office/drawing/2014/main" id="{B2656BA2-D13F-415B-94D7-32CC0B9F071D}"/>
+              </a:ext>
+            </a:extLst>
+          </p:cNvPr>
+          <p:cNvSpPr>
+            <a:spLocks xmlns:a="http://schemas.openxmlformats.org/drawingml/2006/main" noGrp="1"/>
+          </p:cNvSpPr>
+          <p:nvPr/>
+        </p:nvSpPr>
+        <p:spPr>
+          <a:xfrm xmlns:a="http://schemas.openxmlformats.org/drawingml/2006/main">
+            <a:off x="1000125" y="3419475"/>
+            <a:ext cx="10334625" cy="0"/>
+          </a:xfrm>
+          <a:prstGeom xmlns:a="http://schemas.openxmlformats.org/drawingml/2006/main" prst="line">
+            <a:avLst/>
+          </a:prstGeom>
+          <a:noFill xmlns:a="http://schemas.openxmlformats.org/drawingml/2006/main"/>
+          <a:ln xmlns:a="http://schemas.openxmlformats.org/drawingml/2006/main" w="9525">
+            <a:solidFill>
+              <a:srgbClr val="CEDBD3"/>
+            </a:solidFill>
+          </a:ln>
+        </p:spPr>
+      </p:sp>
+      <p:sp>
+        <p:nvSpPr>
+          <p:cNvPr id="13" name="cue-1">
+            <a:extLst xmlns:a="http://schemas.openxmlformats.org/drawingml/2006/main">
+              <a:ext uri="{FF2B5EF4-FFF2-40B4-BE49-F238E27FC236}">
+                <a16:creationId xmlns:a16="http://schemas.microsoft.com/office/drawing/2014/main" id="{B086748D-57BF-4FA8-A90A-2EF99914A4DD}"/>
+              </a:ext>
+            </a:extLst>
+          </p:cNvPr>
+          <p:cNvSpPr>
+            <a:spLocks xmlns:a="http://schemas.openxmlformats.org/drawingml/2006/main" noGrp="1"/>
+          </p:cNvSpPr>
+          <p:nvPr/>
+        </p:nvSpPr>
+        <p:spPr>
+          <a:xfrm xmlns:a="http://schemas.openxmlformats.org/drawingml/2006/main">
+            <a:off x="609600" y="3495675"/>
+            <a:ext cx="323850" cy="323850"/>
+          </a:xfrm>
+          <a:prstGeom xmlns:a="http://schemas.openxmlformats.org/drawingml/2006/main" prst="rect">
+            <a:avLst/>
+          </a:prstGeom>
+          <a:noFill xmlns:a="http://schemas.openxmlformats.org/drawingml/2006/main"/>
+          <a:ln xmlns:a="http://schemas.openxmlformats.org/drawingml/2006/main" w="0">
+            <a:noFill/>
+          </a:ln>
+        </p:spPr>
+        <p:txBody>
+          <a:bodyPr xmlns:a="http://schemas.openxmlformats.org/drawingml/2006/main" lIns="0" tIns="0" rIns="0" bIns="0" anchor="ctr">
+            <a:noAutofit/>
+          </a:bodyPr>
+          <a:lstStyle xmlns:a="http://schemas.openxmlformats.org/drawingml/2006/main"/>
+          <a:p xmlns:a="http://schemas.openxmlformats.org/drawingml/2006/main">
+            <a:pPr algn="l">
+              <a:defRPr sz="1350" b="1">
+                <a:solidFill>
+                  <a:srgbClr val="28685E"/>
+                </a:solidFill>
+                <a:latin typeface="Calibri"/>
+                <a:ea typeface="Calibri"/>
+                <a:cs typeface="Calibri"/>
+              </a:defRPr>
+            </a:pPr>
+            <a:r>
+              <a:rPr sz="1350" b="1">
+                <a:solidFill>
+                  <a:srgbClr val="28685E"/>
+                </a:solidFill>
+                <a:latin typeface="Calibri"/>
+                <a:ea typeface="Calibri"/>
+                <a:cs typeface="Calibri"/>
+              </a:rPr>
+              <a:t>02</a:t>
+            </a:r>
+          </a:p>
+        </p:txBody>
+      </p:sp>
+      <p:sp>
+        <p:nvSpPr>
+          <p:cNvPr id="14" name="row-rule-1">
+            <a:extLst xmlns:a="http://schemas.openxmlformats.org/drawingml/2006/main">
+              <a:ext uri="{FF2B5EF4-FFF2-40B4-BE49-F238E27FC236}">
+                <a16:creationId xmlns:a16="http://schemas.microsoft.com/office/drawing/2014/main" id="{8D30D3A9-8A79-4D0C-91DF-BF5F3B11B984}"/>
+              </a:ext>
+            </a:extLst>
+          </p:cNvPr>
+          <p:cNvSpPr>
+            <a:spLocks xmlns:a="http://schemas.openxmlformats.org/drawingml/2006/main" noGrp="1"/>
+          </p:cNvSpPr>
+          <p:nvPr/>
+        </p:nvSpPr>
+        <p:spPr>
+          <a:xfrm xmlns:a="http://schemas.openxmlformats.org/drawingml/2006/main">
+            <a:off x="1000125" y="4552950"/>
+            <a:ext cx="10334625" cy="0"/>
+          </a:xfrm>
+          <a:prstGeom xmlns:a="http://schemas.openxmlformats.org/drawingml/2006/main" prst="line">
+            <a:avLst/>
+          </a:prstGeom>
+          <a:noFill xmlns:a="http://schemas.openxmlformats.org/drawingml/2006/main"/>
+          <a:ln xmlns:a="http://schemas.openxmlformats.org/drawingml/2006/main" w="9525">
+            <a:solidFill>
+              <a:srgbClr val="CEDBD3"/>
+            </a:solidFill>
+          </a:ln>
+        </p:spPr>
+      </p:sp>
+      <p:sp>
+        <p:nvSpPr>
+          <p:cNvPr id="15" name="cue-2">
+            <a:extLst xmlns:a="http://schemas.openxmlformats.org/drawingml/2006/main">
+              <a:ext uri="{FF2B5EF4-FFF2-40B4-BE49-F238E27FC236}">
+                <a16:creationId xmlns:a16="http://schemas.microsoft.com/office/drawing/2014/main" id="{80EED80B-34D5-4C6F-B151-EB37E475317D}"/>
+              </a:ext>
+            </a:extLst>
+          </p:cNvPr>
+          <p:cNvSpPr>
+            <a:spLocks xmlns:a="http://schemas.openxmlformats.org/drawingml/2006/main" noGrp="1"/>
+          </p:cNvSpPr>
+          <p:nvPr/>
+        </p:nvSpPr>
+        <p:spPr>
+          <a:xfrm xmlns:a="http://schemas.openxmlformats.org/drawingml/2006/main">
+            <a:off x="609600" y="4629150"/>
+            <a:ext cx="323850" cy="323850"/>
+          </a:xfrm>
+          <a:prstGeom xmlns:a="http://schemas.openxmlformats.org/drawingml/2006/main" prst="rect">
+            <a:avLst/>
+          </a:prstGeom>
+          <a:noFill xmlns:a="http://schemas.openxmlformats.org/drawingml/2006/main"/>
+          <a:ln xmlns:a="http://schemas.openxmlformats.org/drawingml/2006/main" w="0">
+            <a:noFill/>
+          </a:ln>
+        </p:spPr>
+        <p:txBody>
+          <a:bodyPr xmlns:a="http://schemas.openxmlformats.org/drawingml/2006/main" lIns="0" tIns="0" rIns="0" bIns="0" anchor="ctr">
+            <a:noAutofit/>
+          </a:bodyPr>
+          <a:lstStyle xmlns:a="http://schemas.openxmlformats.org/drawingml/2006/main"/>
+          <a:p xmlns:a="http://schemas.openxmlformats.org/drawingml/2006/main">
+            <a:pPr algn="l">
+              <a:defRPr sz="1350" b="1">
+                <a:solidFill>
+                  <a:srgbClr val="28685E"/>
+                </a:solidFill>
+                <a:latin typeface="Calibri"/>
+                <a:ea typeface="Calibri"/>
+                <a:cs typeface="Calibri"/>
+              </a:defRPr>
+            </a:pPr>
+            <a:r>
+              <a:rPr sz="1350" b="1">
+                <a:solidFill>
+                  <a:srgbClr val="28685E"/>
+                </a:solidFill>
+                <a:latin typeface="Calibri"/>
+                <a:ea typeface="Calibri"/>
+                <a:cs typeface="Calibri"/>
+              </a:rPr>
+              <a:t>03</a:t>
             </a:r>
           </a:p>
         </p:txBody>
@@ -5097,7 +6412,7 @@
     <p:bg>
       <p:bgPr>
         <a:solidFill xmlns:a="http://schemas.openxmlformats.org/drawingml/2006/main">
-          <a:srgbClr val="F5F1E8"/>
+          <a:srgbClr val="FAF9F5"/>
         </a:solidFill>
       </p:bgPr>
     </p:bg>
@@ -5126,8 +6441,8 @@
         </p:nvSpPr>
         <p:spPr>
           <a:xfrm xmlns:a="http://schemas.openxmlformats.org/drawingml/2006/main">
-            <a:off x="609600" y="552450"/>
-            <a:ext cx="781050" cy="57150"/>
+            <a:off x="609600" y="733425"/>
+            <a:ext cx="781050" cy="38100"/>
           </a:xfrm>
           <a:prstGeom xmlns:a="http://schemas.openxmlformats.org/drawingml/2006/main" prst="rect">
             <a:avLst/>
@@ -5157,34 +6472,43 @@
         </p:nvSpPr>
         <p:spPr>
           <a:xfrm xmlns:a="http://schemas.openxmlformats.org/drawingml/2006/main">
-            <a:off x="609600" y="762000"/>
-            <a:ext cx="8572500" cy="285750"/>
-          </a:xfrm>
-          <a:prstGeom xmlns:a="http://schemas.openxmlformats.org/drawingml/2006/main" prst="rect">
-            <a:avLst/>
-          </a:prstGeom>
-          <a:noFill xmlns:a="http://schemas.openxmlformats.org/drawingml/2006/main"/>
-          <a:ln xmlns:a="http://schemas.openxmlformats.org/drawingml/2006/main" w="0">
-            <a:noFill/>
-            <a:prstDash val="solid"/>
-          </a:ln>
-        </p:spPr>
-        <p:txBody>
-          <a:bodyPr xmlns:a="http://schemas.openxmlformats.org/drawingml/2006/main" lIns="0" tIns="0" rIns="0" bIns="0" anchor="ctr"/>
-          <a:lstStyle xmlns:a="http://schemas.openxmlformats.org/drawingml/2006/main"/>
-          <a:p xmlns:a="http://schemas.openxmlformats.org/drawingml/2006/main">
-            <a:pPr>
-              <a:defRPr sz="1500" b="1">
+            <a:off x="609600" y="342900"/>
+            <a:ext cx="9334500" cy="304800"/>
+          </a:xfrm>
+          <a:prstGeom xmlns:a="http://schemas.openxmlformats.org/drawingml/2006/main" prst="rect">
+            <a:avLst/>
+          </a:prstGeom>
+          <a:noFill xmlns:a="http://schemas.openxmlformats.org/drawingml/2006/main"/>
+          <a:ln xmlns:a="http://schemas.openxmlformats.org/drawingml/2006/main" w="0">
+            <a:noFill/>
+            <a:prstDash val="solid"/>
+          </a:ln>
+        </p:spPr>
+        <p:txBody>
+          <a:bodyPr xmlns:a="http://schemas.openxmlformats.org/drawingml/2006/main" lIns="0" tIns="0" rIns="0" bIns="0" anchor="ctr">
+            <a:noAutofit/>
+          </a:bodyPr>
+          <a:lstStyle xmlns:a="http://schemas.openxmlformats.org/drawingml/2006/main"/>
+          <a:p xmlns:a="http://schemas.openxmlformats.org/drawingml/2006/main">
+            <a:pPr algn="l">
+              <a:buNone/>
+              <a:defRPr sz="1350" b="1">
                 <a:solidFill>
                   <a:srgbClr val="28685E"/>
                 </a:solidFill>
-              </a:defRPr>
-            </a:pPr>
-            <a:r>
-              <a:rPr sz="1500" b="1">
+                <a:latin typeface="Calibri"/>
+                <a:ea typeface="Calibri"/>
+                <a:cs typeface="Calibri"/>
+              </a:defRPr>
+            </a:pPr>
+            <a:r>
+              <a:rPr sz="1350" b="1">
                 <a:solidFill>
                   <a:srgbClr val="28685E"/>
                 </a:solidFill>
+                <a:latin typeface="Calibri"/>
+                <a:ea typeface="Calibri"/>
+                <a:cs typeface="Calibri"/>
               </a:rPr>
               <a:t>MADE BY MATT  /  GROW SCIENCE</a:t>
             </a:r>
@@ -5207,34 +6531,43 @@
         </p:nvSpPr>
         <p:spPr>
           <a:xfrm xmlns:a="http://schemas.openxmlformats.org/drawingml/2006/main">
-            <a:off x="609600" y="1352550"/>
-            <a:ext cx="10972800" cy="952500"/>
-          </a:xfrm>
-          <a:prstGeom xmlns:a="http://schemas.openxmlformats.org/drawingml/2006/main" prst="rect">
-            <a:avLst/>
-          </a:prstGeom>
-          <a:noFill xmlns:a="http://schemas.openxmlformats.org/drawingml/2006/main"/>
-          <a:ln xmlns:a="http://schemas.openxmlformats.org/drawingml/2006/main" w="0">
-            <a:noFill/>
-            <a:prstDash val="solid"/>
-          </a:ln>
-        </p:spPr>
-        <p:txBody>
-          <a:bodyPr xmlns:a="http://schemas.openxmlformats.org/drawingml/2006/main" lIns="0" tIns="0" rIns="0" bIns="0" anchor="ctr"/>
-          <a:lstStyle xmlns:a="http://schemas.openxmlformats.org/drawingml/2006/main"/>
-          <a:p xmlns:a="http://schemas.openxmlformats.org/drawingml/2006/main">
-            <a:pPr>
-              <a:defRPr sz="3750" b="1">
-                <a:solidFill>
-                  <a:srgbClr val="152B3A"/>
-                </a:solidFill>
-              </a:defRPr>
-            </a:pPr>
-            <a:r>
-              <a:rPr sz="3750" b="1">
-                <a:solidFill>
-                  <a:srgbClr val="152B3A"/>
-                </a:solidFill>
+            <a:off x="609600" y="990600"/>
+            <a:ext cx="10972800" cy="1000125"/>
+          </a:xfrm>
+          <a:prstGeom xmlns:a="http://schemas.openxmlformats.org/drawingml/2006/main" prst="rect">
+            <a:avLst/>
+          </a:prstGeom>
+          <a:noFill xmlns:a="http://schemas.openxmlformats.org/drawingml/2006/main"/>
+          <a:ln xmlns:a="http://schemas.openxmlformats.org/drawingml/2006/main" w="0">
+            <a:noFill/>
+            <a:prstDash val="solid"/>
+          </a:ln>
+        </p:spPr>
+        <p:txBody>
+          <a:bodyPr xmlns:a="http://schemas.openxmlformats.org/drawingml/2006/main" lIns="0" tIns="0" rIns="0" bIns="0" anchor="ctr">
+            <a:noAutofit/>
+          </a:bodyPr>
+          <a:lstStyle xmlns:a="http://schemas.openxmlformats.org/drawingml/2006/main"/>
+          <a:p xmlns:a="http://schemas.openxmlformats.org/drawingml/2006/main">
+            <a:pPr algn="l">
+              <a:buNone/>
+              <a:defRPr sz="3675" b="1">
+                <a:solidFill>
+                  <a:srgbClr val="152B3A"/>
+                </a:solidFill>
+                <a:latin typeface="Calibri"/>
+                <a:ea typeface="Calibri"/>
+                <a:cs typeface="Calibri"/>
+              </a:defRPr>
+            </a:pPr>
+            <a:r>
+              <a:rPr sz="3675" b="1">
+                <a:solidFill>
+                  <a:srgbClr val="152B3A"/>
+                </a:solidFill>
+                <a:latin typeface="Calibri"/>
+                <a:ea typeface="Calibri"/>
+                <a:cs typeface="Calibri"/>
               </a:rPr>
               <a:t>Three things to work out</a:t>
             </a:r>
@@ -5257,14 +6590,14 @@
         </p:nvSpPr>
         <p:spPr>
           <a:xfrm xmlns:a="http://schemas.openxmlformats.org/drawingml/2006/main">
-            <a:off x="609600" y="6219825"/>
+            <a:off x="609600" y="6191250"/>
             <a:ext cx="10972800" cy="9525"/>
           </a:xfrm>
           <a:prstGeom xmlns:a="http://schemas.openxmlformats.org/drawingml/2006/main" prst="rect">
             <a:avLst/>
           </a:prstGeom>
           <a:solidFill xmlns:a="http://schemas.openxmlformats.org/drawingml/2006/main">
-            <a:srgbClr val="DCE7DD"/>
+            <a:srgbClr val="CEDBD3"/>
           </a:solidFill>
           <a:ln xmlns:a="http://schemas.openxmlformats.org/drawingml/2006/main" w="0">
             <a:noFill/>
@@ -5288,34 +6621,43 @@
         </p:nvSpPr>
         <p:spPr>
           <a:xfrm xmlns:a="http://schemas.openxmlformats.org/drawingml/2006/main">
-            <a:off x="609600" y="6381750"/>
-            <a:ext cx="9906000" cy="228600"/>
-          </a:xfrm>
-          <a:prstGeom xmlns:a="http://schemas.openxmlformats.org/drawingml/2006/main" prst="rect">
-            <a:avLst/>
-          </a:prstGeom>
-          <a:noFill xmlns:a="http://schemas.openxmlformats.org/drawingml/2006/main"/>
-          <a:ln xmlns:a="http://schemas.openxmlformats.org/drawingml/2006/main" w="0">
-            <a:noFill/>
-            <a:prstDash val="solid"/>
-          </a:ln>
-        </p:spPr>
-        <p:txBody>
-          <a:bodyPr xmlns:a="http://schemas.openxmlformats.org/drawingml/2006/main" lIns="0" tIns="0" rIns="0" bIns="0" anchor="ctr"/>
-          <a:lstStyle xmlns:a="http://schemas.openxmlformats.org/drawingml/2006/main"/>
-          <a:p xmlns:a="http://schemas.openxmlformats.org/drawingml/2006/main">
-            <a:pPr>
-              <a:defRPr sz="1275" b="0">
+            <a:off x="609600" y="6419850"/>
+            <a:ext cx="9525000" cy="219075"/>
+          </a:xfrm>
+          <a:prstGeom xmlns:a="http://schemas.openxmlformats.org/drawingml/2006/main" prst="rect">
+            <a:avLst/>
+          </a:prstGeom>
+          <a:noFill xmlns:a="http://schemas.openxmlformats.org/drawingml/2006/main"/>
+          <a:ln xmlns:a="http://schemas.openxmlformats.org/drawingml/2006/main" w="0">
+            <a:noFill/>
+            <a:prstDash val="solid"/>
+          </a:ln>
+        </p:spPr>
+        <p:txBody>
+          <a:bodyPr xmlns:a="http://schemas.openxmlformats.org/drawingml/2006/main" lIns="0" tIns="0" rIns="0" bIns="0" anchor="ctr">
+            <a:noAutofit/>
+          </a:bodyPr>
+          <a:lstStyle xmlns:a="http://schemas.openxmlformats.org/drawingml/2006/main"/>
+          <a:p xmlns:a="http://schemas.openxmlformats.org/drawingml/2006/main">
+            <a:pPr algn="l">
+              <a:buNone/>
+              <a:defRPr sz="1200" b="0">
                 <a:solidFill>
                   <a:srgbClr val="50616B"/>
                 </a:solidFill>
-              </a:defRPr>
-            </a:pPr>
-            <a:r>
-              <a:rPr sz="1275" b="0">
+                <a:latin typeface="Calibri"/>
+                <a:ea typeface="Calibri"/>
+                <a:cs typeface="Calibri"/>
+              </a:defRPr>
+            </a:pPr>
+            <a:r>
+              <a:rPr sz="1200" b="0">
                 <a:solidFill>
                   <a:srgbClr val="50616B"/>
                 </a:solidFill>
+                <a:latin typeface="Calibri"/>
+                <a:ea typeface="Calibri"/>
+                <a:cs typeface="Calibri"/>
               </a:rPr>
               <a:t>AUTUMN 1  ·  WEEK 7  ·  LESSON A</a:t>
             </a:r>
@@ -5338,27 +6680,33 @@
         </p:nvSpPr>
         <p:spPr>
           <a:xfrm xmlns:a="http://schemas.openxmlformats.org/drawingml/2006/main">
-            <a:off x="11106150" y="6362700"/>
-            <a:ext cx="476250" cy="238125"/>
-          </a:xfrm>
-          <a:prstGeom xmlns:a="http://schemas.openxmlformats.org/drawingml/2006/main" prst="rect">
-            <a:avLst/>
-          </a:prstGeom>
-          <a:noFill xmlns:a="http://schemas.openxmlformats.org/drawingml/2006/main"/>
-          <a:ln xmlns:a="http://schemas.openxmlformats.org/drawingml/2006/main" w="0">
-            <a:noFill/>
-            <a:prstDash val="solid"/>
-          </a:ln>
-        </p:spPr>
-        <p:txBody>
-          <a:bodyPr xmlns:a="http://schemas.openxmlformats.org/drawingml/2006/main" lIns="0" tIns="0" rIns="0" bIns="0" anchor="ctr"/>
-          <a:lstStyle xmlns:a="http://schemas.openxmlformats.org/drawingml/2006/main"/>
-          <a:p xmlns:a="http://schemas.openxmlformats.org/drawingml/2006/main">
-            <a:pPr>
+            <a:off x="11106150" y="6400800"/>
+            <a:ext cx="476250" cy="247650"/>
+          </a:xfrm>
+          <a:prstGeom xmlns:a="http://schemas.openxmlformats.org/drawingml/2006/main" prst="rect">
+            <a:avLst/>
+          </a:prstGeom>
+          <a:noFill xmlns:a="http://schemas.openxmlformats.org/drawingml/2006/main"/>
+          <a:ln xmlns:a="http://schemas.openxmlformats.org/drawingml/2006/main" w="0">
+            <a:noFill/>
+            <a:prstDash val="solid"/>
+          </a:ln>
+        </p:spPr>
+        <p:txBody>
+          <a:bodyPr xmlns:a="http://schemas.openxmlformats.org/drawingml/2006/main" lIns="0" tIns="0" rIns="0" bIns="0" anchor="ctr">
+            <a:noAutofit/>
+          </a:bodyPr>
+          <a:lstStyle xmlns:a="http://schemas.openxmlformats.org/drawingml/2006/main"/>
+          <a:p xmlns:a="http://schemas.openxmlformats.org/drawingml/2006/main">
+            <a:pPr algn="l">
+              <a:buNone/>
               <a:defRPr sz="1350" b="1">
                 <a:solidFill>
                   <a:srgbClr val="28685E"/>
                 </a:solidFill>
+                <a:latin typeface="Calibri"/>
+                <a:ea typeface="Calibri"/>
+                <a:cs typeface="Calibri"/>
               </a:defRPr>
             </a:pPr>
             <a:r>
@@ -5366,6 +6714,9 @@
                 <a:solidFill>
                   <a:srgbClr val="28685E"/>
                 </a:solidFill>
+                <a:latin typeface="Calibri"/>
+                <a:ea typeface="Calibri"/>
+                <a:cs typeface="Calibri"/>
               </a:rPr>
               <a:t>03</a:t>
             </a:r>
@@ -5388,34 +6739,43 @@
         </p:nvSpPr>
         <p:spPr>
           <a:xfrm xmlns:a="http://schemas.openxmlformats.org/drawingml/2006/main">
-            <a:off x="609600" y="2619375"/>
-            <a:ext cx="10972800" cy="781050"/>
-          </a:xfrm>
-          <a:prstGeom xmlns:a="http://schemas.openxmlformats.org/drawingml/2006/main" prst="rect">
-            <a:avLst/>
-          </a:prstGeom>
-          <a:noFill xmlns:a="http://schemas.openxmlformats.org/drawingml/2006/main"/>
-          <a:ln xmlns:a="http://schemas.openxmlformats.org/drawingml/2006/main" w="0">
-            <a:noFill/>
-            <a:prstDash val="solid"/>
-          </a:ln>
-        </p:spPr>
-        <p:txBody>
-          <a:bodyPr xmlns:a="http://schemas.openxmlformats.org/drawingml/2006/main" lIns="0" tIns="0" rIns="0" bIns="0" anchor="ctr"/>
-          <a:lstStyle xmlns:a="http://schemas.openxmlformats.org/drawingml/2006/main"/>
-          <a:p xmlns:a="http://schemas.openxmlformats.org/drawingml/2006/main">
-            <a:pPr>
-              <a:defRPr sz="2550" b="0">
-                <a:solidFill>
-                  <a:srgbClr val="152B3A"/>
-                </a:solidFill>
-              </a:defRPr>
-            </a:pPr>
-            <a:r>
-              <a:rPr sz="2550" b="0">
-                <a:solidFill>
-                  <a:srgbClr val="152B3A"/>
-                </a:solidFill>
+            <a:off x="1000125" y="2333625"/>
+            <a:ext cx="10382250" cy="1076325"/>
+          </a:xfrm>
+          <a:prstGeom xmlns:a="http://schemas.openxmlformats.org/drawingml/2006/main" prst="rect">
+            <a:avLst/>
+          </a:prstGeom>
+          <a:noFill xmlns:a="http://schemas.openxmlformats.org/drawingml/2006/main"/>
+          <a:ln xmlns:a="http://schemas.openxmlformats.org/drawingml/2006/main" w="0">
+            <a:noFill/>
+            <a:prstDash val="solid"/>
+          </a:ln>
+        </p:spPr>
+        <p:txBody>
+          <a:bodyPr xmlns:a="http://schemas.openxmlformats.org/drawingml/2006/main" lIns="0" tIns="0" rIns="0" bIns="0" anchor="ctr">
+            <a:noAutofit/>
+          </a:bodyPr>
+          <a:lstStyle xmlns:a="http://schemas.openxmlformats.org/drawingml/2006/main"/>
+          <a:p xmlns:a="http://schemas.openxmlformats.org/drawingml/2006/main">
+            <a:pPr algn="l">
+              <a:buNone/>
+              <a:defRPr sz="2625" b="0">
+                <a:solidFill>
+                  <a:srgbClr val="152B3A"/>
+                </a:solidFill>
+                <a:latin typeface="Calibri"/>
+                <a:ea typeface="Calibri"/>
+                <a:cs typeface="Calibri"/>
+              </a:defRPr>
+            </a:pPr>
+            <a:r>
+              <a:rPr sz="2625" b="0">
+                <a:solidFill>
+                  <a:srgbClr val="152B3A"/>
+                </a:solidFill>
+                <a:latin typeface="Calibri"/>
+                <a:ea typeface="Calibri"/>
+                <a:cs typeface="Calibri"/>
               </a:rPr>
               <a:t>1   Orbit and time.</a:t>
             </a:r>
@@ -5438,34 +6798,43 @@
         </p:nvSpPr>
         <p:spPr>
           <a:xfrm xmlns:a="http://schemas.openxmlformats.org/drawingml/2006/main">
-            <a:off x="609600" y="3476625"/>
-            <a:ext cx="10972800" cy="781050"/>
-          </a:xfrm>
-          <a:prstGeom xmlns:a="http://schemas.openxmlformats.org/drawingml/2006/main" prst="rect">
-            <a:avLst/>
-          </a:prstGeom>
-          <a:noFill xmlns:a="http://schemas.openxmlformats.org/drawingml/2006/main"/>
-          <a:ln xmlns:a="http://schemas.openxmlformats.org/drawingml/2006/main" w="0">
-            <a:noFill/>
-            <a:prstDash val="solid"/>
-          </a:ln>
-        </p:spPr>
-        <p:txBody>
-          <a:bodyPr xmlns:a="http://schemas.openxmlformats.org/drawingml/2006/main" lIns="0" tIns="0" rIns="0" bIns="0" anchor="ctr"/>
-          <a:lstStyle xmlns:a="http://schemas.openxmlformats.org/drawingml/2006/main"/>
-          <a:p xmlns:a="http://schemas.openxmlformats.org/drawingml/2006/main">
-            <a:pPr>
-              <a:defRPr sz="2550" b="0">
-                <a:solidFill>
-                  <a:srgbClr val="152B3A"/>
-                </a:solidFill>
-              </a:defRPr>
-            </a:pPr>
-            <a:r>
-              <a:rPr sz="2550" b="0">
-                <a:solidFill>
-                  <a:srgbClr val="152B3A"/>
-                </a:solidFill>
+            <a:off x="1000125" y="3467100"/>
+            <a:ext cx="10382250" cy="1076325"/>
+          </a:xfrm>
+          <a:prstGeom xmlns:a="http://schemas.openxmlformats.org/drawingml/2006/main" prst="rect">
+            <a:avLst/>
+          </a:prstGeom>
+          <a:noFill xmlns:a="http://schemas.openxmlformats.org/drawingml/2006/main"/>
+          <a:ln xmlns:a="http://schemas.openxmlformats.org/drawingml/2006/main" w="0">
+            <a:noFill/>
+            <a:prstDash val="solid"/>
+          </a:ln>
+        </p:spPr>
+        <p:txBody>
+          <a:bodyPr xmlns:a="http://schemas.openxmlformats.org/drawingml/2006/main" lIns="0" tIns="0" rIns="0" bIns="0" anchor="ctr">
+            <a:noAutofit/>
+          </a:bodyPr>
+          <a:lstStyle xmlns:a="http://schemas.openxmlformats.org/drawingml/2006/main"/>
+          <a:p xmlns:a="http://schemas.openxmlformats.org/drawingml/2006/main">
+            <a:pPr algn="l">
+              <a:buNone/>
+              <a:defRPr sz="2625" b="0">
+                <a:solidFill>
+                  <a:srgbClr val="152B3A"/>
+                </a:solidFill>
+                <a:latin typeface="Calibri"/>
+                <a:ea typeface="Calibri"/>
+                <a:cs typeface="Calibri"/>
+              </a:defRPr>
+            </a:pPr>
+            <a:r>
+              <a:rPr sz="2625" b="0">
+                <a:solidFill>
+                  <a:srgbClr val="152B3A"/>
+                </a:solidFill>
+                <a:latin typeface="Calibri"/>
+                <a:ea typeface="Calibri"/>
+                <a:cs typeface="Calibri"/>
               </a:rPr>
               <a:t>2   Where the light comes from.</a:t>
             </a:r>
@@ -5488,39 +6857,108 @@
         </p:nvSpPr>
         <p:spPr>
           <a:xfrm xmlns:a="http://schemas.openxmlformats.org/drawingml/2006/main">
-            <a:off x="609600" y="4333875"/>
-            <a:ext cx="10972800" cy="781050"/>
-          </a:xfrm>
-          <a:prstGeom xmlns:a="http://schemas.openxmlformats.org/drawingml/2006/main" prst="rect">
-            <a:avLst/>
-          </a:prstGeom>
-          <a:noFill xmlns:a="http://schemas.openxmlformats.org/drawingml/2006/main"/>
-          <a:ln xmlns:a="http://schemas.openxmlformats.org/drawingml/2006/main" w="0">
-            <a:noFill/>
-            <a:prstDash val="solid"/>
-          </a:ln>
-        </p:spPr>
-        <p:txBody>
-          <a:bodyPr xmlns:a="http://schemas.openxmlformats.org/drawingml/2006/main" lIns="0" tIns="0" rIns="0" bIns="0" anchor="ctr"/>
-          <a:lstStyle xmlns:a="http://schemas.openxmlformats.org/drawingml/2006/main"/>
-          <a:p xmlns:a="http://schemas.openxmlformats.org/drawingml/2006/main">
-            <a:pPr>
-              <a:defRPr sz="2550" b="0">
-                <a:solidFill>
-                  <a:srgbClr val="152B3A"/>
-                </a:solidFill>
-              </a:defRPr>
-            </a:pPr>
-            <a:r>
-              <a:rPr sz="2550" b="0">
-                <a:solidFill>
-                  <a:srgbClr val="152B3A"/>
-                </a:solidFill>
+            <a:off x="1000125" y="4600575"/>
+            <a:ext cx="10382250" cy="1076325"/>
+          </a:xfrm>
+          <a:prstGeom xmlns:a="http://schemas.openxmlformats.org/drawingml/2006/main" prst="rect">
+            <a:avLst/>
+          </a:prstGeom>
+          <a:noFill xmlns:a="http://schemas.openxmlformats.org/drawingml/2006/main"/>
+          <a:ln xmlns:a="http://schemas.openxmlformats.org/drawingml/2006/main" w="0">
+            <a:noFill/>
+            <a:prstDash val="solid"/>
+          </a:ln>
+        </p:spPr>
+        <p:txBody>
+          <a:bodyPr xmlns:a="http://schemas.openxmlformats.org/drawingml/2006/main" lIns="0" tIns="0" rIns="0" bIns="0" anchor="ctr">
+            <a:noAutofit/>
+          </a:bodyPr>
+          <a:lstStyle xmlns:a="http://schemas.openxmlformats.org/drawingml/2006/main"/>
+          <a:p xmlns:a="http://schemas.openxmlformats.org/drawingml/2006/main">
+            <a:pPr algn="l">
+              <a:buNone/>
+              <a:defRPr sz="2625" b="0">
+                <a:solidFill>
+                  <a:srgbClr val="152B3A"/>
+                </a:solidFill>
+                <a:latin typeface="Calibri"/>
+                <a:ea typeface="Calibri"/>
+                <a:cs typeface="Calibri"/>
+              </a:defRPr>
+            </a:pPr>
+            <a:r>
+              <a:rPr sz="2625" b="0">
+                <a:solidFill>
+                  <a:srgbClr val="152B3A"/>
+                </a:solidFill>
+                <a:latin typeface="Calibri"/>
+                <a:ea typeface="Calibri"/>
+                <a:cs typeface="Calibri"/>
               </a:rPr>
               <a:t>3   Model the changing view.</a:t>
             </a:r>
           </a:p>
         </p:txBody>
+      </p:sp>
+      <p:sp>
+        <p:nvSpPr>
+          <p:cNvPr id="11" name="row-rule-0">
+            <a:extLst xmlns:a="http://schemas.openxmlformats.org/drawingml/2006/main">
+              <a:ext uri="{FF2B5EF4-FFF2-40B4-BE49-F238E27FC236}">
+                <a16:creationId xmlns:a16="http://schemas.microsoft.com/office/drawing/2014/main" id="{AB58FEA0-5B5B-4D01-870C-026FFB77A876}"/>
+              </a:ext>
+            </a:extLst>
+          </p:cNvPr>
+          <p:cNvSpPr>
+            <a:spLocks xmlns:a="http://schemas.openxmlformats.org/drawingml/2006/main" noGrp="1"/>
+          </p:cNvSpPr>
+          <p:nvPr/>
+        </p:nvSpPr>
+        <p:spPr>
+          <a:xfrm xmlns:a="http://schemas.openxmlformats.org/drawingml/2006/main">
+            <a:off x="1000125" y="3419475"/>
+            <a:ext cx="10334625" cy="0"/>
+          </a:xfrm>
+          <a:prstGeom xmlns:a="http://schemas.openxmlformats.org/drawingml/2006/main" prst="line">
+            <a:avLst/>
+          </a:prstGeom>
+          <a:noFill xmlns:a="http://schemas.openxmlformats.org/drawingml/2006/main"/>
+          <a:ln xmlns:a="http://schemas.openxmlformats.org/drawingml/2006/main" w="9525">
+            <a:solidFill>
+              <a:srgbClr val="CEDBD3"/>
+            </a:solidFill>
+          </a:ln>
+        </p:spPr>
+      </p:sp>
+      <p:sp>
+        <p:nvSpPr>
+          <p:cNvPr id="12" name="row-rule-1">
+            <a:extLst xmlns:a="http://schemas.openxmlformats.org/drawingml/2006/main">
+              <a:ext uri="{FF2B5EF4-FFF2-40B4-BE49-F238E27FC236}">
+                <a16:creationId xmlns:a16="http://schemas.microsoft.com/office/drawing/2014/main" id="{DCE38B15-D865-44B5-A505-D8B83C6FDD4B}"/>
+              </a:ext>
+            </a:extLst>
+          </p:cNvPr>
+          <p:cNvSpPr>
+            <a:spLocks xmlns:a="http://schemas.openxmlformats.org/drawingml/2006/main" noGrp="1"/>
+          </p:cNvSpPr>
+          <p:nvPr/>
+        </p:nvSpPr>
+        <p:spPr>
+          <a:xfrm xmlns:a="http://schemas.openxmlformats.org/drawingml/2006/main">
+            <a:off x="1000125" y="4552950"/>
+            <a:ext cx="10334625" cy="0"/>
+          </a:xfrm>
+          <a:prstGeom xmlns:a="http://schemas.openxmlformats.org/drawingml/2006/main" prst="line">
+            <a:avLst/>
+          </a:prstGeom>
+          <a:noFill xmlns:a="http://schemas.openxmlformats.org/drawingml/2006/main"/>
+          <a:ln xmlns:a="http://schemas.openxmlformats.org/drawingml/2006/main" w="9525">
+            <a:solidFill>
+              <a:srgbClr val="CEDBD3"/>
+            </a:solidFill>
+          </a:ln>
+        </p:spPr>
       </p:sp>
     </p:spTree>
     <p:extLst>
@@ -5538,7 +6976,7 @@
     <p:bg>
       <p:bgPr>
         <a:solidFill xmlns:a="http://schemas.openxmlformats.org/drawingml/2006/main">
-          <a:srgbClr val="F5F1E8"/>
+          <a:srgbClr val="FAF9F5"/>
         </a:solidFill>
       </p:bgPr>
     </p:bg>
@@ -5567,8 +7005,8 @@
         </p:nvSpPr>
         <p:spPr>
           <a:xfrm xmlns:a="http://schemas.openxmlformats.org/drawingml/2006/main">
-            <a:off x="609600" y="552450"/>
-            <a:ext cx="781050" cy="57150"/>
+            <a:off x="609600" y="733425"/>
+            <a:ext cx="781050" cy="38100"/>
           </a:xfrm>
           <a:prstGeom xmlns:a="http://schemas.openxmlformats.org/drawingml/2006/main" prst="rect">
             <a:avLst/>
@@ -5598,34 +7036,43 @@
         </p:nvSpPr>
         <p:spPr>
           <a:xfrm xmlns:a="http://schemas.openxmlformats.org/drawingml/2006/main">
-            <a:off x="609600" y="762000"/>
-            <a:ext cx="8572500" cy="285750"/>
-          </a:xfrm>
-          <a:prstGeom xmlns:a="http://schemas.openxmlformats.org/drawingml/2006/main" prst="rect">
-            <a:avLst/>
-          </a:prstGeom>
-          <a:noFill xmlns:a="http://schemas.openxmlformats.org/drawingml/2006/main"/>
-          <a:ln xmlns:a="http://schemas.openxmlformats.org/drawingml/2006/main" w="0">
-            <a:noFill/>
-            <a:prstDash val="solid"/>
-          </a:ln>
-        </p:spPr>
-        <p:txBody>
-          <a:bodyPr xmlns:a="http://schemas.openxmlformats.org/drawingml/2006/main" lIns="0" tIns="0" rIns="0" bIns="0" anchor="ctr"/>
-          <a:lstStyle xmlns:a="http://schemas.openxmlformats.org/drawingml/2006/main"/>
-          <a:p xmlns:a="http://schemas.openxmlformats.org/drawingml/2006/main">
-            <a:pPr>
-              <a:defRPr sz="1500" b="1">
+            <a:off x="609600" y="342900"/>
+            <a:ext cx="9334500" cy="304800"/>
+          </a:xfrm>
+          <a:prstGeom xmlns:a="http://schemas.openxmlformats.org/drawingml/2006/main" prst="rect">
+            <a:avLst/>
+          </a:prstGeom>
+          <a:noFill xmlns:a="http://schemas.openxmlformats.org/drawingml/2006/main"/>
+          <a:ln xmlns:a="http://schemas.openxmlformats.org/drawingml/2006/main" w="0">
+            <a:noFill/>
+            <a:prstDash val="solid"/>
+          </a:ln>
+        </p:spPr>
+        <p:txBody>
+          <a:bodyPr xmlns:a="http://schemas.openxmlformats.org/drawingml/2006/main" lIns="0" tIns="0" rIns="0" bIns="0" anchor="ctr">
+            <a:noAutofit/>
+          </a:bodyPr>
+          <a:lstStyle xmlns:a="http://schemas.openxmlformats.org/drawingml/2006/main"/>
+          <a:p xmlns:a="http://schemas.openxmlformats.org/drawingml/2006/main">
+            <a:pPr algn="l">
+              <a:buNone/>
+              <a:defRPr sz="1350" b="1">
                 <a:solidFill>
                   <a:srgbClr val="28685E"/>
                 </a:solidFill>
-              </a:defRPr>
-            </a:pPr>
-            <a:r>
-              <a:rPr sz="1500" b="1">
+                <a:latin typeface="Calibri"/>
+                <a:ea typeface="Calibri"/>
+                <a:cs typeface="Calibri"/>
+              </a:defRPr>
+            </a:pPr>
+            <a:r>
+              <a:rPr sz="1350" b="1">
                 <a:solidFill>
                   <a:srgbClr val="28685E"/>
                 </a:solidFill>
+                <a:latin typeface="Calibri"/>
+                <a:ea typeface="Calibri"/>
+                <a:cs typeface="Calibri"/>
               </a:rPr>
               <a:t>MADE BY MATT  /  GROW SCIENCE</a:t>
             </a:r>
@@ -5648,34 +7095,43 @@
         </p:nvSpPr>
         <p:spPr>
           <a:xfrm xmlns:a="http://schemas.openxmlformats.org/drawingml/2006/main">
-            <a:off x="609600" y="1352550"/>
-            <a:ext cx="10972800" cy="952500"/>
-          </a:xfrm>
-          <a:prstGeom xmlns:a="http://schemas.openxmlformats.org/drawingml/2006/main" prst="rect">
-            <a:avLst/>
-          </a:prstGeom>
-          <a:noFill xmlns:a="http://schemas.openxmlformats.org/drawingml/2006/main"/>
-          <a:ln xmlns:a="http://schemas.openxmlformats.org/drawingml/2006/main" w="0">
-            <a:noFill/>
-            <a:prstDash val="solid"/>
-          </a:ln>
-        </p:spPr>
-        <p:txBody>
-          <a:bodyPr xmlns:a="http://schemas.openxmlformats.org/drawingml/2006/main" lIns="0" tIns="0" rIns="0" bIns="0" anchor="ctr"/>
-          <a:lstStyle xmlns:a="http://schemas.openxmlformats.org/drawingml/2006/main"/>
-          <a:p xmlns:a="http://schemas.openxmlformats.org/drawingml/2006/main">
-            <a:pPr>
-              <a:defRPr sz="3750" b="1">
-                <a:solidFill>
-                  <a:srgbClr val="152B3A"/>
-                </a:solidFill>
-              </a:defRPr>
-            </a:pPr>
-            <a:r>
-              <a:rPr sz="3750" b="1">
-                <a:solidFill>
-                  <a:srgbClr val="152B3A"/>
-                </a:solidFill>
+            <a:off x="609600" y="990600"/>
+            <a:ext cx="10972800" cy="1000125"/>
+          </a:xfrm>
+          <a:prstGeom xmlns:a="http://schemas.openxmlformats.org/drawingml/2006/main" prst="rect">
+            <a:avLst/>
+          </a:prstGeom>
+          <a:noFill xmlns:a="http://schemas.openxmlformats.org/drawingml/2006/main"/>
+          <a:ln xmlns:a="http://schemas.openxmlformats.org/drawingml/2006/main" w="0">
+            <a:noFill/>
+            <a:prstDash val="solid"/>
+          </a:ln>
+        </p:spPr>
+        <p:txBody>
+          <a:bodyPr xmlns:a="http://schemas.openxmlformats.org/drawingml/2006/main" lIns="0" tIns="0" rIns="0" bIns="0" anchor="ctr">
+            <a:noAutofit/>
+          </a:bodyPr>
+          <a:lstStyle xmlns:a="http://schemas.openxmlformats.org/drawingml/2006/main"/>
+          <a:p xmlns:a="http://schemas.openxmlformats.org/drawingml/2006/main">
+            <a:pPr algn="l">
+              <a:buNone/>
+              <a:defRPr sz="3675" b="1">
+                <a:solidFill>
+                  <a:srgbClr val="152B3A"/>
+                </a:solidFill>
+                <a:latin typeface="Calibri"/>
+                <a:ea typeface="Calibri"/>
+                <a:cs typeface="Calibri"/>
+              </a:defRPr>
+            </a:pPr>
+            <a:r>
+              <a:rPr sz="3675" b="1">
+                <a:solidFill>
+                  <a:srgbClr val="152B3A"/>
+                </a:solidFill>
+                <a:latin typeface="Calibri"/>
+                <a:ea typeface="Calibri"/>
+                <a:cs typeface="Calibri"/>
               </a:rPr>
               <a:t>Moonlight begins at the Sun</a:t>
             </a:r>
@@ -5698,14 +7154,14 @@
         </p:nvSpPr>
         <p:spPr>
           <a:xfrm xmlns:a="http://schemas.openxmlformats.org/drawingml/2006/main">
-            <a:off x="609600" y="6219825"/>
+            <a:off x="609600" y="6191250"/>
             <a:ext cx="10972800" cy="9525"/>
           </a:xfrm>
           <a:prstGeom xmlns:a="http://schemas.openxmlformats.org/drawingml/2006/main" prst="rect">
             <a:avLst/>
           </a:prstGeom>
           <a:solidFill xmlns:a="http://schemas.openxmlformats.org/drawingml/2006/main">
-            <a:srgbClr val="DCE7DD"/>
+            <a:srgbClr val="CEDBD3"/>
           </a:solidFill>
           <a:ln xmlns:a="http://schemas.openxmlformats.org/drawingml/2006/main" w="0">
             <a:noFill/>
@@ -5729,34 +7185,43 @@
         </p:nvSpPr>
         <p:spPr>
           <a:xfrm xmlns:a="http://schemas.openxmlformats.org/drawingml/2006/main">
-            <a:off x="609600" y="6381750"/>
-            <a:ext cx="9906000" cy="228600"/>
-          </a:xfrm>
-          <a:prstGeom xmlns:a="http://schemas.openxmlformats.org/drawingml/2006/main" prst="rect">
-            <a:avLst/>
-          </a:prstGeom>
-          <a:noFill xmlns:a="http://schemas.openxmlformats.org/drawingml/2006/main"/>
-          <a:ln xmlns:a="http://schemas.openxmlformats.org/drawingml/2006/main" w="0">
-            <a:noFill/>
-            <a:prstDash val="solid"/>
-          </a:ln>
-        </p:spPr>
-        <p:txBody>
-          <a:bodyPr xmlns:a="http://schemas.openxmlformats.org/drawingml/2006/main" lIns="0" tIns="0" rIns="0" bIns="0" anchor="ctr"/>
-          <a:lstStyle xmlns:a="http://schemas.openxmlformats.org/drawingml/2006/main"/>
-          <a:p xmlns:a="http://schemas.openxmlformats.org/drawingml/2006/main">
-            <a:pPr>
-              <a:defRPr sz="1275" b="0">
+            <a:off x="609600" y="6419850"/>
+            <a:ext cx="9525000" cy="219075"/>
+          </a:xfrm>
+          <a:prstGeom xmlns:a="http://schemas.openxmlformats.org/drawingml/2006/main" prst="rect">
+            <a:avLst/>
+          </a:prstGeom>
+          <a:noFill xmlns:a="http://schemas.openxmlformats.org/drawingml/2006/main"/>
+          <a:ln xmlns:a="http://schemas.openxmlformats.org/drawingml/2006/main" w="0">
+            <a:noFill/>
+            <a:prstDash val="solid"/>
+          </a:ln>
+        </p:spPr>
+        <p:txBody>
+          <a:bodyPr xmlns:a="http://schemas.openxmlformats.org/drawingml/2006/main" lIns="0" tIns="0" rIns="0" bIns="0" anchor="ctr">
+            <a:noAutofit/>
+          </a:bodyPr>
+          <a:lstStyle xmlns:a="http://schemas.openxmlformats.org/drawingml/2006/main"/>
+          <a:p xmlns:a="http://schemas.openxmlformats.org/drawingml/2006/main">
+            <a:pPr algn="l">
+              <a:buNone/>
+              <a:defRPr sz="1200" b="0">
                 <a:solidFill>
                   <a:srgbClr val="50616B"/>
                 </a:solidFill>
-              </a:defRPr>
-            </a:pPr>
-            <a:r>
-              <a:rPr sz="1275" b="0">
+                <a:latin typeface="Calibri"/>
+                <a:ea typeface="Calibri"/>
+                <a:cs typeface="Calibri"/>
+              </a:defRPr>
+            </a:pPr>
+            <a:r>
+              <a:rPr sz="1200" b="0">
                 <a:solidFill>
                   <a:srgbClr val="50616B"/>
                 </a:solidFill>
+                <a:latin typeface="Calibri"/>
+                <a:ea typeface="Calibri"/>
+                <a:cs typeface="Calibri"/>
               </a:rPr>
               <a:t>AUTUMN 1  ·  WEEK 7  ·  LESSON A</a:t>
             </a:r>
@@ -5779,27 +7244,33 @@
         </p:nvSpPr>
         <p:spPr>
           <a:xfrm xmlns:a="http://schemas.openxmlformats.org/drawingml/2006/main">
-            <a:off x="11106150" y="6362700"/>
-            <a:ext cx="476250" cy="238125"/>
-          </a:xfrm>
-          <a:prstGeom xmlns:a="http://schemas.openxmlformats.org/drawingml/2006/main" prst="rect">
-            <a:avLst/>
-          </a:prstGeom>
-          <a:noFill xmlns:a="http://schemas.openxmlformats.org/drawingml/2006/main"/>
-          <a:ln xmlns:a="http://schemas.openxmlformats.org/drawingml/2006/main" w="0">
-            <a:noFill/>
-            <a:prstDash val="solid"/>
-          </a:ln>
-        </p:spPr>
-        <p:txBody>
-          <a:bodyPr xmlns:a="http://schemas.openxmlformats.org/drawingml/2006/main" lIns="0" tIns="0" rIns="0" bIns="0" anchor="ctr"/>
-          <a:lstStyle xmlns:a="http://schemas.openxmlformats.org/drawingml/2006/main"/>
-          <a:p xmlns:a="http://schemas.openxmlformats.org/drawingml/2006/main">
-            <a:pPr>
+            <a:off x="11106150" y="6400800"/>
+            <a:ext cx="476250" cy="247650"/>
+          </a:xfrm>
+          <a:prstGeom xmlns:a="http://schemas.openxmlformats.org/drawingml/2006/main" prst="rect">
+            <a:avLst/>
+          </a:prstGeom>
+          <a:noFill xmlns:a="http://schemas.openxmlformats.org/drawingml/2006/main"/>
+          <a:ln xmlns:a="http://schemas.openxmlformats.org/drawingml/2006/main" w="0">
+            <a:noFill/>
+            <a:prstDash val="solid"/>
+          </a:ln>
+        </p:spPr>
+        <p:txBody>
+          <a:bodyPr xmlns:a="http://schemas.openxmlformats.org/drawingml/2006/main" lIns="0" tIns="0" rIns="0" bIns="0" anchor="ctr">
+            <a:noAutofit/>
+          </a:bodyPr>
+          <a:lstStyle xmlns:a="http://schemas.openxmlformats.org/drawingml/2006/main"/>
+          <a:p xmlns:a="http://schemas.openxmlformats.org/drawingml/2006/main">
+            <a:pPr algn="l">
+              <a:buNone/>
               <a:defRPr sz="1350" b="1">
                 <a:solidFill>
                   <a:srgbClr val="28685E"/>
                 </a:solidFill>
+                <a:latin typeface="Calibri"/>
+                <a:ea typeface="Calibri"/>
+                <a:cs typeface="Calibri"/>
               </a:defRPr>
             </a:pPr>
             <a:r>
@@ -5807,6 +7278,9 @@
                 <a:solidFill>
                   <a:srgbClr val="28685E"/>
                 </a:solidFill>
+                <a:latin typeface="Calibri"/>
+                <a:ea typeface="Calibri"/>
+                <a:cs typeface="Calibri"/>
               </a:rPr>
               <a:t>04</a:t>
             </a:r>
@@ -6007,6 +7481,7 @@
           <a:lstStyle xmlns:a="http://schemas.openxmlformats.org/drawingml/2006/main"/>
           <a:p xmlns:a="http://schemas.openxmlformats.org/drawingml/2006/main">
             <a:pPr>
+              <a:buNone/>
               <a:defRPr sz="1950" b="1">
                 <a:solidFill>
                   <a:srgbClr val="152B3A"/>
@@ -6057,6 +7532,7 @@
           <a:lstStyle xmlns:a="http://schemas.openxmlformats.org/drawingml/2006/main"/>
           <a:p xmlns:a="http://schemas.openxmlformats.org/drawingml/2006/main">
             <a:pPr>
+              <a:buNone/>
               <a:defRPr sz="1950" b="1">
                 <a:solidFill>
                   <a:srgbClr val="152B3A"/>
@@ -6107,6 +7583,7 @@
           <a:lstStyle xmlns:a="http://schemas.openxmlformats.org/drawingml/2006/main"/>
           <a:p xmlns:a="http://schemas.openxmlformats.org/drawingml/2006/main">
             <a:pPr>
+              <a:buNone/>
               <a:defRPr sz="1950" b="1">
                 <a:solidFill>
                   <a:srgbClr val="152B3A"/>
@@ -6157,6 +7634,7 @@
           <a:lstStyle xmlns:a="http://schemas.openxmlformats.org/drawingml/2006/main"/>
           <a:p xmlns:a="http://schemas.openxmlformats.org/drawingml/2006/main">
             <a:pPr>
+              <a:buNone/>
               <a:defRPr sz="1800" b="1">
                 <a:solidFill>
                   <a:srgbClr val="28685E"/>
@@ -6174,6 +7652,7 @@
           </a:p>
           <a:p xmlns:a="http://schemas.openxmlformats.org/drawingml/2006/main">
             <a:pPr>
+              <a:buNone/>
               <a:defRPr sz="1800" b="1">
                 <a:solidFill>
                   <a:srgbClr val="28685E"/>
@@ -6224,6 +7703,7 @@
           <a:lstStyle xmlns:a="http://schemas.openxmlformats.org/drawingml/2006/main"/>
           <a:p xmlns:a="http://schemas.openxmlformats.org/drawingml/2006/main">
             <a:pPr>
+              <a:buNone/>
               <a:defRPr sz="1800" b="1">
                 <a:solidFill>
                   <a:srgbClr val="152B3A"/>
@@ -6257,34 +7737,43 @@
         </p:nvSpPr>
         <p:spPr>
           <a:xfrm xmlns:a="http://schemas.openxmlformats.org/drawingml/2006/main">
-            <a:off x="6667500" y="2714625"/>
-            <a:ext cx="4857750" cy="1762125"/>
-          </a:xfrm>
-          <a:prstGeom xmlns:a="http://schemas.openxmlformats.org/drawingml/2006/main" prst="rect">
-            <a:avLst/>
-          </a:prstGeom>
-          <a:noFill xmlns:a="http://schemas.openxmlformats.org/drawingml/2006/main"/>
-          <a:ln xmlns:a="http://schemas.openxmlformats.org/drawingml/2006/main" w="0">
-            <a:noFill/>
-            <a:prstDash val="solid"/>
-          </a:ln>
-        </p:spPr>
-        <p:txBody>
-          <a:bodyPr xmlns:a="http://schemas.openxmlformats.org/drawingml/2006/main" lIns="0" tIns="0" rIns="0" bIns="0" anchor="ctr"/>
-          <a:lstStyle xmlns:a="http://schemas.openxmlformats.org/drawingml/2006/main"/>
-          <a:p xmlns:a="http://schemas.openxmlformats.org/drawingml/2006/main">
-            <a:pPr>
-              <a:defRPr sz="2550" b="1">
-                <a:solidFill>
-                  <a:srgbClr val="152B3A"/>
-                </a:solidFill>
-              </a:defRPr>
-            </a:pPr>
-            <a:r>
-              <a:rPr sz="2550" b="1">
-                <a:solidFill>
-                  <a:srgbClr val="152B3A"/>
-                </a:solidFill>
+            <a:off x="6667500" y="2476500"/>
+            <a:ext cx="4914900" cy="2095500"/>
+          </a:xfrm>
+          <a:prstGeom xmlns:a="http://schemas.openxmlformats.org/drawingml/2006/main" prst="rect">
+            <a:avLst/>
+          </a:prstGeom>
+          <a:noFill xmlns:a="http://schemas.openxmlformats.org/drawingml/2006/main"/>
+          <a:ln xmlns:a="http://schemas.openxmlformats.org/drawingml/2006/main" w="0">
+            <a:noFill/>
+            <a:prstDash val="solid"/>
+          </a:ln>
+        </p:spPr>
+        <p:txBody>
+          <a:bodyPr xmlns:a="http://schemas.openxmlformats.org/drawingml/2006/main" lIns="0" tIns="0" rIns="0" bIns="0" anchor="ctr">
+            <a:noAutofit/>
+          </a:bodyPr>
+          <a:lstStyle xmlns:a="http://schemas.openxmlformats.org/drawingml/2006/main"/>
+          <a:p xmlns:a="http://schemas.openxmlformats.org/drawingml/2006/main">
+            <a:pPr algn="l">
+              <a:buNone/>
+              <a:defRPr sz="2625" b="1">
+                <a:solidFill>
+                  <a:srgbClr val="152B3A"/>
+                </a:solidFill>
+                <a:latin typeface="Calibri"/>
+                <a:ea typeface="Calibri"/>
+                <a:cs typeface="Calibri"/>
+              </a:defRPr>
+            </a:pPr>
+            <a:r>
+              <a:rPr sz="2625" b="1">
+                <a:solidFill>
+                  <a:srgbClr val="152B3A"/>
+                </a:solidFill>
+                <a:latin typeface="Calibri"/>
+                <a:ea typeface="Calibri"/>
+                <a:cs typeface="Calibri"/>
               </a:rPr>
               <a:t>Sunlight reaches the Moon. Some light is reflected to us.</a:t>
             </a:r>
@@ -6307,27 +7796,33 @@
         </p:nvSpPr>
         <p:spPr>
           <a:xfrm xmlns:a="http://schemas.openxmlformats.org/drawingml/2006/main">
-            <a:off x="6667500" y="4714875"/>
-            <a:ext cx="4857750" cy="1000125"/>
-          </a:xfrm>
-          <a:prstGeom xmlns:a="http://schemas.openxmlformats.org/drawingml/2006/main" prst="rect">
-            <a:avLst/>
-          </a:prstGeom>
-          <a:noFill xmlns:a="http://schemas.openxmlformats.org/drawingml/2006/main"/>
-          <a:ln xmlns:a="http://schemas.openxmlformats.org/drawingml/2006/main" w="0">
-            <a:noFill/>
-            <a:prstDash val="solid"/>
-          </a:ln>
-        </p:spPr>
-        <p:txBody>
-          <a:bodyPr xmlns:a="http://schemas.openxmlformats.org/drawingml/2006/main" lIns="0" tIns="0" rIns="0" bIns="0" anchor="ctr"/>
-          <a:lstStyle xmlns:a="http://schemas.openxmlformats.org/drawingml/2006/main"/>
-          <a:p xmlns:a="http://schemas.openxmlformats.org/drawingml/2006/main">
-            <a:pPr>
+            <a:off x="6667500" y="4781550"/>
+            <a:ext cx="4914900" cy="1057275"/>
+          </a:xfrm>
+          <a:prstGeom xmlns:a="http://schemas.openxmlformats.org/drawingml/2006/main" prst="rect">
+            <a:avLst/>
+          </a:prstGeom>
+          <a:noFill xmlns:a="http://schemas.openxmlformats.org/drawingml/2006/main"/>
+          <a:ln xmlns:a="http://schemas.openxmlformats.org/drawingml/2006/main" w="0">
+            <a:noFill/>
+            <a:prstDash val="solid"/>
+          </a:ln>
+        </p:spPr>
+        <p:txBody>
+          <a:bodyPr xmlns:a="http://schemas.openxmlformats.org/drawingml/2006/main" lIns="0" tIns="0" rIns="0" bIns="0" anchor="ctr">
+            <a:noAutofit/>
+          </a:bodyPr>
+          <a:lstStyle xmlns:a="http://schemas.openxmlformats.org/drawingml/2006/main"/>
+          <a:p xmlns:a="http://schemas.openxmlformats.org/drawingml/2006/main">
+            <a:pPr algn="l">
+              <a:buNone/>
               <a:defRPr sz="2175" b="0">
                 <a:solidFill>
                   <a:srgbClr val="28685E"/>
                 </a:solidFill>
+                <a:latin typeface="Calibri"/>
+                <a:ea typeface="Calibri"/>
+                <a:cs typeface="Calibri"/>
               </a:defRPr>
             </a:pPr>
             <a:r>
@@ -6335,8 +7830,35 @@
                 <a:solidFill>
                   <a:srgbClr val="28685E"/>
                 </a:solidFill>
-              </a:rPr>
-              <a:t>The Moon does not make its own visible light.</a:t>
+                <a:latin typeface="Calibri"/>
+                <a:ea typeface="Calibri"/>
+                <a:cs typeface="Calibri"/>
+              </a:rPr>
+              <a:t>The Moon does not make</a:t>
+            </a:r>
+          </a:p>
+          <a:p xmlns:a="http://schemas.openxmlformats.org/drawingml/2006/main">
+            <a:pPr algn="l">
+              <a:buNone/>
+              <a:defRPr sz="2175" b="0">
+                <a:solidFill>
+                  <a:srgbClr val="28685E"/>
+                </a:solidFill>
+                <a:latin typeface="Calibri"/>
+                <a:ea typeface="Calibri"/>
+                <a:cs typeface="Calibri"/>
+              </a:defRPr>
+            </a:pPr>
+            <a:r>
+              <a:rPr sz="2175" b="0">
+                <a:solidFill>
+                  <a:srgbClr val="28685E"/>
+                </a:solidFill>
+                <a:latin typeface="Calibri"/>
+                <a:ea typeface="Calibri"/>
+                <a:cs typeface="Calibri"/>
+              </a:rPr>
+              <a:t>its own visible light.</a:t>
             </a:r>
           </a:p>
         </p:txBody>
@@ -6357,7 +7879,7 @@
     <p:bg>
       <p:bgPr>
         <a:solidFill xmlns:a="http://schemas.openxmlformats.org/drawingml/2006/main">
-          <a:srgbClr val="F5F1E8"/>
+          <a:srgbClr val="FAF9F5"/>
         </a:solidFill>
       </p:bgPr>
     </p:bg>
@@ -6386,8 +7908,8 @@
         </p:nvSpPr>
         <p:spPr>
           <a:xfrm xmlns:a="http://schemas.openxmlformats.org/drawingml/2006/main">
-            <a:off x="609600" y="552450"/>
-            <a:ext cx="781050" cy="57150"/>
+            <a:off x="609600" y="733425"/>
+            <a:ext cx="781050" cy="38100"/>
           </a:xfrm>
           <a:prstGeom xmlns:a="http://schemas.openxmlformats.org/drawingml/2006/main" prst="rect">
             <a:avLst/>
@@ -6417,34 +7939,43 @@
         </p:nvSpPr>
         <p:spPr>
           <a:xfrm xmlns:a="http://schemas.openxmlformats.org/drawingml/2006/main">
-            <a:off x="609600" y="762000"/>
-            <a:ext cx="8572500" cy="285750"/>
-          </a:xfrm>
-          <a:prstGeom xmlns:a="http://schemas.openxmlformats.org/drawingml/2006/main" prst="rect">
-            <a:avLst/>
-          </a:prstGeom>
-          <a:noFill xmlns:a="http://schemas.openxmlformats.org/drawingml/2006/main"/>
-          <a:ln xmlns:a="http://schemas.openxmlformats.org/drawingml/2006/main" w="0">
-            <a:noFill/>
-            <a:prstDash val="solid"/>
-          </a:ln>
-        </p:spPr>
-        <p:txBody>
-          <a:bodyPr xmlns:a="http://schemas.openxmlformats.org/drawingml/2006/main" lIns="0" tIns="0" rIns="0" bIns="0" anchor="ctr"/>
-          <a:lstStyle xmlns:a="http://schemas.openxmlformats.org/drawingml/2006/main"/>
-          <a:p xmlns:a="http://schemas.openxmlformats.org/drawingml/2006/main">
-            <a:pPr>
-              <a:defRPr sz="1500" b="1">
+            <a:off x="609600" y="342900"/>
+            <a:ext cx="9334500" cy="304800"/>
+          </a:xfrm>
+          <a:prstGeom xmlns:a="http://schemas.openxmlformats.org/drawingml/2006/main" prst="rect">
+            <a:avLst/>
+          </a:prstGeom>
+          <a:noFill xmlns:a="http://schemas.openxmlformats.org/drawingml/2006/main"/>
+          <a:ln xmlns:a="http://schemas.openxmlformats.org/drawingml/2006/main" w="0">
+            <a:noFill/>
+            <a:prstDash val="solid"/>
+          </a:ln>
+        </p:spPr>
+        <p:txBody>
+          <a:bodyPr xmlns:a="http://schemas.openxmlformats.org/drawingml/2006/main" lIns="0" tIns="0" rIns="0" bIns="0" anchor="ctr">
+            <a:noAutofit/>
+          </a:bodyPr>
+          <a:lstStyle xmlns:a="http://schemas.openxmlformats.org/drawingml/2006/main"/>
+          <a:p xmlns:a="http://schemas.openxmlformats.org/drawingml/2006/main">
+            <a:pPr algn="l">
+              <a:buNone/>
+              <a:defRPr sz="1350" b="1">
                 <a:solidFill>
                   <a:srgbClr val="28685E"/>
                 </a:solidFill>
-              </a:defRPr>
-            </a:pPr>
-            <a:r>
-              <a:rPr sz="1500" b="1">
+                <a:latin typeface="Calibri"/>
+                <a:ea typeface="Calibri"/>
+                <a:cs typeface="Calibri"/>
+              </a:defRPr>
+            </a:pPr>
+            <a:r>
+              <a:rPr sz="1350" b="1">
                 <a:solidFill>
                   <a:srgbClr val="28685E"/>
                 </a:solidFill>
+                <a:latin typeface="Calibri"/>
+                <a:ea typeface="Calibri"/>
+                <a:cs typeface="Calibri"/>
               </a:rPr>
               <a:t>MADE BY MATT  /  GROW SCIENCE</a:t>
             </a:r>
@@ -6467,34 +7998,43 @@
         </p:nvSpPr>
         <p:spPr>
           <a:xfrm xmlns:a="http://schemas.openxmlformats.org/drawingml/2006/main">
-            <a:off x="609600" y="1352550"/>
-            <a:ext cx="10972800" cy="952500"/>
-          </a:xfrm>
-          <a:prstGeom xmlns:a="http://schemas.openxmlformats.org/drawingml/2006/main" prst="rect">
-            <a:avLst/>
-          </a:prstGeom>
-          <a:noFill xmlns:a="http://schemas.openxmlformats.org/drawingml/2006/main"/>
-          <a:ln xmlns:a="http://schemas.openxmlformats.org/drawingml/2006/main" w="0">
-            <a:noFill/>
-            <a:prstDash val="solid"/>
-          </a:ln>
-        </p:spPr>
-        <p:txBody>
-          <a:bodyPr xmlns:a="http://schemas.openxmlformats.org/drawingml/2006/main" lIns="0" tIns="0" rIns="0" bIns="0" anchor="ctr"/>
-          <a:lstStyle xmlns:a="http://schemas.openxmlformats.org/drawingml/2006/main"/>
-          <a:p xmlns:a="http://schemas.openxmlformats.org/drawingml/2006/main">
-            <a:pPr>
-              <a:defRPr sz="3750" b="1">
-                <a:solidFill>
-                  <a:srgbClr val="152B3A"/>
-                </a:solidFill>
-              </a:defRPr>
-            </a:pPr>
-            <a:r>
-              <a:rPr sz="3750" b="1">
-                <a:solidFill>
-                  <a:srgbClr val="152B3A"/>
-                </a:solidFill>
+            <a:off x="609600" y="990600"/>
+            <a:ext cx="10972800" cy="1000125"/>
+          </a:xfrm>
+          <a:prstGeom xmlns:a="http://schemas.openxmlformats.org/drawingml/2006/main" prst="rect">
+            <a:avLst/>
+          </a:prstGeom>
+          <a:noFill xmlns:a="http://schemas.openxmlformats.org/drawingml/2006/main"/>
+          <a:ln xmlns:a="http://schemas.openxmlformats.org/drawingml/2006/main" w="0">
+            <a:noFill/>
+            <a:prstDash val="solid"/>
+          </a:ln>
+        </p:spPr>
+        <p:txBody>
+          <a:bodyPr xmlns:a="http://schemas.openxmlformats.org/drawingml/2006/main" lIns="0" tIns="0" rIns="0" bIns="0" anchor="ctr">
+            <a:noAutofit/>
+          </a:bodyPr>
+          <a:lstStyle xmlns:a="http://schemas.openxmlformats.org/drawingml/2006/main"/>
+          <a:p xmlns:a="http://schemas.openxmlformats.org/drawingml/2006/main">
+            <a:pPr algn="l">
+              <a:buNone/>
+              <a:defRPr sz="3675" b="1">
+                <a:solidFill>
+                  <a:srgbClr val="152B3A"/>
+                </a:solidFill>
+                <a:latin typeface="Calibri"/>
+                <a:ea typeface="Calibri"/>
+                <a:cs typeface="Calibri"/>
+              </a:defRPr>
+            </a:pPr>
+            <a:r>
+              <a:rPr sz="3675" b="1">
+                <a:solidFill>
+                  <a:srgbClr val="152B3A"/>
+                </a:solidFill>
+                <a:latin typeface="Calibri"/>
+                <a:ea typeface="Calibri"/>
+                <a:cs typeface="Calibri"/>
               </a:rPr>
               <a:t>Keep the light direction fixed</a:t>
             </a:r>
@@ -6517,14 +8057,14 @@
         </p:nvSpPr>
         <p:spPr>
           <a:xfrm xmlns:a="http://schemas.openxmlformats.org/drawingml/2006/main">
-            <a:off x="609600" y="6219825"/>
+            <a:off x="609600" y="6191250"/>
             <a:ext cx="10972800" cy="9525"/>
           </a:xfrm>
           <a:prstGeom xmlns:a="http://schemas.openxmlformats.org/drawingml/2006/main" prst="rect">
             <a:avLst/>
           </a:prstGeom>
           <a:solidFill xmlns:a="http://schemas.openxmlformats.org/drawingml/2006/main">
-            <a:srgbClr val="DCE7DD"/>
+            <a:srgbClr val="CEDBD3"/>
           </a:solidFill>
           <a:ln xmlns:a="http://schemas.openxmlformats.org/drawingml/2006/main" w="0">
             <a:noFill/>
@@ -6548,34 +8088,43 @@
         </p:nvSpPr>
         <p:spPr>
           <a:xfrm xmlns:a="http://schemas.openxmlformats.org/drawingml/2006/main">
-            <a:off x="609600" y="6381750"/>
-            <a:ext cx="9906000" cy="228600"/>
-          </a:xfrm>
-          <a:prstGeom xmlns:a="http://schemas.openxmlformats.org/drawingml/2006/main" prst="rect">
-            <a:avLst/>
-          </a:prstGeom>
-          <a:noFill xmlns:a="http://schemas.openxmlformats.org/drawingml/2006/main"/>
-          <a:ln xmlns:a="http://schemas.openxmlformats.org/drawingml/2006/main" w="0">
-            <a:noFill/>
-            <a:prstDash val="solid"/>
-          </a:ln>
-        </p:spPr>
-        <p:txBody>
-          <a:bodyPr xmlns:a="http://schemas.openxmlformats.org/drawingml/2006/main" lIns="0" tIns="0" rIns="0" bIns="0" anchor="ctr"/>
-          <a:lstStyle xmlns:a="http://schemas.openxmlformats.org/drawingml/2006/main"/>
-          <a:p xmlns:a="http://schemas.openxmlformats.org/drawingml/2006/main">
-            <a:pPr>
-              <a:defRPr sz="1275" b="0">
+            <a:off x="609600" y="6419850"/>
+            <a:ext cx="9525000" cy="219075"/>
+          </a:xfrm>
+          <a:prstGeom xmlns:a="http://schemas.openxmlformats.org/drawingml/2006/main" prst="rect">
+            <a:avLst/>
+          </a:prstGeom>
+          <a:noFill xmlns:a="http://schemas.openxmlformats.org/drawingml/2006/main"/>
+          <a:ln xmlns:a="http://schemas.openxmlformats.org/drawingml/2006/main" w="0">
+            <a:noFill/>
+            <a:prstDash val="solid"/>
+          </a:ln>
+        </p:spPr>
+        <p:txBody>
+          <a:bodyPr xmlns:a="http://schemas.openxmlformats.org/drawingml/2006/main" lIns="0" tIns="0" rIns="0" bIns="0" anchor="ctr">
+            <a:noAutofit/>
+          </a:bodyPr>
+          <a:lstStyle xmlns:a="http://schemas.openxmlformats.org/drawingml/2006/main"/>
+          <a:p xmlns:a="http://schemas.openxmlformats.org/drawingml/2006/main">
+            <a:pPr algn="l">
+              <a:buNone/>
+              <a:defRPr sz="1200" b="0">
                 <a:solidFill>
                   <a:srgbClr val="50616B"/>
                 </a:solidFill>
-              </a:defRPr>
-            </a:pPr>
-            <a:r>
-              <a:rPr sz="1275" b="0">
+                <a:latin typeface="Calibri"/>
+                <a:ea typeface="Calibri"/>
+                <a:cs typeface="Calibri"/>
+              </a:defRPr>
+            </a:pPr>
+            <a:r>
+              <a:rPr sz="1200" b="0">
                 <a:solidFill>
                   <a:srgbClr val="50616B"/>
                 </a:solidFill>
+                <a:latin typeface="Calibri"/>
+                <a:ea typeface="Calibri"/>
+                <a:cs typeface="Calibri"/>
               </a:rPr>
               <a:t>AUTUMN 1  ·  WEEK 7  ·  LESSON A</a:t>
             </a:r>
@@ -6598,27 +8147,33 @@
         </p:nvSpPr>
         <p:spPr>
           <a:xfrm xmlns:a="http://schemas.openxmlformats.org/drawingml/2006/main">
-            <a:off x="11106150" y="6362700"/>
-            <a:ext cx="476250" cy="238125"/>
-          </a:xfrm>
-          <a:prstGeom xmlns:a="http://schemas.openxmlformats.org/drawingml/2006/main" prst="rect">
-            <a:avLst/>
-          </a:prstGeom>
-          <a:noFill xmlns:a="http://schemas.openxmlformats.org/drawingml/2006/main"/>
-          <a:ln xmlns:a="http://schemas.openxmlformats.org/drawingml/2006/main" w="0">
-            <a:noFill/>
-            <a:prstDash val="solid"/>
-          </a:ln>
-        </p:spPr>
-        <p:txBody>
-          <a:bodyPr xmlns:a="http://schemas.openxmlformats.org/drawingml/2006/main" lIns="0" tIns="0" rIns="0" bIns="0" anchor="ctr"/>
-          <a:lstStyle xmlns:a="http://schemas.openxmlformats.org/drawingml/2006/main"/>
-          <a:p xmlns:a="http://schemas.openxmlformats.org/drawingml/2006/main">
-            <a:pPr>
+            <a:off x="11106150" y="6400800"/>
+            <a:ext cx="476250" cy="247650"/>
+          </a:xfrm>
+          <a:prstGeom xmlns:a="http://schemas.openxmlformats.org/drawingml/2006/main" prst="rect">
+            <a:avLst/>
+          </a:prstGeom>
+          <a:noFill xmlns:a="http://schemas.openxmlformats.org/drawingml/2006/main"/>
+          <a:ln xmlns:a="http://schemas.openxmlformats.org/drawingml/2006/main" w="0">
+            <a:noFill/>
+            <a:prstDash val="solid"/>
+          </a:ln>
+        </p:spPr>
+        <p:txBody>
+          <a:bodyPr xmlns:a="http://schemas.openxmlformats.org/drawingml/2006/main" lIns="0" tIns="0" rIns="0" bIns="0" anchor="ctr">
+            <a:noAutofit/>
+          </a:bodyPr>
+          <a:lstStyle xmlns:a="http://schemas.openxmlformats.org/drawingml/2006/main"/>
+          <a:p xmlns:a="http://schemas.openxmlformats.org/drawingml/2006/main">
+            <a:pPr algn="l">
+              <a:buNone/>
               <a:defRPr sz="1350" b="1">
                 <a:solidFill>
                   <a:srgbClr val="28685E"/>
                 </a:solidFill>
+                <a:latin typeface="Calibri"/>
+                <a:ea typeface="Calibri"/>
+                <a:cs typeface="Calibri"/>
               </a:defRPr>
             </a:pPr>
             <a:r>
@@ -6626,6 +8181,9 @@
                 <a:solidFill>
                   <a:srgbClr val="28685E"/>
                 </a:solidFill>
+                <a:latin typeface="Calibri"/>
+                <a:ea typeface="Calibri"/>
+                <a:cs typeface="Calibri"/>
               </a:rPr>
               <a:t>05</a:t>
             </a:r>
@@ -6648,34 +8206,43 @@
         </p:nvSpPr>
         <p:spPr>
           <a:xfrm xmlns:a="http://schemas.openxmlformats.org/drawingml/2006/main">
-            <a:off x="609600" y="2619375"/>
-            <a:ext cx="10972800" cy="781050"/>
-          </a:xfrm>
-          <a:prstGeom xmlns:a="http://schemas.openxmlformats.org/drawingml/2006/main" prst="rect">
-            <a:avLst/>
-          </a:prstGeom>
-          <a:noFill xmlns:a="http://schemas.openxmlformats.org/drawingml/2006/main"/>
-          <a:ln xmlns:a="http://schemas.openxmlformats.org/drawingml/2006/main" w="0">
-            <a:noFill/>
-            <a:prstDash val="solid"/>
-          </a:ln>
-        </p:spPr>
-        <p:txBody>
-          <a:bodyPr xmlns:a="http://schemas.openxmlformats.org/drawingml/2006/main" lIns="0" tIns="0" rIns="0" bIns="0" anchor="ctr"/>
-          <a:lstStyle xmlns:a="http://schemas.openxmlformats.org/drawingml/2006/main"/>
-          <a:p xmlns:a="http://schemas.openxmlformats.org/drawingml/2006/main">
-            <a:pPr>
-              <a:defRPr sz="2550" b="0">
-                <a:solidFill>
-                  <a:srgbClr val="152B3A"/>
-                </a:solidFill>
-              </a:defRPr>
-            </a:pPr>
-            <a:r>
-              <a:rPr sz="2550" b="0">
-                <a:solidFill>
-                  <a:srgbClr val="152B3A"/>
-                </a:solidFill>
+            <a:off x="1000125" y="2333625"/>
+            <a:ext cx="10382250" cy="1076325"/>
+          </a:xfrm>
+          <a:prstGeom xmlns:a="http://schemas.openxmlformats.org/drawingml/2006/main" prst="rect">
+            <a:avLst/>
+          </a:prstGeom>
+          <a:noFill xmlns:a="http://schemas.openxmlformats.org/drawingml/2006/main"/>
+          <a:ln xmlns:a="http://schemas.openxmlformats.org/drawingml/2006/main" w="0">
+            <a:noFill/>
+            <a:prstDash val="solid"/>
+          </a:ln>
+        </p:spPr>
+        <p:txBody>
+          <a:bodyPr xmlns:a="http://schemas.openxmlformats.org/drawingml/2006/main" lIns="0" tIns="0" rIns="0" bIns="0" anchor="ctr">
+            <a:noAutofit/>
+          </a:bodyPr>
+          <a:lstStyle xmlns:a="http://schemas.openxmlformats.org/drawingml/2006/main"/>
+          <a:p xmlns:a="http://schemas.openxmlformats.org/drawingml/2006/main">
+            <a:pPr algn="l">
+              <a:buNone/>
+              <a:defRPr sz="2625" b="0">
+                <a:solidFill>
+                  <a:srgbClr val="152B3A"/>
+                </a:solidFill>
+                <a:latin typeface="Calibri"/>
+                <a:ea typeface="Calibri"/>
+                <a:cs typeface="Calibri"/>
+              </a:defRPr>
+            </a:pPr>
+            <a:r>
+              <a:rPr sz="2625" b="0">
+                <a:solidFill>
+                  <a:srgbClr val="152B3A"/>
+                </a:solidFill>
+                <a:latin typeface="Calibri"/>
+                <a:ea typeface="Calibri"/>
+                <a:cs typeface="Calibri"/>
               </a:rPr>
               <a:t>Torch = Sun. Ball = Moon. Observer = a view from Earth.</a:t>
             </a:r>
@@ -6698,34 +8265,43 @@
         </p:nvSpPr>
         <p:spPr>
           <a:xfrm xmlns:a="http://schemas.openxmlformats.org/drawingml/2006/main">
-            <a:off x="609600" y="3476625"/>
-            <a:ext cx="10972800" cy="781050"/>
-          </a:xfrm>
-          <a:prstGeom xmlns:a="http://schemas.openxmlformats.org/drawingml/2006/main" prst="rect">
-            <a:avLst/>
-          </a:prstGeom>
-          <a:noFill xmlns:a="http://schemas.openxmlformats.org/drawingml/2006/main"/>
-          <a:ln xmlns:a="http://schemas.openxmlformats.org/drawingml/2006/main" w="0">
-            <a:noFill/>
-            <a:prstDash val="solid"/>
-          </a:ln>
-        </p:spPr>
-        <p:txBody>
-          <a:bodyPr xmlns:a="http://schemas.openxmlformats.org/drawingml/2006/main" lIns="0" tIns="0" rIns="0" bIns="0" anchor="ctr"/>
-          <a:lstStyle xmlns:a="http://schemas.openxmlformats.org/drawingml/2006/main"/>
-          <a:p xmlns:a="http://schemas.openxmlformats.org/drawingml/2006/main">
-            <a:pPr>
-              <a:defRPr sz="2550" b="0">
-                <a:solidFill>
-                  <a:srgbClr val="152B3A"/>
-                </a:solidFill>
-              </a:defRPr>
-            </a:pPr>
-            <a:r>
-              <a:rPr sz="2550" b="0">
-                <a:solidFill>
-                  <a:srgbClr val="152B3A"/>
-                </a:solidFill>
+            <a:off x="1000125" y="3467100"/>
+            <a:ext cx="10382250" cy="1076325"/>
+          </a:xfrm>
+          <a:prstGeom xmlns:a="http://schemas.openxmlformats.org/drawingml/2006/main" prst="rect">
+            <a:avLst/>
+          </a:prstGeom>
+          <a:noFill xmlns:a="http://schemas.openxmlformats.org/drawingml/2006/main"/>
+          <a:ln xmlns:a="http://schemas.openxmlformats.org/drawingml/2006/main" w="0">
+            <a:noFill/>
+            <a:prstDash val="solid"/>
+          </a:ln>
+        </p:spPr>
+        <p:txBody>
+          <a:bodyPr xmlns:a="http://schemas.openxmlformats.org/drawingml/2006/main" lIns="0" tIns="0" rIns="0" bIns="0" anchor="ctr">
+            <a:noAutofit/>
+          </a:bodyPr>
+          <a:lstStyle xmlns:a="http://schemas.openxmlformats.org/drawingml/2006/main"/>
+          <a:p xmlns:a="http://schemas.openxmlformats.org/drawingml/2006/main">
+            <a:pPr algn="l">
+              <a:buNone/>
+              <a:defRPr sz="2625" b="0">
+                <a:solidFill>
+                  <a:srgbClr val="152B3A"/>
+                </a:solidFill>
+                <a:latin typeface="Calibri"/>
+                <a:ea typeface="Calibri"/>
+                <a:cs typeface="Calibri"/>
+              </a:defRPr>
+            </a:pPr>
+            <a:r>
+              <a:rPr sz="2625" b="0">
+                <a:solidFill>
+                  <a:srgbClr val="152B3A"/>
+                </a:solidFill>
+                <a:latin typeface="Calibri"/>
+                <a:ea typeface="Calibri"/>
+                <a:cs typeface="Calibri"/>
               </a:rPr>
               <a:t>Keep the light fixed while the ball changes position.</a:t>
             </a:r>
@@ -6748,36 +8324,276 @@
         </p:nvSpPr>
         <p:spPr>
           <a:xfrm xmlns:a="http://schemas.openxmlformats.org/drawingml/2006/main">
-            <a:off x="609600" y="4333875"/>
-            <a:ext cx="10972800" cy="781050"/>
-          </a:xfrm>
-          <a:prstGeom xmlns:a="http://schemas.openxmlformats.org/drawingml/2006/main" prst="rect">
-            <a:avLst/>
-          </a:prstGeom>
-          <a:noFill xmlns:a="http://schemas.openxmlformats.org/drawingml/2006/main"/>
-          <a:ln xmlns:a="http://schemas.openxmlformats.org/drawingml/2006/main" w="0">
-            <a:noFill/>
-            <a:prstDash val="solid"/>
-          </a:ln>
-        </p:spPr>
-        <p:txBody>
-          <a:bodyPr xmlns:a="http://schemas.openxmlformats.org/drawingml/2006/main" lIns="0" tIns="0" rIns="0" bIns="0" anchor="ctr"/>
-          <a:lstStyle xmlns:a="http://schemas.openxmlformats.org/drawingml/2006/main"/>
-          <a:p xmlns:a="http://schemas.openxmlformats.org/drawingml/2006/main">
-            <a:pPr>
-              <a:defRPr sz="2550" b="0">
-                <a:solidFill>
-                  <a:srgbClr val="152B3A"/>
-                </a:solidFill>
-              </a:defRPr>
-            </a:pPr>
-            <a:r>
-              <a:rPr sz="2550" b="0">
-                <a:solidFill>
-                  <a:srgbClr val="152B3A"/>
-                </a:solidFill>
+            <a:off x="1000125" y="4600575"/>
+            <a:ext cx="10382250" cy="1076325"/>
+          </a:xfrm>
+          <a:prstGeom xmlns:a="http://schemas.openxmlformats.org/drawingml/2006/main" prst="rect">
+            <a:avLst/>
+          </a:prstGeom>
+          <a:noFill xmlns:a="http://schemas.openxmlformats.org/drawingml/2006/main"/>
+          <a:ln xmlns:a="http://schemas.openxmlformats.org/drawingml/2006/main" w="0">
+            <a:noFill/>
+            <a:prstDash val="solid"/>
+          </a:ln>
+        </p:spPr>
+        <p:txBody>
+          <a:bodyPr xmlns:a="http://schemas.openxmlformats.org/drawingml/2006/main" lIns="0" tIns="0" rIns="0" bIns="0" anchor="ctr">
+            <a:noAutofit/>
+          </a:bodyPr>
+          <a:lstStyle xmlns:a="http://schemas.openxmlformats.org/drawingml/2006/main"/>
+          <a:p xmlns:a="http://schemas.openxmlformats.org/drawingml/2006/main">
+            <a:pPr algn="l">
+              <a:buNone/>
+              <a:defRPr sz="2625" b="0">
+                <a:solidFill>
+                  <a:srgbClr val="152B3A"/>
+                </a:solidFill>
+                <a:latin typeface="Calibri"/>
+                <a:ea typeface="Calibri"/>
+                <a:cs typeface="Calibri"/>
+              </a:defRPr>
+            </a:pPr>
+            <a:r>
+              <a:rPr sz="2625" b="0">
+                <a:solidFill>
+                  <a:srgbClr val="152B3A"/>
+                </a:solidFill>
+                <a:latin typeface="Calibri"/>
+                <a:ea typeface="Calibri"/>
+                <a:cs typeface="Calibri"/>
               </a:rPr>
               <a:t>Watch the visible lit part. The ball stays round.</a:t>
+            </a:r>
+          </a:p>
+        </p:txBody>
+      </p:sp>
+      <p:sp>
+        <p:nvSpPr>
+          <p:cNvPr id="11" name="cue-0">
+            <a:extLst xmlns:a="http://schemas.openxmlformats.org/drawingml/2006/main">
+              <a:ext uri="{FF2B5EF4-FFF2-40B4-BE49-F238E27FC236}">
+                <a16:creationId xmlns:a16="http://schemas.microsoft.com/office/drawing/2014/main" id="{D846A1CE-B216-4C60-8071-CB3C6AFD01F4}"/>
+              </a:ext>
+            </a:extLst>
+          </p:cNvPr>
+          <p:cNvSpPr>
+            <a:spLocks xmlns:a="http://schemas.openxmlformats.org/drawingml/2006/main" noGrp="1"/>
+          </p:cNvSpPr>
+          <p:nvPr/>
+        </p:nvSpPr>
+        <p:spPr>
+          <a:xfrm xmlns:a="http://schemas.openxmlformats.org/drawingml/2006/main">
+            <a:off x="609600" y="2362200"/>
+            <a:ext cx="323850" cy="323850"/>
+          </a:xfrm>
+          <a:prstGeom xmlns:a="http://schemas.openxmlformats.org/drawingml/2006/main" prst="rect">
+            <a:avLst/>
+          </a:prstGeom>
+          <a:noFill xmlns:a="http://schemas.openxmlformats.org/drawingml/2006/main"/>
+          <a:ln xmlns:a="http://schemas.openxmlformats.org/drawingml/2006/main" w="0">
+            <a:noFill/>
+          </a:ln>
+        </p:spPr>
+        <p:txBody>
+          <a:bodyPr xmlns:a="http://schemas.openxmlformats.org/drawingml/2006/main" lIns="0" tIns="0" rIns="0" bIns="0" anchor="ctr">
+            <a:noAutofit/>
+          </a:bodyPr>
+          <a:lstStyle xmlns:a="http://schemas.openxmlformats.org/drawingml/2006/main"/>
+          <a:p xmlns:a="http://schemas.openxmlformats.org/drawingml/2006/main">
+            <a:pPr algn="l">
+              <a:defRPr sz="1350" b="1">
+                <a:solidFill>
+                  <a:srgbClr val="28685E"/>
+                </a:solidFill>
+                <a:latin typeface="Calibri"/>
+                <a:ea typeface="Calibri"/>
+                <a:cs typeface="Calibri"/>
+              </a:defRPr>
+            </a:pPr>
+            <a:r>
+              <a:rPr sz="1350" b="1">
+                <a:solidFill>
+                  <a:srgbClr val="28685E"/>
+                </a:solidFill>
+                <a:latin typeface="Calibri"/>
+                <a:ea typeface="Calibri"/>
+                <a:cs typeface="Calibri"/>
+              </a:rPr>
+              <a:t>01</a:t>
+            </a:r>
+          </a:p>
+        </p:txBody>
+      </p:sp>
+      <p:sp>
+        <p:nvSpPr>
+          <p:cNvPr id="12" name="row-rule-0">
+            <a:extLst xmlns:a="http://schemas.openxmlformats.org/drawingml/2006/main">
+              <a:ext uri="{FF2B5EF4-FFF2-40B4-BE49-F238E27FC236}">
+                <a16:creationId xmlns:a16="http://schemas.microsoft.com/office/drawing/2014/main" id="{7E611CD6-E5FF-45BF-B570-092DAC91E592}"/>
+              </a:ext>
+            </a:extLst>
+          </p:cNvPr>
+          <p:cNvSpPr>
+            <a:spLocks xmlns:a="http://schemas.openxmlformats.org/drawingml/2006/main" noGrp="1"/>
+          </p:cNvSpPr>
+          <p:nvPr/>
+        </p:nvSpPr>
+        <p:spPr>
+          <a:xfrm xmlns:a="http://schemas.openxmlformats.org/drawingml/2006/main">
+            <a:off x="1000125" y="3419475"/>
+            <a:ext cx="10334625" cy="0"/>
+          </a:xfrm>
+          <a:prstGeom xmlns:a="http://schemas.openxmlformats.org/drawingml/2006/main" prst="line">
+            <a:avLst/>
+          </a:prstGeom>
+          <a:noFill xmlns:a="http://schemas.openxmlformats.org/drawingml/2006/main"/>
+          <a:ln xmlns:a="http://schemas.openxmlformats.org/drawingml/2006/main" w="9525">
+            <a:solidFill>
+              <a:srgbClr val="CEDBD3"/>
+            </a:solidFill>
+          </a:ln>
+        </p:spPr>
+      </p:sp>
+      <p:sp>
+        <p:nvSpPr>
+          <p:cNvPr id="13" name="cue-1">
+            <a:extLst xmlns:a="http://schemas.openxmlformats.org/drawingml/2006/main">
+              <a:ext uri="{FF2B5EF4-FFF2-40B4-BE49-F238E27FC236}">
+                <a16:creationId xmlns:a16="http://schemas.microsoft.com/office/drawing/2014/main" id="{FBF733BC-06AC-412B-B8FD-74F6A51067E9}"/>
+              </a:ext>
+            </a:extLst>
+          </p:cNvPr>
+          <p:cNvSpPr>
+            <a:spLocks xmlns:a="http://schemas.openxmlformats.org/drawingml/2006/main" noGrp="1"/>
+          </p:cNvSpPr>
+          <p:nvPr/>
+        </p:nvSpPr>
+        <p:spPr>
+          <a:xfrm xmlns:a="http://schemas.openxmlformats.org/drawingml/2006/main">
+            <a:off x="609600" y="3495675"/>
+            <a:ext cx="323850" cy="323850"/>
+          </a:xfrm>
+          <a:prstGeom xmlns:a="http://schemas.openxmlformats.org/drawingml/2006/main" prst="rect">
+            <a:avLst/>
+          </a:prstGeom>
+          <a:noFill xmlns:a="http://schemas.openxmlformats.org/drawingml/2006/main"/>
+          <a:ln xmlns:a="http://schemas.openxmlformats.org/drawingml/2006/main" w="0">
+            <a:noFill/>
+          </a:ln>
+        </p:spPr>
+        <p:txBody>
+          <a:bodyPr xmlns:a="http://schemas.openxmlformats.org/drawingml/2006/main" lIns="0" tIns="0" rIns="0" bIns="0" anchor="ctr">
+            <a:noAutofit/>
+          </a:bodyPr>
+          <a:lstStyle xmlns:a="http://schemas.openxmlformats.org/drawingml/2006/main"/>
+          <a:p xmlns:a="http://schemas.openxmlformats.org/drawingml/2006/main">
+            <a:pPr algn="l">
+              <a:defRPr sz="1350" b="1">
+                <a:solidFill>
+                  <a:srgbClr val="28685E"/>
+                </a:solidFill>
+                <a:latin typeface="Calibri"/>
+                <a:ea typeface="Calibri"/>
+                <a:cs typeface="Calibri"/>
+              </a:defRPr>
+            </a:pPr>
+            <a:r>
+              <a:rPr sz="1350" b="1">
+                <a:solidFill>
+                  <a:srgbClr val="28685E"/>
+                </a:solidFill>
+                <a:latin typeface="Calibri"/>
+                <a:ea typeface="Calibri"/>
+                <a:cs typeface="Calibri"/>
+              </a:rPr>
+              <a:t>02</a:t>
+            </a:r>
+          </a:p>
+        </p:txBody>
+      </p:sp>
+      <p:sp>
+        <p:nvSpPr>
+          <p:cNvPr id="14" name="row-rule-1">
+            <a:extLst xmlns:a="http://schemas.openxmlformats.org/drawingml/2006/main">
+              <a:ext uri="{FF2B5EF4-FFF2-40B4-BE49-F238E27FC236}">
+                <a16:creationId xmlns:a16="http://schemas.microsoft.com/office/drawing/2014/main" id="{474AEAA8-BFF4-436D-B12C-975F72F3D771}"/>
+              </a:ext>
+            </a:extLst>
+          </p:cNvPr>
+          <p:cNvSpPr>
+            <a:spLocks xmlns:a="http://schemas.openxmlformats.org/drawingml/2006/main" noGrp="1"/>
+          </p:cNvSpPr>
+          <p:nvPr/>
+        </p:nvSpPr>
+        <p:spPr>
+          <a:xfrm xmlns:a="http://schemas.openxmlformats.org/drawingml/2006/main">
+            <a:off x="1000125" y="4552950"/>
+            <a:ext cx="10334625" cy="0"/>
+          </a:xfrm>
+          <a:prstGeom xmlns:a="http://schemas.openxmlformats.org/drawingml/2006/main" prst="line">
+            <a:avLst/>
+          </a:prstGeom>
+          <a:noFill xmlns:a="http://schemas.openxmlformats.org/drawingml/2006/main"/>
+          <a:ln xmlns:a="http://schemas.openxmlformats.org/drawingml/2006/main" w="9525">
+            <a:solidFill>
+              <a:srgbClr val="CEDBD3"/>
+            </a:solidFill>
+          </a:ln>
+        </p:spPr>
+      </p:sp>
+      <p:sp>
+        <p:nvSpPr>
+          <p:cNvPr id="15" name="cue-2">
+            <a:extLst xmlns:a="http://schemas.openxmlformats.org/drawingml/2006/main">
+              <a:ext uri="{FF2B5EF4-FFF2-40B4-BE49-F238E27FC236}">
+                <a16:creationId xmlns:a16="http://schemas.microsoft.com/office/drawing/2014/main" id="{FBB93C46-A7DE-4989-9E78-420264082EA0}"/>
+              </a:ext>
+            </a:extLst>
+          </p:cNvPr>
+          <p:cNvSpPr>
+            <a:spLocks xmlns:a="http://schemas.openxmlformats.org/drawingml/2006/main" noGrp="1"/>
+          </p:cNvSpPr>
+          <p:nvPr/>
+        </p:nvSpPr>
+        <p:spPr>
+          <a:xfrm xmlns:a="http://schemas.openxmlformats.org/drawingml/2006/main">
+            <a:off x="609600" y="4629150"/>
+            <a:ext cx="323850" cy="323850"/>
+          </a:xfrm>
+          <a:prstGeom xmlns:a="http://schemas.openxmlformats.org/drawingml/2006/main" prst="rect">
+            <a:avLst/>
+          </a:prstGeom>
+          <a:noFill xmlns:a="http://schemas.openxmlformats.org/drawingml/2006/main"/>
+          <a:ln xmlns:a="http://schemas.openxmlformats.org/drawingml/2006/main" w="0">
+            <a:noFill/>
+          </a:ln>
+        </p:spPr>
+        <p:txBody>
+          <a:bodyPr xmlns:a="http://schemas.openxmlformats.org/drawingml/2006/main" lIns="0" tIns="0" rIns="0" bIns="0" anchor="ctr">
+            <a:noAutofit/>
+          </a:bodyPr>
+          <a:lstStyle xmlns:a="http://schemas.openxmlformats.org/drawingml/2006/main"/>
+          <a:p xmlns:a="http://schemas.openxmlformats.org/drawingml/2006/main">
+            <a:pPr algn="l">
+              <a:defRPr sz="1350" b="1">
+                <a:solidFill>
+                  <a:srgbClr val="28685E"/>
+                </a:solidFill>
+                <a:latin typeface="Calibri"/>
+                <a:ea typeface="Calibri"/>
+                <a:cs typeface="Calibri"/>
+              </a:defRPr>
+            </a:pPr>
+            <a:r>
+              <a:rPr sz="1350" b="1">
+                <a:solidFill>
+                  <a:srgbClr val="28685E"/>
+                </a:solidFill>
+                <a:latin typeface="Calibri"/>
+                <a:ea typeface="Calibri"/>
+                <a:cs typeface="Calibri"/>
+              </a:rPr>
+              <a:t>03</a:t>
             </a:r>
           </a:p>
         </p:txBody>
@@ -6798,7 +8614,7 @@
     <p:bg>
       <p:bgPr>
         <a:solidFill xmlns:a="http://schemas.openxmlformats.org/drawingml/2006/main">
-          <a:srgbClr val="F5F1E8"/>
+          <a:srgbClr val="FAF9F5"/>
         </a:solidFill>
       </p:bgPr>
     </p:bg>
@@ -6827,8 +8643,8 @@
         </p:nvSpPr>
         <p:spPr>
           <a:xfrm xmlns:a="http://schemas.openxmlformats.org/drawingml/2006/main">
-            <a:off x="609600" y="552450"/>
-            <a:ext cx="781050" cy="57150"/>
+            <a:off x="609600" y="733425"/>
+            <a:ext cx="781050" cy="38100"/>
           </a:xfrm>
           <a:prstGeom xmlns:a="http://schemas.openxmlformats.org/drawingml/2006/main" prst="rect">
             <a:avLst/>
@@ -6858,34 +8674,43 @@
         </p:nvSpPr>
         <p:spPr>
           <a:xfrm xmlns:a="http://schemas.openxmlformats.org/drawingml/2006/main">
-            <a:off x="609600" y="762000"/>
-            <a:ext cx="8572500" cy="285750"/>
-          </a:xfrm>
-          <a:prstGeom xmlns:a="http://schemas.openxmlformats.org/drawingml/2006/main" prst="rect">
-            <a:avLst/>
-          </a:prstGeom>
-          <a:noFill xmlns:a="http://schemas.openxmlformats.org/drawingml/2006/main"/>
-          <a:ln xmlns:a="http://schemas.openxmlformats.org/drawingml/2006/main" w="0">
-            <a:noFill/>
-            <a:prstDash val="solid"/>
-          </a:ln>
-        </p:spPr>
-        <p:txBody>
-          <a:bodyPr xmlns:a="http://schemas.openxmlformats.org/drawingml/2006/main" lIns="0" tIns="0" rIns="0" bIns="0" anchor="ctr"/>
-          <a:lstStyle xmlns:a="http://schemas.openxmlformats.org/drawingml/2006/main"/>
-          <a:p xmlns:a="http://schemas.openxmlformats.org/drawingml/2006/main">
-            <a:pPr>
-              <a:defRPr sz="1500" b="1">
+            <a:off x="609600" y="342900"/>
+            <a:ext cx="9334500" cy="304800"/>
+          </a:xfrm>
+          <a:prstGeom xmlns:a="http://schemas.openxmlformats.org/drawingml/2006/main" prst="rect">
+            <a:avLst/>
+          </a:prstGeom>
+          <a:noFill xmlns:a="http://schemas.openxmlformats.org/drawingml/2006/main"/>
+          <a:ln xmlns:a="http://schemas.openxmlformats.org/drawingml/2006/main" w="0">
+            <a:noFill/>
+            <a:prstDash val="solid"/>
+          </a:ln>
+        </p:spPr>
+        <p:txBody>
+          <a:bodyPr xmlns:a="http://schemas.openxmlformats.org/drawingml/2006/main" lIns="0" tIns="0" rIns="0" bIns="0" anchor="ctr">
+            <a:noAutofit/>
+          </a:bodyPr>
+          <a:lstStyle xmlns:a="http://schemas.openxmlformats.org/drawingml/2006/main"/>
+          <a:p xmlns:a="http://schemas.openxmlformats.org/drawingml/2006/main">
+            <a:pPr algn="l">
+              <a:buNone/>
+              <a:defRPr sz="1350" b="1">
                 <a:solidFill>
                   <a:srgbClr val="28685E"/>
                 </a:solidFill>
-              </a:defRPr>
-            </a:pPr>
-            <a:r>
-              <a:rPr sz="1500" b="1">
+                <a:latin typeface="Calibri"/>
+                <a:ea typeface="Calibri"/>
+                <a:cs typeface="Calibri"/>
+              </a:defRPr>
+            </a:pPr>
+            <a:r>
+              <a:rPr sz="1350" b="1">
                 <a:solidFill>
                   <a:srgbClr val="28685E"/>
                 </a:solidFill>
+                <a:latin typeface="Calibri"/>
+                <a:ea typeface="Calibri"/>
+                <a:cs typeface="Calibri"/>
               </a:rPr>
               <a:t>MADE BY MATT  /  GROW SCIENCE</a:t>
             </a:r>
@@ -6908,34 +8733,43 @@
         </p:nvSpPr>
         <p:spPr>
           <a:xfrm xmlns:a="http://schemas.openxmlformats.org/drawingml/2006/main">
-            <a:off x="609600" y="1352550"/>
-            <a:ext cx="10972800" cy="952500"/>
-          </a:xfrm>
-          <a:prstGeom xmlns:a="http://schemas.openxmlformats.org/drawingml/2006/main" prst="rect">
-            <a:avLst/>
-          </a:prstGeom>
-          <a:noFill xmlns:a="http://schemas.openxmlformats.org/drawingml/2006/main"/>
-          <a:ln xmlns:a="http://schemas.openxmlformats.org/drawingml/2006/main" w="0">
-            <a:noFill/>
-            <a:prstDash val="solid"/>
-          </a:ln>
-        </p:spPr>
-        <p:txBody>
-          <a:bodyPr xmlns:a="http://schemas.openxmlformats.org/drawingml/2006/main" lIns="0" tIns="0" rIns="0" bIns="0" anchor="ctr"/>
-          <a:lstStyle xmlns:a="http://schemas.openxmlformats.org/drawingml/2006/main"/>
-          <a:p xmlns:a="http://schemas.openxmlformats.org/drawingml/2006/main">
-            <a:pPr>
-              <a:defRPr sz="3750" b="1">
-                <a:solidFill>
-                  <a:srgbClr val="152B3A"/>
-                </a:solidFill>
-              </a:defRPr>
-            </a:pPr>
-            <a:r>
-              <a:rPr sz="3750" b="1">
-                <a:solidFill>
-                  <a:srgbClr val="152B3A"/>
-                </a:solidFill>
+            <a:off x="609600" y="990600"/>
+            <a:ext cx="10972800" cy="1000125"/>
+          </a:xfrm>
+          <a:prstGeom xmlns:a="http://schemas.openxmlformats.org/drawingml/2006/main" prst="rect">
+            <a:avLst/>
+          </a:prstGeom>
+          <a:noFill xmlns:a="http://schemas.openxmlformats.org/drawingml/2006/main"/>
+          <a:ln xmlns:a="http://schemas.openxmlformats.org/drawingml/2006/main" w="0">
+            <a:noFill/>
+            <a:prstDash val="solid"/>
+          </a:ln>
+        </p:spPr>
+        <p:txBody>
+          <a:bodyPr xmlns:a="http://schemas.openxmlformats.org/drawingml/2006/main" lIns="0" tIns="0" rIns="0" bIns="0" anchor="ctr">
+            <a:noAutofit/>
+          </a:bodyPr>
+          <a:lstStyle xmlns:a="http://schemas.openxmlformats.org/drawingml/2006/main"/>
+          <a:p xmlns:a="http://schemas.openxmlformats.org/drawingml/2006/main">
+            <a:pPr algn="l">
+              <a:buNone/>
+              <a:defRPr sz="3675" b="1">
+                <a:solidFill>
+                  <a:srgbClr val="152B3A"/>
+                </a:solidFill>
+                <a:latin typeface="Calibri"/>
+                <a:ea typeface="Calibri"/>
+                <a:cs typeface="Calibri"/>
+              </a:defRPr>
+            </a:pPr>
+            <a:r>
+              <a:rPr sz="3675" b="1">
+                <a:solidFill>
+                  <a:srgbClr val="152B3A"/>
+                </a:solidFill>
+                <a:latin typeface="Calibri"/>
+                <a:ea typeface="Calibri"/>
+                <a:cs typeface="Calibri"/>
               </a:rPr>
               <a:t>New, half and full: three views</a:t>
             </a:r>
@@ -6958,14 +8792,14 @@
         </p:nvSpPr>
         <p:spPr>
           <a:xfrm xmlns:a="http://schemas.openxmlformats.org/drawingml/2006/main">
-            <a:off x="609600" y="6219825"/>
+            <a:off x="609600" y="6191250"/>
             <a:ext cx="10972800" cy="9525"/>
           </a:xfrm>
           <a:prstGeom xmlns:a="http://schemas.openxmlformats.org/drawingml/2006/main" prst="rect">
             <a:avLst/>
           </a:prstGeom>
           <a:solidFill xmlns:a="http://schemas.openxmlformats.org/drawingml/2006/main">
-            <a:srgbClr val="DCE7DD"/>
+            <a:srgbClr val="CEDBD3"/>
           </a:solidFill>
           <a:ln xmlns:a="http://schemas.openxmlformats.org/drawingml/2006/main" w="0">
             <a:noFill/>
@@ -6989,34 +8823,43 @@
         </p:nvSpPr>
         <p:spPr>
           <a:xfrm xmlns:a="http://schemas.openxmlformats.org/drawingml/2006/main">
-            <a:off x="609600" y="6381750"/>
-            <a:ext cx="9906000" cy="228600"/>
-          </a:xfrm>
-          <a:prstGeom xmlns:a="http://schemas.openxmlformats.org/drawingml/2006/main" prst="rect">
-            <a:avLst/>
-          </a:prstGeom>
-          <a:noFill xmlns:a="http://schemas.openxmlformats.org/drawingml/2006/main"/>
-          <a:ln xmlns:a="http://schemas.openxmlformats.org/drawingml/2006/main" w="0">
-            <a:noFill/>
-            <a:prstDash val="solid"/>
-          </a:ln>
-        </p:spPr>
-        <p:txBody>
-          <a:bodyPr xmlns:a="http://schemas.openxmlformats.org/drawingml/2006/main" lIns="0" tIns="0" rIns="0" bIns="0" anchor="ctr"/>
-          <a:lstStyle xmlns:a="http://schemas.openxmlformats.org/drawingml/2006/main"/>
-          <a:p xmlns:a="http://schemas.openxmlformats.org/drawingml/2006/main">
-            <a:pPr>
-              <a:defRPr sz="1275" b="0">
+            <a:off x="609600" y="6419850"/>
+            <a:ext cx="9525000" cy="219075"/>
+          </a:xfrm>
+          <a:prstGeom xmlns:a="http://schemas.openxmlformats.org/drawingml/2006/main" prst="rect">
+            <a:avLst/>
+          </a:prstGeom>
+          <a:noFill xmlns:a="http://schemas.openxmlformats.org/drawingml/2006/main"/>
+          <a:ln xmlns:a="http://schemas.openxmlformats.org/drawingml/2006/main" w="0">
+            <a:noFill/>
+            <a:prstDash val="solid"/>
+          </a:ln>
+        </p:spPr>
+        <p:txBody>
+          <a:bodyPr xmlns:a="http://schemas.openxmlformats.org/drawingml/2006/main" lIns="0" tIns="0" rIns="0" bIns="0" anchor="ctr">
+            <a:noAutofit/>
+          </a:bodyPr>
+          <a:lstStyle xmlns:a="http://schemas.openxmlformats.org/drawingml/2006/main"/>
+          <a:p xmlns:a="http://schemas.openxmlformats.org/drawingml/2006/main">
+            <a:pPr algn="l">
+              <a:buNone/>
+              <a:defRPr sz="1200" b="0">
                 <a:solidFill>
                   <a:srgbClr val="50616B"/>
                 </a:solidFill>
-              </a:defRPr>
-            </a:pPr>
-            <a:r>
-              <a:rPr sz="1275" b="0">
+                <a:latin typeface="Calibri"/>
+                <a:ea typeface="Calibri"/>
+                <a:cs typeface="Calibri"/>
+              </a:defRPr>
+            </a:pPr>
+            <a:r>
+              <a:rPr sz="1200" b="0">
                 <a:solidFill>
                   <a:srgbClr val="50616B"/>
                 </a:solidFill>
+                <a:latin typeface="Calibri"/>
+                <a:ea typeface="Calibri"/>
+                <a:cs typeface="Calibri"/>
               </a:rPr>
               <a:t>AUTUMN 1  ·  WEEK 7  ·  LESSON A</a:t>
             </a:r>
@@ -7039,27 +8882,33 @@
         </p:nvSpPr>
         <p:spPr>
           <a:xfrm xmlns:a="http://schemas.openxmlformats.org/drawingml/2006/main">
-            <a:off x="11106150" y="6362700"/>
-            <a:ext cx="476250" cy="238125"/>
-          </a:xfrm>
-          <a:prstGeom xmlns:a="http://schemas.openxmlformats.org/drawingml/2006/main" prst="rect">
-            <a:avLst/>
-          </a:prstGeom>
-          <a:noFill xmlns:a="http://schemas.openxmlformats.org/drawingml/2006/main"/>
-          <a:ln xmlns:a="http://schemas.openxmlformats.org/drawingml/2006/main" w="0">
-            <a:noFill/>
-            <a:prstDash val="solid"/>
-          </a:ln>
-        </p:spPr>
-        <p:txBody>
-          <a:bodyPr xmlns:a="http://schemas.openxmlformats.org/drawingml/2006/main" lIns="0" tIns="0" rIns="0" bIns="0" anchor="ctr"/>
-          <a:lstStyle xmlns:a="http://schemas.openxmlformats.org/drawingml/2006/main"/>
-          <a:p xmlns:a="http://schemas.openxmlformats.org/drawingml/2006/main">
-            <a:pPr>
+            <a:off x="11106150" y="6400800"/>
+            <a:ext cx="476250" cy="247650"/>
+          </a:xfrm>
+          <a:prstGeom xmlns:a="http://schemas.openxmlformats.org/drawingml/2006/main" prst="rect">
+            <a:avLst/>
+          </a:prstGeom>
+          <a:noFill xmlns:a="http://schemas.openxmlformats.org/drawingml/2006/main"/>
+          <a:ln xmlns:a="http://schemas.openxmlformats.org/drawingml/2006/main" w="0">
+            <a:noFill/>
+            <a:prstDash val="solid"/>
+          </a:ln>
+        </p:spPr>
+        <p:txBody>
+          <a:bodyPr xmlns:a="http://schemas.openxmlformats.org/drawingml/2006/main" lIns="0" tIns="0" rIns="0" bIns="0" anchor="ctr">
+            <a:noAutofit/>
+          </a:bodyPr>
+          <a:lstStyle xmlns:a="http://schemas.openxmlformats.org/drawingml/2006/main"/>
+          <a:p xmlns:a="http://schemas.openxmlformats.org/drawingml/2006/main">
+            <a:pPr algn="l">
+              <a:buNone/>
               <a:defRPr sz="1350" b="1">
                 <a:solidFill>
                   <a:srgbClr val="28685E"/>
                 </a:solidFill>
+                <a:latin typeface="Calibri"/>
+                <a:ea typeface="Calibri"/>
+                <a:cs typeface="Calibri"/>
               </a:defRPr>
             </a:pPr>
             <a:r>
@@ -7067,6 +8916,9 @@
                 <a:solidFill>
                   <a:srgbClr val="28685E"/>
                 </a:solidFill>
+                <a:latin typeface="Calibri"/>
+                <a:ea typeface="Calibri"/>
+                <a:cs typeface="Calibri"/>
               </a:rPr>
               <a:t>06</a:t>
             </a:r>
@@ -7089,34 +8941,45 @@
         </p:nvSpPr>
         <p:spPr>
           <a:xfrm xmlns:a="http://schemas.openxmlformats.org/drawingml/2006/main">
-            <a:off x="609600" y="2619375"/>
-            <a:ext cx="4953000" cy="428625"/>
-          </a:xfrm>
-          <a:prstGeom xmlns:a="http://schemas.openxmlformats.org/drawingml/2006/main" prst="rect">
-            <a:avLst/>
-          </a:prstGeom>
-          <a:noFill xmlns:a="http://schemas.openxmlformats.org/drawingml/2006/main"/>
-          <a:ln xmlns:a="http://schemas.openxmlformats.org/drawingml/2006/main" w="0">
-            <a:noFill/>
-            <a:prstDash val="solid"/>
-          </a:ln>
-        </p:spPr>
-        <p:txBody>
-          <a:bodyPr xmlns:a="http://schemas.openxmlformats.org/drawingml/2006/main" lIns="0" tIns="0" rIns="0" bIns="0" anchor="ctr"/>
-          <a:lstStyle xmlns:a="http://schemas.openxmlformats.org/drawingml/2006/main"/>
-          <a:p xmlns:a="http://schemas.openxmlformats.org/drawingml/2006/main">
-            <a:pPr>
-              <a:defRPr sz="2025" b="1">
+            <a:off x="609600" y="2219325"/>
+            <a:ext cx="5257800" cy="762000"/>
+          </a:xfrm>
+          <a:prstGeom xmlns:a="http://schemas.openxmlformats.org/drawingml/2006/main" prst="rect">
+            <a:avLst/>
+          </a:prstGeom>
+          <a:solidFill xmlns:a="http://schemas.openxmlformats.org/drawingml/2006/main">
+            <a:srgbClr val="E7EFE9"/>
+          </a:solidFill>
+          <a:ln xmlns:a="http://schemas.openxmlformats.org/drawingml/2006/main" w="0">
+            <a:noFill/>
+            <a:prstDash val="solid"/>
+          </a:ln>
+        </p:spPr>
+        <p:txBody>
+          <a:bodyPr xmlns:a="http://schemas.openxmlformats.org/drawingml/2006/main" lIns="228600" tIns="114300" rIns="228600" bIns="114300" anchor="ctr">
+            <a:noAutofit/>
+          </a:bodyPr>
+          <a:lstStyle xmlns:a="http://schemas.openxmlformats.org/drawingml/2006/main"/>
+          <a:p xmlns:a="http://schemas.openxmlformats.org/drawingml/2006/main">
+            <a:pPr algn="l">
+              <a:buNone/>
+              <a:defRPr sz="1875" b="1">
                 <a:solidFill>
                   <a:srgbClr val="28685E"/>
                 </a:solidFill>
-              </a:defRPr>
-            </a:pPr>
-            <a:r>
-              <a:rPr sz="2025" b="1">
+                <a:latin typeface="Calibri"/>
+                <a:ea typeface="Calibri"/>
+                <a:cs typeface="Calibri"/>
+              </a:defRPr>
+            </a:pPr>
+            <a:r>
+              <a:rPr sz="1875" b="1">
                 <a:solidFill>
                   <a:srgbClr val="28685E"/>
                 </a:solidFill>
+                <a:latin typeface="Calibri"/>
+                <a:ea typeface="Calibri"/>
+                <a:cs typeface="Calibri"/>
               </a:rPr>
               <a:t>VIEW FROM EARTH</a:t>
             </a:r>
@@ -7139,34 +9002,45 @@
         </p:nvSpPr>
         <p:spPr>
           <a:xfrm xmlns:a="http://schemas.openxmlformats.org/drawingml/2006/main">
-            <a:off x="6572250" y="2619375"/>
-            <a:ext cx="4953000" cy="428625"/>
-          </a:xfrm>
-          <a:prstGeom xmlns:a="http://schemas.openxmlformats.org/drawingml/2006/main" prst="rect">
-            <a:avLst/>
-          </a:prstGeom>
-          <a:noFill xmlns:a="http://schemas.openxmlformats.org/drawingml/2006/main"/>
-          <a:ln xmlns:a="http://schemas.openxmlformats.org/drawingml/2006/main" w="0">
-            <a:noFill/>
-            <a:prstDash val="solid"/>
-          </a:ln>
-        </p:spPr>
-        <p:txBody>
-          <a:bodyPr xmlns:a="http://schemas.openxmlformats.org/drawingml/2006/main" lIns="0" tIns="0" rIns="0" bIns="0" anchor="ctr"/>
-          <a:lstStyle xmlns:a="http://schemas.openxmlformats.org/drawingml/2006/main"/>
-          <a:p xmlns:a="http://schemas.openxmlformats.org/drawingml/2006/main">
-            <a:pPr>
-              <a:defRPr sz="2025" b="1">
-                <a:solidFill>
-                  <a:srgbClr val="A65D25"/>
-                </a:solidFill>
-              </a:defRPr>
-            </a:pPr>
-            <a:r>
-              <a:rPr sz="2025" b="1">
-                <a:solidFill>
-                  <a:srgbClr val="A65D25"/>
-                </a:solidFill>
+            <a:off x="6381750" y="2219325"/>
+            <a:ext cx="5200650" cy="762000"/>
+          </a:xfrm>
+          <a:prstGeom xmlns:a="http://schemas.openxmlformats.org/drawingml/2006/main" prst="rect">
+            <a:avLst/>
+          </a:prstGeom>
+          <a:solidFill xmlns:a="http://schemas.openxmlformats.org/drawingml/2006/main">
+            <a:srgbClr val="F0EBE3"/>
+          </a:solidFill>
+          <a:ln xmlns:a="http://schemas.openxmlformats.org/drawingml/2006/main" w="0">
+            <a:noFill/>
+            <a:prstDash val="solid"/>
+          </a:ln>
+        </p:spPr>
+        <p:txBody>
+          <a:bodyPr xmlns:a="http://schemas.openxmlformats.org/drawingml/2006/main" lIns="228600" tIns="114300" rIns="228600" bIns="114300" anchor="ctr">
+            <a:noAutofit/>
+          </a:bodyPr>
+          <a:lstStyle xmlns:a="http://schemas.openxmlformats.org/drawingml/2006/main"/>
+          <a:p xmlns:a="http://schemas.openxmlformats.org/drawingml/2006/main">
+            <a:pPr algn="l">
+              <a:buNone/>
+              <a:defRPr sz="1875" b="1">
+                <a:solidFill>
+                  <a:srgbClr val="A95D21"/>
+                </a:solidFill>
+                <a:latin typeface="Calibri"/>
+                <a:ea typeface="Calibri"/>
+                <a:cs typeface="Calibri"/>
+              </a:defRPr>
+            </a:pPr>
+            <a:r>
+              <a:rPr sz="1875" b="1">
+                <a:solidFill>
+                  <a:srgbClr val="A95D21"/>
+                </a:solidFill>
+                <a:latin typeface="Calibri"/>
+                <a:ea typeface="Calibri"/>
+                <a:cs typeface="Calibri"/>
               </a:rPr>
               <a:t>WHAT WE SEE LIT</a:t>
             </a:r>
@@ -7189,27 +9063,35 @@
         </p:nvSpPr>
         <p:spPr>
           <a:xfrm xmlns:a="http://schemas.openxmlformats.org/drawingml/2006/main">
-            <a:off x="609600" y="3333750"/>
-            <a:ext cx="4953000" cy="2524125"/>
-          </a:xfrm>
-          <a:prstGeom xmlns:a="http://schemas.openxmlformats.org/drawingml/2006/main" prst="rect">
-            <a:avLst/>
-          </a:prstGeom>
-          <a:noFill xmlns:a="http://schemas.openxmlformats.org/drawingml/2006/main"/>
-          <a:ln xmlns:a="http://schemas.openxmlformats.org/drawingml/2006/main" w="0">
-            <a:noFill/>
-            <a:prstDash val="solid"/>
-          </a:ln>
-        </p:spPr>
-        <p:txBody>
-          <a:bodyPr xmlns:a="http://schemas.openxmlformats.org/drawingml/2006/main" lIns="0" tIns="0" rIns="0" bIns="0" anchor="ctr"/>
-          <a:lstStyle xmlns:a="http://schemas.openxmlformats.org/drawingml/2006/main"/>
-          <a:p xmlns:a="http://schemas.openxmlformats.org/drawingml/2006/main">
-            <a:pPr>
+            <a:off x="609600" y="2981325"/>
+            <a:ext cx="5257800" cy="2714625"/>
+          </a:xfrm>
+          <a:prstGeom xmlns:a="http://schemas.openxmlformats.org/drawingml/2006/main" prst="rect">
+            <a:avLst/>
+          </a:prstGeom>
+          <a:solidFill xmlns:a="http://schemas.openxmlformats.org/drawingml/2006/main">
+            <a:srgbClr val="E7EFE9"/>
+          </a:solidFill>
+          <a:ln xmlns:a="http://schemas.openxmlformats.org/drawingml/2006/main" w="0">
+            <a:noFill/>
+            <a:prstDash val="solid"/>
+          </a:ln>
+        </p:spPr>
+        <p:txBody>
+          <a:bodyPr xmlns:a="http://schemas.openxmlformats.org/drawingml/2006/main" lIns="228600" tIns="114300" rIns="228600" bIns="114300" anchor="ctr">
+            <a:noAutofit/>
+          </a:bodyPr>
+          <a:lstStyle xmlns:a="http://schemas.openxmlformats.org/drawingml/2006/main"/>
+          <a:p xmlns:a="http://schemas.openxmlformats.org/drawingml/2006/main">
+            <a:pPr algn="l">
+              <a:buNone/>
               <a:defRPr sz="2400" b="0">
                 <a:solidFill>
                   <a:srgbClr val="152B3A"/>
                 </a:solidFill>
+                <a:latin typeface="Calibri"/>
+                <a:ea typeface="Calibri"/>
+                <a:cs typeface="Calibri"/>
               </a:defRPr>
             </a:pPr>
             <a:r>
@@ -7217,16 +9099,23 @@
                 <a:solidFill>
                   <a:srgbClr val="152B3A"/>
                 </a:solidFill>
+                <a:latin typeface="Calibri"/>
+                <a:ea typeface="Calibri"/>
+                <a:cs typeface="Calibri"/>
               </a:rPr>
               <a:t>New Moon</a:t>
             </a:r>
           </a:p>
           <a:p xmlns:a="http://schemas.openxmlformats.org/drawingml/2006/main">
-            <a:pPr>
+            <a:pPr algn="l">
+              <a:buNone/>
               <a:defRPr sz="2400" b="0">
                 <a:solidFill>
                   <a:srgbClr val="152B3A"/>
                 </a:solidFill>
+                <a:latin typeface="Calibri"/>
+                <a:ea typeface="Calibri"/>
+                <a:cs typeface="Calibri"/>
               </a:defRPr>
             </a:pPr>
             <a:r>
@@ -7234,16 +9123,23 @@
                 <a:solidFill>
                   <a:srgbClr val="152B3A"/>
                 </a:solidFill>
+                <a:latin typeface="Calibri"/>
+                <a:ea typeface="Calibri"/>
+                <a:cs typeface="Calibri"/>
               </a:rPr>
               <a:t>Half Moon</a:t>
             </a:r>
           </a:p>
           <a:p xmlns:a="http://schemas.openxmlformats.org/drawingml/2006/main">
-            <a:pPr>
+            <a:pPr algn="l">
+              <a:buNone/>
               <a:defRPr sz="2400" b="0">
                 <a:solidFill>
                   <a:srgbClr val="152B3A"/>
                 </a:solidFill>
+                <a:latin typeface="Calibri"/>
+                <a:ea typeface="Calibri"/>
+                <a:cs typeface="Calibri"/>
               </a:defRPr>
             </a:pPr>
             <a:r>
@@ -7251,6 +9147,9 @@
                 <a:solidFill>
                   <a:srgbClr val="152B3A"/>
                 </a:solidFill>
+                <a:latin typeface="Calibri"/>
+                <a:ea typeface="Calibri"/>
+                <a:cs typeface="Calibri"/>
               </a:rPr>
               <a:t>Full Moon</a:t>
             </a:r>
@@ -7273,27 +9172,35 @@
         </p:nvSpPr>
         <p:spPr>
           <a:xfrm xmlns:a="http://schemas.openxmlformats.org/drawingml/2006/main">
-            <a:off x="6572250" y="3333750"/>
-            <a:ext cx="4857750" cy="2524125"/>
-          </a:xfrm>
-          <a:prstGeom xmlns:a="http://schemas.openxmlformats.org/drawingml/2006/main" prst="rect">
-            <a:avLst/>
-          </a:prstGeom>
-          <a:noFill xmlns:a="http://schemas.openxmlformats.org/drawingml/2006/main"/>
-          <a:ln xmlns:a="http://schemas.openxmlformats.org/drawingml/2006/main" w="0">
-            <a:noFill/>
-            <a:prstDash val="solid"/>
-          </a:ln>
-        </p:spPr>
-        <p:txBody>
-          <a:bodyPr xmlns:a="http://schemas.openxmlformats.org/drawingml/2006/main" lIns="0" tIns="0" rIns="0" bIns="0" anchor="ctr"/>
-          <a:lstStyle xmlns:a="http://schemas.openxmlformats.org/drawingml/2006/main"/>
-          <a:p xmlns:a="http://schemas.openxmlformats.org/drawingml/2006/main">
-            <a:pPr>
+            <a:off x="6381750" y="2981325"/>
+            <a:ext cx="5200650" cy="2714625"/>
+          </a:xfrm>
+          <a:prstGeom xmlns:a="http://schemas.openxmlformats.org/drawingml/2006/main" prst="rect">
+            <a:avLst/>
+          </a:prstGeom>
+          <a:solidFill xmlns:a="http://schemas.openxmlformats.org/drawingml/2006/main">
+            <a:srgbClr val="F0EBE3"/>
+          </a:solidFill>
+          <a:ln xmlns:a="http://schemas.openxmlformats.org/drawingml/2006/main" w="0">
+            <a:noFill/>
+            <a:prstDash val="solid"/>
+          </a:ln>
+        </p:spPr>
+        <p:txBody>
+          <a:bodyPr xmlns:a="http://schemas.openxmlformats.org/drawingml/2006/main" lIns="228600" tIns="114300" rIns="228600" bIns="114300" anchor="ctr">
+            <a:noAutofit/>
+          </a:bodyPr>
+          <a:lstStyle xmlns:a="http://schemas.openxmlformats.org/drawingml/2006/main"/>
+          <a:p xmlns:a="http://schemas.openxmlformats.org/drawingml/2006/main">
+            <a:pPr algn="l">
+              <a:buNone/>
               <a:defRPr sz="2400" b="0">
                 <a:solidFill>
                   <a:srgbClr val="152B3A"/>
                 </a:solidFill>
+                <a:latin typeface="Calibri"/>
+                <a:ea typeface="Calibri"/>
+                <a:cs typeface="Calibri"/>
               </a:defRPr>
             </a:pPr>
             <a:r>
@@ -7301,16 +9208,23 @@
                 <a:solidFill>
                   <a:srgbClr val="152B3A"/>
                 </a:solidFill>
+                <a:latin typeface="Calibri"/>
+                <a:ea typeface="Calibri"/>
+                <a:cs typeface="Calibri"/>
               </a:rPr>
               <a:t>Little or none of the lit half</a:t>
             </a:r>
           </a:p>
           <a:p xmlns:a="http://schemas.openxmlformats.org/drawingml/2006/main">
-            <a:pPr>
+            <a:pPr algn="l">
+              <a:buNone/>
               <a:defRPr sz="2400" b="0">
                 <a:solidFill>
                   <a:srgbClr val="152B3A"/>
                 </a:solidFill>
+                <a:latin typeface="Calibri"/>
+                <a:ea typeface="Calibri"/>
+                <a:cs typeface="Calibri"/>
               </a:defRPr>
             </a:pPr>
             <a:r>
@@ -7318,16 +9232,23 @@
                 <a:solidFill>
                   <a:srgbClr val="152B3A"/>
                 </a:solidFill>
+                <a:latin typeface="Calibri"/>
+                <a:ea typeface="Calibri"/>
+                <a:cs typeface="Calibri"/>
               </a:rPr>
               <a:t>About half the visible disc</a:t>
             </a:r>
           </a:p>
           <a:p xmlns:a="http://schemas.openxmlformats.org/drawingml/2006/main">
-            <a:pPr>
+            <a:pPr algn="l">
+              <a:buNone/>
               <a:defRPr sz="2400" b="0">
                 <a:solidFill>
                   <a:srgbClr val="152B3A"/>
                 </a:solidFill>
+                <a:latin typeface="Calibri"/>
+                <a:ea typeface="Calibri"/>
+                <a:cs typeface="Calibri"/>
               </a:defRPr>
             </a:pPr>
             <a:r>
@@ -7335,6 +9256,9 @@
                 <a:solidFill>
                   <a:srgbClr val="152B3A"/>
                 </a:solidFill>
+                <a:latin typeface="Calibri"/>
+                <a:ea typeface="Calibri"/>
+                <a:cs typeface="Calibri"/>
               </a:rPr>
               <a:t>The whole visible disc</a:t>
             </a:r>
@@ -7357,7 +9281,7 @@
     <p:bg>
       <p:bgPr>
         <a:solidFill xmlns:a="http://schemas.openxmlformats.org/drawingml/2006/main">
-          <a:srgbClr val="F5F1E8"/>
+          <a:srgbClr val="FAF9F5"/>
         </a:solidFill>
       </p:bgPr>
     </p:bg>
@@ -7386,8 +9310,8 @@
         </p:nvSpPr>
         <p:spPr>
           <a:xfrm xmlns:a="http://schemas.openxmlformats.org/drawingml/2006/main">
-            <a:off x="609600" y="552450"/>
-            <a:ext cx="781050" cy="57150"/>
+            <a:off x="609600" y="733425"/>
+            <a:ext cx="781050" cy="38100"/>
           </a:xfrm>
           <a:prstGeom xmlns:a="http://schemas.openxmlformats.org/drawingml/2006/main" prst="rect">
             <a:avLst/>
@@ -7417,34 +9341,43 @@
         </p:nvSpPr>
         <p:spPr>
           <a:xfrm xmlns:a="http://schemas.openxmlformats.org/drawingml/2006/main">
-            <a:off x="609600" y="762000"/>
-            <a:ext cx="8572500" cy="285750"/>
-          </a:xfrm>
-          <a:prstGeom xmlns:a="http://schemas.openxmlformats.org/drawingml/2006/main" prst="rect">
-            <a:avLst/>
-          </a:prstGeom>
-          <a:noFill xmlns:a="http://schemas.openxmlformats.org/drawingml/2006/main"/>
-          <a:ln xmlns:a="http://schemas.openxmlformats.org/drawingml/2006/main" w="0">
-            <a:noFill/>
-            <a:prstDash val="solid"/>
-          </a:ln>
-        </p:spPr>
-        <p:txBody>
-          <a:bodyPr xmlns:a="http://schemas.openxmlformats.org/drawingml/2006/main" lIns="0" tIns="0" rIns="0" bIns="0" anchor="ctr"/>
-          <a:lstStyle xmlns:a="http://schemas.openxmlformats.org/drawingml/2006/main"/>
-          <a:p xmlns:a="http://schemas.openxmlformats.org/drawingml/2006/main">
-            <a:pPr>
-              <a:defRPr sz="1500" b="1">
+            <a:off x="609600" y="342900"/>
+            <a:ext cx="9334500" cy="304800"/>
+          </a:xfrm>
+          <a:prstGeom xmlns:a="http://schemas.openxmlformats.org/drawingml/2006/main" prst="rect">
+            <a:avLst/>
+          </a:prstGeom>
+          <a:noFill xmlns:a="http://schemas.openxmlformats.org/drawingml/2006/main"/>
+          <a:ln xmlns:a="http://schemas.openxmlformats.org/drawingml/2006/main" w="0">
+            <a:noFill/>
+            <a:prstDash val="solid"/>
+          </a:ln>
+        </p:spPr>
+        <p:txBody>
+          <a:bodyPr xmlns:a="http://schemas.openxmlformats.org/drawingml/2006/main" lIns="0" tIns="0" rIns="0" bIns="0" anchor="ctr">
+            <a:noAutofit/>
+          </a:bodyPr>
+          <a:lstStyle xmlns:a="http://schemas.openxmlformats.org/drawingml/2006/main"/>
+          <a:p xmlns:a="http://schemas.openxmlformats.org/drawingml/2006/main">
+            <a:pPr algn="l">
+              <a:buNone/>
+              <a:defRPr sz="1350" b="1">
                 <a:solidFill>
                   <a:srgbClr val="28685E"/>
                 </a:solidFill>
-              </a:defRPr>
-            </a:pPr>
-            <a:r>
-              <a:rPr sz="1500" b="1">
+                <a:latin typeface="Calibri"/>
+                <a:ea typeface="Calibri"/>
+                <a:cs typeface="Calibri"/>
+              </a:defRPr>
+            </a:pPr>
+            <a:r>
+              <a:rPr sz="1350" b="1">
                 <a:solidFill>
                   <a:srgbClr val="28685E"/>
                 </a:solidFill>
+                <a:latin typeface="Calibri"/>
+                <a:ea typeface="Calibri"/>
+                <a:cs typeface="Calibri"/>
               </a:rPr>
               <a:t>MADE BY MATT  /  GROW SCIENCE</a:t>
             </a:r>
@@ -7467,34 +9400,43 @@
         </p:nvSpPr>
         <p:spPr>
           <a:xfrm xmlns:a="http://schemas.openxmlformats.org/drawingml/2006/main">
-            <a:off x="609600" y="1352550"/>
-            <a:ext cx="10972800" cy="952500"/>
-          </a:xfrm>
-          <a:prstGeom xmlns:a="http://schemas.openxmlformats.org/drawingml/2006/main" prst="rect">
-            <a:avLst/>
-          </a:prstGeom>
-          <a:noFill xmlns:a="http://schemas.openxmlformats.org/drawingml/2006/main"/>
-          <a:ln xmlns:a="http://schemas.openxmlformats.org/drawingml/2006/main" w="0">
-            <a:noFill/>
-            <a:prstDash val="solid"/>
-          </a:ln>
-        </p:spPr>
-        <p:txBody>
-          <a:bodyPr xmlns:a="http://schemas.openxmlformats.org/drawingml/2006/main" lIns="0" tIns="0" rIns="0" bIns="0" anchor="ctr"/>
-          <a:lstStyle xmlns:a="http://schemas.openxmlformats.org/drawingml/2006/main"/>
-          <a:p xmlns:a="http://schemas.openxmlformats.org/drawingml/2006/main">
-            <a:pPr>
-              <a:defRPr sz="3750" b="1">
-                <a:solidFill>
-                  <a:srgbClr val="152B3A"/>
-                </a:solidFill>
-              </a:defRPr>
-            </a:pPr>
-            <a:r>
-              <a:rPr sz="3750" b="1">
-                <a:solidFill>
-                  <a:srgbClr val="152B3A"/>
-                </a:solidFill>
+            <a:off x="609600" y="990600"/>
+            <a:ext cx="10972800" cy="1000125"/>
+          </a:xfrm>
+          <a:prstGeom xmlns:a="http://schemas.openxmlformats.org/drawingml/2006/main" prst="rect">
+            <a:avLst/>
+          </a:prstGeom>
+          <a:noFill xmlns:a="http://schemas.openxmlformats.org/drawingml/2006/main"/>
+          <a:ln xmlns:a="http://schemas.openxmlformats.org/drawingml/2006/main" w="0">
+            <a:noFill/>
+            <a:prstDash val="solid"/>
+          </a:ln>
+        </p:spPr>
+        <p:txBody>
+          <a:bodyPr xmlns:a="http://schemas.openxmlformats.org/drawingml/2006/main" lIns="0" tIns="0" rIns="0" bIns="0" anchor="ctr">
+            <a:noAutofit/>
+          </a:bodyPr>
+          <a:lstStyle xmlns:a="http://schemas.openxmlformats.org/drawingml/2006/main"/>
+          <a:p xmlns:a="http://schemas.openxmlformats.org/drawingml/2006/main">
+            <a:pPr algn="l">
+              <a:buNone/>
+              <a:defRPr sz="3675" b="1">
+                <a:solidFill>
+                  <a:srgbClr val="152B3A"/>
+                </a:solidFill>
+                <a:latin typeface="Calibri"/>
+                <a:ea typeface="Calibri"/>
+                <a:cs typeface="Calibri"/>
+              </a:defRPr>
+            </a:pPr>
+            <a:r>
+              <a:rPr sz="3675" b="1">
+                <a:solidFill>
+                  <a:srgbClr val="152B3A"/>
+                </a:solidFill>
+                <a:latin typeface="Calibri"/>
+                <a:ea typeface="Calibri"/>
+                <a:cs typeface="Calibri"/>
               </a:rPr>
               <a:t>What explains each observation?</a:t>
             </a:r>
@@ -7517,14 +9459,14 @@
         </p:nvSpPr>
         <p:spPr>
           <a:xfrm xmlns:a="http://schemas.openxmlformats.org/drawingml/2006/main">
-            <a:off x="609600" y="6219825"/>
+            <a:off x="609600" y="6191250"/>
             <a:ext cx="10972800" cy="9525"/>
           </a:xfrm>
           <a:prstGeom xmlns:a="http://schemas.openxmlformats.org/drawingml/2006/main" prst="rect">
             <a:avLst/>
           </a:prstGeom>
           <a:solidFill xmlns:a="http://schemas.openxmlformats.org/drawingml/2006/main">
-            <a:srgbClr val="DCE7DD"/>
+            <a:srgbClr val="CEDBD3"/>
           </a:solidFill>
           <a:ln xmlns:a="http://schemas.openxmlformats.org/drawingml/2006/main" w="0">
             <a:noFill/>
@@ -7548,34 +9490,43 @@
         </p:nvSpPr>
         <p:spPr>
           <a:xfrm xmlns:a="http://schemas.openxmlformats.org/drawingml/2006/main">
-            <a:off x="609600" y="6381750"/>
-            <a:ext cx="9906000" cy="228600"/>
-          </a:xfrm>
-          <a:prstGeom xmlns:a="http://schemas.openxmlformats.org/drawingml/2006/main" prst="rect">
-            <a:avLst/>
-          </a:prstGeom>
-          <a:noFill xmlns:a="http://schemas.openxmlformats.org/drawingml/2006/main"/>
-          <a:ln xmlns:a="http://schemas.openxmlformats.org/drawingml/2006/main" w="0">
-            <a:noFill/>
-            <a:prstDash val="solid"/>
-          </a:ln>
-        </p:spPr>
-        <p:txBody>
-          <a:bodyPr xmlns:a="http://schemas.openxmlformats.org/drawingml/2006/main" lIns="0" tIns="0" rIns="0" bIns="0" anchor="ctr"/>
-          <a:lstStyle xmlns:a="http://schemas.openxmlformats.org/drawingml/2006/main"/>
-          <a:p xmlns:a="http://schemas.openxmlformats.org/drawingml/2006/main">
-            <a:pPr>
-              <a:defRPr sz="1275" b="0">
+            <a:off x="609600" y="6419850"/>
+            <a:ext cx="9525000" cy="219075"/>
+          </a:xfrm>
+          <a:prstGeom xmlns:a="http://schemas.openxmlformats.org/drawingml/2006/main" prst="rect">
+            <a:avLst/>
+          </a:prstGeom>
+          <a:noFill xmlns:a="http://schemas.openxmlformats.org/drawingml/2006/main"/>
+          <a:ln xmlns:a="http://schemas.openxmlformats.org/drawingml/2006/main" w="0">
+            <a:noFill/>
+            <a:prstDash val="solid"/>
+          </a:ln>
+        </p:spPr>
+        <p:txBody>
+          <a:bodyPr xmlns:a="http://schemas.openxmlformats.org/drawingml/2006/main" lIns="0" tIns="0" rIns="0" bIns="0" anchor="ctr">
+            <a:noAutofit/>
+          </a:bodyPr>
+          <a:lstStyle xmlns:a="http://schemas.openxmlformats.org/drawingml/2006/main"/>
+          <a:p xmlns:a="http://schemas.openxmlformats.org/drawingml/2006/main">
+            <a:pPr algn="l">
+              <a:buNone/>
+              <a:defRPr sz="1200" b="0">
                 <a:solidFill>
                   <a:srgbClr val="50616B"/>
                 </a:solidFill>
-              </a:defRPr>
-            </a:pPr>
-            <a:r>
-              <a:rPr sz="1275" b="0">
+                <a:latin typeface="Calibri"/>
+                <a:ea typeface="Calibri"/>
+                <a:cs typeface="Calibri"/>
+              </a:defRPr>
+            </a:pPr>
+            <a:r>
+              <a:rPr sz="1200" b="0">
                 <a:solidFill>
                   <a:srgbClr val="50616B"/>
                 </a:solidFill>
+                <a:latin typeface="Calibri"/>
+                <a:ea typeface="Calibri"/>
+                <a:cs typeface="Calibri"/>
               </a:rPr>
               <a:t>AUTUMN 1  ·  WEEK 7  ·  LESSON A</a:t>
             </a:r>
@@ -7598,27 +9549,33 @@
         </p:nvSpPr>
         <p:spPr>
           <a:xfrm xmlns:a="http://schemas.openxmlformats.org/drawingml/2006/main">
-            <a:off x="11106150" y="6362700"/>
-            <a:ext cx="476250" cy="238125"/>
-          </a:xfrm>
-          <a:prstGeom xmlns:a="http://schemas.openxmlformats.org/drawingml/2006/main" prst="rect">
-            <a:avLst/>
-          </a:prstGeom>
-          <a:noFill xmlns:a="http://schemas.openxmlformats.org/drawingml/2006/main"/>
-          <a:ln xmlns:a="http://schemas.openxmlformats.org/drawingml/2006/main" w="0">
-            <a:noFill/>
-            <a:prstDash val="solid"/>
-          </a:ln>
-        </p:spPr>
-        <p:txBody>
-          <a:bodyPr xmlns:a="http://schemas.openxmlformats.org/drawingml/2006/main" lIns="0" tIns="0" rIns="0" bIns="0" anchor="ctr"/>
-          <a:lstStyle xmlns:a="http://schemas.openxmlformats.org/drawingml/2006/main"/>
-          <a:p xmlns:a="http://schemas.openxmlformats.org/drawingml/2006/main">
-            <a:pPr>
+            <a:off x="11106150" y="6400800"/>
+            <a:ext cx="476250" cy="247650"/>
+          </a:xfrm>
+          <a:prstGeom xmlns:a="http://schemas.openxmlformats.org/drawingml/2006/main" prst="rect">
+            <a:avLst/>
+          </a:prstGeom>
+          <a:noFill xmlns:a="http://schemas.openxmlformats.org/drawingml/2006/main"/>
+          <a:ln xmlns:a="http://schemas.openxmlformats.org/drawingml/2006/main" w="0">
+            <a:noFill/>
+            <a:prstDash val="solid"/>
+          </a:ln>
+        </p:spPr>
+        <p:txBody>
+          <a:bodyPr xmlns:a="http://schemas.openxmlformats.org/drawingml/2006/main" lIns="0" tIns="0" rIns="0" bIns="0" anchor="ctr">
+            <a:noAutofit/>
+          </a:bodyPr>
+          <a:lstStyle xmlns:a="http://schemas.openxmlformats.org/drawingml/2006/main"/>
+          <a:p xmlns:a="http://schemas.openxmlformats.org/drawingml/2006/main">
+            <a:pPr algn="l">
+              <a:buNone/>
               <a:defRPr sz="1350" b="1">
                 <a:solidFill>
                   <a:srgbClr val="28685E"/>
                 </a:solidFill>
+                <a:latin typeface="Calibri"/>
+                <a:ea typeface="Calibri"/>
+                <a:cs typeface="Calibri"/>
               </a:defRPr>
             </a:pPr>
             <a:r>
@@ -7626,6 +9583,9 @@
                 <a:solidFill>
                   <a:srgbClr val="28685E"/>
                 </a:solidFill>
+                <a:latin typeface="Calibri"/>
+                <a:ea typeface="Calibri"/>
+                <a:cs typeface="Calibri"/>
               </a:rPr>
               <a:t>07</a:t>
             </a:r>
@@ -7648,34 +9608,43 @@
         </p:nvSpPr>
         <p:spPr>
           <a:xfrm xmlns:a="http://schemas.openxmlformats.org/drawingml/2006/main">
-            <a:off x="609600" y="2619375"/>
-            <a:ext cx="10972800" cy="714375"/>
-          </a:xfrm>
-          <a:prstGeom xmlns:a="http://schemas.openxmlformats.org/drawingml/2006/main" prst="rect">
-            <a:avLst/>
-          </a:prstGeom>
-          <a:noFill xmlns:a="http://schemas.openxmlformats.org/drawingml/2006/main"/>
-          <a:ln xmlns:a="http://schemas.openxmlformats.org/drawingml/2006/main" w="0">
-            <a:noFill/>
-            <a:prstDash val="solid"/>
-          </a:ln>
-        </p:spPr>
-        <p:txBody>
-          <a:bodyPr xmlns:a="http://schemas.openxmlformats.org/drawingml/2006/main" lIns="0" tIns="0" rIns="0" bIns="0" anchor="ctr"/>
-          <a:lstStyle xmlns:a="http://schemas.openxmlformats.org/drawingml/2006/main"/>
-          <a:p xmlns:a="http://schemas.openxmlformats.org/drawingml/2006/main">
-            <a:pPr>
-              <a:defRPr sz="2550" b="0">
-                <a:solidFill>
-                  <a:srgbClr val="152B3A"/>
-                </a:solidFill>
-              </a:defRPr>
-            </a:pPr>
-            <a:r>
-              <a:rPr sz="2550" b="0">
-                <a:solidFill>
-                  <a:srgbClr val="152B3A"/>
-                </a:solidFill>
+            <a:off x="1000125" y="2333625"/>
+            <a:ext cx="10382250" cy="792956"/>
+          </a:xfrm>
+          <a:prstGeom xmlns:a="http://schemas.openxmlformats.org/drawingml/2006/main" prst="rect">
+            <a:avLst/>
+          </a:prstGeom>
+          <a:noFill xmlns:a="http://schemas.openxmlformats.org/drawingml/2006/main"/>
+          <a:ln xmlns:a="http://schemas.openxmlformats.org/drawingml/2006/main" w="0">
+            <a:noFill/>
+            <a:prstDash val="solid"/>
+          </a:ln>
+        </p:spPr>
+        <p:txBody>
+          <a:bodyPr xmlns:a="http://schemas.openxmlformats.org/drawingml/2006/main" lIns="0" tIns="0" rIns="0" bIns="0" anchor="ctr">
+            <a:noAutofit/>
+          </a:bodyPr>
+          <a:lstStyle xmlns:a="http://schemas.openxmlformats.org/drawingml/2006/main"/>
+          <a:p xmlns:a="http://schemas.openxmlformats.org/drawingml/2006/main">
+            <a:pPr algn="l">
+              <a:buNone/>
+              <a:defRPr sz="2400" b="0">
+                <a:solidFill>
+                  <a:srgbClr val="152B3A"/>
+                </a:solidFill>
+                <a:latin typeface="Calibri"/>
+                <a:ea typeface="Calibri"/>
+                <a:cs typeface="Calibri"/>
+              </a:defRPr>
+            </a:pPr>
+            <a:r>
+              <a:rPr sz="2400" b="0">
+                <a:solidFill>
+                  <a:srgbClr val="152B3A"/>
+                </a:solidFill>
+                <a:latin typeface="Calibri"/>
+                <a:ea typeface="Calibri"/>
+                <a:cs typeface="Calibri"/>
               </a:rPr>
               <a:t>An ordinary crescent Moon.</a:t>
             </a:r>
@@ -7698,34 +9667,43 @@
         </p:nvSpPr>
         <p:spPr>
           <a:xfrm xmlns:a="http://schemas.openxmlformats.org/drawingml/2006/main">
-            <a:off x="609600" y="3409950"/>
-            <a:ext cx="10972800" cy="714375"/>
-          </a:xfrm>
-          <a:prstGeom xmlns:a="http://schemas.openxmlformats.org/drawingml/2006/main" prst="rect">
-            <a:avLst/>
-          </a:prstGeom>
-          <a:noFill xmlns:a="http://schemas.openxmlformats.org/drawingml/2006/main"/>
-          <a:ln xmlns:a="http://schemas.openxmlformats.org/drawingml/2006/main" w="0">
-            <a:noFill/>
-            <a:prstDash val="solid"/>
-          </a:ln>
-        </p:spPr>
-        <p:txBody>
-          <a:bodyPr xmlns:a="http://schemas.openxmlformats.org/drawingml/2006/main" lIns="0" tIns="0" rIns="0" bIns="0" anchor="ctr"/>
-          <a:lstStyle xmlns:a="http://schemas.openxmlformats.org/drawingml/2006/main"/>
-          <a:p xmlns:a="http://schemas.openxmlformats.org/drawingml/2006/main">
-            <a:pPr>
-              <a:defRPr sz="2550" b="0">
-                <a:solidFill>
-                  <a:srgbClr val="152B3A"/>
-                </a:solidFill>
-              </a:defRPr>
-            </a:pPr>
-            <a:r>
-              <a:rPr sz="2550" b="0">
-                <a:solidFill>
-                  <a:srgbClr val="152B3A"/>
-                </a:solidFill>
+            <a:off x="1000125" y="3183731"/>
+            <a:ext cx="10382250" cy="792956"/>
+          </a:xfrm>
+          <a:prstGeom xmlns:a="http://schemas.openxmlformats.org/drawingml/2006/main" prst="rect">
+            <a:avLst/>
+          </a:prstGeom>
+          <a:noFill xmlns:a="http://schemas.openxmlformats.org/drawingml/2006/main"/>
+          <a:ln xmlns:a="http://schemas.openxmlformats.org/drawingml/2006/main" w="0">
+            <a:noFill/>
+            <a:prstDash val="solid"/>
+          </a:ln>
+        </p:spPr>
+        <p:txBody>
+          <a:bodyPr xmlns:a="http://schemas.openxmlformats.org/drawingml/2006/main" lIns="0" tIns="0" rIns="0" bIns="0" anchor="ctr">
+            <a:noAutofit/>
+          </a:bodyPr>
+          <a:lstStyle xmlns:a="http://schemas.openxmlformats.org/drawingml/2006/main"/>
+          <a:p xmlns:a="http://schemas.openxmlformats.org/drawingml/2006/main">
+            <a:pPr algn="l">
+              <a:buNone/>
+              <a:defRPr sz="2400" b="0">
+                <a:solidFill>
+                  <a:srgbClr val="152B3A"/>
+                </a:solidFill>
+                <a:latin typeface="Calibri"/>
+                <a:ea typeface="Calibri"/>
+                <a:cs typeface="Calibri"/>
+              </a:defRPr>
+            </a:pPr>
+            <a:r>
+              <a:rPr sz="2400" b="0">
+                <a:solidFill>
+                  <a:srgbClr val="152B3A"/>
+                </a:solidFill>
+                <a:latin typeface="Calibri"/>
+                <a:ea typeface="Calibri"/>
+                <a:cs typeface="Calibri"/>
               </a:rPr>
               <a:t>An ordinary full Moon.</a:t>
             </a:r>
@@ -7748,34 +9726,43 @@
         </p:nvSpPr>
         <p:spPr>
           <a:xfrm xmlns:a="http://schemas.openxmlformats.org/drawingml/2006/main">
-            <a:off x="609600" y="4200525"/>
-            <a:ext cx="10972800" cy="714375"/>
-          </a:xfrm>
-          <a:prstGeom xmlns:a="http://schemas.openxmlformats.org/drawingml/2006/main" prst="rect">
-            <a:avLst/>
-          </a:prstGeom>
-          <a:noFill xmlns:a="http://schemas.openxmlformats.org/drawingml/2006/main"/>
-          <a:ln xmlns:a="http://schemas.openxmlformats.org/drawingml/2006/main" w="0">
-            <a:noFill/>
-            <a:prstDash val="solid"/>
-          </a:ln>
-        </p:spPr>
-        <p:txBody>
-          <a:bodyPr xmlns:a="http://schemas.openxmlformats.org/drawingml/2006/main" lIns="0" tIns="0" rIns="0" bIns="0" anchor="ctr"/>
-          <a:lstStyle xmlns:a="http://schemas.openxmlformats.org/drawingml/2006/main"/>
-          <a:p xmlns:a="http://schemas.openxmlformats.org/drawingml/2006/main">
-            <a:pPr>
-              <a:defRPr sz="2550" b="0">
-                <a:solidFill>
-                  <a:srgbClr val="152B3A"/>
-                </a:solidFill>
-              </a:defRPr>
-            </a:pPr>
-            <a:r>
-              <a:rPr sz="2550" b="0">
-                <a:solidFill>
-                  <a:srgbClr val="152B3A"/>
-                </a:solidFill>
+            <a:off x="1000125" y="4033838"/>
+            <a:ext cx="10382250" cy="792956"/>
+          </a:xfrm>
+          <a:prstGeom xmlns:a="http://schemas.openxmlformats.org/drawingml/2006/main" prst="rect">
+            <a:avLst/>
+          </a:prstGeom>
+          <a:noFill xmlns:a="http://schemas.openxmlformats.org/drawingml/2006/main"/>
+          <a:ln xmlns:a="http://schemas.openxmlformats.org/drawingml/2006/main" w="0">
+            <a:noFill/>
+            <a:prstDash val="solid"/>
+          </a:ln>
+        </p:spPr>
+        <p:txBody>
+          <a:bodyPr xmlns:a="http://schemas.openxmlformats.org/drawingml/2006/main" lIns="0" tIns="0" rIns="0" bIns="0" anchor="ctr">
+            <a:noAutofit/>
+          </a:bodyPr>
+          <a:lstStyle xmlns:a="http://schemas.openxmlformats.org/drawingml/2006/main"/>
+          <a:p xmlns:a="http://schemas.openxmlformats.org/drawingml/2006/main">
+            <a:pPr algn="l">
+              <a:buNone/>
+              <a:defRPr sz="2400" b="0">
+                <a:solidFill>
+                  <a:srgbClr val="152B3A"/>
+                </a:solidFill>
+                <a:latin typeface="Calibri"/>
+                <a:ea typeface="Calibri"/>
+                <a:cs typeface="Calibri"/>
+              </a:defRPr>
+            </a:pPr>
+            <a:r>
+              <a:rPr sz="2400" b="0">
+                <a:solidFill>
+                  <a:srgbClr val="152B3A"/>
+                </a:solidFill>
+                <a:latin typeface="Calibri"/>
+                <a:ea typeface="Calibri"/>
+                <a:cs typeface="Calibri"/>
               </a:rPr>
               <a:t>New Moon is hard to see.</a:t>
             </a:r>
@@ -7798,36 +9785,363 @@
         </p:nvSpPr>
         <p:spPr>
           <a:xfrm xmlns:a="http://schemas.openxmlformats.org/drawingml/2006/main">
-            <a:off x="609600" y="4991100"/>
-            <a:ext cx="10972800" cy="714375"/>
-          </a:xfrm>
-          <a:prstGeom xmlns:a="http://schemas.openxmlformats.org/drawingml/2006/main" prst="rect">
-            <a:avLst/>
-          </a:prstGeom>
-          <a:noFill xmlns:a="http://schemas.openxmlformats.org/drawingml/2006/main"/>
-          <a:ln xmlns:a="http://schemas.openxmlformats.org/drawingml/2006/main" w="0">
-            <a:noFill/>
-            <a:prstDash val="solid"/>
-          </a:ln>
-        </p:spPr>
-        <p:txBody>
-          <a:bodyPr xmlns:a="http://schemas.openxmlformats.org/drawingml/2006/main" lIns="0" tIns="0" rIns="0" bIns="0" anchor="ctr"/>
-          <a:lstStyle xmlns:a="http://schemas.openxmlformats.org/drawingml/2006/main"/>
-          <a:p xmlns:a="http://schemas.openxmlformats.org/drawingml/2006/main">
-            <a:pPr>
-              <a:defRPr sz="2550" b="0">
-                <a:solidFill>
-                  <a:srgbClr val="152B3A"/>
-                </a:solidFill>
-              </a:defRPr>
-            </a:pPr>
-            <a:r>
-              <a:rPr sz="2550" b="0">
-                <a:solidFill>
-                  <a:srgbClr val="152B3A"/>
-                </a:solidFill>
+            <a:off x="1000125" y="4883944"/>
+            <a:ext cx="10382250" cy="792956"/>
+          </a:xfrm>
+          <a:prstGeom xmlns:a="http://schemas.openxmlformats.org/drawingml/2006/main" prst="rect">
+            <a:avLst/>
+          </a:prstGeom>
+          <a:noFill xmlns:a="http://schemas.openxmlformats.org/drawingml/2006/main"/>
+          <a:ln xmlns:a="http://schemas.openxmlformats.org/drawingml/2006/main" w="0">
+            <a:noFill/>
+            <a:prstDash val="solid"/>
+          </a:ln>
+        </p:spPr>
+        <p:txBody>
+          <a:bodyPr xmlns:a="http://schemas.openxmlformats.org/drawingml/2006/main" lIns="0" tIns="0" rIns="0" bIns="0" anchor="ctr">
+            <a:noAutofit/>
+          </a:bodyPr>
+          <a:lstStyle xmlns:a="http://schemas.openxmlformats.org/drawingml/2006/main"/>
+          <a:p xmlns:a="http://schemas.openxmlformats.org/drawingml/2006/main">
+            <a:pPr algn="l">
+              <a:buNone/>
+              <a:defRPr sz="2400" b="0">
+                <a:solidFill>
+                  <a:srgbClr val="152B3A"/>
+                </a:solidFill>
+                <a:latin typeface="Calibri"/>
+                <a:ea typeface="Calibri"/>
+                <a:cs typeface="Calibri"/>
+              </a:defRPr>
+            </a:pPr>
+            <a:r>
+              <a:rPr sz="2400" b="0">
+                <a:solidFill>
+                  <a:srgbClr val="152B3A"/>
+                </a:solidFill>
+                <a:latin typeface="Calibri"/>
+                <a:ea typeface="Calibri"/>
+                <a:cs typeface="Calibri"/>
               </a:rPr>
               <a:t>The Moon looks dark red during a lunar eclipse.</a:t>
+            </a:r>
+          </a:p>
+        </p:txBody>
+      </p:sp>
+      <p:sp>
+        <p:nvSpPr>
+          <p:cNvPr id="12" name="cue-0">
+            <a:extLst xmlns:a="http://schemas.openxmlformats.org/drawingml/2006/main">
+              <a:ext uri="{FF2B5EF4-FFF2-40B4-BE49-F238E27FC236}">
+                <a16:creationId xmlns:a16="http://schemas.microsoft.com/office/drawing/2014/main" id="{DE7CBF25-ACE9-4DF0-947B-2E6C20127A9D}"/>
+              </a:ext>
+            </a:extLst>
+          </p:cNvPr>
+          <p:cNvSpPr>
+            <a:spLocks xmlns:a="http://schemas.openxmlformats.org/drawingml/2006/main" noGrp="1"/>
+          </p:cNvSpPr>
+          <p:nvPr/>
+        </p:nvSpPr>
+        <p:spPr>
+          <a:xfrm xmlns:a="http://schemas.openxmlformats.org/drawingml/2006/main">
+            <a:off x="609600" y="2362200"/>
+            <a:ext cx="323850" cy="323850"/>
+          </a:xfrm>
+          <a:prstGeom xmlns:a="http://schemas.openxmlformats.org/drawingml/2006/main" prst="rect">
+            <a:avLst/>
+          </a:prstGeom>
+          <a:noFill xmlns:a="http://schemas.openxmlformats.org/drawingml/2006/main"/>
+          <a:ln xmlns:a="http://schemas.openxmlformats.org/drawingml/2006/main" w="0">
+            <a:noFill/>
+          </a:ln>
+        </p:spPr>
+        <p:txBody>
+          <a:bodyPr xmlns:a="http://schemas.openxmlformats.org/drawingml/2006/main" lIns="0" tIns="0" rIns="0" bIns="0" anchor="ctr">
+            <a:noAutofit/>
+          </a:bodyPr>
+          <a:lstStyle xmlns:a="http://schemas.openxmlformats.org/drawingml/2006/main"/>
+          <a:p xmlns:a="http://schemas.openxmlformats.org/drawingml/2006/main">
+            <a:pPr algn="l">
+              <a:defRPr sz="1350" b="1">
+                <a:solidFill>
+                  <a:srgbClr val="28685E"/>
+                </a:solidFill>
+                <a:latin typeface="Calibri"/>
+                <a:ea typeface="Calibri"/>
+                <a:cs typeface="Calibri"/>
+              </a:defRPr>
+            </a:pPr>
+            <a:r>
+              <a:rPr sz="1350" b="1">
+                <a:solidFill>
+                  <a:srgbClr val="28685E"/>
+                </a:solidFill>
+                <a:latin typeface="Calibri"/>
+                <a:ea typeface="Calibri"/>
+                <a:cs typeface="Calibri"/>
+              </a:rPr>
+              <a:t>01</a:t>
+            </a:r>
+          </a:p>
+        </p:txBody>
+      </p:sp>
+      <p:sp>
+        <p:nvSpPr>
+          <p:cNvPr id="13" name="row-rule-0">
+            <a:extLst xmlns:a="http://schemas.openxmlformats.org/drawingml/2006/main">
+              <a:ext uri="{FF2B5EF4-FFF2-40B4-BE49-F238E27FC236}">
+                <a16:creationId xmlns:a16="http://schemas.microsoft.com/office/drawing/2014/main" id="{8CAC8C6A-5C56-4EE6-9B46-7AE52CB4EEDB}"/>
+              </a:ext>
+            </a:extLst>
+          </p:cNvPr>
+          <p:cNvSpPr>
+            <a:spLocks xmlns:a="http://schemas.openxmlformats.org/drawingml/2006/main" noGrp="1"/>
+          </p:cNvSpPr>
+          <p:nvPr/>
+        </p:nvSpPr>
+        <p:spPr>
+          <a:xfrm xmlns:a="http://schemas.openxmlformats.org/drawingml/2006/main">
+            <a:off x="1000125" y="3136106"/>
+            <a:ext cx="10334625" cy="0"/>
+          </a:xfrm>
+          <a:prstGeom xmlns:a="http://schemas.openxmlformats.org/drawingml/2006/main" prst="line">
+            <a:avLst/>
+          </a:prstGeom>
+          <a:noFill xmlns:a="http://schemas.openxmlformats.org/drawingml/2006/main"/>
+          <a:ln xmlns:a="http://schemas.openxmlformats.org/drawingml/2006/main" w="9525">
+            <a:solidFill>
+              <a:srgbClr val="CEDBD3"/>
+            </a:solidFill>
+          </a:ln>
+        </p:spPr>
+      </p:sp>
+      <p:sp>
+        <p:nvSpPr>
+          <p:cNvPr id="14" name="cue-1">
+            <a:extLst xmlns:a="http://schemas.openxmlformats.org/drawingml/2006/main">
+              <a:ext uri="{FF2B5EF4-FFF2-40B4-BE49-F238E27FC236}">
+                <a16:creationId xmlns:a16="http://schemas.microsoft.com/office/drawing/2014/main" id="{1C61765F-6111-4ED6-B58F-E7250DC7F491}"/>
+              </a:ext>
+            </a:extLst>
+          </p:cNvPr>
+          <p:cNvSpPr>
+            <a:spLocks xmlns:a="http://schemas.openxmlformats.org/drawingml/2006/main" noGrp="1"/>
+          </p:cNvSpPr>
+          <p:nvPr/>
+        </p:nvSpPr>
+        <p:spPr>
+          <a:xfrm xmlns:a="http://schemas.openxmlformats.org/drawingml/2006/main">
+            <a:off x="609600" y="3212306"/>
+            <a:ext cx="323850" cy="323850"/>
+          </a:xfrm>
+          <a:prstGeom xmlns:a="http://schemas.openxmlformats.org/drawingml/2006/main" prst="rect">
+            <a:avLst/>
+          </a:prstGeom>
+          <a:noFill xmlns:a="http://schemas.openxmlformats.org/drawingml/2006/main"/>
+          <a:ln xmlns:a="http://schemas.openxmlformats.org/drawingml/2006/main" w="0">
+            <a:noFill/>
+          </a:ln>
+        </p:spPr>
+        <p:txBody>
+          <a:bodyPr xmlns:a="http://schemas.openxmlformats.org/drawingml/2006/main" lIns="0" tIns="0" rIns="0" bIns="0" anchor="ctr">
+            <a:noAutofit/>
+          </a:bodyPr>
+          <a:lstStyle xmlns:a="http://schemas.openxmlformats.org/drawingml/2006/main"/>
+          <a:p xmlns:a="http://schemas.openxmlformats.org/drawingml/2006/main">
+            <a:pPr algn="l">
+              <a:defRPr sz="1350" b="1">
+                <a:solidFill>
+                  <a:srgbClr val="28685E"/>
+                </a:solidFill>
+                <a:latin typeface="Calibri"/>
+                <a:ea typeface="Calibri"/>
+                <a:cs typeface="Calibri"/>
+              </a:defRPr>
+            </a:pPr>
+            <a:r>
+              <a:rPr sz="1350" b="1">
+                <a:solidFill>
+                  <a:srgbClr val="28685E"/>
+                </a:solidFill>
+                <a:latin typeface="Calibri"/>
+                <a:ea typeface="Calibri"/>
+                <a:cs typeface="Calibri"/>
+              </a:rPr>
+              <a:t>02</a:t>
+            </a:r>
+          </a:p>
+        </p:txBody>
+      </p:sp>
+      <p:sp>
+        <p:nvSpPr>
+          <p:cNvPr id="15" name="row-rule-1">
+            <a:extLst xmlns:a="http://schemas.openxmlformats.org/drawingml/2006/main">
+              <a:ext uri="{FF2B5EF4-FFF2-40B4-BE49-F238E27FC236}">
+                <a16:creationId xmlns:a16="http://schemas.microsoft.com/office/drawing/2014/main" id="{C12E7775-8060-435F-91FD-4FB212890992}"/>
+              </a:ext>
+            </a:extLst>
+          </p:cNvPr>
+          <p:cNvSpPr>
+            <a:spLocks xmlns:a="http://schemas.openxmlformats.org/drawingml/2006/main" noGrp="1"/>
+          </p:cNvSpPr>
+          <p:nvPr/>
+        </p:nvSpPr>
+        <p:spPr>
+          <a:xfrm xmlns:a="http://schemas.openxmlformats.org/drawingml/2006/main">
+            <a:off x="1000125" y="3986213"/>
+            <a:ext cx="10334625" cy="0"/>
+          </a:xfrm>
+          <a:prstGeom xmlns:a="http://schemas.openxmlformats.org/drawingml/2006/main" prst="line">
+            <a:avLst/>
+          </a:prstGeom>
+          <a:noFill xmlns:a="http://schemas.openxmlformats.org/drawingml/2006/main"/>
+          <a:ln xmlns:a="http://schemas.openxmlformats.org/drawingml/2006/main" w="9525">
+            <a:solidFill>
+              <a:srgbClr val="CEDBD3"/>
+            </a:solidFill>
+          </a:ln>
+        </p:spPr>
+      </p:sp>
+      <p:sp>
+        <p:nvSpPr>
+          <p:cNvPr id="16" name="cue-2">
+            <a:extLst xmlns:a="http://schemas.openxmlformats.org/drawingml/2006/main">
+              <a:ext uri="{FF2B5EF4-FFF2-40B4-BE49-F238E27FC236}">
+                <a16:creationId xmlns:a16="http://schemas.microsoft.com/office/drawing/2014/main" id="{999D7050-45C2-4D3D-A110-6A361E8E6C55}"/>
+              </a:ext>
+            </a:extLst>
+          </p:cNvPr>
+          <p:cNvSpPr>
+            <a:spLocks xmlns:a="http://schemas.openxmlformats.org/drawingml/2006/main" noGrp="1"/>
+          </p:cNvSpPr>
+          <p:nvPr/>
+        </p:nvSpPr>
+        <p:spPr>
+          <a:xfrm xmlns:a="http://schemas.openxmlformats.org/drawingml/2006/main">
+            <a:off x="609600" y="4062413"/>
+            <a:ext cx="323850" cy="323850"/>
+          </a:xfrm>
+          <a:prstGeom xmlns:a="http://schemas.openxmlformats.org/drawingml/2006/main" prst="rect">
+            <a:avLst/>
+          </a:prstGeom>
+          <a:noFill xmlns:a="http://schemas.openxmlformats.org/drawingml/2006/main"/>
+          <a:ln xmlns:a="http://schemas.openxmlformats.org/drawingml/2006/main" w="0">
+            <a:noFill/>
+          </a:ln>
+        </p:spPr>
+        <p:txBody>
+          <a:bodyPr xmlns:a="http://schemas.openxmlformats.org/drawingml/2006/main" lIns="0" tIns="0" rIns="0" bIns="0" anchor="ctr">
+            <a:noAutofit/>
+          </a:bodyPr>
+          <a:lstStyle xmlns:a="http://schemas.openxmlformats.org/drawingml/2006/main"/>
+          <a:p xmlns:a="http://schemas.openxmlformats.org/drawingml/2006/main">
+            <a:pPr algn="l">
+              <a:defRPr sz="1350" b="1">
+                <a:solidFill>
+                  <a:srgbClr val="28685E"/>
+                </a:solidFill>
+                <a:latin typeface="Calibri"/>
+                <a:ea typeface="Calibri"/>
+                <a:cs typeface="Calibri"/>
+              </a:defRPr>
+            </a:pPr>
+            <a:r>
+              <a:rPr sz="1350" b="1">
+                <a:solidFill>
+                  <a:srgbClr val="28685E"/>
+                </a:solidFill>
+                <a:latin typeface="Calibri"/>
+                <a:ea typeface="Calibri"/>
+                <a:cs typeface="Calibri"/>
+              </a:rPr>
+              <a:t>03</a:t>
+            </a:r>
+          </a:p>
+        </p:txBody>
+      </p:sp>
+      <p:sp>
+        <p:nvSpPr>
+          <p:cNvPr id="17" name="row-rule-2">
+            <a:extLst xmlns:a="http://schemas.openxmlformats.org/drawingml/2006/main">
+              <a:ext uri="{FF2B5EF4-FFF2-40B4-BE49-F238E27FC236}">
+                <a16:creationId xmlns:a16="http://schemas.microsoft.com/office/drawing/2014/main" id="{E7068FE0-1F82-44EF-B887-DDAFE38725DD}"/>
+              </a:ext>
+            </a:extLst>
+          </p:cNvPr>
+          <p:cNvSpPr>
+            <a:spLocks xmlns:a="http://schemas.openxmlformats.org/drawingml/2006/main" noGrp="1"/>
+          </p:cNvSpPr>
+          <p:nvPr/>
+        </p:nvSpPr>
+        <p:spPr>
+          <a:xfrm xmlns:a="http://schemas.openxmlformats.org/drawingml/2006/main">
+            <a:off x="1000125" y="4836319"/>
+            <a:ext cx="10334625" cy="0"/>
+          </a:xfrm>
+          <a:prstGeom xmlns:a="http://schemas.openxmlformats.org/drawingml/2006/main" prst="line">
+            <a:avLst/>
+          </a:prstGeom>
+          <a:noFill xmlns:a="http://schemas.openxmlformats.org/drawingml/2006/main"/>
+          <a:ln xmlns:a="http://schemas.openxmlformats.org/drawingml/2006/main" w="9525">
+            <a:solidFill>
+              <a:srgbClr val="CEDBD3"/>
+            </a:solidFill>
+          </a:ln>
+        </p:spPr>
+      </p:sp>
+      <p:sp>
+        <p:nvSpPr>
+          <p:cNvPr id="18" name="cue-3">
+            <a:extLst xmlns:a="http://schemas.openxmlformats.org/drawingml/2006/main">
+              <a:ext uri="{FF2B5EF4-FFF2-40B4-BE49-F238E27FC236}">
+                <a16:creationId xmlns:a16="http://schemas.microsoft.com/office/drawing/2014/main" id="{22FFB5AA-F4F9-4B59-AB02-37336A8167F7}"/>
+              </a:ext>
+            </a:extLst>
+          </p:cNvPr>
+          <p:cNvSpPr>
+            <a:spLocks xmlns:a="http://schemas.openxmlformats.org/drawingml/2006/main" noGrp="1"/>
+          </p:cNvSpPr>
+          <p:nvPr/>
+        </p:nvSpPr>
+        <p:spPr>
+          <a:xfrm xmlns:a="http://schemas.openxmlformats.org/drawingml/2006/main">
+            <a:off x="609600" y="4912519"/>
+            <a:ext cx="323850" cy="323850"/>
+          </a:xfrm>
+          <a:prstGeom xmlns:a="http://schemas.openxmlformats.org/drawingml/2006/main" prst="rect">
+            <a:avLst/>
+          </a:prstGeom>
+          <a:noFill xmlns:a="http://schemas.openxmlformats.org/drawingml/2006/main"/>
+          <a:ln xmlns:a="http://schemas.openxmlformats.org/drawingml/2006/main" w="0">
+            <a:noFill/>
+          </a:ln>
+        </p:spPr>
+        <p:txBody>
+          <a:bodyPr xmlns:a="http://schemas.openxmlformats.org/drawingml/2006/main" lIns="0" tIns="0" rIns="0" bIns="0" anchor="ctr">
+            <a:noAutofit/>
+          </a:bodyPr>
+          <a:lstStyle xmlns:a="http://schemas.openxmlformats.org/drawingml/2006/main"/>
+          <a:p xmlns:a="http://schemas.openxmlformats.org/drawingml/2006/main">
+            <a:pPr algn="l">
+              <a:defRPr sz="1350" b="1">
+                <a:solidFill>
+                  <a:srgbClr val="28685E"/>
+                </a:solidFill>
+                <a:latin typeface="Calibri"/>
+                <a:ea typeface="Calibri"/>
+                <a:cs typeface="Calibri"/>
+              </a:defRPr>
+            </a:pPr>
+            <a:r>
+              <a:rPr sz="1350" b="1">
+                <a:solidFill>
+                  <a:srgbClr val="28685E"/>
+                </a:solidFill>
+                <a:latin typeface="Calibri"/>
+                <a:ea typeface="Calibri"/>
+                <a:cs typeface="Calibri"/>
+              </a:rPr>
+              <a:t>04</a:t>
             </a:r>
           </a:p>
         </p:txBody>
@@ -7848,7 +10162,7 @@
     <p:bg>
       <p:bgPr>
         <a:solidFill xmlns:a="http://schemas.openxmlformats.org/drawingml/2006/main">
-          <a:srgbClr val="F5F1E8"/>
+          <a:srgbClr val="FAF9F5"/>
         </a:solidFill>
       </p:bgPr>
     </p:bg>
@@ -7877,8 +10191,8 @@
         </p:nvSpPr>
         <p:spPr>
           <a:xfrm xmlns:a="http://schemas.openxmlformats.org/drawingml/2006/main">
-            <a:off x="609600" y="552450"/>
-            <a:ext cx="781050" cy="57150"/>
+            <a:off x="609600" y="733425"/>
+            <a:ext cx="781050" cy="38100"/>
           </a:xfrm>
           <a:prstGeom xmlns:a="http://schemas.openxmlformats.org/drawingml/2006/main" prst="rect">
             <a:avLst/>
@@ -7908,34 +10222,43 @@
         </p:nvSpPr>
         <p:spPr>
           <a:xfrm xmlns:a="http://schemas.openxmlformats.org/drawingml/2006/main">
-            <a:off x="609600" y="762000"/>
-            <a:ext cx="8572500" cy="285750"/>
-          </a:xfrm>
-          <a:prstGeom xmlns:a="http://schemas.openxmlformats.org/drawingml/2006/main" prst="rect">
-            <a:avLst/>
-          </a:prstGeom>
-          <a:noFill xmlns:a="http://schemas.openxmlformats.org/drawingml/2006/main"/>
-          <a:ln xmlns:a="http://schemas.openxmlformats.org/drawingml/2006/main" w="0">
-            <a:noFill/>
-            <a:prstDash val="solid"/>
-          </a:ln>
-        </p:spPr>
-        <p:txBody>
-          <a:bodyPr xmlns:a="http://schemas.openxmlformats.org/drawingml/2006/main" lIns="0" tIns="0" rIns="0" bIns="0" anchor="ctr"/>
-          <a:lstStyle xmlns:a="http://schemas.openxmlformats.org/drawingml/2006/main"/>
-          <a:p xmlns:a="http://schemas.openxmlformats.org/drawingml/2006/main">
-            <a:pPr>
-              <a:defRPr sz="1500" b="1">
+            <a:off x="609600" y="342900"/>
+            <a:ext cx="9334500" cy="304800"/>
+          </a:xfrm>
+          <a:prstGeom xmlns:a="http://schemas.openxmlformats.org/drawingml/2006/main" prst="rect">
+            <a:avLst/>
+          </a:prstGeom>
+          <a:noFill xmlns:a="http://schemas.openxmlformats.org/drawingml/2006/main"/>
+          <a:ln xmlns:a="http://schemas.openxmlformats.org/drawingml/2006/main" w="0">
+            <a:noFill/>
+            <a:prstDash val="solid"/>
+          </a:ln>
+        </p:spPr>
+        <p:txBody>
+          <a:bodyPr xmlns:a="http://schemas.openxmlformats.org/drawingml/2006/main" lIns="0" tIns="0" rIns="0" bIns="0" anchor="ctr">
+            <a:noAutofit/>
+          </a:bodyPr>
+          <a:lstStyle xmlns:a="http://schemas.openxmlformats.org/drawingml/2006/main"/>
+          <a:p xmlns:a="http://schemas.openxmlformats.org/drawingml/2006/main">
+            <a:pPr algn="l">
+              <a:buNone/>
+              <a:defRPr sz="1350" b="1">
                 <a:solidFill>
                   <a:srgbClr val="28685E"/>
                 </a:solidFill>
-              </a:defRPr>
-            </a:pPr>
-            <a:r>
-              <a:rPr sz="1500" b="1">
+                <a:latin typeface="Calibri"/>
+                <a:ea typeface="Calibri"/>
+                <a:cs typeface="Calibri"/>
+              </a:defRPr>
+            </a:pPr>
+            <a:r>
+              <a:rPr sz="1350" b="1">
                 <a:solidFill>
                   <a:srgbClr val="28685E"/>
                 </a:solidFill>
+                <a:latin typeface="Calibri"/>
+                <a:ea typeface="Calibri"/>
+                <a:cs typeface="Calibri"/>
               </a:rPr>
               <a:t>MADE BY MATT  /  GROW SCIENCE</a:t>
             </a:r>
@@ -7958,34 +10281,43 @@
         </p:nvSpPr>
         <p:spPr>
           <a:xfrm xmlns:a="http://schemas.openxmlformats.org/drawingml/2006/main">
-            <a:off x="609600" y="1352550"/>
-            <a:ext cx="10972800" cy="952500"/>
-          </a:xfrm>
-          <a:prstGeom xmlns:a="http://schemas.openxmlformats.org/drawingml/2006/main" prst="rect">
-            <a:avLst/>
-          </a:prstGeom>
-          <a:noFill xmlns:a="http://schemas.openxmlformats.org/drawingml/2006/main"/>
-          <a:ln xmlns:a="http://schemas.openxmlformats.org/drawingml/2006/main" w="0">
-            <a:noFill/>
-            <a:prstDash val="solid"/>
-          </a:ln>
-        </p:spPr>
-        <p:txBody>
-          <a:bodyPr xmlns:a="http://schemas.openxmlformats.org/drawingml/2006/main" lIns="0" tIns="0" rIns="0" bIns="0" anchor="ctr"/>
-          <a:lstStyle xmlns:a="http://schemas.openxmlformats.org/drawingml/2006/main"/>
-          <a:p xmlns:a="http://schemas.openxmlformats.org/drawingml/2006/main">
-            <a:pPr>
-              <a:defRPr sz="3750" b="1">
-                <a:solidFill>
-                  <a:srgbClr val="152B3A"/>
-                </a:solidFill>
-              </a:defRPr>
-            </a:pPr>
-            <a:r>
-              <a:rPr sz="3750" b="1">
-                <a:solidFill>
-                  <a:srgbClr val="152B3A"/>
-                </a:solidFill>
+            <a:off x="609600" y="990600"/>
+            <a:ext cx="10972800" cy="1000125"/>
+          </a:xfrm>
+          <a:prstGeom xmlns:a="http://schemas.openxmlformats.org/drawingml/2006/main" prst="rect">
+            <a:avLst/>
+          </a:prstGeom>
+          <a:noFill xmlns:a="http://schemas.openxmlformats.org/drawingml/2006/main"/>
+          <a:ln xmlns:a="http://schemas.openxmlformats.org/drawingml/2006/main" w="0">
+            <a:noFill/>
+            <a:prstDash val="solid"/>
+          </a:ln>
+        </p:spPr>
+        <p:txBody>
+          <a:bodyPr xmlns:a="http://schemas.openxmlformats.org/drawingml/2006/main" lIns="0" tIns="0" rIns="0" bIns="0" anchor="ctr">
+            <a:noAutofit/>
+          </a:bodyPr>
+          <a:lstStyle xmlns:a="http://schemas.openxmlformats.org/drawingml/2006/main"/>
+          <a:p xmlns:a="http://schemas.openxmlformats.org/drawingml/2006/main">
+            <a:pPr algn="l">
+              <a:buNone/>
+              <a:defRPr sz="3675" b="1">
+                <a:solidFill>
+                  <a:srgbClr val="152B3A"/>
+                </a:solidFill>
+                <a:latin typeface="Calibri"/>
+                <a:ea typeface="Calibri"/>
+                <a:cs typeface="Calibri"/>
+              </a:defRPr>
+            </a:pPr>
+            <a:r>
+              <a:rPr sz="3675" b="1">
+                <a:solidFill>
+                  <a:srgbClr val="152B3A"/>
+                </a:solidFill>
+                <a:latin typeface="Calibri"/>
+                <a:ea typeface="Calibri"/>
+                <a:cs typeface="Calibri"/>
               </a:rPr>
               <a:t>Phases and eclipses differ</a:t>
             </a:r>
@@ -8008,14 +10340,14 @@
         </p:nvSpPr>
         <p:spPr>
           <a:xfrm xmlns:a="http://schemas.openxmlformats.org/drawingml/2006/main">
-            <a:off x="609600" y="6219825"/>
+            <a:off x="609600" y="6191250"/>
             <a:ext cx="10972800" cy="9525"/>
           </a:xfrm>
           <a:prstGeom xmlns:a="http://schemas.openxmlformats.org/drawingml/2006/main" prst="rect">
             <a:avLst/>
           </a:prstGeom>
           <a:solidFill xmlns:a="http://schemas.openxmlformats.org/drawingml/2006/main">
-            <a:srgbClr val="DCE7DD"/>
+            <a:srgbClr val="CEDBD3"/>
           </a:solidFill>
           <a:ln xmlns:a="http://schemas.openxmlformats.org/drawingml/2006/main" w="0">
             <a:noFill/>
@@ -8039,34 +10371,43 @@
         </p:nvSpPr>
         <p:spPr>
           <a:xfrm xmlns:a="http://schemas.openxmlformats.org/drawingml/2006/main">
-            <a:off x="609600" y="6381750"/>
-            <a:ext cx="9906000" cy="228600"/>
-          </a:xfrm>
-          <a:prstGeom xmlns:a="http://schemas.openxmlformats.org/drawingml/2006/main" prst="rect">
-            <a:avLst/>
-          </a:prstGeom>
-          <a:noFill xmlns:a="http://schemas.openxmlformats.org/drawingml/2006/main"/>
-          <a:ln xmlns:a="http://schemas.openxmlformats.org/drawingml/2006/main" w="0">
-            <a:noFill/>
-            <a:prstDash val="solid"/>
-          </a:ln>
-        </p:spPr>
-        <p:txBody>
-          <a:bodyPr xmlns:a="http://schemas.openxmlformats.org/drawingml/2006/main" lIns="0" tIns="0" rIns="0" bIns="0" anchor="ctr"/>
-          <a:lstStyle xmlns:a="http://schemas.openxmlformats.org/drawingml/2006/main"/>
-          <a:p xmlns:a="http://schemas.openxmlformats.org/drawingml/2006/main">
-            <a:pPr>
-              <a:defRPr sz="1275" b="0">
+            <a:off x="609600" y="6419850"/>
+            <a:ext cx="9525000" cy="219075"/>
+          </a:xfrm>
+          <a:prstGeom xmlns:a="http://schemas.openxmlformats.org/drawingml/2006/main" prst="rect">
+            <a:avLst/>
+          </a:prstGeom>
+          <a:noFill xmlns:a="http://schemas.openxmlformats.org/drawingml/2006/main"/>
+          <a:ln xmlns:a="http://schemas.openxmlformats.org/drawingml/2006/main" w="0">
+            <a:noFill/>
+            <a:prstDash val="solid"/>
+          </a:ln>
+        </p:spPr>
+        <p:txBody>
+          <a:bodyPr xmlns:a="http://schemas.openxmlformats.org/drawingml/2006/main" lIns="0" tIns="0" rIns="0" bIns="0" anchor="ctr">
+            <a:noAutofit/>
+          </a:bodyPr>
+          <a:lstStyle xmlns:a="http://schemas.openxmlformats.org/drawingml/2006/main"/>
+          <a:p xmlns:a="http://schemas.openxmlformats.org/drawingml/2006/main">
+            <a:pPr algn="l">
+              <a:buNone/>
+              <a:defRPr sz="1200" b="0">
                 <a:solidFill>
                   <a:srgbClr val="50616B"/>
                 </a:solidFill>
-              </a:defRPr>
-            </a:pPr>
-            <a:r>
-              <a:rPr sz="1275" b="0">
+                <a:latin typeface="Calibri"/>
+                <a:ea typeface="Calibri"/>
+                <a:cs typeface="Calibri"/>
+              </a:defRPr>
+            </a:pPr>
+            <a:r>
+              <a:rPr sz="1200" b="0">
                 <a:solidFill>
                   <a:srgbClr val="50616B"/>
                 </a:solidFill>
+                <a:latin typeface="Calibri"/>
+                <a:ea typeface="Calibri"/>
+                <a:cs typeface="Calibri"/>
               </a:rPr>
               <a:t>AUTUMN 1  ·  WEEK 7  ·  LESSON A</a:t>
             </a:r>
@@ -8089,27 +10430,33 @@
         </p:nvSpPr>
         <p:spPr>
           <a:xfrm xmlns:a="http://schemas.openxmlformats.org/drawingml/2006/main">
-            <a:off x="11106150" y="6362700"/>
-            <a:ext cx="476250" cy="238125"/>
-          </a:xfrm>
-          <a:prstGeom xmlns:a="http://schemas.openxmlformats.org/drawingml/2006/main" prst="rect">
-            <a:avLst/>
-          </a:prstGeom>
-          <a:noFill xmlns:a="http://schemas.openxmlformats.org/drawingml/2006/main"/>
-          <a:ln xmlns:a="http://schemas.openxmlformats.org/drawingml/2006/main" w="0">
-            <a:noFill/>
-            <a:prstDash val="solid"/>
-          </a:ln>
-        </p:spPr>
-        <p:txBody>
-          <a:bodyPr xmlns:a="http://schemas.openxmlformats.org/drawingml/2006/main" lIns="0" tIns="0" rIns="0" bIns="0" anchor="ctr"/>
-          <a:lstStyle xmlns:a="http://schemas.openxmlformats.org/drawingml/2006/main"/>
-          <a:p xmlns:a="http://schemas.openxmlformats.org/drawingml/2006/main">
-            <a:pPr>
+            <a:off x="11106150" y="6400800"/>
+            <a:ext cx="476250" cy="247650"/>
+          </a:xfrm>
+          <a:prstGeom xmlns:a="http://schemas.openxmlformats.org/drawingml/2006/main" prst="rect">
+            <a:avLst/>
+          </a:prstGeom>
+          <a:noFill xmlns:a="http://schemas.openxmlformats.org/drawingml/2006/main"/>
+          <a:ln xmlns:a="http://schemas.openxmlformats.org/drawingml/2006/main" w="0">
+            <a:noFill/>
+            <a:prstDash val="solid"/>
+          </a:ln>
+        </p:spPr>
+        <p:txBody>
+          <a:bodyPr xmlns:a="http://schemas.openxmlformats.org/drawingml/2006/main" lIns="0" tIns="0" rIns="0" bIns="0" anchor="ctr">
+            <a:noAutofit/>
+          </a:bodyPr>
+          <a:lstStyle xmlns:a="http://schemas.openxmlformats.org/drawingml/2006/main"/>
+          <a:p xmlns:a="http://schemas.openxmlformats.org/drawingml/2006/main">
+            <a:pPr algn="l">
+              <a:buNone/>
               <a:defRPr sz="1350" b="1">
                 <a:solidFill>
                   <a:srgbClr val="28685E"/>
                 </a:solidFill>
+                <a:latin typeface="Calibri"/>
+                <a:ea typeface="Calibri"/>
+                <a:cs typeface="Calibri"/>
               </a:defRPr>
             </a:pPr>
             <a:r>
@@ -8117,6 +10464,9 @@
                 <a:solidFill>
                   <a:srgbClr val="28685E"/>
                 </a:solidFill>
+                <a:latin typeface="Calibri"/>
+                <a:ea typeface="Calibri"/>
+                <a:cs typeface="Calibri"/>
               </a:rPr>
               <a:t>08</a:t>
             </a:r>
@@ -8139,34 +10489,45 @@
         </p:nvSpPr>
         <p:spPr>
           <a:xfrm xmlns:a="http://schemas.openxmlformats.org/drawingml/2006/main">
-            <a:off x="609600" y="2619375"/>
-            <a:ext cx="4953000" cy="428625"/>
-          </a:xfrm>
-          <a:prstGeom xmlns:a="http://schemas.openxmlformats.org/drawingml/2006/main" prst="rect">
-            <a:avLst/>
-          </a:prstGeom>
-          <a:noFill xmlns:a="http://schemas.openxmlformats.org/drawingml/2006/main"/>
-          <a:ln xmlns:a="http://schemas.openxmlformats.org/drawingml/2006/main" w="0">
-            <a:noFill/>
-            <a:prstDash val="solid"/>
-          </a:ln>
-        </p:spPr>
-        <p:txBody>
-          <a:bodyPr xmlns:a="http://schemas.openxmlformats.org/drawingml/2006/main" lIns="0" tIns="0" rIns="0" bIns="0" anchor="ctr"/>
-          <a:lstStyle xmlns:a="http://schemas.openxmlformats.org/drawingml/2006/main"/>
-          <a:p xmlns:a="http://schemas.openxmlformats.org/drawingml/2006/main">
-            <a:pPr>
-              <a:defRPr sz="2025" b="1">
+            <a:off x="609600" y="2219325"/>
+            <a:ext cx="5257800" cy="762000"/>
+          </a:xfrm>
+          <a:prstGeom xmlns:a="http://schemas.openxmlformats.org/drawingml/2006/main" prst="rect">
+            <a:avLst/>
+          </a:prstGeom>
+          <a:solidFill xmlns:a="http://schemas.openxmlformats.org/drawingml/2006/main">
+            <a:srgbClr val="E7EFE9"/>
+          </a:solidFill>
+          <a:ln xmlns:a="http://schemas.openxmlformats.org/drawingml/2006/main" w="0">
+            <a:noFill/>
+            <a:prstDash val="solid"/>
+          </a:ln>
+        </p:spPr>
+        <p:txBody>
+          <a:bodyPr xmlns:a="http://schemas.openxmlformats.org/drawingml/2006/main" lIns="228600" tIns="114300" rIns="228600" bIns="114300" anchor="ctr">
+            <a:noAutofit/>
+          </a:bodyPr>
+          <a:lstStyle xmlns:a="http://schemas.openxmlformats.org/drawingml/2006/main"/>
+          <a:p xmlns:a="http://schemas.openxmlformats.org/drawingml/2006/main">
+            <a:pPr algn="l">
+              <a:buNone/>
+              <a:defRPr sz="1875" b="1">
                 <a:solidFill>
                   <a:srgbClr val="28685E"/>
                 </a:solidFill>
-              </a:defRPr>
-            </a:pPr>
-            <a:r>
-              <a:rPr sz="2025" b="1">
+                <a:latin typeface="Calibri"/>
+                <a:ea typeface="Calibri"/>
+                <a:cs typeface="Calibri"/>
+              </a:defRPr>
+            </a:pPr>
+            <a:r>
+              <a:rPr sz="1875" b="1">
                 <a:solidFill>
                   <a:srgbClr val="28685E"/>
                 </a:solidFill>
+                <a:latin typeface="Calibri"/>
+                <a:ea typeface="Calibri"/>
+                <a:cs typeface="Calibri"/>
               </a:rPr>
               <a:t>ORDINARY PHASES</a:t>
             </a:r>
@@ -8189,34 +10550,45 @@
         </p:nvSpPr>
         <p:spPr>
           <a:xfrm xmlns:a="http://schemas.openxmlformats.org/drawingml/2006/main">
-            <a:off x="6572250" y="2619375"/>
-            <a:ext cx="4953000" cy="428625"/>
-          </a:xfrm>
-          <a:prstGeom xmlns:a="http://schemas.openxmlformats.org/drawingml/2006/main" prst="rect">
-            <a:avLst/>
-          </a:prstGeom>
-          <a:noFill xmlns:a="http://schemas.openxmlformats.org/drawingml/2006/main"/>
-          <a:ln xmlns:a="http://schemas.openxmlformats.org/drawingml/2006/main" w="0">
-            <a:noFill/>
-            <a:prstDash val="solid"/>
-          </a:ln>
-        </p:spPr>
-        <p:txBody>
-          <a:bodyPr xmlns:a="http://schemas.openxmlformats.org/drawingml/2006/main" lIns="0" tIns="0" rIns="0" bIns="0" anchor="ctr"/>
-          <a:lstStyle xmlns:a="http://schemas.openxmlformats.org/drawingml/2006/main"/>
-          <a:p xmlns:a="http://schemas.openxmlformats.org/drawingml/2006/main">
-            <a:pPr>
-              <a:defRPr sz="2025" b="1">
-                <a:solidFill>
-                  <a:srgbClr val="A65D25"/>
-                </a:solidFill>
-              </a:defRPr>
-            </a:pPr>
-            <a:r>
-              <a:rPr sz="2025" b="1">
-                <a:solidFill>
-                  <a:srgbClr val="A65D25"/>
-                </a:solidFill>
+            <a:off x="6381750" y="2219325"/>
+            <a:ext cx="5200650" cy="762000"/>
+          </a:xfrm>
+          <a:prstGeom xmlns:a="http://schemas.openxmlformats.org/drawingml/2006/main" prst="rect">
+            <a:avLst/>
+          </a:prstGeom>
+          <a:solidFill xmlns:a="http://schemas.openxmlformats.org/drawingml/2006/main">
+            <a:srgbClr val="F0EBE3"/>
+          </a:solidFill>
+          <a:ln xmlns:a="http://schemas.openxmlformats.org/drawingml/2006/main" w="0">
+            <a:noFill/>
+            <a:prstDash val="solid"/>
+          </a:ln>
+        </p:spPr>
+        <p:txBody>
+          <a:bodyPr xmlns:a="http://schemas.openxmlformats.org/drawingml/2006/main" lIns="228600" tIns="114300" rIns="228600" bIns="114300" anchor="ctr">
+            <a:noAutofit/>
+          </a:bodyPr>
+          <a:lstStyle xmlns:a="http://schemas.openxmlformats.org/drawingml/2006/main"/>
+          <a:p xmlns:a="http://schemas.openxmlformats.org/drawingml/2006/main">
+            <a:pPr algn="l">
+              <a:buNone/>
+              <a:defRPr sz="1875" b="1">
+                <a:solidFill>
+                  <a:srgbClr val="A95D21"/>
+                </a:solidFill>
+                <a:latin typeface="Calibri"/>
+                <a:ea typeface="Calibri"/>
+                <a:cs typeface="Calibri"/>
+              </a:defRPr>
+            </a:pPr>
+            <a:r>
+              <a:rPr sz="1875" b="1">
+                <a:solidFill>
+                  <a:srgbClr val="A95D21"/>
+                </a:solidFill>
+                <a:latin typeface="Calibri"/>
+                <a:ea typeface="Calibri"/>
+                <a:cs typeface="Calibri"/>
               </a:rPr>
               <a:t>LUNAR ECLIPSE</a:t>
             </a:r>
@@ -8239,27 +10611,35 @@
         </p:nvSpPr>
         <p:spPr>
           <a:xfrm xmlns:a="http://schemas.openxmlformats.org/drawingml/2006/main">
-            <a:off x="609600" y="3333750"/>
-            <a:ext cx="4953000" cy="2524125"/>
-          </a:xfrm>
-          <a:prstGeom xmlns:a="http://schemas.openxmlformats.org/drawingml/2006/main" prst="rect">
-            <a:avLst/>
-          </a:prstGeom>
-          <a:noFill xmlns:a="http://schemas.openxmlformats.org/drawingml/2006/main"/>
-          <a:ln xmlns:a="http://schemas.openxmlformats.org/drawingml/2006/main" w="0">
-            <a:noFill/>
-            <a:prstDash val="solid"/>
-          </a:ln>
-        </p:spPr>
-        <p:txBody>
-          <a:bodyPr xmlns:a="http://schemas.openxmlformats.org/drawingml/2006/main" lIns="0" tIns="0" rIns="0" bIns="0" anchor="ctr"/>
-          <a:lstStyle xmlns:a="http://schemas.openxmlformats.org/drawingml/2006/main"/>
-          <a:p xmlns:a="http://schemas.openxmlformats.org/drawingml/2006/main">
-            <a:pPr>
+            <a:off x="609600" y="2981325"/>
+            <a:ext cx="5257800" cy="2714625"/>
+          </a:xfrm>
+          <a:prstGeom xmlns:a="http://schemas.openxmlformats.org/drawingml/2006/main" prst="rect">
+            <a:avLst/>
+          </a:prstGeom>
+          <a:solidFill xmlns:a="http://schemas.openxmlformats.org/drawingml/2006/main">
+            <a:srgbClr val="E7EFE9"/>
+          </a:solidFill>
+          <a:ln xmlns:a="http://schemas.openxmlformats.org/drawingml/2006/main" w="0">
+            <a:noFill/>
+            <a:prstDash val="solid"/>
+          </a:ln>
+        </p:spPr>
+        <p:txBody>
+          <a:bodyPr xmlns:a="http://schemas.openxmlformats.org/drawingml/2006/main" lIns="228600" tIns="114300" rIns="228600" bIns="114300" anchor="ctr">
+            <a:noAutofit/>
+          </a:bodyPr>
+          <a:lstStyle xmlns:a="http://schemas.openxmlformats.org/drawingml/2006/main"/>
+          <a:p xmlns:a="http://schemas.openxmlformats.org/drawingml/2006/main">
+            <a:pPr algn="l">
+              <a:buNone/>
               <a:defRPr sz="2400" b="0">
                 <a:solidFill>
                   <a:srgbClr val="152B3A"/>
                 </a:solidFill>
+                <a:latin typeface="Calibri"/>
+                <a:ea typeface="Calibri"/>
+                <a:cs typeface="Calibri"/>
               </a:defRPr>
             </a:pPr>
             <a:r>
@@ -8267,16 +10647,23 @@
                 <a:solidFill>
                   <a:srgbClr val="152B3A"/>
                 </a:solidFill>
+                <a:latin typeface="Calibri"/>
+                <a:ea typeface="Calibri"/>
+                <a:cs typeface="Calibri"/>
               </a:rPr>
               <a:t>The viewing angle changes.</a:t>
             </a:r>
           </a:p>
           <a:p xmlns:a="http://schemas.openxmlformats.org/drawingml/2006/main">
-            <a:pPr>
+            <a:pPr algn="l">
+              <a:buNone/>
               <a:defRPr sz="2400" b="0">
                 <a:solidFill>
                   <a:srgbClr val="152B3A"/>
                 </a:solidFill>
+                <a:latin typeface="Calibri"/>
+                <a:ea typeface="Calibri"/>
+                <a:cs typeface="Calibri"/>
               </a:defRPr>
             </a:pPr>
             <a:r>
@@ -8284,16 +10671,23 @@
                 <a:solidFill>
                   <a:srgbClr val="152B3A"/>
                 </a:solidFill>
+                <a:latin typeface="Calibri"/>
+                <a:ea typeface="Calibri"/>
+                <a:cs typeface="Calibri"/>
               </a:rPr>
               <a:t>The visible lit portion changes.</a:t>
             </a:r>
           </a:p>
           <a:p xmlns:a="http://schemas.openxmlformats.org/drawingml/2006/main">
-            <a:pPr>
+            <a:pPr algn="l">
+              <a:buNone/>
               <a:defRPr sz="2400" b="0">
                 <a:solidFill>
                   <a:srgbClr val="152B3A"/>
                 </a:solidFill>
+                <a:latin typeface="Calibri"/>
+                <a:ea typeface="Calibri"/>
+                <a:cs typeface="Calibri"/>
               </a:defRPr>
             </a:pPr>
             <a:r>
@@ -8301,6 +10695,9 @@
                 <a:solidFill>
                   <a:srgbClr val="152B3A"/>
                 </a:solidFill>
+                <a:latin typeface="Calibri"/>
+                <a:ea typeface="Calibri"/>
+                <a:cs typeface="Calibri"/>
               </a:rPr>
               <a:t>The Moon remains round.</a:t>
             </a:r>
@@ -8323,27 +10720,35 @@
         </p:nvSpPr>
         <p:spPr>
           <a:xfrm xmlns:a="http://schemas.openxmlformats.org/drawingml/2006/main">
-            <a:off x="6572250" y="3333750"/>
-            <a:ext cx="4857750" cy="2524125"/>
-          </a:xfrm>
-          <a:prstGeom xmlns:a="http://schemas.openxmlformats.org/drawingml/2006/main" prst="rect">
-            <a:avLst/>
-          </a:prstGeom>
-          <a:noFill xmlns:a="http://schemas.openxmlformats.org/drawingml/2006/main"/>
-          <a:ln xmlns:a="http://schemas.openxmlformats.org/drawingml/2006/main" w="0">
-            <a:noFill/>
-            <a:prstDash val="solid"/>
-          </a:ln>
-        </p:spPr>
-        <p:txBody>
-          <a:bodyPr xmlns:a="http://schemas.openxmlformats.org/drawingml/2006/main" lIns="0" tIns="0" rIns="0" bIns="0" anchor="ctr"/>
-          <a:lstStyle xmlns:a="http://schemas.openxmlformats.org/drawingml/2006/main"/>
-          <a:p xmlns:a="http://schemas.openxmlformats.org/drawingml/2006/main">
-            <a:pPr>
+            <a:off x="6381750" y="2981325"/>
+            <a:ext cx="5200650" cy="2714625"/>
+          </a:xfrm>
+          <a:prstGeom xmlns:a="http://schemas.openxmlformats.org/drawingml/2006/main" prst="rect">
+            <a:avLst/>
+          </a:prstGeom>
+          <a:solidFill xmlns:a="http://schemas.openxmlformats.org/drawingml/2006/main">
+            <a:srgbClr val="F0EBE3"/>
+          </a:solidFill>
+          <a:ln xmlns:a="http://schemas.openxmlformats.org/drawingml/2006/main" w="0">
+            <a:noFill/>
+            <a:prstDash val="solid"/>
+          </a:ln>
+        </p:spPr>
+        <p:txBody>
+          <a:bodyPr xmlns:a="http://schemas.openxmlformats.org/drawingml/2006/main" lIns="228600" tIns="114300" rIns="228600" bIns="114300" anchor="ctr">
+            <a:noAutofit/>
+          </a:bodyPr>
+          <a:lstStyle xmlns:a="http://schemas.openxmlformats.org/drawingml/2006/main"/>
+          <a:p xmlns:a="http://schemas.openxmlformats.org/drawingml/2006/main">
+            <a:pPr algn="l">
+              <a:buNone/>
               <a:defRPr sz="2400" b="0">
                 <a:solidFill>
                   <a:srgbClr val="152B3A"/>
                 </a:solidFill>
+                <a:latin typeface="Calibri"/>
+                <a:ea typeface="Calibri"/>
+                <a:cs typeface="Calibri"/>
               </a:defRPr>
             </a:pPr>
             <a:r>
@@ -8351,16 +10756,23 @@
                 <a:solidFill>
                   <a:srgbClr val="152B3A"/>
                 </a:solidFill>
+                <a:latin typeface="Calibri"/>
+                <a:ea typeface="Calibri"/>
+                <a:cs typeface="Calibri"/>
               </a:rPr>
               <a:t>Earth blocks direct sunlight.</a:t>
             </a:r>
           </a:p>
           <a:p xmlns:a="http://schemas.openxmlformats.org/drawingml/2006/main">
-            <a:pPr>
+            <a:pPr algn="l">
+              <a:buNone/>
               <a:defRPr sz="2400" b="0">
                 <a:solidFill>
                   <a:srgbClr val="152B3A"/>
                 </a:solidFill>
+                <a:latin typeface="Calibri"/>
+                <a:ea typeface="Calibri"/>
+                <a:cs typeface="Calibri"/>
               </a:defRPr>
             </a:pPr>
             <a:r>
@@ -8368,16 +10780,23 @@
                 <a:solidFill>
                   <a:srgbClr val="152B3A"/>
                 </a:solidFill>
+                <a:latin typeface="Calibri"/>
+                <a:ea typeface="Calibri"/>
+                <a:cs typeface="Calibri"/>
               </a:rPr>
               <a:t>Earth's shadow reaches the Moon.</a:t>
             </a:r>
           </a:p>
           <a:p xmlns:a="http://schemas.openxmlformats.org/drawingml/2006/main">
-            <a:pPr>
+            <a:pPr algn="l">
+              <a:buNone/>
               <a:defRPr sz="2400" b="0">
                 <a:solidFill>
                   <a:srgbClr val="152B3A"/>
                 </a:solidFill>
+                <a:latin typeface="Calibri"/>
+                <a:ea typeface="Calibri"/>
+                <a:cs typeface="Calibri"/>
               </a:defRPr>
             </a:pPr>
             <a:r>
@@ -8385,8 +10804,35 @@
                 <a:solidFill>
                   <a:srgbClr val="152B3A"/>
                 </a:solidFill>
-              </a:rPr>
-              <a:t>This is not the monthly phase cause.</a:t>
+                <a:latin typeface="Calibri"/>
+                <a:ea typeface="Calibri"/>
+                <a:cs typeface="Calibri"/>
+              </a:rPr>
+              <a:t>This is not the monthly</a:t>
+            </a:r>
+          </a:p>
+          <a:p xmlns:a="http://schemas.openxmlformats.org/drawingml/2006/main">
+            <a:pPr algn="l">
+              <a:buNone/>
+              <a:defRPr sz="2400" b="0">
+                <a:solidFill>
+                  <a:srgbClr val="152B3A"/>
+                </a:solidFill>
+                <a:latin typeface="Calibri"/>
+                <a:ea typeface="Calibri"/>
+                <a:cs typeface="Calibri"/>
+              </a:defRPr>
+            </a:pPr>
+            <a:r>
+              <a:rPr sz="2400" b="0">
+                <a:solidFill>
+                  <a:srgbClr val="152B3A"/>
+                </a:solidFill>
+                <a:latin typeface="Calibri"/>
+                <a:ea typeface="Calibri"/>
+                <a:cs typeface="Calibri"/>
+              </a:rPr>
+              <a:t>phase cause.</a:t>
             </a:r>
           </a:p>
         </p:txBody>
@@ -8407,7 +10853,7 @@
     <p:bg>
       <p:bgPr>
         <a:solidFill xmlns:a="http://schemas.openxmlformats.org/drawingml/2006/main">
-          <a:srgbClr val="F5F1E8"/>
+          <a:srgbClr val="FAF9F5"/>
         </a:solidFill>
       </p:bgPr>
     </p:bg>
@@ -8436,8 +10882,8 @@
         </p:nvSpPr>
         <p:spPr>
           <a:xfrm xmlns:a="http://schemas.openxmlformats.org/drawingml/2006/main">
-            <a:off x="609600" y="552450"/>
-            <a:ext cx="781050" cy="57150"/>
+            <a:off x="609600" y="733425"/>
+            <a:ext cx="781050" cy="38100"/>
           </a:xfrm>
           <a:prstGeom xmlns:a="http://schemas.openxmlformats.org/drawingml/2006/main" prst="rect">
             <a:avLst/>
@@ -8467,34 +10913,43 @@
         </p:nvSpPr>
         <p:spPr>
           <a:xfrm xmlns:a="http://schemas.openxmlformats.org/drawingml/2006/main">
-            <a:off x="609600" y="762000"/>
-            <a:ext cx="8572500" cy="285750"/>
-          </a:xfrm>
-          <a:prstGeom xmlns:a="http://schemas.openxmlformats.org/drawingml/2006/main" prst="rect">
-            <a:avLst/>
-          </a:prstGeom>
-          <a:noFill xmlns:a="http://schemas.openxmlformats.org/drawingml/2006/main"/>
-          <a:ln xmlns:a="http://schemas.openxmlformats.org/drawingml/2006/main" w="0">
-            <a:noFill/>
-            <a:prstDash val="solid"/>
-          </a:ln>
-        </p:spPr>
-        <p:txBody>
-          <a:bodyPr xmlns:a="http://schemas.openxmlformats.org/drawingml/2006/main" lIns="0" tIns="0" rIns="0" bIns="0" anchor="ctr"/>
-          <a:lstStyle xmlns:a="http://schemas.openxmlformats.org/drawingml/2006/main"/>
-          <a:p xmlns:a="http://schemas.openxmlformats.org/drawingml/2006/main">
-            <a:pPr>
-              <a:defRPr sz="1500" b="1">
+            <a:off x="609600" y="342900"/>
+            <a:ext cx="9334500" cy="304800"/>
+          </a:xfrm>
+          <a:prstGeom xmlns:a="http://schemas.openxmlformats.org/drawingml/2006/main" prst="rect">
+            <a:avLst/>
+          </a:prstGeom>
+          <a:noFill xmlns:a="http://schemas.openxmlformats.org/drawingml/2006/main"/>
+          <a:ln xmlns:a="http://schemas.openxmlformats.org/drawingml/2006/main" w="0">
+            <a:noFill/>
+            <a:prstDash val="solid"/>
+          </a:ln>
+        </p:spPr>
+        <p:txBody>
+          <a:bodyPr xmlns:a="http://schemas.openxmlformats.org/drawingml/2006/main" lIns="0" tIns="0" rIns="0" bIns="0" anchor="ctr">
+            <a:noAutofit/>
+          </a:bodyPr>
+          <a:lstStyle xmlns:a="http://schemas.openxmlformats.org/drawingml/2006/main"/>
+          <a:p xmlns:a="http://schemas.openxmlformats.org/drawingml/2006/main">
+            <a:pPr algn="l">
+              <a:buNone/>
+              <a:defRPr sz="1350" b="1">
                 <a:solidFill>
                   <a:srgbClr val="28685E"/>
                 </a:solidFill>
-              </a:defRPr>
-            </a:pPr>
-            <a:r>
-              <a:rPr sz="1500" b="1">
+                <a:latin typeface="Calibri"/>
+                <a:ea typeface="Calibri"/>
+                <a:cs typeface="Calibri"/>
+              </a:defRPr>
+            </a:pPr>
+            <a:r>
+              <a:rPr sz="1350" b="1">
                 <a:solidFill>
                   <a:srgbClr val="28685E"/>
                 </a:solidFill>
+                <a:latin typeface="Calibri"/>
+                <a:ea typeface="Calibri"/>
+                <a:cs typeface="Calibri"/>
               </a:rPr>
               <a:t>MADE BY MATT  /  GROW SCIENCE</a:t>
             </a:r>
@@ -8517,34 +10972,43 @@
         </p:nvSpPr>
         <p:spPr>
           <a:xfrm xmlns:a="http://schemas.openxmlformats.org/drawingml/2006/main">
-            <a:off x="609600" y="1352550"/>
-            <a:ext cx="10972800" cy="952500"/>
-          </a:xfrm>
-          <a:prstGeom xmlns:a="http://schemas.openxmlformats.org/drawingml/2006/main" prst="rect">
-            <a:avLst/>
-          </a:prstGeom>
-          <a:noFill xmlns:a="http://schemas.openxmlformats.org/drawingml/2006/main"/>
-          <a:ln xmlns:a="http://schemas.openxmlformats.org/drawingml/2006/main" w="0">
-            <a:noFill/>
-            <a:prstDash val="solid"/>
-          </a:ln>
-        </p:spPr>
-        <p:txBody>
-          <a:bodyPr xmlns:a="http://schemas.openxmlformats.org/drawingml/2006/main" lIns="0" tIns="0" rIns="0" bIns="0" anchor="ctr"/>
-          <a:lstStyle xmlns:a="http://schemas.openxmlformats.org/drawingml/2006/main"/>
-          <a:p xmlns:a="http://schemas.openxmlformats.org/drawingml/2006/main">
-            <a:pPr>
-              <a:defRPr sz="3750" b="1">
-                <a:solidFill>
-                  <a:srgbClr val="152B3A"/>
-                </a:solidFill>
-              </a:defRPr>
-            </a:pPr>
-            <a:r>
-              <a:rPr sz="3750" b="1">
-                <a:solidFill>
-                  <a:srgbClr val="152B3A"/>
-                </a:solidFill>
+            <a:off x="609600" y="990600"/>
+            <a:ext cx="10972800" cy="1000125"/>
+          </a:xfrm>
+          <a:prstGeom xmlns:a="http://schemas.openxmlformats.org/drawingml/2006/main" prst="rect">
+            <a:avLst/>
+          </a:prstGeom>
+          <a:noFill xmlns:a="http://schemas.openxmlformats.org/drawingml/2006/main"/>
+          <a:ln xmlns:a="http://schemas.openxmlformats.org/drawingml/2006/main" w="0">
+            <a:noFill/>
+            <a:prstDash val="solid"/>
+          </a:ln>
+        </p:spPr>
+        <p:txBody>
+          <a:bodyPr xmlns:a="http://schemas.openxmlformats.org/drawingml/2006/main" lIns="0" tIns="0" rIns="0" bIns="0" anchor="ctr">
+            <a:noAutofit/>
+          </a:bodyPr>
+          <a:lstStyle xmlns:a="http://schemas.openxmlformats.org/drawingml/2006/main"/>
+          <a:p xmlns:a="http://schemas.openxmlformats.org/drawingml/2006/main">
+            <a:pPr algn="l">
+              <a:buNone/>
+              <a:defRPr sz="3675" b="1">
+                <a:solidFill>
+                  <a:srgbClr val="152B3A"/>
+                </a:solidFill>
+                <a:latin typeface="Calibri"/>
+                <a:ea typeface="Calibri"/>
+                <a:cs typeface="Calibri"/>
+              </a:defRPr>
+            </a:pPr>
+            <a:r>
+              <a:rPr sz="3675" b="1">
+                <a:solidFill>
+                  <a:srgbClr val="152B3A"/>
+                </a:solidFill>
+                <a:latin typeface="Calibri"/>
+                <a:ea typeface="Calibri"/>
+                <a:cs typeface="Calibri"/>
               </a:rPr>
               <a:t>Explain cause, then observation</a:t>
             </a:r>
@@ -8567,14 +11031,14 @@
         </p:nvSpPr>
         <p:spPr>
           <a:xfrm xmlns:a="http://schemas.openxmlformats.org/drawingml/2006/main">
-            <a:off x="609600" y="6219825"/>
+            <a:off x="609600" y="6191250"/>
             <a:ext cx="10972800" cy="9525"/>
           </a:xfrm>
           <a:prstGeom xmlns:a="http://schemas.openxmlformats.org/drawingml/2006/main" prst="rect">
             <a:avLst/>
           </a:prstGeom>
           <a:solidFill xmlns:a="http://schemas.openxmlformats.org/drawingml/2006/main">
-            <a:srgbClr val="DCE7DD"/>
+            <a:srgbClr val="CEDBD3"/>
           </a:solidFill>
           <a:ln xmlns:a="http://schemas.openxmlformats.org/drawingml/2006/main" w="0">
             <a:noFill/>
@@ -8598,34 +11062,43 @@
         </p:nvSpPr>
         <p:spPr>
           <a:xfrm xmlns:a="http://schemas.openxmlformats.org/drawingml/2006/main">
-            <a:off x="609600" y="6381750"/>
-            <a:ext cx="9906000" cy="228600"/>
-          </a:xfrm>
-          <a:prstGeom xmlns:a="http://schemas.openxmlformats.org/drawingml/2006/main" prst="rect">
-            <a:avLst/>
-          </a:prstGeom>
-          <a:noFill xmlns:a="http://schemas.openxmlformats.org/drawingml/2006/main"/>
-          <a:ln xmlns:a="http://schemas.openxmlformats.org/drawingml/2006/main" w="0">
-            <a:noFill/>
-            <a:prstDash val="solid"/>
-          </a:ln>
-        </p:spPr>
-        <p:txBody>
-          <a:bodyPr xmlns:a="http://schemas.openxmlformats.org/drawingml/2006/main" lIns="0" tIns="0" rIns="0" bIns="0" anchor="ctr"/>
-          <a:lstStyle xmlns:a="http://schemas.openxmlformats.org/drawingml/2006/main"/>
-          <a:p xmlns:a="http://schemas.openxmlformats.org/drawingml/2006/main">
-            <a:pPr>
-              <a:defRPr sz="1275" b="0">
+            <a:off x="609600" y="6419850"/>
+            <a:ext cx="9525000" cy="219075"/>
+          </a:xfrm>
+          <a:prstGeom xmlns:a="http://schemas.openxmlformats.org/drawingml/2006/main" prst="rect">
+            <a:avLst/>
+          </a:prstGeom>
+          <a:noFill xmlns:a="http://schemas.openxmlformats.org/drawingml/2006/main"/>
+          <a:ln xmlns:a="http://schemas.openxmlformats.org/drawingml/2006/main" w="0">
+            <a:noFill/>
+            <a:prstDash val="solid"/>
+          </a:ln>
+        </p:spPr>
+        <p:txBody>
+          <a:bodyPr xmlns:a="http://schemas.openxmlformats.org/drawingml/2006/main" lIns="0" tIns="0" rIns="0" bIns="0" anchor="ctr">
+            <a:noAutofit/>
+          </a:bodyPr>
+          <a:lstStyle xmlns:a="http://schemas.openxmlformats.org/drawingml/2006/main"/>
+          <a:p xmlns:a="http://schemas.openxmlformats.org/drawingml/2006/main">
+            <a:pPr algn="l">
+              <a:buNone/>
+              <a:defRPr sz="1200" b="0">
                 <a:solidFill>
                   <a:srgbClr val="50616B"/>
                 </a:solidFill>
-              </a:defRPr>
-            </a:pPr>
-            <a:r>
-              <a:rPr sz="1275" b="0">
+                <a:latin typeface="Calibri"/>
+                <a:ea typeface="Calibri"/>
+                <a:cs typeface="Calibri"/>
+              </a:defRPr>
+            </a:pPr>
+            <a:r>
+              <a:rPr sz="1200" b="0">
                 <a:solidFill>
                   <a:srgbClr val="50616B"/>
                 </a:solidFill>
+                <a:latin typeface="Calibri"/>
+                <a:ea typeface="Calibri"/>
+                <a:cs typeface="Calibri"/>
               </a:rPr>
               <a:t>AUTUMN 1  ·  WEEK 7  ·  LESSON A</a:t>
             </a:r>
@@ -8648,27 +11121,33 @@
         </p:nvSpPr>
         <p:spPr>
           <a:xfrm xmlns:a="http://schemas.openxmlformats.org/drawingml/2006/main">
-            <a:off x="11106150" y="6362700"/>
-            <a:ext cx="476250" cy="238125"/>
-          </a:xfrm>
-          <a:prstGeom xmlns:a="http://schemas.openxmlformats.org/drawingml/2006/main" prst="rect">
-            <a:avLst/>
-          </a:prstGeom>
-          <a:noFill xmlns:a="http://schemas.openxmlformats.org/drawingml/2006/main"/>
-          <a:ln xmlns:a="http://schemas.openxmlformats.org/drawingml/2006/main" w="0">
-            <a:noFill/>
-            <a:prstDash val="solid"/>
-          </a:ln>
-        </p:spPr>
-        <p:txBody>
-          <a:bodyPr xmlns:a="http://schemas.openxmlformats.org/drawingml/2006/main" lIns="0" tIns="0" rIns="0" bIns="0" anchor="ctr"/>
-          <a:lstStyle xmlns:a="http://schemas.openxmlformats.org/drawingml/2006/main"/>
-          <a:p xmlns:a="http://schemas.openxmlformats.org/drawingml/2006/main">
-            <a:pPr>
+            <a:off x="11106150" y="6400800"/>
+            <a:ext cx="476250" cy="247650"/>
+          </a:xfrm>
+          <a:prstGeom xmlns:a="http://schemas.openxmlformats.org/drawingml/2006/main" prst="rect">
+            <a:avLst/>
+          </a:prstGeom>
+          <a:noFill xmlns:a="http://schemas.openxmlformats.org/drawingml/2006/main"/>
+          <a:ln xmlns:a="http://schemas.openxmlformats.org/drawingml/2006/main" w="0">
+            <a:noFill/>
+            <a:prstDash val="solid"/>
+          </a:ln>
+        </p:spPr>
+        <p:txBody>
+          <a:bodyPr xmlns:a="http://schemas.openxmlformats.org/drawingml/2006/main" lIns="0" tIns="0" rIns="0" bIns="0" anchor="ctr">
+            <a:noAutofit/>
+          </a:bodyPr>
+          <a:lstStyle xmlns:a="http://schemas.openxmlformats.org/drawingml/2006/main"/>
+          <a:p xmlns:a="http://schemas.openxmlformats.org/drawingml/2006/main">
+            <a:pPr algn="l">
+              <a:buNone/>
               <a:defRPr sz="1350" b="1">
                 <a:solidFill>
                   <a:srgbClr val="28685E"/>
                 </a:solidFill>
+                <a:latin typeface="Calibri"/>
+                <a:ea typeface="Calibri"/>
+                <a:cs typeface="Calibri"/>
               </a:defRPr>
             </a:pPr>
             <a:r>
@@ -8676,6 +11155,9 @@
                 <a:solidFill>
                   <a:srgbClr val="28685E"/>
                 </a:solidFill>
+                <a:latin typeface="Calibri"/>
+                <a:ea typeface="Calibri"/>
+                <a:cs typeface="Calibri"/>
               </a:rPr>
               <a:t>09</a:t>
             </a:r>
@@ -8698,34 +11180,45 @@
         </p:nvSpPr>
         <p:spPr>
           <a:xfrm xmlns:a="http://schemas.openxmlformats.org/drawingml/2006/main">
-            <a:off x="609600" y="2686050"/>
-            <a:ext cx="10858500" cy="1524000"/>
-          </a:xfrm>
-          <a:prstGeom xmlns:a="http://schemas.openxmlformats.org/drawingml/2006/main" prst="rect">
-            <a:avLst/>
-          </a:prstGeom>
-          <a:noFill xmlns:a="http://schemas.openxmlformats.org/drawingml/2006/main"/>
-          <a:ln xmlns:a="http://schemas.openxmlformats.org/drawingml/2006/main" w="0">
-            <a:noFill/>
-            <a:prstDash val="solid"/>
-          </a:ln>
-        </p:spPr>
-        <p:txBody>
-          <a:bodyPr xmlns:a="http://schemas.openxmlformats.org/drawingml/2006/main" lIns="0" tIns="0" rIns="0" bIns="0" anchor="ctr"/>
-          <a:lstStyle xmlns:a="http://schemas.openxmlformats.org/drawingml/2006/main"/>
-          <a:p xmlns:a="http://schemas.openxmlformats.org/drawingml/2006/main">
-            <a:pPr>
-              <a:defRPr sz="2925" b="1">
+            <a:off x="457200" y="2181225"/>
+            <a:ext cx="5734050" cy="2409825"/>
+          </a:xfrm>
+          <a:prstGeom xmlns:a="http://schemas.openxmlformats.org/drawingml/2006/main" prst="rect">
+            <a:avLst/>
+          </a:prstGeom>
+          <a:solidFill xmlns:a="http://schemas.openxmlformats.org/drawingml/2006/main">
+            <a:srgbClr val="E7EFE9"/>
+          </a:solidFill>
+          <a:ln xmlns:a="http://schemas.openxmlformats.org/drawingml/2006/main" w="0">
+            <a:noFill/>
+            <a:prstDash val="solid"/>
+          </a:ln>
+        </p:spPr>
+        <p:txBody>
+          <a:bodyPr xmlns:a="http://schemas.openxmlformats.org/drawingml/2006/main" lIns="152400" tIns="114300" rIns="152400" bIns="114300" anchor="ctr">
+            <a:noAutofit/>
+          </a:bodyPr>
+          <a:lstStyle xmlns:a="http://schemas.openxmlformats.org/drawingml/2006/main"/>
+          <a:p xmlns:a="http://schemas.openxmlformats.org/drawingml/2006/main">
+            <a:pPr algn="l">
+              <a:buNone/>
+              <a:defRPr sz="2775" b="1">
                 <a:solidFill>
                   <a:srgbClr val="28685E"/>
                 </a:solidFill>
-              </a:defRPr>
-            </a:pPr>
-            <a:r>
-              <a:rPr sz="2925" b="1">
+                <a:latin typeface="Calibri"/>
+                <a:ea typeface="Calibri"/>
+                <a:cs typeface="Calibri"/>
+              </a:defRPr>
+            </a:pPr>
+            <a:r>
+              <a:rPr sz="2775" b="1">
                 <a:solidFill>
                   <a:srgbClr val="28685E"/>
                 </a:solidFill>
+                <a:latin typeface="Calibri"/>
+                <a:ea typeface="Calibri"/>
+                <a:cs typeface="Calibri"/>
               </a:rPr>
               <a:t>As the Moon orbits Earth, we see different amounts of its sunlit half.</a:t>
             </a:r>
@@ -8748,36 +11241,402 @@
         </p:nvSpPr>
         <p:spPr>
           <a:xfrm xmlns:a="http://schemas.openxmlformats.org/drawingml/2006/main">
-            <a:off x="609600" y="4552950"/>
-            <a:ext cx="10858500" cy="1285875"/>
-          </a:xfrm>
-          <a:prstGeom xmlns:a="http://schemas.openxmlformats.org/drawingml/2006/main" prst="rect">
-            <a:avLst/>
-          </a:prstGeom>
-          <a:noFill xmlns:a="http://schemas.openxmlformats.org/drawingml/2006/main"/>
-          <a:ln xmlns:a="http://schemas.openxmlformats.org/drawingml/2006/main" w="0">
-            <a:noFill/>
-            <a:prstDash val="solid"/>
-          </a:ln>
-        </p:spPr>
-        <p:txBody>
-          <a:bodyPr xmlns:a="http://schemas.openxmlformats.org/drawingml/2006/main" lIns="0" tIns="0" rIns="0" bIns="0" anchor="ctr"/>
-          <a:lstStyle xmlns:a="http://schemas.openxmlformats.org/drawingml/2006/main"/>
-          <a:p xmlns:a="http://schemas.openxmlformats.org/drawingml/2006/main">
-            <a:pPr>
-              <a:defRPr sz="2700" b="0">
-                <a:solidFill>
-                  <a:srgbClr val="152B3A"/>
-                </a:solidFill>
-              </a:defRPr>
-            </a:pPr>
-            <a:r>
-              <a:rPr sz="2700" b="0">
-                <a:solidFill>
-                  <a:srgbClr val="152B3A"/>
-                </a:solidFill>
+            <a:off x="609600" y="4533900"/>
+            <a:ext cx="5429250" cy="1409700"/>
+          </a:xfrm>
+          <a:prstGeom xmlns:a="http://schemas.openxmlformats.org/drawingml/2006/main" prst="rect">
+            <a:avLst/>
+          </a:prstGeom>
+          <a:noFill xmlns:a="http://schemas.openxmlformats.org/drawingml/2006/main"/>
+          <a:ln xmlns:a="http://schemas.openxmlformats.org/drawingml/2006/main" w="0">
+            <a:noFill/>
+            <a:prstDash val="solid"/>
+          </a:ln>
+        </p:spPr>
+        <p:txBody>
+          <a:bodyPr xmlns:a="http://schemas.openxmlformats.org/drawingml/2006/main" lIns="0" tIns="0" rIns="0" bIns="0" anchor="ctr">
+            <a:noAutofit/>
+          </a:bodyPr>
+          <a:lstStyle xmlns:a="http://schemas.openxmlformats.org/drawingml/2006/main"/>
+          <a:p xmlns:a="http://schemas.openxmlformats.org/drawingml/2006/main">
+            <a:pPr algn="l">
+              <a:buNone/>
+              <a:defRPr sz="2250" b="0">
+                <a:solidFill>
+                  <a:srgbClr val="152B3A"/>
+                </a:solidFill>
+                <a:latin typeface="Calibri"/>
+                <a:ea typeface="Calibri"/>
+                <a:cs typeface="Calibri"/>
+              </a:defRPr>
+            </a:pPr>
+            <a:r>
+              <a:rPr sz="2250" b="0">
+                <a:solidFill>
+                  <a:srgbClr val="152B3A"/>
+                </a:solidFill>
+                <a:latin typeface="Calibri"/>
+                <a:ea typeface="Calibri"/>
+                <a:cs typeface="Calibri"/>
               </a:rPr>
               <a:t>That is why its phase appears to change.</a:t>
+            </a:r>
+          </a:p>
+        </p:txBody>
+      </p:sp>
+      <p:sp>
+        <p:nvSpPr>
+          <p:cNvPr id="11" name="phase-disc-0">
+            <a:extLst xmlns:a="http://schemas.openxmlformats.org/drawingml/2006/main">
+              <a:ext uri="{FF2B5EF4-FFF2-40B4-BE49-F238E27FC236}">
+                <a16:creationId xmlns:a16="http://schemas.microsoft.com/office/drawing/2014/main" id="{FA67B417-E20E-42AA-8C33-AA54C559B3F7}"/>
+              </a:ext>
+            </a:extLst>
+          </p:cNvPr>
+          <p:cNvSpPr>
+            <a:spLocks xmlns:a="http://schemas.openxmlformats.org/drawingml/2006/main" noGrp="1"/>
+          </p:cNvSpPr>
+          <p:nvPr/>
+        </p:nvSpPr>
+        <p:spPr>
+          <a:xfrm xmlns:a="http://schemas.openxmlformats.org/drawingml/2006/main">
+            <a:off x="6762750" y="3095625"/>
+            <a:ext cx="952500" cy="952500"/>
+          </a:xfrm>
+          <a:prstGeom xmlns:a="http://schemas.openxmlformats.org/drawingml/2006/main" prst="ellipse">
+            <a:avLst/>
+          </a:prstGeom>
+          <a:solidFill xmlns:a="http://schemas.openxmlformats.org/drawingml/2006/main">
+            <a:srgbClr val="152B3A"/>
+          </a:solidFill>
+          <a:ln xmlns:a="http://schemas.openxmlformats.org/drawingml/2006/main" w="9525">
+            <a:solidFill>
+              <a:srgbClr val="50616B"/>
+            </a:solidFill>
+          </a:ln>
+        </p:spPr>
+      </p:sp>
+      <p:sp>
+        <p:nvSpPr>
+          <p:cNvPr id="12" name="phase-label-0">
+            <a:extLst xmlns:a="http://schemas.openxmlformats.org/drawingml/2006/main">
+              <a:ext uri="{FF2B5EF4-FFF2-40B4-BE49-F238E27FC236}">
+                <a16:creationId xmlns:a16="http://schemas.microsoft.com/office/drawing/2014/main" id="{78EDDD84-64D9-44C3-92E2-204CA1E97362}"/>
+              </a:ext>
+            </a:extLst>
+          </p:cNvPr>
+          <p:cNvSpPr>
+            <a:spLocks xmlns:a="http://schemas.openxmlformats.org/drawingml/2006/main" noGrp="1"/>
+          </p:cNvSpPr>
+          <p:nvPr/>
+        </p:nvSpPr>
+        <p:spPr>
+          <a:xfrm xmlns:a="http://schemas.openxmlformats.org/drawingml/2006/main">
+            <a:off x="6667500" y="4238625"/>
+            <a:ext cx="1143000" cy="381000"/>
+          </a:xfrm>
+          <a:prstGeom xmlns:a="http://schemas.openxmlformats.org/drawingml/2006/main" prst="rect">
+            <a:avLst/>
+          </a:prstGeom>
+          <a:noFill xmlns:a="http://schemas.openxmlformats.org/drawingml/2006/main"/>
+          <a:ln xmlns:a="http://schemas.openxmlformats.org/drawingml/2006/main" w="0">
+            <a:noFill/>
+          </a:ln>
+        </p:spPr>
+        <p:txBody>
+          <a:bodyPr xmlns:a="http://schemas.openxmlformats.org/drawingml/2006/main" lIns="0" tIns="0" rIns="0" bIns="0" anchor="ctr">
+            <a:noAutofit/>
+          </a:bodyPr>
+          <a:lstStyle xmlns:a="http://schemas.openxmlformats.org/drawingml/2006/main"/>
+          <a:p xmlns:a="http://schemas.openxmlformats.org/drawingml/2006/main">
+            <a:pPr algn="ctr">
+              <a:defRPr sz="1950" b="1">
+                <a:solidFill>
+                  <a:srgbClr val="28685E"/>
+                </a:solidFill>
+                <a:latin typeface="Calibri"/>
+                <a:ea typeface="Calibri"/>
+                <a:cs typeface="Calibri"/>
+              </a:defRPr>
+            </a:pPr>
+            <a:r>
+              <a:rPr sz="1950" b="1">
+                <a:solidFill>
+                  <a:srgbClr val="28685E"/>
+                </a:solidFill>
+                <a:latin typeface="Calibri"/>
+                <a:ea typeface="Calibri"/>
+                <a:cs typeface="Calibri"/>
+              </a:rPr>
+              <a:t>New</a:t>
+            </a:r>
+          </a:p>
+        </p:txBody>
+      </p:sp>
+      <p:sp>
+        <p:nvSpPr>
+          <p:cNvPr id="13" name="phase-disc-1">
+            <a:extLst xmlns:a="http://schemas.openxmlformats.org/drawingml/2006/main">
+              <a:ext uri="{FF2B5EF4-FFF2-40B4-BE49-F238E27FC236}">
+                <a16:creationId xmlns:a16="http://schemas.microsoft.com/office/drawing/2014/main" id="{A04A1E9D-560F-4E02-940E-F3C45D426B43}"/>
+              </a:ext>
+            </a:extLst>
+          </p:cNvPr>
+          <p:cNvSpPr>
+            <a:spLocks xmlns:a="http://schemas.openxmlformats.org/drawingml/2006/main" noGrp="1"/>
+          </p:cNvSpPr>
+          <p:nvPr/>
+        </p:nvSpPr>
+        <p:spPr>
+          <a:xfrm xmlns:a="http://schemas.openxmlformats.org/drawingml/2006/main">
+            <a:off x="8477250" y="3095625"/>
+            <a:ext cx="952500" cy="952500"/>
+          </a:xfrm>
+          <a:prstGeom xmlns:a="http://schemas.openxmlformats.org/drawingml/2006/main" prst="ellipse">
+            <a:avLst/>
+          </a:prstGeom>
+          <a:solidFill xmlns:a="http://schemas.openxmlformats.org/drawingml/2006/main">
+            <a:srgbClr val="152B3A"/>
+          </a:solidFill>
+          <a:ln xmlns:a="http://schemas.openxmlformats.org/drawingml/2006/main" w="9525">
+            <a:solidFill>
+              <a:srgbClr val="50616B"/>
+            </a:solidFill>
+          </a:ln>
+        </p:spPr>
+      </p:sp>
+      <p:sp>
+        <p:nvSpPr>
+          <p:cNvPr id="14" name="half-lit">
+            <a:extLst xmlns:a="http://schemas.openxmlformats.org/drawingml/2006/main">
+              <a:ext uri="{FF2B5EF4-FFF2-40B4-BE49-F238E27FC236}">
+                <a16:creationId xmlns:a16="http://schemas.microsoft.com/office/drawing/2014/main" id="{BE04A1FD-EEDE-485E-9618-8ABB5111DA4E}"/>
+              </a:ext>
+            </a:extLst>
+          </p:cNvPr>
+          <p:cNvSpPr>
+            <a:spLocks xmlns:a="http://schemas.openxmlformats.org/drawingml/2006/main" noGrp="1"/>
+          </p:cNvSpPr>
+          <p:nvPr/>
+        </p:nvSpPr>
+        <p:spPr>
+          <a:xfrm xmlns:a="http://schemas.openxmlformats.org/drawingml/2006/main">
+            <a:off x="8477250" y="3095625"/>
+            <a:ext cx="952500" cy="952500"/>
+          </a:xfrm>
+          <a:prstGeom xmlns:a="http://schemas.openxmlformats.org/drawingml/2006/main" prst="pie">
+            <a:avLst>
+              <a:gd name="adj1" fmla="val 16200000"/>
+              <a:gd name="adj2" fmla="val 5400000"/>
+            </a:avLst>
+          </a:prstGeom>
+          <a:solidFill xmlns:a="http://schemas.openxmlformats.org/drawingml/2006/main">
+            <a:srgbClr val="DCE3E1"/>
+          </a:solidFill>
+          <a:ln xmlns:a="http://schemas.openxmlformats.org/drawingml/2006/main" w="0">
+            <a:noFill/>
+          </a:ln>
+        </p:spPr>
+      </p:sp>
+      <p:sp>
+        <p:nvSpPr>
+          <p:cNvPr id="15" name="phase-label-1">
+            <a:extLst xmlns:a="http://schemas.openxmlformats.org/drawingml/2006/main">
+              <a:ext uri="{FF2B5EF4-FFF2-40B4-BE49-F238E27FC236}">
+                <a16:creationId xmlns:a16="http://schemas.microsoft.com/office/drawing/2014/main" id="{A0E6D61D-0F0B-41B8-AA13-53EC1331E984}"/>
+              </a:ext>
+            </a:extLst>
+          </p:cNvPr>
+          <p:cNvSpPr>
+            <a:spLocks xmlns:a="http://schemas.openxmlformats.org/drawingml/2006/main" noGrp="1"/>
+          </p:cNvSpPr>
+          <p:nvPr/>
+        </p:nvSpPr>
+        <p:spPr>
+          <a:xfrm xmlns:a="http://schemas.openxmlformats.org/drawingml/2006/main">
+            <a:off x="8382000" y="4238625"/>
+            <a:ext cx="1143000" cy="381000"/>
+          </a:xfrm>
+          <a:prstGeom xmlns:a="http://schemas.openxmlformats.org/drawingml/2006/main" prst="rect">
+            <a:avLst/>
+          </a:prstGeom>
+          <a:noFill xmlns:a="http://schemas.openxmlformats.org/drawingml/2006/main"/>
+          <a:ln xmlns:a="http://schemas.openxmlformats.org/drawingml/2006/main" w="0">
+            <a:noFill/>
+          </a:ln>
+        </p:spPr>
+        <p:txBody>
+          <a:bodyPr xmlns:a="http://schemas.openxmlformats.org/drawingml/2006/main" lIns="0" tIns="0" rIns="0" bIns="0" anchor="ctr">
+            <a:noAutofit/>
+          </a:bodyPr>
+          <a:lstStyle xmlns:a="http://schemas.openxmlformats.org/drawingml/2006/main"/>
+          <a:p xmlns:a="http://schemas.openxmlformats.org/drawingml/2006/main">
+            <a:pPr algn="ctr">
+              <a:defRPr sz="1950" b="1">
+                <a:solidFill>
+                  <a:srgbClr val="28685E"/>
+                </a:solidFill>
+                <a:latin typeface="Calibri"/>
+                <a:ea typeface="Calibri"/>
+                <a:cs typeface="Calibri"/>
+              </a:defRPr>
+            </a:pPr>
+            <a:r>
+              <a:rPr sz="1950" b="1">
+                <a:solidFill>
+                  <a:srgbClr val="28685E"/>
+                </a:solidFill>
+                <a:latin typeface="Calibri"/>
+                <a:ea typeface="Calibri"/>
+                <a:cs typeface="Calibri"/>
+              </a:rPr>
+              <a:t>Half</a:t>
+            </a:r>
+          </a:p>
+        </p:txBody>
+      </p:sp>
+      <p:sp>
+        <p:nvSpPr>
+          <p:cNvPr id="16" name="phase-disc-2">
+            <a:extLst xmlns:a="http://schemas.openxmlformats.org/drawingml/2006/main">
+              <a:ext uri="{FF2B5EF4-FFF2-40B4-BE49-F238E27FC236}">
+                <a16:creationId xmlns:a16="http://schemas.microsoft.com/office/drawing/2014/main" id="{A6A3655F-41F4-44BB-9D2E-A73C16809F7B}"/>
+              </a:ext>
+            </a:extLst>
+          </p:cNvPr>
+          <p:cNvSpPr>
+            <a:spLocks xmlns:a="http://schemas.openxmlformats.org/drawingml/2006/main" noGrp="1"/>
+          </p:cNvSpPr>
+          <p:nvPr/>
+        </p:nvSpPr>
+        <p:spPr>
+          <a:xfrm xmlns:a="http://schemas.openxmlformats.org/drawingml/2006/main">
+            <a:off x="10191750" y="3095625"/>
+            <a:ext cx="952500" cy="952500"/>
+          </a:xfrm>
+          <a:prstGeom xmlns:a="http://schemas.openxmlformats.org/drawingml/2006/main" prst="ellipse">
+            <a:avLst/>
+          </a:prstGeom>
+          <a:solidFill xmlns:a="http://schemas.openxmlformats.org/drawingml/2006/main">
+            <a:srgbClr val="DCE3E1"/>
+          </a:solidFill>
+          <a:ln xmlns:a="http://schemas.openxmlformats.org/drawingml/2006/main" w="9525">
+            <a:solidFill>
+              <a:srgbClr val="50616B"/>
+            </a:solidFill>
+          </a:ln>
+        </p:spPr>
+      </p:sp>
+      <p:sp>
+        <p:nvSpPr>
+          <p:cNvPr id="17" name="phase-label-2">
+            <a:extLst xmlns:a="http://schemas.openxmlformats.org/drawingml/2006/main">
+              <a:ext uri="{FF2B5EF4-FFF2-40B4-BE49-F238E27FC236}">
+                <a16:creationId xmlns:a16="http://schemas.microsoft.com/office/drawing/2014/main" id="{106C946D-0454-4AAF-ACA7-968087A12F77}"/>
+              </a:ext>
+            </a:extLst>
+          </p:cNvPr>
+          <p:cNvSpPr>
+            <a:spLocks xmlns:a="http://schemas.openxmlformats.org/drawingml/2006/main" noGrp="1"/>
+          </p:cNvSpPr>
+          <p:nvPr/>
+        </p:nvSpPr>
+        <p:spPr>
+          <a:xfrm xmlns:a="http://schemas.openxmlformats.org/drawingml/2006/main">
+            <a:off x="10096500" y="4238625"/>
+            <a:ext cx="1143000" cy="381000"/>
+          </a:xfrm>
+          <a:prstGeom xmlns:a="http://schemas.openxmlformats.org/drawingml/2006/main" prst="rect">
+            <a:avLst/>
+          </a:prstGeom>
+          <a:noFill xmlns:a="http://schemas.openxmlformats.org/drawingml/2006/main"/>
+          <a:ln xmlns:a="http://schemas.openxmlformats.org/drawingml/2006/main" w="0">
+            <a:noFill/>
+          </a:ln>
+        </p:spPr>
+        <p:txBody>
+          <a:bodyPr xmlns:a="http://schemas.openxmlformats.org/drawingml/2006/main" lIns="0" tIns="0" rIns="0" bIns="0" anchor="ctr">
+            <a:noAutofit/>
+          </a:bodyPr>
+          <a:lstStyle xmlns:a="http://schemas.openxmlformats.org/drawingml/2006/main"/>
+          <a:p xmlns:a="http://schemas.openxmlformats.org/drawingml/2006/main">
+            <a:pPr algn="ctr">
+              <a:defRPr sz="1950" b="1">
+                <a:solidFill>
+                  <a:srgbClr val="28685E"/>
+                </a:solidFill>
+                <a:latin typeface="Calibri"/>
+                <a:ea typeface="Calibri"/>
+                <a:cs typeface="Calibri"/>
+              </a:defRPr>
+            </a:pPr>
+            <a:r>
+              <a:rPr sz="1950" b="1">
+                <a:solidFill>
+                  <a:srgbClr val="28685E"/>
+                </a:solidFill>
+                <a:latin typeface="Calibri"/>
+                <a:ea typeface="Calibri"/>
+                <a:cs typeface="Calibri"/>
+              </a:rPr>
+              <a:t>Full</a:t>
+            </a:r>
+          </a:p>
+        </p:txBody>
+      </p:sp>
+      <p:sp>
+        <p:nvSpPr>
+          <p:cNvPr id="18" name="phase-note">
+            <a:extLst xmlns:a="http://schemas.openxmlformats.org/drawingml/2006/main">
+              <a:ext uri="{FF2B5EF4-FFF2-40B4-BE49-F238E27FC236}">
+                <a16:creationId xmlns:a16="http://schemas.microsoft.com/office/drawing/2014/main" id="{4A6ABD26-1855-4E81-A5AD-4414751FA733}"/>
+              </a:ext>
+            </a:extLst>
+          </p:cNvPr>
+          <p:cNvSpPr>
+            <a:spLocks xmlns:a="http://schemas.openxmlformats.org/drawingml/2006/main" noGrp="1"/>
+          </p:cNvSpPr>
+          <p:nvPr/>
+        </p:nvSpPr>
+        <p:spPr>
+          <a:xfrm xmlns:a="http://schemas.openxmlformats.org/drawingml/2006/main">
+            <a:off x="6762750" y="4953000"/>
+            <a:ext cx="4381500" cy="400050"/>
+          </a:xfrm>
+          <a:prstGeom xmlns:a="http://schemas.openxmlformats.org/drawingml/2006/main" prst="rect">
+            <a:avLst/>
+          </a:prstGeom>
+          <a:noFill xmlns:a="http://schemas.openxmlformats.org/drawingml/2006/main"/>
+          <a:ln xmlns:a="http://schemas.openxmlformats.org/drawingml/2006/main" w="0">
+            <a:noFill/>
+          </a:ln>
+        </p:spPr>
+        <p:txBody>
+          <a:bodyPr xmlns:a="http://schemas.openxmlformats.org/drawingml/2006/main" lIns="0" tIns="0" rIns="0" bIns="0" anchor="ctr">
+            <a:noAutofit/>
+          </a:bodyPr>
+          <a:lstStyle xmlns:a="http://schemas.openxmlformats.org/drawingml/2006/main"/>
+          <a:p xmlns:a="http://schemas.openxmlformats.org/drawingml/2006/main">
+            <a:pPr algn="ctr">
+              <a:defRPr sz="1650" b="0">
+                <a:solidFill>
+                  <a:srgbClr val="50616B"/>
+                </a:solidFill>
+                <a:latin typeface="Calibri"/>
+                <a:ea typeface="Calibri"/>
+                <a:cs typeface="Calibri"/>
+              </a:defRPr>
+            </a:pPr>
+            <a:r>
+              <a:rPr sz="1650" b="0">
+                <a:solidFill>
+                  <a:srgbClr val="50616B"/>
+                </a:solidFill>
+                <a:latin typeface="Calibri"/>
+                <a:ea typeface="Calibri"/>
+                <a:cs typeface="Calibri"/>
+              </a:rPr>
+              <a:t>View from Earth • schematic</a:t>
             </a:r>
           </a:p>
         </p:txBody>
